--- a/examples/crown-castle-2025/deliverables/presentation.pptx
+++ b/examples/crown-castle-2025/deliverables/presentation.pptx
@@ -607,6 +607,9 @@
             <a:r>
               <a:rPr lang="en-US" dirty="0"/>
               <a:t>底稿 F05, F08, F09, F15, F17
+[F05] supported / [F08] supported / [F09] conditional / [F15] conditional / [F17] conditional
+底稿 F05 / F08 / F09 / F15 / F17；来源 S25 / SQ126 / SSALE / SPROFORMA / SSPA / SCREDIT / SOLDCREDIT / S_SP_RATIOS / S_SP_XBRL / S_SP_Q4 / S_SP_SECTORS / S_SP_Q1
+原文定位、URL及完整引用见本页备注；完整方法和明细见同名底稿及 Word/Excel。
 [E25CASH] Crown Castle 2025 Form 10-K | note 16，印刷及 PDF p88，cash reconciliation table
 https://investor.crowncastle.com/static-files/68fb84e1-1dac-440d-96b4-55b9603e10dd
 [E25DEBT] Crown Castle 2025 Form 10-K | note 8，p75–79 债务表、2018 Tower Revenue Notes、CP Program；MD&amp;A p40/p45
@@ -772,6 +775,9 @@
             <a:r>
               <a:rPr lang="en-US" dirty="0"/>
               <a:t>底稿 F01, F02, F03, C_contnimove, saleloss2025
+[F01] supported / [F02] supported / [F03] supported
+底稿 F01 / F02 / F03；来源 S25 / SSEC / S24 / SFASB / SSPA / SPROFORMA / SQ126
+原文定位、URL及完整引用见本页备注；完整方法和明细见同名底稿及 Word/Excel。
 [E25PL] Crown Castle 2025 Form 10-K | 印刷及 PDF p59，Consolidated Statement of Operations and Comprehensive Income
 https://investor.crowncastle.com/static-files/68fb84e1-1dac-440d-96b4-55b9603e10dd
 [ESECSEQ] Crown Castle 2025-06-04 SEC comment-response letter | 公司回复 Staff comment 1；引用 ASC350-20-35-31 和 ASC360-10-35-17
@@ -888,6 +894,9 @@
             <a:r>
               <a:rPr lang="en-US" dirty="0"/>
               <a:t>底稿 F04, F05, F12, cash2025, C_cashdiv_2025, cashend2025
+[F04] supported / [F05] supported / [F12] supported
+底稿 F04 / F05 / F12；来源 S25
+原文定位、URL及完整引用见本页备注；完整方法和明细见同名底稿及 Word/Excel。
 [E25BS] Crown Castle 2025 Form 10-K | 印刷及 PDF p58，Consolidated Balance Sheet，2025/2024 两列
 https://investor.crowncastle.com/static-files/68fb84e1-1dac-440d-96b4-55b9603e10dd
 [E25CF] Crown Castle 2025 Form 10-K | 印刷及 PDF p60，Consolidated Statement of Cash Flows
@@ -994,6 +1003,9 @@
             <a:r>
               <a:rPr lang="en-US" dirty="0"/>
               <a:t>底稿 F08, F15, C_saleproceeds, debtrepaid, costpaid, C_pf_cash
+[F08] supported / [F15] conditional
+底稿 F08 / F15；来源 SQ126 / SPROFORMA / SSALE / S25 / SSPA / S_SP_RATIOS / S_SP_XBRL
+原文定位、URL及完整引用见本页备注；完整方法和明细见同名底稿及 Word/Excel。
 [EQ126SALE] Crown Castle Q1 2026 Form 10-Q | note 14 印刷 p19/PDF p20，Completion of Strategic Fiber Transaction
 https://investor.crowncastle.com/static-files/de60fca2-89d5-499d-899b-8e0a23030617
 [EPROBASIS] 2026-05-01 出售8-K及Exhibit99.2公开未经审计备考 | Ex99.2 PDF p18编制基础；p21 Note1
@@ -1126,6 +1138,9 @@
             <a:r>
               <a:rPr lang="en-US" dirty="0"/>
               <a:t>底稿 F06, F07, F09, C_headroom2025, C_newnetLC, leverage2025, limit2025
+[F06] conditional / [F07] supported / [F09] conditional
+底稿 F06 / F07 / F09；来源 S25 / SOLDCREDIT / SCREDIT / SQ126 / SPROFORMA
+原文定位、URL及完整引用见本页备注；完整方法和明细见同名底稿及 Word/Excel。
 [E25COV] Crown Castle 2025 Form 10-K | MD&amp;A p45 covenant table 及脚注
 https://investor.crowncastle.com/static-files/68fb84e1-1dac-440d-96b4-55b9603e10dd
 [EOLDCREDIT] 2022-07-08 Amendment No.7及附后旧信用协议 | §1.01定义：印刷p13–17/27–28/40/44/50–52；§1.04/1.05 p55–56；§6.09/6.10 p129
@@ -1234,6 +1249,9 @@
             <a:r>
               <a:rPr lang="en-US" dirty="0"/>
               <a:t>底稿 F13, F14, F15, sp_ebitda, sp_leverage, sp_ffo, sp_focf
+[F13] conditional / [F14] conditional / [F15] conditional
+底稿 F13 / F14 / F15；来源 S25 / S_SP_RATIOS / S_SP_XBRL / SPROFORMA / SQ126
+原文定位、URL及完整引用见本页备注；完整方法和明细见同名底稿及 Word/Excel。
 [E25BS] Crown Castle 2025 Form 10-K | 印刷及 PDF p58，Consolidated Balance Sheet，2025/2024 两列
 https://investor.crowncastle.com/static-files/68fb84e1-1dac-440d-96b4-55b9603e10dd
 [E25CF] Crown Castle 2025 Form 10-K | 印刷及 PDF p60，Consolidated Statement of Cash Flows
@@ -1354,6 +1372,9 @@
             <a:r>
               <a:rPr lang="en-US" dirty="0"/>
               <a:t>底稿 F11, F16, F17, C_sp_q1_cfo_change, C_sp_renew_share
+[F11] conditional / [F16] supported / [F17] conditional
+底稿 F11 / F16 / F17；来源 SQ126 / S_SP_Q4 / S25 / S_SP_Q1 / S_SP_SECTORS
+原文定位、URL及完整引用见本页备注；完整方法和明细见同名底稿及 Word/Excel。
 [E_SP_Q1CFO] Crown Castle Q1 2026 Form 10-Q | PDF6/印刷p5，2026Q1/2025Q1现金流表；PDF19–20/印刷p18–19，note13重组事项
 https://investor.crowncastle.com/static-files/de60fca2-89d5-499d-899b-8e0a23030617
 [E_SP_RENEW] Crown Castle Q4 2025 Supplemental Information | PDF13/印刷p12；TENANT OVERVIEW及脚注(a)–(f)
@@ -1454,6 +1475,9 @@
             <a:r>
               <a:rPr lang="en-US" dirty="0"/>
               <a:t>底稿 F10, F12, F06, F09, F14, F15, F17
+[F10] unresolved / [F12] supported / [F06] conditional / [F09] conditional / [F14] conditional / [F15] conditional / [F17] conditional
+底稿 F10 / F12 / F06 / F09 / F14 / F15 / F17；来源 S24 / S25 / SQ125 / SSEC / SQ126 / SOLDCREDIT / SCREDIT / SPROFORMA / S_SP_RATIOS / S_SP_XBRL / S_SP_Q4 / S_SP_SECTORS / S_SP_Q1
+原文定位、URL及完整引用见本页备注；完整方法和明细见同名底稿及 Word/Excel。
 [E24ORIG] Crown Castle 2024 Form 10-K（原报） | 原报 p61 合并损益；note 14/p88–89 segment results，分部表p89
 https://investor.crowncastle.com/static-files/baed4489-6578-4e32-81e6-a084eea66a02
 [E25PL] Crown Castle 2025 Form 10-K | 印刷及 PDF p59，Consolidated Statement of Operations and Comprehensive Income
@@ -5449,41 +5473,41 @@
                   <a:srgbClr val="1F2933"/>
                 </a:solidFill>
               </a:rPr>
-              <a:t>当年必然损失。土地控制与迁移成本可能缓释风险；medial仅</a:t>
-            </a:r>
-            <a:endParaRPr lang="en-US" sz="1800" dirty="0"/>
-          </a:p>
-          <a:p>
-            <a:pPr indent="0" marL="0">
-              <a:lnSpc>
-                <a:spcPct val="100000"/>
-              </a:lnSpc>
-              <a:buNone/>
-            </a:pPr>
-            <a:r>
-              <a:rPr lang="en-US" sz="1800" dirty="0">
-                <a:solidFill>
-                  <a:srgbClr val="1F2933"/>
-                </a:solidFill>
-              </a:rPr>
-              <a:t>是待验证候选，须核竞争地位、可预测CFO归属及续约情景，不能</a:t>
-            </a:r>
-            <a:endParaRPr lang="en-US" sz="1800" dirty="0"/>
-          </a:p>
-          <a:p>
-            <a:pPr indent="0" marL="0">
-              <a:lnSpc>
-                <a:spcPct val="100000"/>
-              </a:lnSpc>
-              <a:buNone/>
-            </a:pPr>
-            <a:r>
-              <a:rPr lang="en-US" sz="1800" dirty="0">
-                <a:solidFill>
-                  <a:srgbClr val="1F2933"/>
-                </a:solidFill>
-              </a:rPr>
-              <a:t>直接定档。</a:t>
+              <a:t>当年必然损失。土地控制与迁移成本可能缓释风险；先核low全部</a:t>
+            </a:r>
+            <a:endParaRPr lang="en-US" sz="1800" dirty="0"/>
+          </a:p>
+          <a:p>
+            <a:pPr indent="0" marL="0">
+              <a:lnSpc>
+                <a:spcPct val="100000"/>
+              </a:lnSpc>
+              <a:buNone/>
+            </a:pPr>
+            <a:r>
+              <a:rPr lang="en-US" sz="1800" dirty="0">
+                <a:solidFill>
+                  <a:srgbClr val="1F2933"/>
+                </a:solidFill>
+              </a:rPr>
+              <a:t>条件，再检验medial或standard。本案CICRA、</a:t>
+            </a:r>
+            <a:endParaRPr lang="en-US" sz="1800" dirty="0"/>
+          </a:p>
+          <a:p>
+            <a:pPr indent="0" marL="0">
+              <a:lnSpc>
+                <a:spcPct val="100000"/>
+              </a:lnSpc>
+              <a:buNone/>
+            </a:pPr>
+            <a:r>
+              <a:rPr lang="en-US" sz="1800" dirty="0">
+                <a:solidFill>
+                  <a:srgbClr val="1F2933"/>
+                </a:solidFill>
+              </a:rPr>
+              <a:t>竞争地位、可预测CFO归属及续约情景尚未完成，不能直接定档。</a:t>
             </a:r>
             <a:endParaRPr lang="en-US" sz="1800" dirty="0"/>
           </a:p>

--- a/examples/crown-castle-2025/deliverables/presentation.pptx
+++ b/examples/crown-castle-2025/deliverables/presentation.pptx
@@ -14,9 +14,16 @@
     <p:sldId id="262" r:id="rId8"/>
     <p:sldId id="263" r:id="rId9"/>
     <p:sldId id="264" r:id="rId10"/>
+    <p:sldId id="265" r:id="rId11"/>
+    <p:sldId id="266" r:id="rId12"/>
+    <p:sldId id="267" r:id="rId13"/>
+    <p:sldId id="268" r:id="rId14"/>
+    <p:sldId id="269" r:id="rId15"/>
+    <p:sldId id="270" r:id="rId16"/>
+    <p:sldId id="271" r:id="rId17"/>
   </p:sldIdLst>
   <p:notesMasterIdLst>
-    <p:notesMasterId r:id="rId11"/>
+    <p:notesMasterId r:id="rId18"/>
   </p:notesMasterIdLst>
   <p:sldSz cx="12192000" cy="6858000"/>
   <p:notesSz cx="6858000" cy="12192000"/>
@@ -510,15 +517,15 @@
           <a:p>
             <a:r>
               <a:rPr lang="en-US" dirty="0"/>
-              <a:t>研究执行于 2026-10-03；信息截止严格为 2026-06-30。2026 年二季报及七月业绩公告虽涉及六月期末，因发表日晚于截止日排除。
+              <a:t>研究于2026年10月整理更新；信息截止严格为2026-06-30。二季报及七月业绩虽涉及六月期末，因发表日晚于截止日排除。
 完整下载不等于逐页阅读。2025 年报已重点阅读审计意见、四表、政策/减值、终止经营、债务、税、现金及期后事项；2024 年报和新协议阅读范围见来源说明。
 未取得企业内部总账、估值模型、银行流水、合规证明、资金上划限制清单、最终交割结算及完整出售协议附件；不能形成审计保证或可支用现金/正式评级。
 2024 原报收入与 2025 年报重列比较收入差异，以及 2026 Q1 对 2025 Q1 待售准备回述差异尚未解释。
 现金流桥使用合并表内持续/终止组成项目，不能将其视为法律母公司单体现金流。
 US GAAP 条款编号来自 SEC 公司回复及公司政策，未将公司回复视为 SEC 批准，亦未声称已阅读全文 FASB Codification。
 公开备考BS假设2025-12-31完成、利润表假设2025-01-01完成，2026-05-01发表；其金额不属于2025已报实数或2026五月实际现金。出售协议后续修订未找到可识别文本，最初签署机制不能视为全部最终条款。
-S&amp;P桥包含披露支持的最佳估计及局部敏感性；未完成主权/行业、竞争地位、前瞻财务、支持与债项全形成链，不宣告机构级别。
-来源 SSEC, SFASB 的正式公布日期未核验；不得据此证明在信息截止日前已公开。当前披露内容可以继续分析，历史时点结论须补充公告时间证据。</a:t>
+已形成业务风险、standard财务风险、锚点、逐项修正及指定票据的条件研究链；June实际资金资格、专门M&amp;G分类、当前主权/T&amp;C及回收法域仍分别待核。主体情景和塔DAV足值边界不等于机构发表等级或已核实际回收。
+来源 SSEC, SFASB, S_SP_XBRL 未列单一正式公布日期；各报告期间的公开日、快照取得日或尚待核准事项见来源记录。历史时点结论须逐项依据实际公开时间。</a:t>
             </a:r>
             <a:endParaRPr lang="en-US" dirty="0"/>
           </a:p>
@@ -542,6 +549,1147 @@
             <a:fld id="{F7021451-1387-4CA6-816F-3879F97B5CBC}" type="slidenum">
               <a:rPr lang="en-US"/>
               <a:t>1</a:t>
+            </a:fld>
+            <a:endParaRPr lang="en-US"/>
+          </a:p>
+        </p:txBody>
+      </p:sp>
+    </p:spTree>
+    <p:extLst>
+      <p:ext uri="{BB962C8B-B14F-4D97-AF65-F5344CB8AC3E}">
+        <p14:creationId xmlns:p14="http://schemas.microsoft.com/office/powerpoint/2010/main" val="1024086991"/>
+      </p:ext>
+    </p:extLst>
+  </p:cSld>
+  <p:clrMapOvr>
+    <a:masterClrMapping/>
+  </p:clrMapOvr>
+</p:notes>
+</file>
+
+<file path=ppt/notesSlides/notesSlide10.xml><?xml version="1.0" encoding="utf-8"?>
+<p:notes xmlns:a="http://schemas.openxmlformats.org/drawingml/2006/main" xmlns:r="http://schemas.openxmlformats.org/officeDocument/2006/relationships" xmlns:p="http://schemas.openxmlformats.org/presentationml/2006/main">
+  <p:cSld>
+    <p:spTree>
+      <p:nvGrpSpPr>
+        <p:cNvPr id="1" name=""/>
+        <p:cNvGrpSpPr/>
+        <p:nvPr/>
+      </p:nvGrpSpPr>
+      <p:grpSpPr>
+        <a:xfrm>
+          <a:off x="0" y="0"/>
+          <a:ext cx="0" cy="0"/>
+          <a:chOff x="0" y="0"/>
+          <a:chExt cx="0" cy="0"/>
+        </a:xfrm>
+      </p:grpSpPr>
+      <p:sp>
+        <p:nvSpPr>
+          <p:cNvPr id="2" name="Slide Image Placeholder 1"/>
+          <p:cNvSpPr>
+            <a:spLocks noGrp="1" noRot="1" noChangeAspect="1"/>
+          </p:cNvSpPr>
+          <p:nvPr>
+            <p:ph type="sldImg"/>
+          </p:nvPr>
+        </p:nvSpPr>
+        <p:spPr/>
+      </p:sp>
+      <p:sp>
+        <p:nvSpPr>
+          <p:cNvPr id="3" name="Notes Placeholder 2"/>
+          <p:cNvSpPr>
+            <a:spLocks noGrp="1"/>
+          </p:cNvSpPr>
+          <p:nvPr>
+            <p:ph type="body" idx="1"/>
+          </p:nvPr>
+        </p:nvSpPr>
+        <p:spPr/>
+        <p:txBody>
+          <a:bodyPr/>
+          <a:lstStyle/>
+          <a:p>
+            <a:r>
+              <a:rPr lang="en-US" dirty="0"/>
+              <a:t>底稿 F05, cg_cash_spe, cg_payment_rights, r109_window_B0, r109_window_JV_for_adequate, r109_window_JV_for_positive_stress
+[F05] conditional / [cg_cash_spe] conditional / [cg_payment_rights] conditional
+底稿 F05 / cg_cash_spe / cg_payment_rights；来源 S25 / SCREDIT / SQ126 / S_SP_Q1 / S_DEV_CORP / S_SP_SECTORS / S_SP_RATIOS / SPROFORMA / S_SP_XBRL / S_DEV_LIQ / S_DEV_REC
+原文定位、URL及完整引用见本页备注；完整方法和明细见同名底稿及 Word/Excel。
+[E25BS] Crown Castle 2025 Form 10-K | 印刷及 PDF p58，Consolidated Balance Sheet，2025/2024 两列
+https://investor.crowncastle.com/static-files/68fb84e1-1dac-440d-96b4-55b9603e10dd
+[ECREDIT] Crown Castle May 1 2026 Form 8-K and Exhibit 10.1 credit agreement | 8-K Item 1.01；协议 §1.01、§1.04/p43、§1.05/p44、§4.02/p93、§6.10/p108；Total Indebtedness印刷39/PDF49，§1.04印刷43/PDF53
+https://investor.crowncastle.com/static-files/dd7712df-51aa-4a29-b6a5-67becf7b2234
+[EQ126CF] Crown Castle Q1 2026 Form 10-Q | 印刷 p18/PDF p19 现金调节；note 5/p12 债务；MD&amp;A/p28 流动性
+https://investor.crowncastle.com/static-files/de60fca2-89d5-499d-899b-8e0a23030617
+[EQ126FAC] Crown Castle Q1 2026 Form 10-Q | note 14 印刷 p20/PDF p21；MD&amp;A/p28 May 5 balances
+https://investor.crowncastle.com/static-files/de60fca2-89d5-499d-899b-8e0a23030617
+[EQ126SALE] Crown Castle Q1 2026 Form 10-Q | note 14 印刷 p19/PDF p20，Completion of Strategic Fiber Transaction
+https://investor.crowncastle.com/static-files/de60fca2-89d5-499d-899b-8e0a23030617
+[E_DEV_CASH_CONTRACT] Crown Castle Q1 2026 Supplemental Information | PDF13–14
+https://investor.crowncastle.com/static-files/38f6a584-60a8-452d-bfd2-a44103aeec82
+[E_DEV_CORP] Corporate Methodology | PDF4–12、21–22、24–28、30–44、47–50；Tables1/2/3/5/14–19/21–25及¶40–50/91–92/112–125/136–191
+https://www.maalot.co.il/Publications/MT20250709153825.pdf
+[E_DEV_CP] Crown Castle 2025 Form 10-K | PDF4–8、17–19、36–38；Q1 supplement另见E_DEV_CASH_CONTRACT
+https://investor.crowncastle.com/static-files/68fb84e1-1dac-440d-96b4-55b9603e10dd
+[E_DEV_CREDIT] Crown Castle May 1 2026 Form 8-K and Exhibit 10.1 credit agreement | PDF11、22–24、40–41、49、51、103、118及公开8K摘要
+https://investor.crowncastle.com/static-files/dd7712df-51aa-4a29-b6a5-67becf7b2234
+[E_DEV_DI] S&amp;P Sector-Specific Corporate Methodology — Digital Infrastructure | PDF61–63、68–71、73、76–77
+https://www.maalot.co.il/Publications/MT20251012123218.pdf
+[E_DEV_FACE] Crown Castle Q1 2026 Supplemental Information | PDF15/印14，Capitalization Overview，Face Value
+https://investor.crowncastle.com/static-files/38f6a584-60a8-452d-bfd2-a44103aeec82
+[E_DEV_NOTE] Crown Castle Q1 2026 Form 10-Q | 2026Q1 10Q PDF13–14，Debt and Other Obligations
+https://investor.crowncastle.com/static-files/de60fca2-89d5-499d-899b-8e0a23030617
+[E_DEV_NOTE_GUAR] Crown Castle 2025 Form 10-K | PDF75、77–79，Senior Notes/Securitized Debt
+https://investor.crowncastle.com/static-files/68fb84e1-1dac-440d-96b4-55b9603e10dd
+[E_DEV_TOWER_RIGHTS] Crown Castle 2025 Form 10-K | PDF4、7、17–18及77–79
+https://investor.crowncastle.com/static-files/68fb84e1-1dac-440d-96b4-55b9603e10dd
+[E_FWD_CASH_TAX] Crown Castle Q1 2026 Supplemental Information | Q1 supplement PDF12/印刷11完整Consolidated ROIC表及(a)–(f)脚注；PDF23/印刷22 Non-GAAP Measures定义
+https://investor.crowncastle.com/static-files/38f6a584-60a8-452d-bfd2-a44103aeec82
+[E_FWD_CONTRACT] Crown Castle Q1 2026 Supplemental Information | PDF9/11/13–16/18/28，印刷8/10/12–15/17/27
+https://investor.crowncastle.com/static-files/38f6a584-60a8-452d-bfd2-a44103aeec82
+[E_FWD_CREDIT_CONDITIONS] Crown Castle May 1 2026 Form 8-K and Exhibit 10.1 credit agreement | 完整协议PDF2、49、51、103、118；协议印刷39、41、93、108；§4.02/§6.10
+https://investor.crowncastle.com/static-files/dd7712df-51aa-4a29-b6a5-67becf7b2234
+[E_FWD_DEBT_MEASURE] S&amp;P Corporate Methodology: Ratios And Adjustments | PDF27/印刷27，Appendix2 Initial measurement / debt at fair value
+https://www.maalot.co.il/Publications/MT20251223092257.pdf
+[E_FWD_GUIDANCE] 2026-05-01 出售8-K及Exhibit99.2公开未经审计备考 | 完整May1 8-K的Ex99.1 PDF6、11、13、15–16（印刷2、7、9、11–12）
+https://investor.crowncastle.com/static-files/f4ff727f-0f13-4f18-affa-1ff461698ccf
+[E_FWD_Q1] Crown Castle Q1 2026 Form 10-Q | PDF4–6/印刷3–5；note5 PDF14/印刷13；note13–14 PDF19–20
+https://investor.crowncastle.com/static-files/de60fca2-89d5-499d-899b-8e0a23030617
+[E_FWD_Q1_XBRL] SEC Companyfacts：Crown Castle 2025年度及2026Q1原申报事实 | InterestPaidNet / InterestCostsCapitalized；accn0001051470-26-000059，2026Q1，filed2026-05-07
+https://data.sec.gov/api/xbrl/companyfacts/CIK0001051470.json
+[E_FWD_RESTRUCT_CLASS] Crown Castle 2025 Form 10-K | 2025 10K PDF89/印刷89；Q1更新已由E_FWD_Q1 note13–14支持
+https://investor.crowncastle.com/static-files/68fb84e1-1dac-440d-96b4-55b9603e10dd
+[E_R109_FRP_TABLE] Corporate Methodology | PDF29–36/¶105、108、110、116–125/Tables17–19
+https://www.maalot.co.il/Publications/MT20250709153825.pdf
+[E_R109_LIQ] Methodology And Assumptions: Liquidity Descriptors For Global Corporate Issuers | PDF4–5/¶22–32；PDF7–14/¶37–50、64、73–90
+urn:sha256:76cf8f47d56b21e8fe60597490f873d1af5dd4ff1326b9a4fa2577c022a534d4
+[E_R109_MODIFIERS] Corporate Methodology | PDF8/Table5脚注4–7；PDF38–43/Tables21–23；PDF49–50/¶186–191
+https://www.maalot.co.il/Publications/MT20250709153825.pdf
+[E_R109_NOTE_ID] Crown Castle Q1 2026 Form 10-Q | PDF13–14；另S25 PDF75/78与S_SP_Q1 PDF15交叉核
+https://investor.crowncastle.com/static-files/de60fca2-89d5-499d-899b-8e0a23030617
+[E_R109_RECOVERY] Recovery Rating Criteria For Corporate Issuers | PDF1、4、10–14、16–17、23、39、44/¶3、21–28、55–83、90–99/Appendix4/G
+https://www.maalot.co.il/Publications/MT20260405084138.pdf
+[E_SP_ARO] Crown Castle 2025 Form 10-K | PDF/印刷p65、p73–74；p80–82税务
+https://investor.crowncastle.com/static-files/68fb84e1-1dac-440d-96b4-55b9603e10dd
+[E_SP_LEASE] Crown Castle 2025 Form 10-K | PDF/印刷p58、p64、p75、p85、p87；note14
+https://investor.crowncastle.com/static-files/68fb84e1-1dac-440d-96b4-55b9603e10dd
+[E_SP_Q1CFO] Crown Castle Q1 2026 Form 10-Q | PDF6/印刷p5，2026Q1/2025Q1现金流表；PDF19–20/印刷p18–19，note13重组事项
+https://investor.crowncastle.com/static-files/de60fca2-89d5-499d-899b-8e0a23030617
+[E_SP_RATIOS] S&amp;P Corporate Methodology: Ratios And Adjustments | 原发2019-04-01，2025-12-17重发，PDF7 ¶31–35；17–25 ¶86–137；44–45 ¶223–225
+https://www.maalot.co.il/Publications/MT20251223092257.pdf
+[E_SP_SCOPE] Crown Castle 2025 Form 10-K | note1/PDF及印刷p62；p60、p87–88
+https://investor.crowncastle.com/static-files/68fb84e1-1dac-440d-96b4-55b9603e10dd
+[E_DEV_SALE] 2026-05-01 出售8-K及Exhibit99.2公开未经审计备考 | PDF2/5–9；已读相关备考章节
+https://investor.crowncastle.com/static-files/f4ff727f-0f13-4f18-affa-1ff461698ccf
+[E_CG_RESOURCE] Crown Castle 2025 Form 10-K | note2印刷/PDF63受限现金；note8 p77–78完整Securitized Debt及Senior Notes段；note16 p88
+https://investor.crowncastle.com/static-files/68fb84e1-1dac-440d-96b4-55b9603e10dd
+[E_CG_TRANSFER] Crown Castle May 1 2026 Form 8-K and Exhibit 10.1 credit agreement | §6.08印刷107–108/PDF117–118完整公开条款
+https://investor.crowncastle.com/static-files/dd7712df-51aa-4a29-b6a5-67becf7b2234
+[E_CG_DRAW] Crown Castle May 1 2026 Form 8-K and Exhibit 10.1 credit agreement | 新8-K PDF2；§1.01 Borrower PDF19、Default PDF24、Unrestricted PDF51；§4.02印刷93/PDF103；§6.10印刷108/PDF118；ArticleVII(d)/(e)印刷109/PDF119；(g)印刷110/PDF120
+https://investor.crowncastle.com/static-files/dd7712df-51aa-4a29-b6a5-67becf7b2234
+[E25SPE] Crown Castle 2025 Form 10-K | note 8/p77–78，2018 Tower Revenue Notes 及 2009 Securitized Notes
+https://investor.crowncastle.com/static-files/68fb84e1-1dac-440d-96b4-55b9603e10dd
+[E25CASH] Crown Castle 2025 Form 10-K | note 16，印刷及 PDF p88，cash reconciliation table
+https://investor.crowncastle.com/static-files/68fb84e1-1dac-440d-96b4-55b9603e10dd
+[E_CG_RP] Crown Castle May 1 2026 Form 8-K and Exhibit 10.1 credit agreement | 新协议§1.01 Restricted Payment/Restricted Subsidiary PDF45；§6.06印刷105–106/PDF115–116
+https://investor.crowncastle.com/static-files/dd7712df-51aa-4a29-b6a5-67becf7b2234</a:t>
+            </a:r>
+            <a:endParaRPr lang="en-US" dirty="0"/>
+          </a:p>
+        </p:txBody>
+      </p:sp>
+      <p:sp>
+        <p:nvSpPr>
+          <p:cNvPr id="4" name="Slide Number Placeholder 3"/>
+          <p:cNvSpPr>
+            <a:spLocks noGrp="1"/>
+          </p:cNvSpPr>
+          <p:nvPr>
+            <p:ph type="sldNum" sz="quarter" idx="10"/>
+          </p:nvPr>
+        </p:nvSpPr>
+        <p:spPr/>
+        <p:txBody>
+          <a:bodyPr/>
+          <a:lstStyle/>
+          <a:p>
+            <a:fld id="{F7021451-1387-4CA6-816F-3879F97B5CBC}" type="slidenum">
+              <a:rPr lang="en-US"/>
+              <a:t>10</a:t>
+            </a:fld>
+            <a:endParaRPr lang="en-US"/>
+          </a:p>
+        </p:txBody>
+      </p:sp>
+    </p:spTree>
+    <p:extLst>
+      <p:ext uri="{BB962C8B-B14F-4D97-AF65-F5344CB8AC3E}">
+        <p14:creationId xmlns:p14="http://schemas.microsoft.com/office/powerpoint/2010/main" val="1024086991"/>
+      </p:ext>
+    </p:extLst>
+  </p:cSld>
+  <p:clrMapOvr>
+    <a:masterClrMapping/>
+  </p:clrMapOvr>
+</p:notes>
+</file>
+
+<file path=ppt/notesSlides/notesSlide11.xml><?xml version="1.0" encoding="utf-8"?>
+<p:notes xmlns:a="http://schemas.openxmlformats.org/drawingml/2006/main" xmlns:r="http://schemas.openxmlformats.org/officeDocument/2006/relationships" xmlns:p="http://schemas.openxmlformats.org/presentationml/2006/main">
+  <p:cSld>
+    <p:spTree>
+      <p:nvGrpSpPr>
+        <p:cNvPr id="1" name=""/>
+        <p:cNvGrpSpPr/>
+        <p:nvPr/>
+      </p:nvGrpSpPr>
+      <p:grpSpPr>
+        <a:xfrm>
+          <a:off x="0" y="0"/>
+          <a:ext cx="0" cy="0"/>
+          <a:chOff x="0" y="0"/>
+          <a:chExt cx="0" cy="0"/>
+        </a:xfrm>
+      </p:grpSpPr>
+      <p:sp>
+        <p:nvSpPr>
+          <p:cNvPr id="2" name="Slide Image Placeholder 1"/>
+          <p:cNvSpPr>
+            <a:spLocks noGrp="1" noRot="1" noChangeAspect="1"/>
+          </p:cNvSpPr>
+          <p:nvPr>
+            <p:ph type="sldImg"/>
+          </p:nvPr>
+        </p:nvSpPr>
+        <p:spPr/>
+      </p:sp>
+      <p:sp>
+        <p:nvSpPr>
+          <p:cNvPr id="3" name="Notes Placeholder 2"/>
+          <p:cNvSpPr>
+            <a:spLocks noGrp="1"/>
+          </p:cNvSpPr>
+          <p:nvPr>
+            <p:ph type="body" idx="1"/>
+          </p:nvPr>
+        </p:nvSpPr>
+        <p:spPr/>
+        <p:txBody>
+          <a:bodyPr/>
+          <a:lstStyle/>
+          <a:p>
+            <a:r>
+              <a:rPr lang="en-US" dirty="0"/>
+              <a:t>底稿 F05, cg_cash_spe, cg_payment_rights, r109_window_B0, r109_window_JV_for_adequate, r109_window_JV_for_positive_stress
+[F05] conditional / [cg_cash_spe] conditional / [cg_payment_rights] conditional
+底稿 F05 / cg_cash_spe / cg_payment_rights；来源 S25 / SCREDIT / SQ126 / S_SP_Q1 / S_DEV_CORP / S_SP_SECTORS / S_SP_RATIOS / SPROFORMA / S_SP_XBRL / S_DEV_LIQ / S_DEV_REC
+原文定位、URL及完整引用见本页备注；完整方法和明细见同名底稿及 Word/Excel。
+[E25BS] Crown Castle 2025 Form 10-K | 印刷及 PDF p58，Consolidated Balance Sheet，2025/2024 两列
+https://investor.crowncastle.com/static-files/68fb84e1-1dac-440d-96b4-55b9603e10dd
+[ECREDIT] Crown Castle May 1 2026 Form 8-K and Exhibit 10.1 credit agreement | 8-K Item 1.01；协议 §1.01、§1.04/p43、§1.05/p44、§4.02/p93、§6.10/p108；Total Indebtedness印刷39/PDF49，§1.04印刷43/PDF53
+https://investor.crowncastle.com/static-files/dd7712df-51aa-4a29-b6a5-67becf7b2234
+[EQ126CF] Crown Castle Q1 2026 Form 10-Q | 印刷 p18/PDF p19 现金调节；note 5/p12 债务；MD&amp;A/p28 流动性
+https://investor.crowncastle.com/static-files/de60fca2-89d5-499d-899b-8e0a23030617
+[EQ126FAC] Crown Castle Q1 2026 Form 10-Q | note 14 印刷 p20/PDF p21；MD&amp;A/p28 May 5 balances
+https://investor.crowncastle.com/static-files/de60fca2-89d5-499d-899b-8e0a23030617
+[EQ126SALE] Crown Castle Q1 2026 Form 10-Q | note 14 印刷 p19/PDF p20，Completion of Strategic Fiber Transaction
+https://investor.crowncastle.com/static-files/de60fca2-89d5-499d-899b-8e0a23030617
+[E_DEV_CASH_CONTRACT] Crown Castle Q1 2026 Supplemental Information | PDF13–14
+https://investor.crowncastle.com/static-files/38f6a584-60a8-452d-bfd2-a44103aeec82
+[E_DEV_CORP] Corporate Methodology | PDF4–12、21–22、24–28、30–44、47–50；Tables1/2/3/5/14–19/21–25及¶40–50/91–92/112–125/136–191
+https://www.maalot.co.il/Publications/MT20250709153825.pdf
+[E_DEV_CP] Crown Castle 2025 Form 10-K | PDF4–8、17–19、36–38；Q1 supplement另见E_DEV_CASH_CONTRACT
+https://investor.crowncastle.com/static-files/68fb84e1-1dac-440d-96b4-55b9603e10dd
+[E_DEV_CREDIT] Crown Castle May 1 2026 Form 8-K and Exhibit 10.1 credit agreement | PDF11、22–24、40–41、49、51、103、118及公开8K摘要
+https://investor.crowncastle.com/static-files/dd7712df-51aa-4a29-b6a5-67becf7b2234
+[E_DEV_DI] S&amp;P Sector-Specific Corporate Methodology — Digital Infrastructure | PDF61–63、68–71、73、76–77
+https://www.maalot.co.il/Publications/MT20251012123218.pdf
+[E_DEV_FACE] Crown Castle Q1 2026 Supplemental Information | PDF15/印14，Capitalization Overview，Face Value
+https://investor.crowncastle.com/static-files/38f6a584-60a8-452d-bfd2-a44103aeec82
+[E_DEV_NOTE] Crown Castle Q1 2026 Form 10-Q | 2026Q1 10Q PDF13–14，Debt and Other Obligations
+https://investor.crowncastle.com/static-files/de60fca2-89d5-499d-899b-8e0a23030617
+[E_DEV_NOTE_GUAR] Crown Castle 2025 Form 10-K | PDF75、77–79，Senior Notes/Securitized Debt
+https://investor.crowncastle.com/static-files/68fb84e1-1dac-440d-96b4-55b9603e10dd
+[E_DEV_TOWER_RIGHTS] Crown Castle 2025 Form 10-K | PDF4、7、17–18及77–79
+https://investor.crowncastle.com/static-files/68fb84e1-1dac-440d-96b4-55b9603e10dd
+[E_FWD_CASH_TAX] Crown Castle Q1 2026 Supplemental Information | Q1 supplement PDF12/印刷11完整Consolidated ROIC表及(a)–(f)脚注；PDF23/印刷22 Non-GAAP Measures定义
+https://investor.crowncastle.com/static-files/38f6a584-60a8-452d-bfd2-a44103aeec82
+[E_FWD_CONTRACT] Crown Castle Q1 2026 Supplemental Information | PDF9/11/13–16/18/28，印刷8/10/12–15/17/27
+https://investor.crowncastle.com/static-files/38f6a584-60a8-452d-bfd2-a44103aeec82
+[E_FWD_CREDIT_CONDITIONS] Crown Castle May 1 2026 Form 8-K and Exhibit 10.1 credit agreement | 完整协议PDF2、49、51、103、118；协议印刷39、41、93、108；§4.02/§6.10
+https://investor.crowncastle.com/static-files/dd7712df-51aa-4a29-b6a5-67becf7b2234
+[E_FWD_DEBT_MEASURE] S&amp;P Corporate Methodology: Ratios And Adjustments | PDF27/印刷27，Appendix2 Initial measurement / debt at fair value
+https://www.maalot.co.il/Publications/MT20251223092257.pdf
+[E_FWD_GUIDANCE] 2026-05-01 出售8-K及Exhibit99.2公开未经审计备考 | 完整May1 8-K的Ex99.1 PDF6、11、13、15–16（印刷2、7、9、11–12）
+https://investor.crowncastle.com/static-files/f4ff727f-0f13-4f18-affa-1ff461698ccf
+[E_FWD_Q1] Crown Castle Q1 2026 Form 10-Q | PDF4–6/印刷3–5；note5 PDF14/印刷13；note13–14 PDF19–20
+https://investor.crowncastle.com/static-files/de60fca2-89d5-499d-899b-8e0a23030617
+[E_FWD_Q1_XBRL] SEC Companyfacts：Crown Castle 2025年度及2026Q1原申报事实 | InterestPaidNet / InterestCostsCapitalized；accn0001051470-26-000059，2026Q1，filed2026-05-07
+https://data.sec.gov/api/xbrl/companyfacts/CIK0001051470.json
+[E_FWD_RESTRUCT_CLASS] Crown Castle 2025 Form 10-K | 2025 10K PDF89/印刷89；Q1更新已由E_FWD_Q1 note13–14支持
+https://investor.crowncastle.com/static-files/68fb84e1-1dac-440d-96b4-55b9603e10dd
+[E_R109_FRP_TABLE] Corporate Methodology | PDF29–36/¶105、108、110、116–125/Tables17–19
+https://www.maalot.co.il/Publications/MT20250709153825.pdf
+[E_R109_LIQ] Methodology And Assumptions: Liquidity Descriptors For Global Corporate Issuers | PDF4–5/¶22–32；PDF7–14/¶37–50、64、73–90
+urn:sha256:76cf8f47d56b21e8fe60597490f873d1af5dd4ff1326b9a4fa2577c022a534d4
+[E_R109_MODIFIERS] Corporate Methodology | PDF8/Table5脚注4–7；PDF38–43/Tables21–23；PDF49–50/¶186–191
+https://www.maalot.co.il/Publications/MT20250709153825.pdf
+[E_R109_NOTE_ID] Crown Castle Q1 2026 Form 10-Q | PDF13–14；另S25 PDF75/78与S_SP_Q1 PDF15交叉核
+https://investor.crowncastle.com/static-files/de60fca2-89d5-499d-899b-8e0a23030617
+[E_R109_RECOVERY] Recovery Rating Criteria For Corporate Issuers | PDF1、4、10–14、16–17、23、39、44/¶3、21–28、55–83、90–99/Appendix4/G
+https://www.maalot.co.il/Publications/MT20260405084138.pdf
+[E_SP_ARO] Crown Castle 2025 Form 10-K | PDF/印刷p65、p73–74；p80–82税务
+https://investor.crowncastle.com/static-files/68fb84e1-1dac-440d-96b4-55b9603e10dd
+[E_SP_LEASE] Crown Castle 2025 Form 10-K | PDF/印刷p58、p64、p75、p85、p87；note14
+https://investor.crowncastle.com/static-files/68fb84e1-1dac-440d-96b4-55b9603e10dd
+[E_SP_Q1CFO] Crown Castle Q1 2026 Form 10-Q | PDF6/印刷p5，2026Q1/2025Q1现金流表；PDF19–20/印刷p18–19，note13重组事项
+https://investor.crowncastle.com/static-files/de60fca2-89d5-499d-899b-8e0a23030617
+[E_SP_RATIOS] S&amp;P Corporate Methodology: Ratios And Adjustments | 原发2019-04-01，2025-12-17重发，PDF7 ¶31–35；17–25 ¶86–137；44–45 ¶223–225
+https://www.maalot.co.il/Publications/MT20251223092257.pdf
+[E_SP_SCOPE] Crown Castle 2025 Form 10-K | note1/PDF及印刷p62；p60、p87–88
+https://investor.crowncastle.com/static-files/68fb84e1-1dac-440d-96b4-55b9603e10dd
+[E_DEV_SALE] 2026-05-01 出售8-K及Exhibit99.2公开未经审计备考 | PDF2/5–9；已读相关备考章节
+https://investor.crowncastle.com/static-files/f4ff727f-0f13-4f18-affa-1ff461698ccf
+[E_CG_RESOURCE] Crown Castle 2025 Form 10-K | note2印刷/PDF63受限现金；note8 p77–78完整Securitized Debt及Senior Notes段；note16 p88
+https://investor.crowncastle.com/static-files/68fb84e1-1dac-440d-96b4-55b9603e10dd
+[E_CG_TRANSFER] Crown Castle May 1 2026 Form 8-K and Exhibit 10.1 credit agreement | §6.08印刷107–108/PDF117–118完整公开条款
+https://investor.crowncastle.com/static-files/dd7712df-51aa-4a29-b6a5-67becf7b2234
+[E_CG_DRAW] Crown Castle May 1 2026 Form 8-K and Exhibit 10.1 credit agreement | 新8-K PDF2；§1.01 Borrower PDF19、Default PDF24、Unrestricted PDF51；§4.02印刷93/PDF103；§6.10印刷108/PDF118；ArticleVII(d)/(e)印刷109/PDF119；(g)印刷110/PDF120
+https://investor.crowncastle.com/static-files/dd7712df-51aa-4a29-b6a5-67becf7b2234
+[E25SPE] Crown Castle 2025 Form 10-K | note 8/p77–78，2018 Tower Revenue Notes 及 2009 Securitized Notes
+https://investor.crowncastle.com/static-files/68fb84e1-1dac-440d-96b4-55b9603e10dd
+[E25CASH] Crown Castle 2025 Form 10-K | note 16，印刷及 PDF p88，cash reconciliation table
+https://investor.crowncastle.com/static-files/68fb84e1-1dac-440d-96b4-55b9603e10dd
+[E_CG_RP] Crown Castle May 1 2026 Form 8-K and Exhibit 10.1 credit agreement | 新协议§1.01 Restricted Payment/Restricted Subsidiary PDF45；§6.06印刷105–106/PDF115–116
+https://investor.crowncastle.com/static-files/dd7712df-51aa-4a29-b6a5-67becf7b2234</a:t>
+            </a:r>
+            <a:endParaRPr lang="en-US" dirty="0"/>
+          </a:p>
+        </p:txBody>
+      </p:sp>
+      <p:sp>
+        <p:nvSpPr>
+          <p:cNvPr id="4" name="Slide Number Placeholder 3"/>
+          <p:cNvSpPr>
+            <a:spLocks noGrp="1"/>
+          </p:cNvSpPr>
+          <p:nvPr>
+            <p:ph type="sldNum" sz="quarter" idx="10"/>
+          </p:nvPr>
+        </p:nvSpPr>
+        <p:spPr/>
+        <p:txBody>
+          <a:bodyPr/>
+          <a:lstStyle/>
+          <a:p>
+            <a:fld id="{F7021451-1387-4CA6-816F-3879F97B5CBC}" type="slidenum">
+              <a:rPr lang="en-US"/>
+              <a:t>11</a:t>
+            </a:fld>
+            <a:endParaRPr lang="en-US"/>
+          </a:p>
+        </p:txBody>
+      </p:sp>
+    </p:spTree>
+    <p:extLst>
+      <p:ext uri="{BB962C8B-B14F-4D97-AF65-F5344CB8AC3E}">
+        <p14:creationId xmlns:p14="http://schemas.microsoft.com/office/powerpoint/2010/main" val="1024086991"/>
+      </p:ext>
+    </p:extLst>
+  </p:cSld>
+  <p:clrMapOvr>
+    <a:masterClrMapping/>
+  </p:clrMapOvr>
+</p:notes>
+</file>
+
+<file path=ppt/notesSlides/notesSlide12.xml><?xml version="1.0" encoding="utf-8"?>
+<p:notes xmlns:a="http://schemas.openxmlformats.org/drawingml/2006/main" xmlns:r="http://schemas.openxmlformats.org/officeDocument/2006/relationships" xmlns:p="http://schemas.openxmlformats.org/presentationml/2006/main">
+  <p:cSld>
+    <p:spTree>
+      <p:nvGrpSpPr>
+        <p:cNvPr id="1" name=""/>
+        <p:cNvGrpSpPr/>
+        <p:nvPr/>
+      </p:nvGrpSpPr>
+      <p:grpSpPr>
+        <a:xfrm>
+          <a:off x="0" y="0"/>
+          <a:ext cx="0" cy="0"/>
+          <a:chOff x="0" y="0"/>
+          <a:chExt cx="0" cy="0"/>
+        </a:xfrm>
+      </p:grpSpPr>
+      <p:sp>
+        <p:nvSpPr>
+          <p:cNvPr id="2" name="Slide Image Placeholder 1"/>
+          <p:cNvSpPr>
+            <a:spLocks noGrp="1" noRot="1" noChangeAspect="1"/>
+          </p:cNvSpPr>
+          <p:nvPr>
+            <p:ph type="sldImg"/>
+          </p:nvPr>
+        </p:nvSpPr>
+        <p:spPr/>
+      </p:sp>
+      <p:sp>
+        <p:nvSpPr>
+          <p:cNvPr id="3" name="Notes Placeholder 2"/>
+          <p:cNvSpPr>
+            <a:spLocks noGrp="1"/>
+          </p:cNvSpPr>
+          <p:nvPr>
+            <p:ph type="body" idx="1"/>
+          </p:nvPr>
+        </p:nvSpPr>
+        <p:spPr/>
+        <p:txBody>
+          <a:bodyPr/>
+          <a:lstStyle/>
+          <a:p>
+            <a:r>
+              <a:rPr lang="en-US" dirty="0"/>
+              <a:t>底稿 FF_R109_MODIFIERS, FF_R109_ISSUER, cg_governance, cg_sti_difference, cg_sti_ebitda_display_difference
+[FF_R109_MODIFIERS] conditional / [FF_R109_ISSUER] conditional / [cg_governance] conditional / [cg_sti_difference] unresolved
+底稿 FF_R109_MODIFIERS / FF_R109_ISSUER / cg_governance / cg_sti_difference；来源 S_PROXY26 / S_DEV_CORP / S_SP_Q1 / SCREDIT / SPROFORMA / S25 / SQ126 / S_SP_SECTORS / S_SP_RATIOS / S_SP_XBRL / S_DEV_LIQ / S_DEV_REC / S_DEV_COUNTRY
+原文定位、URL及完整引用见本页备注；完整方法和明细见同名底稿及 Word/Excel。
+[E_PROXY_STI] Crown Castle 2026 DEF14A（2026年股东会；完整传输HTML） | printed p34 Alignment/AIP；p44–45结构、两张业绩表及404要求；p46 Hillabrant奖金表及脚注(a)
+https://investor.crowncastle.com/node/29011/html
+[E_R109_MODIFIERS] Corporate Methodology | PDF8/Table5脚注4–7；PDF38–43/Tables21–23；PDF49–50/¶186–191
+https://www.maalot.co.il/Publications/MT20250709153825.pdf
+[E_DEV_FACE] Crown Castle Q1 2026 Supplemental Information | PDF15/印14，Capitalization Overview，Face Value
+https://investor.crowncastle.com/static-files/38f6a584-60a8-452d-bfd2-a44103aeec82
+[E_DEV_CREDIT] Crown Castle May 1 2026 Form 8-K and Exhibit 10.1 credit agreement | PDF11、22–24、40–41、49、51、103、118及公开8K摘要
+https://investor.crowncastle.com/static-files/dd7712df-51aa-4a29-b6a5-67becf7b2234
+[E_DEV_SALE] 2026-05-01 出售8-K及Exhibit99.2公开未经审计备考 | PDF2/5–9；已读相关备考章节
+https://investor.crowncastle.com/static-files/f4ff727f-0f13-4f18-affa-1ff461698ccf
+[E25BS] Crown Castle 2025 Form 10-K | 印刷及 PDF p58，Consolidated Balance Sheet，2025/2024 两列
+https://investor.crowncastle.com/static-files/68fb84e1-1dac-440d-96b4-55b9603e10dd
+[ECREDIT] Crown Castle May 1 2026 Form 8-K and Exhibit 10.1 credit agreement | 8-K Item 1.01；协议 §1.01、§1.04/p43、§1.05/p44、§4.02/p93、§6.10/p108；Total Indebtedness印刷39/PDF49，§1.04印刷43/PDF53
+https://investor.crowncastle.com/static-files/dd7712df-51aa-4a29-b6a5-67becf7b2234
+[EQ126CF] Crown Castle Q1 2026 Form 10-Q | 印刷 p18/PDF p19 现金调节；note 5/p12 债务；MD&amp;A/p28 流动性
+https://investor.crowncastle.com/static-files/de60fca2-89d5-499d-899b-8e0a23030617
+[EQ126FAC] Crown Castle Q1 2026 Form 10-Q | note 14 印刷 p20/PDF p21；MD&amp;A/p28 May 5 balances
+https://investor.crowncastle.com/static-files/de60fca2-89d5-499d-899b-8e0a23030617
+[EQ126SALE] Crown Castle Q1 2026 Form 10-Q | note 14 印刷 p19/PDF p20，Completion of Strategic Fiber Transaction
+https://investor.crowncastle.com/static-files/de60fca2-89d5-499d-899b-8e0a23030617
+[E_DEV_CASH_CONTRACT] Crown Castle Q1 2026 Supplemental Information | PDF13–14
+https://investor.crowncastle.com/static-files/38f6a584-60a8-452d-bfd2-a44103aeec82
+[E_DEV_CORP] Corporate Methodology | PDF4–12、21–22、24–28、30–44、47–50；Tables1/2/3/5/14–19/21–25及¶40–50/91–92/112–125/136–191
+https://www.maalot.co.il/Publications/MT20250709153825.pdf
+[E_DEV_CP] Crown Castle 2025 Form 10-K | PDF4–8、17–19、36–38；Q1 supplement另见E_DEV_CASH_CONTRACT
+https://investor.crowncastle.com/static-files/68fb84e1-1dac-440d-96b4-55b9603e10dd
+[E_DEV_DI] S&amp;P Sector-Specific Corporate Methodology — Digital Infrastructure | PDF61–63、68–71、73、76–77
+https://www.maalot.co.il/Publications/MT20251012123218.pdf
+[E_DEV_NOTE] Crown Castle Q1 2026 Form 10-Q | 2026Q1 10Q PDF13–14，Debt and Other Obligations
+https://investor.crowncastle.com/static-files/de60fca2-89d5-499d-899b-8e0a23030617
+[E_DEV_NOTE_GUAR] Crown Castle 2025 Form 10-K | PDF75、77–79，Senior Notes/Securitized Debt
+https://investor.crowncastle.com/static-files/68fb84e1-1dac-440d-96b4-55b9603e10dd
+[E_DEV_TOWER_RIGHTS] Crown Castle 2025 Form 10-K | PDF4、7、17–18及77–79
+https://investor.crowncastle.com/static-files/68fb84e1-1dac-440d-96b4-55b9603e10dd
+[E_FWD_CASH_TAX] Crown Castle Q1 2026 Supplemental Information | Q1 supplement PDF12/印刷11完整Consolidated ROIC表及(a)–(f)脚注；PDF23/印刷22 Non-GAAP Measures定义
+https://investor.crowncastle.com/static-files/38f6a584-60a8-452d-bfd2-a44103aeec82
+[E_FWD_CONTRACT] Crown Castle Q1 2026 Supplemental Information | PDF9/11/13–16/18/28，印刷8/10/12–15/17/27
+https://investor.crowncastle.com/static-files/38f6a584-60a8-452d-bfd2-a44103aeec82
+[E_FWD_CREDIT_CONDITIONS] Crown Castle May 1 2026 Form 8-K and Exhibit 10.1 credit agreement | 完整协议PDF2、49、51、103、118；协议印刷39、41、93、108；§4.02/§6.10
+https://investor.crowncastle.com/static-files/dd7712df-51aa-4a29-b6a5-67becf7b2234
+[E_FWD_DEBT_MEASURE] S&amp;P Corporate Methodology: Ratios And Adjustments | PDF27/印刷27，Appendix2 Initial measurement / debt at fair value
+https://www.maalot.co.il/Publications/MT20251223092257.pdf
+[E_FWD_GUIDANCE] 2026-05-01 出售8-K及Exhibit99.2公开未经审计备考 | 完整May1 8-K的Ex99.1 PDF6、11、13、15–16（印刷2、7、9、11–12）
+https://investor.crowncastle.com/static-files/f4ff727f-0f13-4f18-affa-1ff461698ccf
+[E_FWD_Q1] Crown Castle Q1 2026 Form 10-Q | PDF4–6/印刷3–5；note5 PDF14/印刷13；note13–14 PDF19–20
+https://investor.crowncastle.com/static-files/de60fca2-89d5-499d-899b-8e0a23030617
+[E_FWD_Q1_XBRL] SEC Companyfacts：Crown Castle 2025年度及2026Q1原申报事实 | InterestPaidNet / InterestCostsCapitalized；accn0001051470-26-000059，2026Q1，filed2026-05-07
+https://data.sec.gov/api/xbrl/companyfacts/CIK0001051470.json
+[E_FWD_RESTRUCT_CLASS] Crown Castle 2025 Form 10-K | 2025 10K PDF89/印刷89；Q1更新已由E_FWD_Q1 note13–14支持
+https://investor.crowncastle.com/static-files/68fb84e1-1dac-440d-96b4-55b9603e10dd
+[E_R109_FRP_TABLE] Corporate Methodology | PDF29–36/¶105、108、110、116–125/Tables17–19
+https://www.maalot.co.il/Publications/MT20250709153825.pdf
+[E_R109_LIQ] Methodology And Assumptions: Liquidity Descriptors For Global Corporate Issuers | PDF4–5/¶22–32；PDF7–14/¶37–50、64、73–90
+urn:sha256:76cf8f47d56b21e8fe60597490f873d1af5dd4ff1326b9a4fa2577c022a534d4
+[E_R109_NOTE_ID] Crown Castle Q1 2026 Form 10-Q | PDF13–14；另S25 PDF75/78与S_SP_Q1 PDF15交叉核
+https://investor.crowncastle.com/static-files/de60fca2-89d5-499d-899b-8e0a23030617
+[E_R109_RECOVERY] Recovery Rating Criteria For Corporate Issuers | PDF1、4、10–14、16–17、23、39、44/¶3、21–28、55–83、90–99/Appendix4/G
+https://www.maalot.co.il/Publications/MT20260405084138.pdf
+[E_SP_ARO] Crown Castle 2025 Form 10-K | PDF/印刷p65、p73–74；p80–82税务
+https://investor.crowncastle.com/static-files/68fb84e1-1dac-440d-96b4-55b9603e10dd
+[E_SP_LEASE] Crown Castle 2025 Form 10-K | PDF/印刷p58、p64、p75、p85、p87；note14
+https://investor.crowncastle.com/static-files/68fb84e1-1dac-440d-96b4-55b9603e10dd
+[E_SP_Q1CFO] Crown Castle Q1 2026 Form 10-Q | PDF6/印刷p5，2026Q1/2025Q1现金流表；PDF19–20/印刷p18–19，note13重组事项
+https://investor.crowncastle.com/static-files/de60fca2-89d5-499d-899b-8e0a23030617
+[E_SP_RATIOS] S&amp;P Corporate Methodology: Ratios And Adjustments | 原发2019-04-01，2025-12-17重发，PDF7 ¶31–35；17–25 ¶86–137；44–45 ¶223–225
+https://www.maalot.co.il/Publications/MT20251223092257.pdf
+[E_SP_SCOPE] Crown Castle 2025 Form 10-K | note1/PDF及印刷p62；p60、p87–88
+https://investor.crowncastle.com/static-files/68fb84e1-1dac-440d-96b4-55b9603e10dd
+[E_DEV_PROXY] Crown Castle 2026 DEF14A（2026年股东会；完整传输HTML） | 完整HTML提取行1706–1732、1882–1907、2091–2112、4909–5008；印18–27/75–76相应部分
+https://investor.crowncastle.com/node/29011/html
+[E_DEV_COUNTRY] Country Risk Assessments Update: June 2026 | 内嵌文章元数据June17及Table1表头/美国行
+https://spratings.spglobal.com/ratings/en/regulatory/article/-/view/type/HTML/id/3582048
+[E_R109_METHOD_LIMIT] Corporate Methodology | PDF49/¶186；未核法域适用性关联另见E_R109_RECOVERY
+https://www.maalot.co.il/Publications/MT20250709153825.pdf
+[E_CG_GOV] Crown Castle 2026 DEF14A（2026年股东会；完整传输HTML） | printed p18–23 Board leadership/Risk oversight/Committees；p29–30 Audit Committee report
+https://investor.crowncastle.com/node/29011/html
+[E_CG_RPT] Crown Castle 2026 DEF14A（2026年股东会；完整传输HTML） | printed p26–27 Review of transactions with related persons；p28–30 auditor services/report
+https://investor.crowncastle.com/node/29011/html
+[E_CG_LEADERSHIP] Crown Castle 2026 DEF14A（2026年股东会；完整传输HTML） | printed p33–34 Executive leadership changes；p52–53 recovery/antihedging/antipledging
+https://investor.crowncastle.com/node/29011/html
+[E_CG_RP] Crown Castle May 1 2026 Form 8-K and Exhibit 10.1 credit agreement | 新协议§1.01 Restricted Payment/Restricted Subsidiary PDF45；§6.06印刷105–106/PDF115–116
+https://investor.crowncastle.com/static-files/dd7712df-51aa-4a29-b6a5-67becf7b2234
+[E25CF] Crown Castle 2025 Form 10-K | 印刷及 PDF p60，Consolidated Statement of Cash Flows
+https://investor.crowncastle.com/static-files/68fb84e1-1dac-440d-96b4-55b9603e10dd
+[E_CG_PROXY_B3] Crown Castle 2026 DEF14A（2026年股东会；完整传输HTML） | Appendix B printed B3 Historical Adjusted EBITDA reconciliation完整相关表；B1定义及B2 Fiber定义
+https://investor.crowncastle.com/node/29011/html</a:t>
+            </a:r>
+            <a:endParaRPr lang="en-US" dirty="0"/>
+          </a:p>
+        </p:txBody>
+      </p:sp>
+      <p:sp>
+        <p:nvSpPr>
+          <p:cNvPr id="4" name="Slide Number Placeholder 3"/>
+          <p:cNvSpPr>
+            <a:spLocks noGrp="1"/>
+          </p:cNvSpPr>
+          <p:nvPr>
+            <p:ph type="sldNum" sz="quarter" idx="10"/>
+          </p:nvPr>
+        </p:nvSpPr>
+        <p:spPr/>
+        <p:txBody>
+          <a:bodyPr/>
+          <a:lstStyle/>
+          <a:p>
+            <a:fld id="{F7021451-1387-4CA6-816F-3879F97B5CBC}" type="slidenum">
+              <a:rPr lang="en-US"/>
+              <a:t>12</a:t>
+            </a:fld>
+            <a:endParaRPr lang="en-US"/>
+          </a:p>
+        </p:txBody>
+      </p:sp>
+    </p:spTree>
+    <p:extLst>
+      <p:ext uri="{BB962C8B-B14F-4D97-AF65-F5344CB8AC3E}">
+        <p14:creationId xmlns:p14="http://schemas.microsoft.com/office/powerpoint/2010/main" val="1024086991"/>
+      </p:ext>
+    </p:extLst>
+  </p:cSld>
+  <p:clrMapOvr>
+    <a:masterClrMapping/>
+  </p:clrMapOvr>
+</p:notes>
+</file>
+
+<file path=ppt/notesSlides/notesSlide13.xml><?xml version="1.0" encoding="utf-8"?>
+<p:notes xmlns:a="http://schemas.openxmlformats.org/drawingml/2006/main" xmlns:r="http://schemas.openxmlformats.org/officeDocument/2006/relationships" xmlns:p="http://schemas.openxmlformats.org/presentationml/2006/main">
+  <p:cSld>
+    <p:spTree>
+      <p:nvGrpSpPr>
+        <p:cNvPr id="1" name=""/>
+        <p:cNvGrpSpPr/>
+        <p:nvPr/>
+      </p:nvGrpSpPr>
+      <p:grpSpPr>
+        <a:xfrm>
+          <a:off x="0" y="0"/>
+          <a:ext cx="0" cy="0"/>
+          <a:chOff x="0" y="0"/>
+          <a:chExt cx="0" cy="0"/>
+        </a:xfrm>
+      </p:grpSpPr>
+      <p:sp>
+        <p:nvSpPr>
+          <p:cNvPr id="2" name="Slide Image Placeholder 1"/>
+          <p:cNvSpPr>
+            <a:spLocks noGrp="1" noRot="1" noChangeAspect="1"/>
+          </p:cNvSpPr>
+          <p:nvPr>
+            <p:ph type="sldImg"/>
+          </p:nvPr>
+        </p:nvSpPr>
+        <p:spPr/>
+      </p:sp>
+      <p:sp>
+        <p:nvSpPr>
+          <p:cNvPr id="3" name="Notes Placeholder 2"/>
+          <p:cNvSpPr>
+            <a:spLocks noGrp="1"/>
+          </p:cNvSpPr>
+          <p:nvPr>
+            <p:ph type="body" idx="1"/>
+          </p:nvPr>
+        </p:nvSpPr>
+        <p:spPr/>
+        <p:txBody>
+          <a:bodyPr/>
+          <a:lstStyle/>
+          <a:p>
+            <a:r>
+              <a:rPr lang="en-US" dirty="0"/>
+              <a:t>底稿 FF_R109_NOTE, F06, r109_note_same_coupon_claim, r109_note_30pct_distribution, r109_note_10pct_distribution, F_DEV_NOTE_FACE, F_R109_NOTE_BOOK
+[FF_R109_NOTE] conditional / [F06] conditional
+底稿 FF_R109_NOTE / F06；来源 S25 / SCREDIT / SQ126 / S_SP_Q1 / S_DEV_CORP / S_SP_SECTORS / S_SP_RATIOS / SPROFORMA / S_SP_XBRL / S_DEV_LIQ / S_DEV_REC / SOLDCREDIT
+原文定位、URL及完整引用见本页备注；完整方法和明细见同名底稿及 Word/Excel。
+[E25BS] Crown Castle 2025 Form 10-K | 印刷及 PDF p58，Consolidated Balance Sheet，2025/2024 两列
+https://investor.crowncastle.com/static-files/68fb84e1-1dac-440d-96b4-55b9603e10dd
+[ECREDIT] Crown Castle May 1 2026 Form 8-K and Exhibit 10.1 credit agreement | 8-K Item 1.01；协议 §1.01、§1.04/p43、§1.05/p44、§4.02/p93、§6.10/p108；Total Indebtedness印刷39/PDF49，§1.04印刷43/PDF53
+https://investor.crowncastle.com/static-files/dd7712df-51aa-4a29-b6a5-67becf7b2234
+[EQ126CF] Crown Castle Q1 2026 Form 10-Q | 印刷 p18/PDF p19 现金调节；note 5/p12 债务；MD&amp;A/p28 流动性
+https://investor.crowncastle.com/static-files/de60fca2-89d5-499d-899b-8e0a23030617
+[EQ126FAC] Crown Castle Q1 2026 Form 10-Q | note 14 印刷 p20/PDF p21；MD&amp;A/p28 May 5 balances
+https://investor.crowncastle.com/static-files/de60fca2-89d5-499d-899b-8e0a23030617
+[EQ126SALE] Crown Castle Q1 2026 Form 10-Q | note 14 印刷 p19/PDF p20，Completion of Strategic Fiber Transaction
+https://investor.crowncastle.com/static-files/de60fca2-89d5-499d-899b-8e0a23030617
+[E_DEV_CASH_CONTRACT] Crown Castle Q1 2026 Supplemental Information | PDF13–14
+https://investor.crowncastle.com/static-files/38f6a584-60a8-452d-bfd2-a44103aeec82
+[E_DEV_CORP] Corporate Methodology | PDF4–12、21–22、24–28、30–44、47–50；Tables1/2/3/5/14–19/21–25及¶40–50/91–92/112–125/136–191
+https://www.maalot.co.il/Publications/MT20250709153825.pdf
+[E_DEV_CP] Crown Castle 2025 Form 10-K | PDF4–8、17–19、36–38；Q1 supplement另见E_DEV_CASH_CONTRACT
+https://investor.crowncastle.com/static-files/68fb84e1-1dac-440d-96b4-55b9603e10dd
+[E_DEV_CREDIT] Crown Castle May 1 2026 Form 8-K and Exhibit 10.1 credit agreement | PDF11、22–24、40–41、49、51、103、118及公开8K摘要
+https://investor.crowncastle.com/static-files/dd7712df-51aa-4a29-b6a5-67becf7b2234
+[E_DEV_DI] S&amp;P Sector-Specific Corporate Methodology — Digital Infrastructure | PDF61–63、68–71、73、76–77
+https://www.maalot.co.il/Publications/MT20251012123218.pdf
+[E_DEV_FACE] Crown Castle Q1 2026 Supplemental Information | PDF15/印14，Capitalization Overview，Face Value
+https://investor.crowncastle.com/static-files/38f6a584-60a8-452d-bfd2-a44103aeec82
+[E_DEV_NOTE] Crown Castle Q1 2026 Form 10-Q | 2026Q1 10Q PDF13–14，Debt and Other Obligations
+https://investor.crowncastle.com/static-files/de60fca2-89d5-499d-899b-8e0a23030617
+[E_DEV_NOTE_GUAR] Crown Castle 2025 Form 10-K | PDF75、77–79，Senior Notes/Securitized Debt
+https://investor.crowncastle.com/static-files/68fb84e1-1dac-440d-96b4-55b9603e10dd
+[E_DEV_TOWER_RIGHTS] Crown Castle 2025 Form 10-K | PDF4、7、17–18及77–79
+https://investor.crowncastle.com/static-files/68fb84e1-1dac-440d-96b4-55b9603e10dd
+[E_FWD_CASH_TAX] Crown Castle Q1 2026 Supplemental Information | Q1 supplement PDF12/印刷11完整Consolidated ROIC表及(a)–(f)脚注；PDF23/印刷22 Non-GAAP Measures定义
+https://investor.crowncastle.com/static-files/38f6a584-60a8-452d-bfd2-a44103aeec82
+[E_FWD_CONTRACT] Crown Castle Q1 2026 Supplemental Information | PDF9/11/13–16/18/28，印刷8/10/12–15/17/27
+https://investor.crowncastle.com/static-files/38f6a584-60a8-452d-bfd2-a44103aeec82
+[E_FWD_CREDIT_CONDITIONS] Crown Castle May 1 2026 Form 8-K and Exhibit 10.1 credit agreement | 完整协议PDF2、49、51、103、118；协议印刷39、41、93、108；§4.02/§6.10
+https://investor.crowncastle.com/static-files/dd7712df-51aa-4a29-b6a5-67becf7b2234
+[E_FWD_DEBT_MEASURE] S&amp;P Corporate Methodology: Ratios And Adjustments | PDF27/印刷27，Appendix2 Initial measurement / debt at fair value
+https://www.maalot.co.il/Publications/MT20251223092257.pdf
+[E_FWD_GUIDANCE] 2026-05-01 出售8-K及Exhibit99.2公开未经审计备考 | 完整May1 8-K的Ex99.1 PDF6、11、13、15–16（印刷2、7、9、11–12）
+https://investor.crowncastle.com/static-files/f4ff727f-0f13-4f18-affa-1ff461698ccf
+[E_FWD_Q1] Crown Castle Q1 2026 Form 10-Q | PDF4–6/印刷3–5；note5 PDF14/印刷13；note13–14 PDF19–20
+https://investor.crowncastle.com/static-files/de60fca2-89d5-499d-899b-8e0a23030617
+[E_FWD_Q1_XBRL] SEC Companyfacts：Crown Castle 2025年度及2026Q1原申报事实 | InterestPaidNet / InterestCostsCapitalized；accn0001051470-26-000059，2026Q1，filed2026-05-07
+https://data.sec.gov/api/xbrl/companyfacts/CIK0001051470.json
+[E_FWD_RESTRUCT_CLASS] Crown Castle 2025 Form 10-K | 2025 10K PDF89/印刷89；Q1更新已由E_FWD_Q1 note13–14支持
+https://investor.crowncastle.com/static-files/68fb84e1-1dac-440d-96b4-55b9603e10dd
+[E_R109_FRP_TABLE] Corporate Methodology | PDF29–36/¶105、108、110、116–125/Tables17–19
+https://www.maalot.co.il/Publications/MT20250709153825.pdf
+[E_R109_LIQ] Methodology And Assumptions: Liquidity Descriptors For Global Corporate Issuers | PDF4–5/¶22–32；PDF7–14/¶37–50、64、73–90
+urn:sha256:76cf8f47d56b21e8fe60597490f873d1af5dd4ff1326b9a4fa2577c022a534d4
+[E_R109_MODIFIERS] Corporate Methodology | PDF8/Table5脚注4–7；PDF38–43/Tables21–23；PDF49–50/¶186–191
+https://www.maalot.co.il/Publications/MT20250709153825.pdf
+[E_R109_NOTE_ID] Crown Castle Q1 2026 Form 10-Q | PDF13–14；另S25 PDF75/78与S_SP_Q1 PDF15交叉核
+https://investor.crowncastle.com/static-files/de60fca2-89d5-499d-899b-8e0a23030617
+[E_R109_RECOVERY] Recovery Rating Criteria For Corporate Issuers | PDF1、4、10–14、16–17、23、39、44/¶3、21–28、55–83、90–99/Appendix4/G
+https://www.maalot.co.il/Publications/MT20260405084138.pdf
+[E_SP_ARO] Crown Castle 2025 Form 10-K | PDF/印刷p65、p73–74；p80–82税务
+https://investor.crowncastle.com/static-files/68fb84e1-1dac-440d-96b4-55b9603e10dd
+[E_SP_LEASE] Crown Castle 2025 Form 10-K | PDF/印刷p58、p64、p75、p85、p87；note14
+https://investor.crowncastle.com/static-files/68fb84e1-1dac-440d-96b4-55b9603e10dd
+[E_SP_Q1CFO] Crown Castle Q1 2026 Form 10-Q | PDF6/印刷p5，2026Q1/2025Q1现金流表；PDF19–20/印刷p18–19，note13重组事项
+https://investor.crowncastle.com/static-files/de60fca2-89d5-499d-899b-8e0a23030617
+[E_SP_RATIOS] S&amp;P Corporate Methodology: Ratios And Adjustments | 原发2019-04-01，2025-12-17重发，PDF7 ¶31–35；17–25 ¶86–137；44–45 ¶223–225
+https://www.maalot.co.il/Publications/MT20251223092257.pdf
+[E_SP_SCOPE] Crown Castle 2025 Form 10-K | note1/PDF及印刷p62；p60、p87–88
+https://investor.crowncastle.com/static-files/68fb84e1-1dac-440d-96b4-55b9603e10dd
+[E_R109_METHOD_LIMIT] Corporate Methodology | PDF49/¶186；未核法域适用性关联另见E_R109_RECOVERY
+https://www.maalot.co.il/Publications/MT20250709153825.pdf
+[E25DEBT] Crown Castle 2025 Form 10-K | note 8，p75–79 债务表、2018 Tower Revenue Notes、CP Program；MD&amp;A p40/p45
+https://investor.crowncastle.com/static-files/68fb84e1-1dac-440d-96b4-55b9603e10dd
+[E25SPE] Crown Castle 2025 Form 10-K | note 8/p77–78，2018 Tower Revenue Notes 及 2009 Securitized Notes
+https://investor.crowncastle.com/static-files/68fb84e1-1dac-440d-96b4-55b9603e10dd
+[EOLDCREDIT] 2022-07-08 Amendment No.7及附后旧信用协议 | §1.01定义：印刷p13–17/27–28/40/44/50–52；§1.04/1.05 p55–56；§6.09/6.10 p129
+https://investor.crowncastle.com/static-files/d735da3e-9136-43ce-ad76-3a96bcb686cf</a:t>
+            </a:r>
+            <a:endParaRPr lang="en-US" dirty="0"/>
+          </a:p>
+        </p:txBody>
+      </p:sp>
+      <p:sp>
+        <p:nvSpPr>
+          <p:cNvPr id="4" name="Slide Number Placeholder 3"/>
+          <p:cNvSpPr>
+            <a:spLocks noGrp="1"/>
+          </p:cNvSpPr>
+          <p:nvPr>
+            <p:ph type="sldNum" sz="quarter" idx="10"/>
+          </p:nvPr>
+        </p:nvSpPr>
+        <p:spPr/>
+        <p:txBody>
+          <a:bodyPr/>
+          <a:lstStyle/>
+          <a:p>
+            <a:fld id="{F7021451-1387-4CA6-816F-3879F97B5CBC}" type="slidenum">
+              <a:rPr lang="en-US"/>
+              <a:t>13</a:t>
+            </a:fld>
+            <a:endParaRPr lang="en-US"/>
+          </a:p>
+        </p:txBody>
+      </p:sp>
+    </p:spTree>
+    <p:extLst>
+      <p:ext uri="{BB962C8B-B14F-4D97-AF65-F5344CB8AC3E}">
+        <p14:creationId xmlns:p14="http://schemas.microsoft.com/office/powerpoint/2010/main" val="1024086991"/>
+      </p:ext>
+    </p:extLst>
+  </p:cSld>
+  <p:clrMapOvr>
+    <a:masterClrMapping/>
+  </p:clrMapOvr>
+</p:notes>
+</file>
+
+<file path=ppt/notesSlides/notesSlide14.xml><?xml version="1.0" encoding="utf-8"?>
+<p:notes xmlns:a="http://schemas.openxmlformats.org/drawingml/2006/main" xmlns:r="http://schemas.openxmlformats.org/officeDocument/2006/relationships" xmlns:p="http://schemas.openxmlformats.org/presentationml/2006/main">
+  <p:cSld>
+    <p:spTree>
+      <p:nvGrpSpPr>
+        <p:cNvPr id="1" name=""/>
+        <p:cNvGrpSpPr/>
+        <p:nvPr/>
+      </p:nvGrpSpPr>
+      <p:grpSpPr>
+        <a:xfrm>
+          <a:off x="0" y="0"/>
+          <a:ext cx="0" cy="0"/>
+          <a:chOff x="0" y="0"/>
+          <a:chExt cx="0" cy="0"/>
+        </a:xfrm>
+      </p:grpSpPr>
+      <p:sp>
+        <p:nvSpPr>
+          <p:cNvPr id="2" name="Slide Image Placeholder 1"/>
+          <p:cNvSpPr>
+            <a:spLocks noGrp="1" noRot="1" noChangeAspect="1"/>
+          </p:cNvSpPr>
+          <p:nvPr>
+            <p:ph type="sldImg"/>
+          </p:nvPr>
+        </p:nvSpPr>
+        <p:spPr/>
+      </p:sp>
+      <p:sp>
+        <p:nvSpPr>
+          <p:cNvPr id="3" name="Notes Placeholder 2"/>
+          <p:cNvSpPr>
+            <a:spLocks noGrp="1"/>
+          </p:cNvSpPr>
+          <p:nvPr>
+            <p:ph type="body" idx="1"/>
+          </p:nvPr>
+        </p:nvSpPr>
+        <p:spPr/>
+        <p:txBody>
+          <a:bodyPr/>
+          <a:lstStyle/>
+          <a:p>
+            <a:r>
+              <a:rPr lang="en-US" dirty="0"/>
+              <a:t>底稿 FF_R109_NOTE, F06, r109_note_same_coupon_claim, r109_note_30pct_distribution, r109_note_10pct_distribution, F_DEV_NOTE_FACE, F_R109_NOTE_BOOK
+[FF_R109_NOTE] conditional / [F06] conditional
+底稿 FF_R109_NOTE / F06；来源 S25 / SCREDIT / SQ126 / S_SP_Q1 / S_DEV_CORP / S_SP_SECTORS / S_SP_RATIOS / SPROFORMA / S_SP_XBRL / S_DEV_LIQ / S_DEV_REC / SOLDCREDIT
+原文定位、URL及完整引用见本页备注；完整方法和明细见同名底稿及 Word/Excel。
+[E25BS] Crown Castle 2025 Form 10-K | 印刷及 PDF p58，Consolidated Balance Sheet，2025/2024 两列
+https://investor.crowncastle.com/static-files/68fb84e1-1dac-440d-96b4-55b9603e10dd
+[ECREDIT] Crown Castle May 1 2026 Form 8-K and Exhibit 10.1 credit agreement | 8-K Item 1.01；协议 §1.01、§1.04/p43、§1.05/p44、§4.02/p93、§6.10/p108；Total Indebtedness印刷39/PDF49，§1.04印刷43/PDF53
+https://investor.crowncastle.com/static-files/dd7712df-51aa-4a29-b6a5-67becf7b2234
+[EQ126CF] Crown Castle Q1 2026 Form 10-Q | 印刷 p18/PDF p19 现金调节；note 5/p12 债务；MD&amp;A/p28 流动性
+https://investor.crowncastle.com/static-files/de60fca2-89d5-499d-899b-8e0a23030617
+[EQ126FAC] Crown Castle Q1 2026 Form 10-Q | note 14 印刷 p20/PDF p21；MD&amp;A/p28 May 5 balances
+https://investor.crowncastle.com/static-files/de60fca2-89d5-499d-899b-8e0a23030617
+[EQ126SALE] Crown Castle Q1 2026 Form 10-Q | note 14 印刷 p19/PDF p20，Completion of Strategic Fiber Transaction
+https://investor.crowncastle.com/static-files/de60fca2-89d5-499d-899b-8e0a23030617
+[E_DEV_CASH_CONTRACT] Crown Castle Q1 2026 Supplemental Information | PDF13–14
+https://investor.crowncastle.com/static-files/38f6a584-60a8-452d-bfd2-a44103aeec82
+[E_DEV_CORP] Corporate Methodology | PDF4–12、21–22、24–28、30–44、47–50；Tables1/2/3/5/14–19/21–25及¶40–50/91–92/112–125/136–191
+https://www.maalot.co.il/Publications/MT20250709153825.pdf
+[E_DEV_CP] Crown Castle 2025 Form 10-K | PDF4–8、17–19、36–38；Q1 supplement另见E_DEV_CASH_CONTRACT
+https://investor.crowncastle.com/static-files/68fb84e1-1dac-440d-96b4-55b9603e10dd
+[E_DEV_CREDIT] Crown Castle May 1 2026 Form 8-K and Exhibit 10.1 credit agreement | PDF11、22–24、40–41、49、51、103、118及公开8K摘要
+https://investor.crowncastle.com/static-files/dd7712df-51aa-4a29-b6a5-67becf7b2234
+[E_DEV_DI] S&amp;P Sector-Specific Corporate Methodology — Digital Infrastructure | PDF61–63、68–71、73、76–77
+https://www.maalot.co.il/Publications/MT20251012123218.pdf
+[E_DEV_FACE] Crown Castle Q1 2026 Supplemental Information | PDF15/印14，Capitalization Overview，Face Value
+https://investor.crowncastle.com/static-files/38f6a584-60a8-452d-bfd2-a44103aeec82
+[E_DEV_NOTE] Crown Castle Q1 2026 Form 10-Q | 2026Q1 10Q PDF13–14，Debt and Other Obligations
+https://investor.crowncastle.com/static-files/de60fca2-89d5-499d-899b-8e0a23030617
+[E_DEV_NOTE_GUAR] Crown Castle 2025 Form 10-K | PDF75、77–79，Senior Notes/Securitized Debt
+https://investor.crowncastle.com/static-files/68fb84e1-1dac-440d-96b4-55b9603e10dd
+[E_DEV_TOWER_RIGHTS] Crown Castle 2025 Form 10-K | PDF4、7、17–18及77–79
+https://investor.crowncastle.com/static-files/68fb84e1-1dac-440d-96b4-55b9603e10dd
+[E_FWD_CASH_TAX] Crown Castle Q1 2026 Supplemental Information | Q1 supplement PDF12/印刷11完整Consolidated ROIC表及(a)–(f)脚注；PDF23/印刷22 Non-GAAP Measures定义
+https://investor.crowncastle.com/static-files/38f6a584-60a8-452d-bfd2-a44103aeec82
+[E_FWD_CONTRACT] Crown Castle Q1 2026 Supplemental Information | PDF9/11/13–16/18/28，印刷8/10/12–15/17/27
+https://investor.crowncastle.com/static-files/38f6a584-60a8-452d-bfd2-a44103aeec82
+[E_FWD_CREDIT_CONDITIONS] Crown Castle May 1 2026 Form 8-K and Exhibit 10.1 credit agreement | 完整协议PDF2、49、51、103、118；协议印刷39、41、93、108；§4.02/§6.10
+https://investor.crowncastle.com/static-files/dd7712df-51aa-4a29-b6a5-67becf7b2234
+[E_FWD_DEBT_MEASURE] S&amp;P Corporate Methodology: Ratios And Adjustments | PDF27/印刷27，Appendix2 Initial measurement / debt at fair value
+https://www.maalot.co.il/Publications/MT20251223092257.pdf
+[E_FWD_GUIDANCE] 2026-05-01 出售8-K及Exhibit99.2公开未经审计备考 | 完整May1 8-K的Ex99.1 PDF6、11、13、15–16（印刷2、7、9、11–12）
+https://investor.crowncastle.com/static-files/f4ff727f-0f13-4f18-affa-1ff461698ccf
+[E_FWD_Q1] Crown Castle Q1 2026 Form 10-Q | PDF4–6/印刷3–5；note5 PDF14/印刷13；note13–14 PDF19–20
+https://investor.crowncastle.com/static-files/de60fca2-89d5-499d-899b-8e0a23030617
+[E_FWD_Q1_XBRL] SEC Companyfacts：Crown Castle 2025年度及2026Q1原申报事实 | InterestPaidNet / InterestCostsCapitalized；accn0001051470-26-000059，2026Q1，filed2026-05-07
+https://data.sec.gov/api/xbrl/companyfacts/CIK0001051470.json
+[E_FWD_RESTRUCT_CLASS] Crown Castle 2025 Form 10-K | 2025 10K PDF89/印刷89；Q1更新已由E_FWD_Q1 note13–14支持
+https://investor.crowncastle.com/static-files/68fb84e1-1dac-440d-96b4-55b9603e10dd
+[E_R109_FRP_TABLE] Corporate Methodology | PDF29–36/¶105、108、110、116–125/Tables17–19
+https://www.maalot.co.il/Publications/MT20250709153825.pdf
+[E_R109_LIQ] Methodology And Assumptions: Liquidity Descriptors For Global Corporate Issuers | PDF4–5/¶22–32；PDF7–14/¶37–50、64、73–90
+urn:sha256:76cf8f47d56b21e8fe60597490f873d1af5dd4ff1326b9a4fa2577c022a534d4
+[E_R109_MODIFIERS] Corporate Methodology | PDF8/Table5脚注4–7；PDF38–43/Tables21–23；PDF49–50/¶186–191
+https://www.maalot.co.il/Publications/MT20250709153825.pdf
+[E_R109_NOTE_ID] Crown Castle Q1 2026 Form 10-Q | PDF13–14；另S25 PDF75/78与S_SP_Q1 PDF15交叉核
+https://investor.crowncastle.com/static-files/de60fca2-89d5-499d-899b-8e0a23030617
+[E_R109_RECOVERY] Recovery Rating Criteria For Corporate Issuers | PDF1、4、10–14、16–17、23、39、44/¶3、21–28、55–83、90–99/Appendix4/G
+https://www.maalot.co.il/Publications/MT20260405084138.pdf
+[E_SP_ARO] Crown Castle 2025 Form 10-K | PDF/印刷p65、p73–74；p80–82税务
+https://investor.crowncastle.com/static-files/68fb84e1-1dac-440d-96b4-55b9603e10dd
+[E_SP_LEASE] Crown Castle 2025 Form 10-K | PDF/印刷p58、p64、p75、p85、p87；note14
+https://investor.crowncastle.com/static-files/68fb84e1-1dac-440d-96b4-55b9603e10dd
+[E_SP_Q1CFO] Crown Castle Q1 2026 Form 10-Q | PDF6/印刷p5，2026Q1/2025Q1现金流表；PDF19–20/印刷p18–19，note13重组事项
+https://investor.crowncastle.com/static-files/de60fca2-89d5-499d-899b-8e0a23030617
+[E_SP_RATIOS] S&amp;P Corporate Methodology: Ratios And Adjustments | 原发2019-04-01，2025-12-17重发，PDF7 ¶31–35；17–25 ¶86–137；44–45 ¶223–225
+https://www.maalot.co.il/Publications/MT20251223092257.pdf
+[E_SP_SCOPE] Crown Castle 2025 Form 10-K | note1/PDF及印刷p62；p60、p87–88
+https://investor.crowncastle.com/static-files/68fb84e1-1dac-440d-96b4-55b9603e10dd
+[E_R109_METHOD_LIMIT] Corporate Methodology | PDF49/¶186；未核法域适用性关联另见E_R109_RECOVERY
+https://www.maalot.co.il/Publications/MT20250709153825.pdf
+[E25DEBT] Crown Castle 2025 Form 10-K | note 8，p75–79 债务表、2018 Tower Revenue Notes、CP Program；MD&amp;A p40/p45
+https://investor.crowncastle.com/static-files/68fb84e1-1dac-440d-96b4-55b9603e10dd
+[E25SPE] Crown Castle 2025 Form 10-K | note 8/p77–78，2018 Tower Revenue Notes 及 2009 Securitized Notes
+https://investor.crowncastle.com/static-files/68fb84e1-1dac-440d-96b4-55b9603e10dd
+[EOLDCREDIT] 2022-07-08 Amendment No.7及附后旧信用协议 | §1.01定义：印刷p13–17/27–28/40/44/50–52；§1.04/1.05 p55–56；§6.09/6.10 p129
+https://investor.crowncastle.com/static-files/d735da3e-9136-43ce-ad76-3a96bcb686cf</a:t>
+            </a:r>
+            <a:endParaRPr lang="en-US" dirty="0"/>
+          </a:p>
+        </p:txBody>
+      </p:sp>
+      <p:sp>
+        <p:nvSpPr>
+          <p:cNvPr id="4" name="Slide Number Placeholder 3"/>
+          <p:cNvSpPr>
+            <a:spLocks noGrp="1"/>
+          </p:cNvSpPr>
+          <p:nvPr>
+            <p:ph type="sldNum" sz="quarter" idx="10"/>
+          </p:nvPr>
+        </p:nvSpPr>
+        <p:spPr/>
+        <p:txBody>
+          <a:bodyPr/>
+          <a:lstStyle/>
+          <a:p>
+            <a:fld id="{F7021451-1387-4CA6-816F-3879F97B5CBC}" type="slidenum">
+              <a:rPr lang="en-US"/>
+              <a:t>14</a:t>
+            </a:fld>
+            <a:endParaRPr lang="en-US"/>
+          </a:p>
+        </p:txBody>
+      </p:sp>
+    </p:spTree>
+    <p:extLst>
+      <p:ext uri="{BB962C8B-B14F-4D97-AF65-F5344CB8AC3E}">
+        <p14:creationId xmlns:p14="http://schemas.microsoft.com/office/powerpoint/2010/main" val="1024086991"/>
+      </p:ext>
+    </p:extLst>
+  </p:cSld>
+  <p:clrMapOvr>
+    <a:masterClrMapping/>
+  </p:clrMapOvr>
+</p:notes>
+</file>
+
+<file path=ppt/notesSlides/notesSlide15.xml><?xml version="1.0" encoding="utf-8"?>
+<p:notes xmlns:a="http://schemas.openxmlformats.org/drawingml/2006/main" xmlns:r="http://schemas.openxmlformats.org/officeDocument/2006/relationships" xmlns:p="http://schemas.openxmlformats.org/presentationml/2006/main">
+  <p:cSld>
+    <p:spTree>
+      <p:nvGrpSpPr>
+        <p:cNvPr id="1" name=""/>
+        <p:cNvGrpSpPr/>
+        <p:nvPr/>
+      </p:nvGrpSpPr>
+      <p:grpSpPr>
+        <a:xfrm>
+          <a:off x="0" y="0"/>
+          <a:ext cx="0" cy="0"/>
+          <a:chOff x="0" y="0"/>
+          <a:chExt cx="0" cy="0"/>
+        </a:xfrm>
+      </p:grpSpPr>
+      <p:sp>
+        <p:nvSpPr>
+          <p:cNvPr id="2" name="Slide Image Placeholder 1"/>
+          <p:cNvSpPr>
+            <a:spLocks noGrp="1" noRot="1" noChangeAspect="1"/>
+          </p:cNvSpPr>
+          <p:nvPr>
+            <p:ph type="sldImg"/>
+          </p:nvPr>
+        </p:nvSpPr>
+        <p:spPr/>
+      </p:sp>
+      <p:sp>
+        <p:nvSpPr>
+          <p:cNvPr id="3" name="Notes Placeholder 2"/>
+          <p:cNvSpPr>
+            <a:spLocks noGrp="1"/>
+          </p:cNvSpPr>
+          <p:nvPr>
+            <p:ph type="body" idx="1"/>
+          </p:nvPr>
+        </p:nvSpPr>
+        <p:spPr/>
+        <p:txBody>
+          <a:bodyPr/>
+          <a:lstStyle/>
+          <a:p>
+            <a:r>
+              <a:rPr lang="en-US" dirty="0"/>
+              <a:t>底稿 F12, cg_rental_audit, cg_sti_difference, cg_governance, cg_sti_weighted_display_gap, cg_sti_hill_display_gap
+[F12] supported / [cg_rental_audit] conditional / [cg_sti_difference] unresolved / [cg_governance] conditional
+底稿 F12 / cg_rental_audit / cg_sti_difference / cg_governance；来源 S_PROXY26 / S25 / SQ126 / SCREDIT
+原文定位、URL及完整引用见本页备注；完整方法和明细见同名底稿及 Word/Excel。
+[E_PROXY_STI] Crown Castle 2026 DEF14A（2026年股东会；完整传输HTML） | printed p34 Alignment/AIP；p44–45结构、两张业绩表及404要求；p46 Hillabrant奖金表及脚注(a)
+https://investor.crowncastle.com/node/29011/html
+[E25AUDIT] Crown Castle 2025 Form 10-K | p56–57，PwC auditor report，2026-02-23
+https://investor.crowncastle.com/static-files/68fb84e1-1dac-440d-96b4-55b9603e10dd
+[E25BS] Crown Castle 2025 Form 10-K | 印刷及 PDF p58，Consolidated Balance Sheet，2025/2024 两列
+https://investor.crowncastle.com/static-files/68fb84e1-1dac-440d-96b4-55b9603e10dd
+[E25HFS] Crown Castle 2025 Form 10-K | note 3，印刷及 PDF p71–72，尤其 p72 资产负债、损益及脚注 (b)(c)
+https://investor.crowncastle.com/static-files/68fb84e1-1dac-440d-96b4-55b9603e10dd
+[E_CG_AUDIT] Crown Castle 2025 Form 10-K | 2025 10-K印刷/PDF p56–57完整PwC报告
+https://investor.crowncastle.com/static-files/68fb84e1-1dac-440d-96b4-55b9603e10dd
+[E_CG_RENT] Crown Castle 2025 Form 10-K | note2印刷/PDF p63、p66–67；p57收入CAM；note18 p89
+https://investor.crowncastle.com/static-files/68fb84e1-1dac-440d-96b4-55b9603e10dd
+[E_CG_Q1_CTRL] Crown Castle Q1 2026 Form 10-Q | 2026 Q1 10-Q印刷p10/PDF11 note4；印刷p36/PDF37 Item4
+https://investor.crowncastle.com/static-files/de60fca2-89d5-499d-899b-8e0a23030617
+[EDISH] Crown Castle 2025 Form 10-K | note 18/p89，Subsequent Events—DISH Wireless
+https://investor.crowncastle.com/static-files/68fb84e1-1dac-440d-96b4-55b9603e10dd
+[E_CG_PROXY_B3] Crown Castle 2026 DEF14A（2026年股东会；完整传输HTML） | Appendix B printed B3 Historical Adjusted EBITDA reconciliation完整相关表；B1定义及B2 Fiber定义
+https://investor.crowncastle.com/node/29011/html
+[E_CG_GOV] Crown Castle 2026 DEF14A（2026年股东会；完整传输HTML） | printed p18–23 Board leadership/Risk oversight/Committees；p29–30 Audit Committee report
+https://investor.crowncastle.com/node/29011/html
+[E_CG_RPT] Crown Castle 2026 DEF14A（2026年股东会；完整传输HTML） | printed p26–27 Review of transactions with related persons；p28–30 auditor services/report
+https://investor.crowncastle.com/node/29011/html
+[E_CG_LEADERSHIP] Crown Castle 2026 DEF14A（2026年股东会；完整传输HTML） | printed p33–34 Executive leadership changes；p52–53 recovery/antihedging/antipledging
+https://investor.crowncastle.com/node/29011/html
+[E_CG_RP] Crown Castle May 1 2026 Form 8-K and Exhibit 10.1 credit agreement | 新协议§1.01 Restricted Payment/Restricted Subsidiary PDF45；§6.06印刷105–106/PDF115–116
+https://investor.crowncastle.com/static-files/dd7712df-51aa-4a29-b6a5-67becf7b2234
+[E25CF] Crown Castle 2025 Form 10-K | 印刷及 PDF p60，Consolidated Statement of Cash Flows
+https://investor.crowncastle.com/static-files/68fb84e1-1dac-440d-96b4-55b9603e10dd
+[EQ126SALE] Crown Castle Q1 2026 Form 10-Q | note 14 印刷 p19/PDF p20，Completion of Strategic Fiber Transaction
+https://investor.crowncastle.com/static-files/de60fca2-89d5-499d-899b-8e0a23030617</a:t>
+            </a:r>
+            <a:endParaRPr lang="en-US" dirty="0"/>
+          </a:p>
+        </p:txBody>
+      </p:sp>
+      <p:sp>
+        <p:nvSpPr>
+          <p:cNvPr id="4" name="Slide Number Placeholder 3"/>
+          <p:cNvSpPr>
+            <a:spLocks noGrp="1"/>
+          </p:cNvSpPr>
+          <p:nvPr>
+            <p:ph type="sldNum" sz="quarter" idx="10"/>
+          </p:nvPr>
+        </p:nvSpPr>
+        <p:spPr/>
+        <p:txBody>
+          <a:bodyPr/>
+          <a:lstStyle/>
+          <a:p>
+            <a:fld id="{F7021451-1387-4CA6-816F-3879F97B5CBC}" type="slidenum">
+              <a:rPr lang="en-US"/>
+              <a:t>15</a:t>
+            </a:fld>
+            <a:endParaRPr lang="en-US"/>
+          </a:p>
+        </p:txBody>
+      </p:sp>
+    </p:spTree>
+    <p:extLst>
+      <p:ext uri="{BB962C8B-B14F-4D97-AF65-F5344CB8AC3E}">
+        <p14:creationId xmlns:p14="http://schemas.microsoft.com/office/powerpoint/2010/main" val="1024086991"/>
+      </p:ext>
+    </p:extLst>
+  </p:cSld>
+  <p:clrMapOvr>
+    <a:masterClrMapping/>
+  </p:clrMapOvr>
+</p:notes>
+</file>
+
+<file path=ppt/notesSlides/notesSlide16.xml><?xml version="1.0" encoding="utf-8"?>
+<p:notes xmlns:a="http://schemas.openxmlformats.org/drawingml/2006/main" xmlns:r="http://schemas.openxmlformats.org/officeDocument/2006/relationships" xmlns:p="http://schemas.openxmlformats.org/presentationml/2006/main">
+  <p:cSld>
+    <p:spTree>
+      <p:nvGrpSpPr>
+        <p:cNvPr id="1" name=""/>
+        <p:cNvGrpSpPr/>
+        <p:nvPr/>
+      </p:nvGrpSpPr>
+      <p:grpSpPr>
+        <a:xfrm>
+          <a:off x="0" y="0"/>
+          <a:ext cx="0" cy="0"/>
+          <a:chOff x="0" y="0"/>
+          <a:chExt cx="0" cy="0"/>
+        </a:xfrm>
+      </p:grpSpPr>
+      <p:sp>
+        <p:nvSpPr>
+          <p:cNvPr id="2" name="Slide Image Placeholder 1"/>
+          <p:cNvSpPr>
+            <a:spLocks noGrp="1" noRot="1" noChangeAspect="1"/>
+          </p:cNvSpPr>
+          <p:nvPr>
+            <p:ph type="sldImg"/>
+          </p:nvPr>
+        </p:nvSpPr>
+        <p:spPr/>
+      </p:sp>
+      <p:sp>
+        <p:nvSpPr>
+          <p:cNvPr id="3" name="Notes Placeholder 2"/>
+          <p:cNvSpPr>
+            <a:spLocks noGrp="1"/>
+          </p:cNvSpPr>
+          <p:nvPr>
+            <p:ph type="body" idx="1"/>
+          </p:nvPr>
+        </p:nvSpPr>
+        <p:spPr/>
+        <p:txBody>
+          <a:bodyPr/>
+          <a:lstStyle/>
+          <a:p>
+            <a:r>
+              <a:rPr lang="en-US" dirty="0"/>
+              <a:t>底稿 F05, FF_R109_ISSUER, FF_R109_NOTE, F10, FF_FORWARD_STRESS
+[F05] conditional / [FF_R109_ISSUER] conditional / [FF_R109_NOTE] conditional / [F10] unresolved / [FF_FORWARD_STRESS] conditional
+底稿 F05 / FF_R109_ISSUER / FF_R109_NOTE / F10 / FF_FORWARD_STRESS；来源 S_DEV_LIQ / SCREDIT / SPROFORMA / S25 / SQ126 / S_SP_Q1 / S_SP_RATIOS / S_SP_XBRL / S_DEV_CORP / S_SP_SECTORS / S_DEV_REC / S_PROXY26 / S_DEV_COUNTRY / S24 / SQ125 / SSEC / S_SP_Q4
+原文定位、URL及完整引用见本页备注；完整方法和明细见同名底稿及 Word/Excel。
+[E_R109_LIQ] Methodology And Assumptions: Liquidity Descriptors For Global Corporate Issuers | PDF4–5/¶22–32；PDF7–14/¶37–50、64、73–90
+urn:sha256:76cf8f47d56b21e8fe60597490f873d1af5dd4ff1326b9a4fa2577c022a534d4
+[E_DEV_CREDIT] Crown Castle May 1 2026 Form 8-K and Exhibit 10.1 credit agreement | PDF11、22–24、40–41、49、51、103、118及公开8K摘要
+https://investor.crowncastle.com/static-files/dd7712df-51aa-4a29-b6a5-67becf7b2234
+[E_DEV_SALE] 2026-05-01 出售8-K及Exhibit99.2公开未经审计备考 | PDF2/5–9；已读相关备考章节
+https://investor.crowncastle.com/static-files/f4ff727f-0f13-4f18-affa-1ff461698ccf
+[E25BS] Crown Castle 2025 Form 10-K | 印刷及 PDF p58，Consolidated Balance Sheet，2025/2024 两列
+https://investor.crowncastle.com/static-files/68fb84e1-1dac-440d-96b4-55b9603e10dd
+[ECREDIT] Crown Castle May 1 2026 Form 8-K and Exhibit 10.1 credit agreement | 8-K Item 1.01；协议 §1.01、§1.04/p43、§1.05/p44、§4.02/p93、§6.10/p108；Total Indebtedness印刷39/PDF49，§1.04印刷43/PDF53
+https://investor.crowncastle.com/static-files/dd7712df-51aa-4a29-b6a5-67becf7b2234
+[EQ126CF] Crown Castle Q1 2026 Form 10-Q | 印刷 p18/PDF p19 现金调节；note 5/p12 债务；MD&amp;A/p28 流动性
+https://investor.crowncastle.com/static-files/de60fca2-89d5-499d-899b-8e0a23030617
+[EQ126FAC] Crown Castle Q1 2026 Form 10-Q | note 14 印刷 p20/PDF p21；MD&amp;A/p28 May 5 balances
+https://investor.crowncastle.com/static-files/de60fca2-89d5-499d-899b-8e0a23030617
+[EQ126SALE] Crown Castle Q1 2026 Form 10-Q | note 14 印刷 p19/PDF p20，Completion of Strategic Fiber Transaction
+https://investor.crowncastle.com/static-files/de60fca2-89d5-499d-899b-8e0a23030617
+[E_FWD_CASH_TAX] Crown Castle Q1 2026 Supplemental Information | Q1 supplement PDF12/印刷11完整Consolidated ROIC表及(a)–(f)脚注；PDF23/印刷22 Non-GAAP Measures定义
+https://investor.crowncastle.com/static-files/38f6a584-60a8-452d-bfd2-a44103aeec82
+[E_FWD_CONTRACT] Crown Castle Q1 2026 Supplemental Information | PDF9/11/13–16/18/28，印刷8/10/12–15/17/27
+https://investor.crowncastle.com/static-files/38f6a584-60a8-452d-bfd2-a44103aeec82
+[E_FWD_CREDIT_CONDITIONS] Crown Castle May 1 2026 Form 8-K and Exhibit 10.1 credit agreement | 完整协议PDF2、49、51、103、118；协议印刷39、41、93、108；§4.02/§6.10
+https://investor.crowncastle.com/static-files/dd7712df-51aa-4a29-b6a5-67becf7b2234
+[E_FWD_DEBT_MEASURE] S&amp;P Corporate Methodology: Ratios And Adjustments | PDF27/印刷27，Appendix2 Initial measurement / debt at fair value
+https://www.maalot.co.il/Publications/MT20251223092257.pdf
+[E_FWD_GUIDANCE] 2026-05-01 出售8-K及Exhibit99.2公开未经审计备考 | 完整May1 8-K的Ex99.1 PDF6、11、13、15–16（印刷2、7、9、11–12）
+https://investor.crowncastle.com/static-files/f4ff727f-0f13-4f18-affa-1ff461698ccf
+[E_FWD_Q1] Crown Castle Q1 2026 Form 10-Q | PDF4–6/印刷3–5；note5 PDF14/印刷13；note13–14 PDF19–20
+https://investor.crowncastle.com/static-files/de60fca2-89d5-499d-899b-8e0a23030617
+[E_FWD_Q1_XBRL] SEC Companyfacts：Crown Castle 2025年度及2026Q1原申报事实 | InterestPaidNet / InterestCostsCapitalized；accn0001051470-26-000059，2026Q1，filed2026-05-07
+https://data.sec.gov/api/xbrl/companyfacts/CIK0001051470.json
+[E_FWD_RESTRUCT_CLASS] Crown Castle 2025 Form 10-K | 2025 10K PDF89/印刷89；Q1更新已由E_FWD_Q1 note13–14支持
+https://investor.crowncastle.com/static-files/68fb84e1-1dac-440d-96b4-55b9603e10dd
+[E_SP_ARO] Crown Castle 2025 Form 10-K | PDF/印刷p65、p73–74；p80–82税务
+https://investor.crowncastle.com/static-files/68fb84e1-1dac-440d-96b4-55b9603e10dd
+[E_SP_LEASE] Crown Castle 2025 Form 10-K | PDF/印刷p58、p64、p75、p85、p87；note14
+https://investor.crowncastle.com/static-files/68fb84e1-1dac-440d-96b4-55b9603e10dd
+[E_SP_Q1CFO] Crown Castle Q1 2026 Form 10-Q | PDF6/印刷p5，2026Q1/2025Q1现金流表；PDF19–20/印刷p18–19，note13重组事项
+https://investor.crowncastle.com/static-files/de60fca2-89d5-499d-899b-8e0a23030617
+[E_SP_RATIOS] S&amp;P Corporate Methodology: Ratios And Adjustments | 原发2019-04-01，2025-12-17重发，PDF7 ¶31–35；17–25 ¶86–137；44–45 ¶223–225
+https://www.maalot.co.il/Publications/MT20251223092257.pdf
+[E_SP_SCOPE] Crown Castle 2025 Form 10-K | note1/PDF及印刷p62；p60、p87–88
+https://investor.crowncastle.com/static-files/68fb84e1-1dac-440d-96b4-55b9603e10dd
+[E_DEV_CASH_CONTRACT] Crown Castle Q1 2026 Supplemental Information | PDF13–14
+https://investor.crowncastle.com/static-files/38f6a584-60a8-452d-bfd2-a44103aeec82
+[E_DEV_CORP] Corporate Methodology | PDF4–12、21–22、24–28、30–44、47–50；Tables1/2/3/5/14–19/21–25及¶40–50/91–92/112–125/136–191
+https://www.maalot.co.il/Publications/MT20250709153825.pdf
+[E_DEV_CP] Crown Castle 2025 Form 10-K | PDF4–8、17–19、36–38；Q1 supplement另见E_DEV_CASH_CONTRACT
+https://investor.crowncastle.com/static-files/68fb84e1-1dac-440d-96b4-55b9603e10dd
+[E_DEV_DI] S&amp;P Sector-Specific Corporate Methodology — Digital Infrastructure | PDF61–63、68–71、73、76–77
+https://www.maalot.co.il/Publications/MT20251012123218.pdf
+[E_DEV_FACE] Crown Castle Q1 2026 Supplemental Information | PDF15/印14，Capitalization Overview，Face Value
+https://investor.crowncastle.com/static-files/38f6a584-60a8-452d-bfd2-a44103aeec82
+[E_DEV_NOTE] Crown Castle Q1 2026 Form 10-Q | 2026Q1 10Q PDF13–14，Debt and Other Obligations
+https://investor.crowncastle.com/static-files/de60fca2-89d5-499d-899b-8e0a23030617
+[E_DEV_NOTE_GUAR] Crown Castle 2025 Form 10-K | PDF75、77–79，Senior Notes/Securitized Debt
+https://investor.crowncastle.com/static-files/68fb84e1-1dac-440d-96b4-55b9603e10dd
+[E_DEV_TOWER_RIGHTS] Crown Castle 2025 Form 10-K | PDF4、7、17–18及77–79
+https://investor.crowncastle.com/static-files/68fb84e1-1dac-440d-96b4-55b9603e10dd
+[E_R109_FRP_TABLE] Corporate Methodology | PDF29–36/¶105、108、110、116–125/Tables17–19
+https://www.maalot.co.il/Publications/MT20250709153825.pdf
+[E_R109_MODIFIERS] Corporate Methodology | PDF8/Table5脚注4–7；PDF38–43/Tables21–23；PDF49–50/¶186–191
+https://www.maalot.co.il/Publications/MT20250709153825.pdf
+[E_R109_NOTE_ID] Crown Castle Q1 2026 Form 10-Q | PDF13–14；另S25 PDF75/78与S_SP_Q1 PDF15交叉核
+https://investor.crowncastle.com/static-files/de60fca2-89d5-499d-899b-8e0a23030617
+[E_R109_RECOVERY] Recovery Rating Criteria For Corporate Issuers | PDF1、4、10–14、16–17、23、39、44/¶3、21–28、55–83、90–99/Appendix4/G
+https://www.maalot.co.il/Publications/MT20260405084138.pdf
+[E_DEV_PROXY] Crown Castle 2026 DEF14A（2026年股东会；完整传输HTML） | 完整HTML提取行1706–1732、1882–1907、2091–2112、4909–5008；印18–27/75–76相应部分
+https://investor.crowncastle.com/node/29011/html
+[E_DEV_COUNTRY] Country Risk Assessments Update: June 2026 | 内嵌文章元数据June17及Table1表头/美国行
+https://spratings.spglobal.com/ratings/en/regulatory/article/-/view/type/HTML/id/3582048
+[E_R109_METHOD_LIMIT] Corporate Methodology | PDF49/¶186；未核法域适用性关联另见E_R109_RECOVERY
+https://www.maalot.co.il/Publications/MT20250709153825.pdf
+[E24ORIG] Crown Castle 2024 Form 10-K（原报） | 原报 p61 合并损益；note 14/p88–89 segment results，分部表p89
+https://investor.crowncastle.com/static-files/baed4489-6578-4e32-81e6-a084eea66a02
+[E25PL] Crown Castle 2025 Form 10-K | 印刷及 PDF p59，Consolidated Statement of Operations and Comprehensive Income
+https://investor.crowncastle.com/static-files/68fb84e1-1dac-440d-96b4-55b9603e10dd
+[E25HFS] Crown Castle 2025 Form 10-K | note 3，印刷及 PDF p71–72，尤其 p72 资产负债、损益及脚注 (b)(c)
+https://investor.crowncastle.com/static-files/68fb84e1-1dac-440d-96b4-55b9603e10dd
+[EQ125] Crown Castle Q1 2025 Form 10-Q 原报 | note 3，2025-03-31 held-for-sale table
+https://www.sec.gov/Archives/edgar/data/1051470/000105147025000141/cci-20250331.htm
+[ESECSALE] Crown Castle 2025-06-04 SEC comment-response letter | 公司回复 comment 2；ASC205-20-45-3A、税项及830损失/819准备/11售出费用
+https://www.sec.gov/Archives/edgar/data/1051470/000105147025000154/filename1.htm
+[EQ126HFS] Crown Castle Q1 2026 Form 10-Q | note 3 印刷 p9/PDF p10，2026/2025 比较损益、准备表、脚注 (c)
+https://investor.crowncastle.com/static-files/de60fca2-89d5-499d-899b-8e0a23030617
+[E_SP_LAND] Crown Castle Q4 2025 Supplemental Information | PDF14/印刷p13：GROUND INTEREST OVERVIEW及脚注(e)–(i)
+https://investor.crowncastle.com/static-files/bea23792-6649-4b95-9395-aa837e68396c
+[E_SP_RENEW] Crown Castle Q4 2025 Supplemental Information | PDF13/印刷p12；TENANT OVERVIEW及脚注(a)–(f)
+https://investor.crowncastle.com/static-files/bea23792-6649-4b95-9395-aa837e68396c</a:t>
+            </a:r>
+            <a:endParaRPr lang="en-US" dirty="0"/>
+          </a:p>
+        </p:txBody>
+      </p:sp>
+      <p:sp>
+        <p:nvSpPr>
+          <p:cNvPr id="4" name="Slide Number Placeholder 3"/>
+          <p:cNvSpPr>
+            <a:spLocks noGrp="1"/>
+          </p:cNvSpPr>
+          <p:nvPr>
+            <p:ph type="sldNum" sz="quarter" idx="10"/>
+          </p:nvPr>
+        </p:nvSpPr>
+        <p:spPr/>
+        <p:txBody>
+          <a:bodyPr/>
+          <a:lstStyle/>
+          <a:p>
+            <a:fld id="{F7021451-1387-4CA6-816F-3879F97B5CBC}" type="slidenum">
+              <a:rPr lang="en-US"/>
+              <a:t>16</a:t>
             </a:fld>
             <a:endParaRPr lang="en-US"/>
           </a:p>
@@ -606,87 +1754,98 @@
           <a:p>
             <a:r>
               <a:rPr lang="en-US" dirty="0"/>
-              <a:t>底稿 F05, F08, F09, F15, F17
-[F05] supported / [F08] supported / [F09] conditional / [F15] conditional / [F17] conditional
-底稿 F05 / F08 / F09 / F15 / F17；来源 S25 / SQ126 / SSALE / SPROFORMA / SSPA / SCREDIT / SOLDCREDIT / S_SP_RATIOS / S_SP_XBRL / S_SP_Q4 / S_SP_SECTORS / S_SP_Q1
+              <a:t>底稿 FF_R109_ISSUER, F15, FF_R109_NOTE, r109_base_FFO_debt_120, r109_base_debt_EBITDA_120
+[FF_R109_ISSUER] conditional / [F15] conditional / [FF_R109_NOTE] conditional
+底稿 FF_R109_ISSUER / F15 / FF_R109_NOTE；来源 S25 / SCREDIT / SQ126 / S_SP_Q1 / S_DEV_CORP / S_SP_SECTORS / S_SP_RATIOS / SPROFORMA / S_SP_XBRL / S_DEV_LIQ / S_DEV_REC / S_PROXY26 / S_DEV_COUNTRY
 原文定位、URL及完整引用见本页备注；完整方法和明细见同名底稿及 Word/Excel。
-[E25CASH] Crown Castle 2025 Form 10-K | note 16，印刷及 PDF p88，cash reconciliation table
-https://investor.crowncastle.com/static-files/68fb84e1-1dac-440d-96b4-55b9603e10dd
-[E25DEBT] Crown Castle 2025 Form 10-K | note 8，p75–79 债务表、2018 Tower Revenue Notes、CP Program；MD&amp;A p40/p45
-https://investor.crowncastle.com/static-files/68fb84e1-1dac-440d-96b4-55b9603e10dd
-[E25CF] Crown Castle 2025 Form 10-K | 印刷及 PDF p60，Consolidated Statement of Cash Flows
-https://investor.crowncastle.com/static-files/68fb84e1-1dac-440d-96b4-55b9603e10dd
 [E25BS] Crown Castle 2025 Form 10-K | 印刷及 PDF p58，Consolidated Balance Sheet，2025/2024 两列
 https://investor.crowncastle.com/static-files/68fb84e1-1dac-440d-96b4-55b9603e10dd
+[ECREDIT] Crown Castle May 1 2026 Form 8-K and Exhibit 10.1 credit agreement | 8-K Item 1.01；协议 §1.01、§1.04/p43、§1.05/p44、§4.02/p93、§6.10/p108；Total Indebtedness印刷39/PDF49，§1.04印刷43/PDF53
+https://investor.crowncastle.com/static-files/dd7712df-51aa-4a29-b6a5-67becf7b2234
+[EQ126CF] Crown Castle Q1 2026 Form 10-Q | 印刷 p18/PDF p19 现金调节；note 5/p12 债务；MD&amp;A/p28 流动性
+https://investor.crowncastle.com/static-files/de60fca2-89d5-499d-899b-8e0a23030617
+[EQ126FAC] Crown Castle Q1 2026 Form 10-Q | note 14 印刷 p20/PDF p21；MD&amp;A/p28 May 5 balances
+https://investor.crowncastle.com/static-files/de60fca2-89d5-499d-899b-8e0a23030617
 [EQ126SALE] Crown Castle Q1 2026 Form 10-Q | note 14 印刷 p19/PDF p20，Completion of Strategic Fiber Transaction
 https://investor.crowncastle.com/static-files/de60fca2-89d5-499d-899b-8e0a23030617
-[ESALE] Crown Castle announces completion of fiber and small cell sale | 2026-05-01 官方 completion 公告开头、Use of proceeds
-https://investor.crowncastle.com/node/29086
-[E25HFS] Crown Castle 2025 Form 10-K | note 3，印刷及 PDF p71–72，尤其 p72 资产负债、损益及脚注 (b)(c)
+[E_DEV_CASH_CONTRACT] Crown Castle Q1 2026 Supplemental Information | PDF13–14
+https://investor.crowncastle.com/static-files/38f6a584-60a8-452d-bfd2-a44103aeec82
+[E_DEV_CORP] Corporate Methodology | PDF4–12、21–22、24–28、30–44、47–50；Tables1/2/3/5/14–19/21–25及¶40–50/91–92/112–125/136–191
+https://www.maalot.co.il/Publications/MT20250709153825.pdf
+[E_DEV_CP] Crown Castle 2025 Form 10-K | PDF4–8、17–19、36–38；Q1 supplement另见E_DEV_CASH_CONTRACT
 https://investor.crowncastle.com/static-files/68fb84e1-1dac-440d-96b4-55b9603e10dd
-[EQ126HFS] Crown Castle Q1 2026 Form 10-Q | note 3 印刷 p9/PDF p10，2026/2025 比较损益、准备表、脚注 (c)
+[E_DEV_CREDIT] Crown Castle May 1 2026 Form 8-K and Exhibit 10.1 credit agreement | PDF11、22–24、40–41、49、51、103、118及公开8K摘要
+https://investor.crowncastle.com/static-files/dd7712df-51aa-4a29-b6a5-67becf7b2234
+[E_DEV_DI] S&amp;P Sector-Specific Corporate Methodology — Digital Infrastructure | PDF61–63、68–71、73、76–77
+https://www.maalot.co.il/Publications/MT20251012123218.pdf
+[E_DEV_FACE] Crown Castle Q1 2026 Supplemental Information | PDF15/印14，Capitalization Overview，Face Value
+https://investor.crowncastle.com/static-files/38f6a584-60a8-452d-bfd2-a44103aeec82
+[E_DEV_NOTE] Crown Castle Q1 2026 Form 10-Q | 2026Q1 10Q PDF13–14，Debt and Other Obligations
 https://investor.crowncastle.com/static-files/de60fca2-89d5-499d-899b-8e0a23030617
-[EPROBASIS] 2026-05-01 出售8-K及Exhibit99.2公开未经审计备考 | Ex99.2 PDF p18编制基础；p21 Note1
+[E_DEV_NOTE_GUAR] Crown Castle 2025 Form 10-K | PDF75、77–79，Senior Notes/Securitized Debt
+https://investor.crowncastle.com/static-files/68fb84e1-1dac-440d-96b4-55b9603e10dd
+[E_DEV_TOWER_RIGHTS] Crown Castle 2025 Form 10-K | PDF4、7、17–18及77–79
+https://investor.crowncastle.com/static-files/68fb84e1-1dac-440d-96b4-55b9603e10dd
+[E_FWD_CASH_TAX] Crown Castle Q1 2026 Supplemental Information | Q1 supplement PDF12/印刷11完整Consolidated ROIC表及(a)–(f)脚注；PDF23/印刷22 Non-GAAP Measures定义
+https://investor.crowncastle.com/static-files/38f6a584-60a8-452d-bfd2-a44103aeec82
+[E_FWD_CONTRACT] Crown Castle Q1 2026 Supplemental Information | PDF9/11/13–16/18/28，印刷8/10/12–15/17/27
+https://investor.crowncastle.com/static-files/38f6a584-60a8-452d-bfd2-a44103aeec82
+[E_FWD_CREDIT_CONDITIONS] Crown Castle May 1 2026 Form 8-K and Exhibit 10.1 credit agreement | 完整协议PDF2、49、51、103、118；协议印刷39、41、93、108；§4.02/§6.10
+https://investor.crowncastle.com/static-files/dd7712df-51aa-4a29-b6a5-67becf7b2234
+[E_FWD_DEBT_MEASURE] S&amp;P Corporate Methodology: Ratios And Adjustments | PDF27/印刷27，Appendix2 Initial measurement / debt at fair value
+https://www.maalot.co.il/Publications/MT20251223092257.pdf
+[E_FWD_GUIDANCE] 2026-05-01 出售8-K及Exhibit99.2公开未经审计备考 | 完整May1 8-K的Ex99.1 PDF6、11、13、15–16（印刷2、7、9、11–12）
 https://investor.crowncastle.com/static-files/f4ff727f-0f13-4f18-affa-1ff461698ccf
-[EPROBS] 2026-05-01 出售8-K及Exhibit99.2公开未经审计备考 | Ex99.2 PDF p19资产负债表；p21 Note2(A)–(D)
-https://investor.crowncastle.com/static-files/f4ff727f-0f13-4f18-affa-1ff461698ccf
-[EPROPL] 2026-05-01 出售8-K及Exhibit99.2公开未经审计备考 | Ex99.2 PDF p20损益；p21 Note2(E)
-https://investor.crowncastle.com/static-files/f4ff727f-0f13-4f18-affa-1ff461698ccf
-[ESALEVERSION] 2026-05-01 出售8-K及Exhibit99.2公开未经审计备考 | 8-K PDF p2 Item2.01、p3 Exhibit Index；Ex99.1 p10 Fiber Business定义
-https://investor.crowncastle.com/static-files/f4ff727f-0f13-4f18-affa-1ff461698ccf
-[ESPASETTLE] 2025-03-13签署出售协议（2025-03-17提交8-K Exhibit2.1） | §2.4–2.7，PDF p48–54；§12.9 PDF p160
-https://investor.crowncastle.com/static-files/3b910737-4f3d-4197-a8b4-893f83855c9f
-[EQ126FAC] Crown Castle Q1 2026 Form 10-Q | note 14 印刷 p20/PDF p21；MD&amp;A/p28 May 5 balances
+[E_FWD_Q1] Crown Castle Q1 2026 Form 10-Q | PDF4–6/印刷3–5；note5 PDF14/印刷13；note13–14 PDF19–20
 https://investor.crowncastle.com/static-files/de60fca2-89d5-499d-899b-8e0a23030617
-[ECREDIT] Crown Castle May 1 2026 Form 8-K and Exhibit 10.1 credit agreement | 8-K Item 1.01；协议 §1.01、§1.04/p43、§1.05/p44、§4.02/p93、§6.10/p108
-https://investor.crowncastle.com/static-files/dd7712df-51aa-4a29-b6a5-67becf7b2234
-[EOLDCREDIT] 2022-07-08 Amendment No.7及附后旧信用协议 | §1.01定义：印刷p13–17/27–28/40/44/50–52；§1.04/1.05 p55–56；§6.09/6.10 p129
-https://investor.crowncastle.com/static-files/d735da3e-9136-43ce-ad76-3a96bcb686cf
-[EOLDVERSION] Crown Castle 2025 Form 10-K | Exhibit Index p101–102，Ex10.49–10.55，尤其2022 Amendment7
+[E_FWD_Q1_XBRL] SEC Companyfacts：Crown Castle 2025年度及2026Q1原申报事实 | InterestPaidNet / InterestCostsCapitalized；accn0001051470-26-000059，2026Q1，filed2026-05-07
+https://data.sec.gov/api/xbrl/companyfacts/CIK0001051470.json
+[E_FWD_RESTRUCT_CLASS] Crown Castle 2025 Form 10-K | 2025 10K PDF89/印刷89；Q1更新已由E_FWD_Q1 note13–14支持
 https://investor.crowncastle.com/static-files/68fb84e1-1dac-440d-96b4-55b9603e10dd
-[EQ126INDEX] Crown Castle Q1 2026 Form 10-Q | Item6 Exhibit Index，印刷p38/PDF p39
+[E_R109_FRP_TABLE] Corporate Methodology | PDF29–36/¶105、108、110、116–125/Tables17–19
+https://www.maalot.co.il/Publications/MT20250709153825.pdf
+[E_R109_LIQ] Methodology And Assumptions: Liquidity Descriptors For Global Corporate Issuers | PDF4–5/¶22–32；PDF7–14/¶37–50、64、73–90
+urn:sha256:76cf8f47d56b21e8fe60597490f873d1af5dd4ff1326b9a4fa2577c022a534d4
+[E_R109_MODIFIERS] Corporate Methodology | PDF8/Table5脚注4–7；PDF38–43/Tables21–23；PDF49–50/¶186–191
+https://www.maalot.co.il/Publications/MT20250709153825.pdf
+[E_R109_NOTE_ID] Crown Castle Q1 2026 Form 10-Q | PDF13–14；另S25 PDF75/78与S_SP_Q1 PDF15交叉核
+https://investor.crowncastle.com/static-files/de60fca2-89d5-499d-899b-8e0a23030617
+[E_R109_RECOVERY] Recovery Rating Criteria For Corporate Issuers | PDF1、4、10–14、16–17、23、39、44/¶3、21–28、55–83、90–99/Appendix4/G
+https://www.maalot.co.il/Publications/MT20260405084138.pdf
+[E_SP_ARO] Crown Castle 2025 Form 10-K | PDF/印刷p65、p73–74；p80–82税务
+https://investor.crowncastle.com/static-files/68fb84e1-1dac-440d-96b4-55b9603e10dd
+[E_SP_LEASE] Crown Castle 2025 Form 10-K | PDF/印刷p58、p64、p75、p85、p87；note14
+https://investor.crowncastle.com/static-files/68fb84e1-1dac-440d-96b4-55b9603e10dd
+[E_SP_Q1CFO] Crown Castle Q1 2026 Form 10-Q | PDF6/印刷p5，2026Q1/2025Q1现金流表；PDF19–20/印刷p18–19，note13重组事项
 https://investor.crowncastle.com/static-files/de60fca2-89d5-499d-899b-8e0a23030617
 [E_SP_RATIOS] S&amp;P Corporate Methodology: Ratios And Adjustments | 原发2019-04-01，2025-12-17重发，PDF7 ¶31–35；17–25 ¶86–137；44–45 ¶223–225
 https://www.maalot.co.il/Publications/MT20251223092257.pdf
-[E_SP_ARO] Crown Castle 2025 Form 10-K | PDF/印刷p65、p73–74；p80–82税务
-https://investor.crowncastle.com/static-files/68fb84e1-1dac-440d-96b4-55b9603e10dd
-[E25PL] Crown Castle 2025 Form 10-K | 印刷及 PDF p59，Consolidated Statement of Operations and Comprehensive Income
-https://investor.crowncastle.com/static-files/68fb84e1-1dac-440d-96b4-55b9603e10dd
-[E_SP_CASH] Crown Castle 2025 Form 10-K | PDF/印刷p68利息表；p87补充现金流
-https://investor.crowncastle.com/static-files/68fb84e1-1dac-440d-96b4-55b9603e10dd
-[E_SP_LEASE] Crown Castle 2025 Form 10-K | PDF/印刷p58、p64、p75、p85、p87；note14
-https://investor.crowncastle.com/static-files/68fb84e1-1dac-440d-96b4-55b9603e10dd
-[E_SP_SBC] Crown Castle 2025 Form 10-K | PDF/印刷p59、p65、p83–84
-https://investor.crowncastle.com/static-files/68fb84e1-1dac-440d-96b4-55b9603e10dd
 [E_SP_SCOPE] Crown Castle 2025 Form 10-K | note1/PDF及印刷p62；p60、p87–88
 https://investor.crowncastle.com/static-files/68fb84e1-1dac-440d-96b4-55b9603e10dd
-[E_SP_XBRL] SEC Companyfacts：Crown Castle 2025原申报事实 | facts/us-gaap/InterestPaidNet、InterestCostsCapitalized、AllocatedShareBasedCompensationExpense、ShareBasedCompensation；指定原申报accession
-https://data.sec.gov/api/xbrl/companyfacts/CIK0001051470.json
-[E_SP_LAND] Crown Castle Q4 2025 Supplemental Information | PDF14/印刷p13：GROUND INTEREST OVERVIEW及脚注(e)–(i)
-https://investor.crowncastle.com/static-files/bea23792-6649-4b95-9395-aa837e68396c
-[E_SP_RENEW] Crown Castle Q4 2025 Supplemental Information | PDF13/印刷p12；TENANT OVERVIEW及脚注(a)–(f)
-https://investor.crowncastle.com/static-files/bea23792-6649-4b95-9395-aa837e68396c
-[E_SP_SECTORS] S&amp;P Sector-Specific Corporate Methodology — Digital Infrastructure | 2025-07-07原发、2025-09-26重发；PDF61–78数字基础设施章，尤其68–71及77
-https://www.maalot.co.il/Publications/MT20251012123218.pdf
-[E_SP_Q1BILL] Crown Castle Q1 2026 Supplemental Information | PDF10/印刷p9：2026Q1列，Components of changes in site rental revenues
-https://investor.crowncastle.com/static-files/38f6a584-60a8-452d-bfd2-a44103aeec82
-[EDISH] Crown Castle 2025 Form 10-K | note 18/p89，Subsequent Events—DISH Wireless
-https://investor.crowncastle.com/static-files/68fb84e1-1dac-440d-96b4-55b9603e10dd
+[E_DEV_PROXY] Crown Castle 2026 DEF14A（2026年股东会；完整传输HTML） | 完整HTML提取行1706–1732、1882–1907、2091–2112、4909–5008；印18–27/75–76相应部分
+https://investor.crowncastle.com/node/29011/html
+[E_DEV_COUNTRY] Country Risk Assessments Update: June 2026 | 内嵌文章元数据June17及Table1表头/美国行
+https://spratings.spglobal.com/ratings/en/regulatory/article/-/view/type/HTML/id/3582048
+[E_R109_METHOD_LIMIT] Corporate Methodology | PDF49/¶186；未核法域适用性关联另见E_R109_RECOVERY
+https://www.maalot.co.il/Publications/MT20250709153825.pdf
 下载官方 PDF，以 pypdf 提取；关键表逐页图像复核；原件 SHA-256 留存
 仅采用截止日前公开原件；分别保留原报、重列比较期和期后事项，禁止跨期倒填
 以共同底稿复算四表及交易调节；金额按原表百万美元记录，勾稽差额以美元列示
 已执行程序仅为公开资料阅读、版本对照和计算；内部审计证据列为待核请求
 读取出售备考、签署出售协议和新旧信贷定义，将备考假设、实际交割收付及尚未完成的计划分列。
 按S&amp;P Ratios and Adjustments 2025-12-17及Sector-Specific Corporate Methodology 2025-09-26数字基础设施章建立历史调整桥和条件路径；方法代理、实际现金和分析估计分列。
-研究执行于 2026-10-03；信息截止严格为 2026-06-30。2026 年二季报及七月业绩公告虽涉及六月期末，因发表日晚于截止日排除。
+从实际Q1持续经营现金接入售后经营与融资；逐年同步滚动账面债、金融本金、租赁、ARO、付息、分配和方法指标。已发生、公司展望及研究假设分别保留。
+按Corporate Methodology的业务风险、适用波动表、前瞻核心与补充指标、锚点和逐步修正形成条件主体建议；六月十二个月流动性与管理治理分类分开，不能以年度模型现金替代实际来源。
+对CCI 4.000% March2027高级无抵押票据核义务人和顺位；投机级回收与投资级从属路径分别适用。塔设施资格、SPE匹配排除、同级及优先债权和法域未核时，计算足值边界而不填实际回收。
+研究于2026年10月整理更新；信息截止严格为2026-06-30。二季报及七月业绩虽涉及六月期末，因发表日晚于截止日排除。
 完整下载不等于逐页阅读。2025 年报已重点阅读审计意见、四表、政策/减值、终止经营、债务、税、现金及期后事项；2024 年报和新协议阅读范围见来源说明。
 未取得企业内部总账、估值模型、银行流水、合规证明、资金上划限制清单、最终交割结算及完整出售协议附件；不能形成审计保证或可支用现金/正式评级。
 2024 原报收入与 2025 年报重列比较收入差异，以及 2026 Q1 对 2025 Q1 待售准备回述差异尚未解释。
 现金流桥使用合并表内持续/终止组成项目，不能将其视为法律母公司单体现金流。
 US GAAP 条款编号来自 SEC 公司回复及公司政策，未将公司回复视为 SEC 批准，亦未声称已阅读全文 FASB Codification。
 公开备考BS假设2025-12-31完成、利润表假设2025-01-01完成，2026-05-01发表；其金额不属于2025已报实数或2026五月实际现金。出售协议后续修订未找到可识别文本，最初签署机制不能视为全部最终条款。
-S&amp;P桥包含披露支持的最佳估计及局部敏感性；未完成主权/行业、竞争地位、前瞻财务、支持与债项全形成链，不宣告机构级别。
-来源 SSEC, SFASB 的正式公布日期未核验；不得据此证明在信息截止日前已公开。当前披露内容可以继续分析，历史时点结论须补充公告时间证据。</a:t>
+已形成业务风险、standard财务风险、锚点、逐项修正及指定票据的条件研究链；June实际资金资格、专门M&amp;G分类、当前主权/T&amp;C及回收法域仍分别待核。主体情景和塔DAV足值边界不等于机构发表等级或已核实际回收。
+来源 SSEC, SFASB, S_SP_XBRL 未列单一正式公布日期；各报告期间的公开日、快照取得日或尚待核准事项见来源记录。历史时点结论须逐项依据实际公开时间。</a:t>
             </a:r>
             <a:endParaRPr lang="en-US" dirty="0"/>
           </a:p>
@@ -893,27 +2052,67 @@
           <a:p>
             <a:r>
               <a:rPr lang="en-US" dirty="0"/>
-              <a:t>底稿 F04, F05, F12, cash2025, C_cashdiv_2025, cashend2025
-[F04] supported / [F05] supported / [F12] supported
-底稿 F04 / F05 / F12；来源 S25
+              <a:t>底稿 F08, F09, FF_FORWARD_CASH, C_saleproceeds, debtrepaid, costpaid
+[F08] supported / [F09] conditional / [FF_FORWARD_CASH] conditional
+底稿 F08 / F09 / FF_FORWARD_CASH；来源 SQ126 / SSALE / S25 / SPROFORMA / SSPA / SCREDIT / SOLDCREDIT / S_SP_XBRL / S_SP_Q1 / S_SP_RATIOS
 原文定位、URL及完整引用见本页备注；完整方法和明细见同名底稿及 Word/Excel。
+[EQ126SALE] Crown Castle Q1 2026 Form 10-Q | note 14 印刷 p19/PDF p20，Completion of Strategic Fiber Transaction
+https://investor.crowncastle.com/static-files/de60fca2-89d5-499d-899b-8e0a23030617
+[ESALE] Crown Castle announces completion of fiber and small cell sale | 2026-05-01 官方 completion 公告开头、Use of proceeds
+https://investor.crowncastle.com/node/29086
+[E25HFS] Crown Castle 2025 Form 10-K | note 3，印刷及 PDF p71–72，尤其 p72 资产负债、损益及脚注 (b)(c)
+https://investor.crowncastle.com/static-files/68fb84e1-1dac-440d-96b4-55b9603e10dd
+[EQ126HFS] Crown Castle Q1 2026 Form 10-Q | note 3 印刷 p9/PDF p10，2026/2025 比较损益、准备表、脚注 (c)
+https://investor.crowncastle.com/static-files/de60fca2-89d5-499d-899b-8e0a23030617
+[EPROBASIS] 2026-05-01 出售8-K及Exhibit99.2公开未经审计备考 | Ex99.2 PDF p18编制基础；p21 Note1
+https://investor.crowncastle.com/static-files/f4ff727f-0f13-4f18-affa-1ff461698ccf
+[EPROBS] 2026-05-01 出售8-K及Exhibit99.2公开未经审计备考 | Ex99.2 PDF p19资产负债表；p21 Note2(A)–(D)
+https://investor.crowncastle.com/static-files/f4ff727f-0f13-4f18-affa-1ff461698ccf
+[EPROPL] 2026-05-01 出售8-K及Exhibit99.2公开未经审计备考 | Ex99.2 PDF p20损益；p21 Note2(E)
+https://investor.crowncastle.com/static-files/f4ff727f-0f13-4f18-affa-1ff461698ccf
+[ESALEVERSION] 2026-05-01 出售8-K及Exhibit99.2公开未经审计备考 | 8-K PDF p2 Item2.01、p3 Exhibit Index；Ex99.1 p10 Fiber Business定义
+https://investor.crowncastle.com/static-files/f4ff727f-0f13-4f18-affa-1ff461698ccf
+[ESPASETTLE] 2025-03-13签署出售协议（2025-03-17提交8-K Exhibit2.1） | §2.4–2.7，PDF p48–54；§12.9 PDF p160
+https://investor.crowncastle.com/static-files/3b910737-4f3d-4197-a8b4-893f83855c9f
+[EQ126FAC] Crown Castle Q1 2026 Form 10-Q | note 14 印刷 p20/PDF p21；MD&amp;A/p28 May 5 balances
+https://investor.crowncastle.com/static-files/de60fca2-89d5-499d-899b-8e0a23030617
+[ECREDIT] Crown Castle May 1 2026 Form 8-K and Exhibit 10.1 credit agreement | 8-K Item 1.01；协议 §1.01、§1.04/p43、§1.05/p44、§4.02/p93、§6.10/p108；Total Indebtedness印刷39/PDF49，§1.04印刷43/PDF53
+https://investor.crowncastle.com/static-files/dd7712df-51aa-4a29-b6a5-67becf7b2234
+[EOLDCREDIT] 2022-07-08 Amendment No.7及附后旧信用协议 | §1.01定义：印刷p13–17/27–28/40/44/50–52；§1.04/1.05 p55–56；§6.09/6.10 p129
+https://investor.crowncastle.com/static-files/d735da3e-9136-43ce-ad76-3a96bcb686cf
+[EOLDVERSION] Crown Castle 2025 Form 10-K | Exhibit Index p101–102，Ex10.49–10.55，尤其2022 Amendment7
+https://investor.crowncastle.com/static-files/68fb84e1-1dac-440d-96b4-55b9603e10dd
+[EQ126INDEX] Crown Castle Q1 2026 Form 10-Q | Item6 Exhibit Index，印刷p38/PDF p39
+https://investor.crowncastle.com/static-files/de60fca2-89d5-499d-899b-8e0a23030617
+[E_FWD_Q1] Crown Castle Q1 2026 Form 10-Q | PDF4–6/印刷3–5；note5 PDF14/印刷13；note13–14 PDF19–20
+https://investor.crowncastle.com/static-files/de60fca2-89d5-499d-899b-8e0a23030617
+[E_FWD_Q1_XBRL] SEC Companyfacts：Crown Castle 2025年度及2026Q1原申报事实 | InterestPaidNet / InterestCostsCapitalized；accn0001051470-26-000059，2026Q1，filed2026-05-07
+https://data.sec.gov/api/xbrl/companyfacts/CIK0001051470.json
+[E_FWD_GUIDANCE] 2026-05-01 出售8-K及Exhibit99.2公开未经审计备考 | 完整May1 8-K的Ex99.1 PDF6、11、13、15–16（印刷2、7、9、11–12）
+https://investor.crowncastle.com/static-files/f4ff727f-0f13-4f18-affa-1ff461698ccf
+[E_FWD_CONTRACT] Crown Castle Q1 2026 Supplemental Information | PDF9/11/13–16/18/28，印刷8/10/12–15/17/27
+https://investor.crowncastle.com/static-files/38f6a584-60a8-452d-bfd2-a44103aeec82
 [E25BS] Crown Castle 2025 Form 10-K | 印刷及 PDF p58，Consolidated Balance Sheet，2025/2024 两列
 https://investor.crowncastle.com/static-files/68fb84e1-1dac-440d-96b4-55b9603e10dd
-[E25CF] Crown Castle 2025 Form 10-K | 印刷及 PDF p60，Consolidated Statement of Cash Flows
+[EQ126CF] Crown Castle Q1 2026 Form 10-Q | 印刷 p18/PDF p19 现金调节；note 5/p12 债务；MD&amp;A/p28 流动性
+https://investor.crowncastle.com/static-files/de60fca2-89d5-499d-899b-8e0a23030617
+[E_FWD_CASH_TAX] Crown Castle Q1 2026 Supplemental Information | Q1 supplement PDF12/印刷11完整Consolidated ROIC表及(a)–(f)脚注；PDF23/印刷22 Non-GAAP Measures定义
+https://investor.crowncastle.com/static-files/38f6a584-60a8-452d-bfd2-a44103aeec82
+[E_FWD_CREDIT_CONDITIONS] Crown Castle May 1 2026 Form 8-K and Exhibit 10.1 credit agreement | 完整协议PDF2、49、51、103、118；协议印刷39、41、93、108；§4.02/§6.10
+https://investor.crowncastle.com/static-files/dd7712df-51aa-4a29-b6a5-67becf7b2234
+[E_FWD_DEBT_MEASURE] S&amp;P Corporate Methodology: Ratios And Adjustments | PDF27/印刷27，Appendix2 Initial measurement / debt at fair value
+https://www.maalot.co.il/Publications/MT20251223092257.pdf
+[E_FWD_RESTRUCT_CLASS] Crown Castle 2025 Form 10-K | 2025 10K PDF89/印刷89；Q1更新已由E_FWD_Q1 note13–14支持
 https://investor.crowncastle.com/static-files/68fb84e1-1dac-440d-96b4-55b9603e10dd
-[E25CASH] Crown Castle 2025 Form 10-K | note 16，印刷及 PDF p88，cash reconciliation table
+[E_SP_ARO] Crown Castle 2025 Form 10-K | PDF/印刷p65、p73–74；p80–82税务
 https://investor.crowncastle.com/static-files/68fb84e1-1dac-440d-96b4-55b9603e10dd
-[E25PL] Crown Castle 2025 Form 10-K | 印刷及 PDF p59，Consolidated Statement of Operations and Comprehensive Income
+[E_SP_LEASE] Crown Castle 2025 Form 10-K | PDF/印刷p58、p64、p75、p85、p87；note14
 https://investor.crowncastle.com/static-files/68fb84e1-1dac-440d-96b4-55b9603e10dd
-[E25EQ] Crown Castle 2025 Form 10-K | 印刷及 PDF p61，Consolidated Statement of Equity (Deficit)
-https://investor.crowncastle.com/static-files/68fb84e1-1dac-440d-96b4-55b9603e10dd
-[E25TAX] Crown Castle 2025 Form 10-K | note 10，印刷及 PDF p80，所得税组成及法定税率金额调节
-https://investor.crowncastle.com/static-files/68fb84e1-1dac-440d-96b4-55b9603e10dd
-[E25DEBT] Crown Castle 2025 Form 10-K | note 8，p75–79 债务表、2018 Tower Revenue Notes、CP Program；MD&amp;A p40/p45
-https://investor.crowncastle.com/static-files/68fb84e1-1dac-440d-96b4-55b9603e10dd
-[E25AUDIT] Crown Castle 2025 Form 10-K | p56–57，PwC auditor report，2026-02-23
-https://investor.crowncastle.com/static-files/68fb84e1-1dac-440d-96b4-55b9603e10dd
-[E25HFS] Crown Castle 2025 Form 10-K | note 3，印刷及 PDF p71–72，尤其 p72 资产负债、损益及脚注 (b)(c)
+[E_SP_Q1CFO] Crown Castle Q1 2026 Form 10-Q | PDF6/印刷p5，2026Q1/2025Q1现金流表；PDF19–20/印刷p18–19，note13重组事项
+https://investor.crowncastle.com/static-files/de60fca2-89d5-499d-899b-8e0a23030617
+[E_SP_RATIOS] S&amp;P Corporate Methodology: Ratios And Adjustments | 原发2019-04-01，2025-12-17重发，PDF7 ¶31–35；17–25 ¶86–137；44–45 ¶223–225
+https://www.maalot.co.il/Publications/MT20251223092257.pdf
+[E_SP_SCOPE] Crown Castle 2025 Form 10-K | note1/PDF及印刷p62；p60、p87–88
 https://investor.crowncastle.com/static-files/68fb84e1-1dac-440d-96b4-55b9603e10dd</a:t>
             </a:r>
             <a:endParaRPr lang="en-US" dirty="0"/>
@@ -1002,37 +2201,45 @@
           <a:p>
             <a:r>
               <a:rPr lang="en-US" dirty="0"/>
-              <a:t>底稿 F08, F15, C_saleproceeds, debtrepaid, costpaid, C_pf_cash
-[F08] supported / [F15] conditional
-底稿 F08 / F15；来源 SQ126 / SPROFORMA / SSALE / S25 / SSPA / S_SP_RATIOS / S_SP_XBRL
+              <a:t>底稿 FF_FORWARD_CASH, F13, F14, fwd_base_CFO_2026, fwd_base_new_draw_2026, C_sp_q1_cfo_2026
+[FF_FORWARD_CASH] conditional / [F13] conditional / [F14] conditional
+底稿 FF_FORWARD_CASH / F13 / F14；来源 S25 / SCREDIT / SQ126 / S_SP_Q1 / S_SP_RATIOS / SPROFORMA / S_SP_XBRL
 原文定位、URL及完整引用见本页备注；完整方法和明细见同名底稿及 Word/Excel。
+[E25BS] Crown Castle 2025 Form 10-K | 印刷及 PDF p58，Consolidated Balance Sheet，2025/2024 两列
+https://investor.crowncastle.com/static-files/68fb84e1-1dac-440d-96b4-55b9603e10dd
+[ECREDIT] Crown Castle May 1 2026 Form 8-K and Exhibit 10.1 credit agreement | 8-K Item 1.01；协议 §1.01、§1.04/p43、§1.05/p44、§4.02/p93、§6.10/p108；Total Indebtedness印刷39/PDF49，§1.04印刷43/PDF53
+https://investor.crowncastle.com/static-files/dd7712df-51aa-4a29-b6a5-67becf7b2234
+[EQ126CF] Crown Castle Q1 2026 Form 10-Q | 印刷 p18/PDF p19 现金调节；note 5/p12 债务；MD&amp;A/p28 流动性
+https://investor.crowncastle.com/static-files/de60fca2-89d5-499d-899b-8e0a23030617
+[EQ126FAC] Crown Castle Q1 2026 Form 10-Q | note 14 印刷 p20/PDF p21；MD&amp;A/p28 May 5 balances
+https://investor.crowncastle.com/static-files/de60fca2-89d5-499d-899b-8e0a23030617
 [EQ126SALE] Crown Castle Q1 2026 Form 10-Q | note 14 印刷 p19/PDF p20，Completion of Strategic Fiber Transaction
 https://investor.crowncastle.com/static-files/de60fca2-89d5-499d-899b-8e0a23030617
-[EPROBASIS] 2026-05-01 出售8-K及Exhibit99.2公开未经审计备考 | Ex99.2 PDF p18编制基础；p21 Note1
+[E_FWD_CASH_TAX] Crown Castle Q1 2026 Supplemental Information | Q1 supplement PDF12/印刷11完整Consolidated ROIC表及(a)–(f)脚注；PDF23/印刷22 Non-GAAP Measures定义
+https://investor.crowncastle.com/static-files/38f6a584-60a8-452d-bfd2-a44103aeec82
+[E_FWD_CONTRACT] Crown Castle Q1 2026 Supplemental Information | PDF9/11/13–16/18/28，印刷8/10/12–15/17/27
+https://investor.crowncastle.com/static-files/38f6a584-60a8-452d-bfd2-a44103aeec82
+[E_FWD_CREDIT_CONDITIONS] Crown Castle May 1 2026 Form 8-K and Exhibit 10.1 credit agreement | 完整协议PDF2、49、51、103、118；协议印刷39、41、93、108；§4.02/§6.10
+https://investor.crowncastle.com/static-files/dd7712df-51aa-4a29-b6a5-67becf7b2234
+[E_FWD_DEBT_MEASURE] S&amp;P Corporate Methodology: Ratios And Adjustments | PDF27/印刷27，Appendix2 Initial measurement / debt at fair value
+https://www.maalot.co.il/Publications/MT20251223092257.pdf
+[E_FWD_GUIDANCE] 2026-05-01 出售8-K及Exhibit99.2公开未经审计备考 | 完整May1 8-K的Ex99.1 PDF6、11、13、15–16（印刷2、7、9、11–12）
 https://investor.crowncastle.com/static-files/f4ff727f-0f13-4f18-affa-1ff461698ccf
-[EPROBS] 2026-05-01 出售8-K及Exhibit99.2公开未经审计备考 | Ex99.2 PDF p19资产负债表；p21 Note2(A)–(D)
-https://investor.crowncastle.com/static-files/f4ff727f-0f13-4f18-affa-1ff461698ccf
-[ESALE] Crown Castle announces completion of fiber and small cell sale | 2026-05-01 官方 completion 公告开头、Use of proceeds
-https://investor.crowncastle.com/node/29086
-[E25HFS] Crown Castle 2025 Form 10-K | note 3，印刷及 PDF p71–72，尤其 p72 资产负债、损益及脚注 (b)(c)
+[E_FWD_Q1] Crown Castle Q1 2026 Form 10-Q | PDF4–6/印刷3–5；note5 PDF14/印刷13；note13–14 PDF19–20
+https://investor.crowncastle.com/static-files/de60fca2-89d5-499d-899b-8e0a23030617
+[E_FWD_Q1_XBRL] SEC Companyfacts：Crown Castle 2025年度及2026Q1原申报事实 | InterestPaidNet / InterestCostsCapitalized；accn0001051470-26-000059，2026Q1，filed2026-05-07
+https://data.sec.gov/api/xbrl/companyfacts/CIK0001051470.json
+[E_FWD_RESTRUCT_CLASS] Crown Castle 2025 Form 10-K | 2025 10K PDF89/印刷89；Q1更新已由E_FWD_Q1 note13–14支持
 https://investor.crowncastle.com/static-files/68fb84e1-1dac-440d-96b4-55b9603e10dd
-[EQ126HFS] Crown Castle Q1 2026 Form 10-Q | note 3 印刷 p9/PDF p10，2026/2025 比较损益、准备表、脚注 (c)
-https://investor.crowncastle.com/static-files/de60fca2-89d5-499d-899b-8e0a23030617
-[EPROPL] 2026-05-01 出售8-K及Exhibit99.2公开未经审计备考 | Ex99.2 PDF p20损益；p21 Note2(E)
-https://investor.crowncastle.com/static-files/f4ff727f-0f13-4f18-affa-1ff461698ccf
-[ESALEVERSION] 2026-05-01 出售8-K及Exhibit99.2公开未经审计备考 | 8-K PDF p2 Item2.01、p3 Exhibit Index；Ex99.1 p10 Fiber Business定义
-https://investor.crowncastle.com/static-files/f4ff727f-0f13-4f18-affa-1ff461698ccf
-[ESPASETTLE] 2025-03-13签署出售协议（2025-03-17提交8-K Exhibit2.1） | §2.4–2.7，PDF p48–54；§12.9 PDF p160
-https://investor.crowncastle.com/static-files/3b910737-4f3d-4197-a8b4-893f83855c9f
-[EQ126FAC] Crown Castle Q1 2026 Form 10-Q | note 14 印刷 p20/PDF p21；MD&amp;A/p28 May 5 balances
+[E_SP_ARO] Crown Castle 2025 Form 10-K | PDF/印刷p65、p73–74；p80–82税务
+https://investor.crowncastle.com/static-files/68fb84e1-1dac-440d-96b4-55b9603e10dd
+[E_SP_LEASE] Crown Castle 2025 Form 10-K | PDF/印刷p58、p64、p75、p85、p87；note14
+https://investor.crowncastle.com/static-files/68fb84e1-1dac-440d-96b4-55b9603e10dd
+[E_SP_Q1CFO] Crown Castle Q1 2026 Form 10-Q | PDF6/印刷p5，2026Q1/2025Q1现金流表；PDF19–20/印刷p18–19，note13重组事项
 https://investor.crowncastle.com/static-files/de60fca2-89d5-499d-899b-8e0a23030617
 [E_SP_RATIOS] S&amp;P Corporate Methodology: Ratios And Adjustments | 原发2019-04-01，2025-12-17重发，PDF7 ¶31–35；17–25 ¶86–137；44–45 ¶223–225
 https://www.maalot.co.il/Publications/MT20251223092257.pdf
-[E_SP_ARO] Crown Castle 2025 Form 10-K | PDF/印刷p65、p73–74；p80–82税务
-https://investor.crowncastle.com/static-files/68fb84e1-1dac-440d-96b4-55b9603e10dd
-[E25CASH] Crown Castle 2025 Form 10-K | note 16，印刷及 PDF p88，cash reconciliation table
-https://investor.crowncastle.com/static-files/68fb84e1-1dac-440d-96b4-55b9603e10dd
-[E25BS] Crown Castle 2025 Form 10-K | 印刷及 PDF p58，Consolidated Balance Sheet，2025/2024 两列
+[E_SP_SCOPE] Crown Castle 2025 Form 10-K | note1/PDF及印刷p62；p60、p87–88
 https://investor.crowncastle.com/static-files/68fb84e1-1dac-440d-96b4-55b9603e10dd
 [E25CF] Crown Castle 2025 Form 10-K | 印刷及 PDF p60，Consolidated Statement of Cash Flows
 https://investor.crowncastle.com/static-files/68fb84e1-1dac-440d-96b4-55b9603e10dd
@@ -1042,13 +2249,9 @@
 https://investor.crowncastle.com/static-files/68fb84e1-1dac-440d-96b4-55b9603e10dd
 [E_SP_CASH] Crown Castle 2025 Form 10-K | PDF/印刷p68利息表；p87补充现金流
 https://investor.crowncastle.com/static-files/68fb84e1-1dac-440d-96b4-55b9603e10dd
-[E_SP_LEASE] Crown Castle 2025 Form 10-K | PDF/印刷p58、p64、p75、p85、p87；note14
-https://investor.crowncastle.com/static-files/68fb84e1-1dac-440d-96b4-55b9603e10dd
 [E_SP_SBC] Crown Castle 2025 Form 10-K | PDF/印刷p59、p65、p83–84
 https://investor.crowncastle.com/static-files/68fb84e1-1dac-440d-96b4-55b9603e10dd
-[E_SP_SCOPE] Crown Castle 2025 Form 10-K | note1/PDF及印刷p62；p60、p87–88
-https://investor.crowncastle.com/static-files/68fb84e1-1dac-440d-96b4-55b9603e10dd
-[E_SP_XBRL] SEC Companyfacts：Crown Castle 2025原申报事实 | facts/us-gaap/InterestPaidNet、InterestCostsCapitalized、AllocatedShareBasedCompensationExpense、ShareBasedCompensation；指定原申报accession
+[E_SP_XBRL] SEC Companyfacts：Crown Castle 2025年度及2026Q1原申报事实 | facts/us-gaap/InterestPaidNet、InterestCostsCapitalized、AllocatedShareBasedCompensationExpense、ShareBasedCompensation；指定原申报accession
 https://data.sec.gov/api/xbrl/companyfacts/CIK0001051470.json</a:t>
             </a:r>
             <a:endParaRPr lang="en-US" dirty="0"/>
@@ -1137,30 +2340,30 @@
           <a:p>
             <a:r>
               <a:rPr lang="en-US" dirty="0"/>
-              <a:t>底稿 F06, F07, F09, C_headroom2025, C_newnetLC, leverage2025, limit2025
-[F06] conditional / [F07] supported / [F09] conditional
-底稿 F06 / F07 / F09；来源 S25 / SOLDCREDIT / SCREDIT / SQ126 / SPROFORMA
+              <a:t>底稿 FF_R109_BRP, F16, F_DEV_CICRA, F_DEV_BRP
+[FF_R109_BRP] conditional / [F16] supported
+底稿 FF_R109_BRP / F16；来源 S_DEV_COUNTRY / S_DEV_CORP / S_SP_SECTORS / S25 / S_SP_Q1 / SQ126
 原文定位、URL及完整引用见本页备注；完整方法和明细见同名底稿及 Word/Excel。
-[E25COV] Crown Castle 2025 Form 10-K | MD&amp;A p45 covenant table 及脚注
+[E_DEV_COUNTRY] Country Risk Assessments Update: June 2026 | 内嵌文章元数据June17及Table1表头/美国行
+https://spratings.spglobal.com/ratings/en/regulatory/article/-/view/type/HTML/id/3582048
+[E_DEV_CORP] Corporate Methodology | PDF4–12、21–22、24–28、30–44、47–50；Tables1/2/3/5/14–19/21–25及¶40–50/91–92/112–125/136–191
+https://www.maalot.co.il/Publications/MT20250709153825.pdf
+[E_DEV_DI] S&amp;P Sector-Specific Corporate Methodology — Digital Infrastructure | PDF61–63、68–71、73、76–77
+https://www.maalot.co.il/Publications/MT20251012123218.pdf
+[E_DEV_CP] Crown Castle 2025 Form 10-K | PDF4–8、17–19、36–38；Q1 supplement另见E_DEV_CASH_CONTRACT
 https://investor.crowncastle.com/static-files/68fb84e1-1dac-440d-96b4-55b9603e10dd
-[EOLDCREDIT] 2022-07-08 Amendment No.7及附后旧信用协议 | §1.01定义：印刷p13–17/27–28/40/44/50–52；§1.04/1.05 p55–56；§6.09/6.10 p129
-https://investor.crowncastle.com/static-files/d735da3e-9136-43ce-ad76-3a96bcb686cf
-[ECREDIT] Crown Castle May 1 2026 Form 8-K and Exhibit 10.1 credit agreement | 8-K Item 1.01；协议 §1.01、§1.04/p43、§1.05/p44、§4.02/p93、§6.10/p108
-https://investor.crowncastle.com/static-files/dd7712df-51aa-4a29-b6a5-67becf7b2234
-[E25DEBT] Crown Castle 2025 Form 10-K | note 8，p75–79 债务表、2018 Tower Revenue Notes、CP Program；MD&amp;A p40/p45
+[E_DEV_CASH_CONTRACT] Crown Castle Q1 2026 Supplemental Information | PDF13–14
+https://investor.crowncastle.com/static-files/38f6a584-60a8-452d-bfd2-a44103aeec82
+[E_DEV_SERVICE_VOL] Crown Castle 2025 Form 10-K | PDF/印刷7、18–19，另PDF47/67服务期限相关句
 https://investor.crowncastle.com/static-files/68fb84e1-1dac-440d-96b4-55b9603e10dd
-[E25SPE] Crown Castle 2025 Form 10-K | note 8/p77–78，2018 Tower Revenue Notes 及 2009 Securitized Notes
+[E_DEV_TOWER_RIGHTS] Crown Castle 2025 Form 10-K | PDF4、7、17–18及77–79
 https://investor.crowncastle.com/static-files/68fb84e1-1dac-440d-96b4-55b9603e10dd
-[E25BS] Crown Castle 2025 Form 10-K | 印刷及 PDF p58，Consolidated Balance Sheet，2025/2024 两列
-https://investor.crowncastle.com/static-files/68fb84e1-1dac-440d-96b4-55b9603e10dd
-[EOLDVERSION] Crown Castle 2025 Form 10-K | Exhibit Index p101–102，Ex10.49–10.55，尤其2022 Amendment7
-https://investor.crowncastle.com/static-files/68fb84e1-1dac-440d-96b4-55b9603e10dd
-[EQ126INDEX] Crown Castle Q1 2026 Form 10-Q | Item6 Exhibit Index，印刷p38/PDF p39
+[E_SP_Q1CFO] Crown Castle Q1 2026 Form 10-Q | PDF6/印刷p5，2026Q1/2025Q1现金流表；PDF19–20/印刷p18–19，note13重组事项
 https://investor.crowncastle.com/static-files/de60fca2-89d5-499d-899b-8e0a23030617
-[EQ126FAC] Crown Castle Q1 2026 Form 10-Q | note 14 印刷 p20/PDF p21；MD&amp;A/p28 May 5 balances
-https://investor.crowncastle.com/static-files/de60fca2-89d5-499d-899b-8e0a23030617
-[EPROPL] 2026-05-01 出售8-K及Exhibit99.2公开未经审计备考 | Ex99.2 PDF p20损益；p21 Note2(E)
-https://investor.crowncastle.com/static-files/f4ff727f-0f13-4f18-affa-1ff461698ccf</a:t>
+[E_SP_Q1BILL] Crown Castle Q1 2026 Supplemental Information | PDF10/印刷p9：2026Q1列，Components of changes in site rental revenues
+https://investor.crowncastle.com/static-files/38f6a584-60a8-452d-bfd2-a44103aeec82
+[EDISH] Crown Castle 2025 Form 10-K | note 18/p89，Subsequent Events—DISH Wireless
+https://investor.crowncastle.com/static-files/68fb84e1-1dac-440d-96b4-55b9603e10dd</a:t>
             </a:r>
             <a:endParaRPr lang="en-US" dirty="0"/>
           </a:p>
@@ -1248,42 +2451,58 @@
           <a:p>
             <a:r>
               <a:rPr lang="en-US" dirty="0"/>
-              <a:t>底稿 F13, F14, F15, sp_ebitda, sp_leverage, sp_ffo, sp_focf
-[F13] conditional / [F14] conditional / [F15] conditional
-底稿 F13 / F14 / F15；来源 S25 / S_SP_RATIOS / S_SP_XBRL / SPROFORMA / SQ126
+              <a:t>底稿 F17, F_DEV_SERVICES_GM_LOW, F_DEV_SERVICES_GM_HIGH
+[F17] conditional
+底稿 F17；来源 SPROFORMA / S_SP_SECTORS / S25 / S_SP_Q1 / SCREDIT / SQ126 / S_SP_RATIOS / S_SP_XBRL / S_DEV_CORP
 原文定位、URL及完整引用见本页备注；完整方法和明细见同名底稿及 Word/Excel。
+[E_DEV_SALE] 2026-05-01 出售8-K及Exhibit99.2公开未经审计备考 | PDF2/5–9；已读相关备考章节
+https://investor.crowncastle.com/static-files/f4ff727f-0f13-4f18-affa-1ff461698ccf
+[E_DEV_DI] S&amp;P Sector-Specific Corporate Methodology — Digital Infrastructure | PDF61–63、68–71、73、76–77
+https://www.maalot.co.il/Publications/MT20251012123218.pdf
+[E_DEV_SERVICE_VOL] Crown Castle 2025 Form 10-K | PDF/印刷7、18–19，另PDF47/67服务期限相关句
+https://investor.crowncastle.com/static-files/68fb84e1-1dac-440d-96b4-55b9603e10dd
+[E_DEV_CASH_CONTRACT] Crown Castle Q1 2026 Supplemental Information | PDF13–14
+https://investor.crowncastle.com/static-files/38f6a584-60a8-452d-bfd2-a44103aeec82
 [E25BS] Crown Castle 2025 Form 10-K | 印刷及 PDF p58，Consolidated Balance Sheet，2025/2024 两列
 https://investor.crowncastle.com/static-files/68fb84e1-1dac-440d-96b4-55b9603e10dd
-[E25CF] Crown Castle 2025 Form 10-K | 印刷及 PDF p60，Consolidated Statement of Cash Flows
-https://investor.crowncastle.com/static-files/68fb84e1-1dac-440d-96b4-55b9603e10dd
-[E25DEBT] Crown Castle 2025 Form 10-K | note 8，p75–79 债务表、2018 Tower Revenue Notes、CP Program；MD&amp;A p40/p45
-https://investor.crowncastle.com/static-files/68fb84e1-1dac-440d-96b4-55b9603e10dd
-[E25PL] Crown Castle 2025 Form 10-K | 印刷及 PDF p59，Consolidated Statement of Operations and Comprehensive Income
+[ECREDIT] Crown Castle May 1 2026 Form 8-K and Exhibit 10.1 credit agreement | 8-K Item 1.01；协议 §1.01、§1.04/p43、§1.05/p44、§4.02/p93、§6.10/p108；Total Indebtedness印刷39/PDF49，§1.04印刷43/PDF53
+https://investor.crowncastle.com/static-files/dd7712df-51aa-4a29-b6a5-67becf7b2234
+[EQ126CF] Crown Castle Q1 2026 Form 10-Q | 印刷 p18/PDF p19 现金调节；note 5/p12 债务；MD&amp;A/p28 流动性
+https://investor.crowncastle.com/static-files/de60fca2-89d5-499d-899b-8e0a23030617
+[EQ126FAC] Crown Castle Q1 2026 Form 10-Q | note 14 印刷 p20/PDF p21；MD&amp;A/p28 May 5 balances
+https://investor.crowncastle.com/static-files/de60fca2-89d5-499d-899b-8e0a23030617
+[EQ126SALE] Crown Castle Q1 2026 Form 10-Q | note 14 印刷 p19/PDF p20，Completion of Strategic Fiber Transaction
+https://investor.crowncastle.com/static-files/de60fca2-89d5-499d-899b-8e0a23030617
+[E_FWD_CASH_TAX] Crown Castle Q1 2026 Supplemental Information | Q1 supplement PDF12/印刷11完整Consolidated ROIC表及(a)–(f)脚注；PDF23/印刷22 Non-GAAP Measures定义
+https://investor.crowncastle.com/static-files/38f6a584-60a8-452d-bfd2-a44103aeec82
+[E_FWD_CONTRACT] Crown Castle Q1 2026 Supplemental Information | PDF9/11/13–16/18/28，印刷8/10/12–15/17/27
+https://investor.crowncastle.com/static-files/38f6a584-60a8-452d-bfd2-a44103aeec82
+[E_FWD_CREDIT_CONDITIONS] Crown Castle May 1 2026 Form 8-K and Exhibit 10.1 credit agreement | 完整协议PDF2、49、51、103、118；协议印刷39、41、93、108；§4.02/§6.10
+https://investor.crowncastle.com/static-files/dd7712df-51aa-4a29-b6a5-67becf7b2234
+[E_FWD_DEBT_MEASURE] S&amp;P Corporate Methodology: Ratios And Adjustments | PDF27/印刷27，Appendix2 Initial measurement / debt at fair value
+https://www.maalot.co.il/Publications/MT20251223092257.pdf
+[E_FWD_GUIDANCE] 2026-05-01 出售8-K及Exhibit99.2公开未经审计备考 | 完整May1 8-K的Ex99.1 PDF6、11、13、15–16（印刷2、7、9、11–12）
+https://investor.crowncastle.com/static-files/f4ff727f-0f13-4f18-affa-1ff461698ccf
+[E_FWD_Q1] Crown Castle Q1 2026 Form 10-Q | PDF4–6/印刷3–5；note5 PDF14/印刷13；note13–14 PDF19–20
+https://investor.crowncastle.com/static-files/de60fca2-89d5-499d-899b-8e0a23030617
+[E_FWD_Q1_XBRL] SEC Companyfacts：Crown Castle 2025年度及2026Q1原申报事实 | InterestPaidNet / InterestCostsCapitalized；accn0001051470-26-000059，2026Q1，filed2026-05-07
+https://data.sec.gov/api/xbrl/companyfacts/CIK0001051470.json
+[E_FWD_RESTRUCT_CLASS] Crown Castle 2025 Form 10-K | 2025 10K PDF89/印刷89；Q1更新已由E_FWD_Q1 note13–14支持
 https://investor.crowncastle.com/static-files/68fb84e1-1dac-440d-96b4-55b9603e10dd
 [E_SP_ARO] Crown Castle 2025 Form 10-K | PDF/印刷p65、p73–74；p80–82税务
 https://investor.crowncastle.com/static-files/68fb84e1-1dac-440d-96b4-55b9603e10dd
-[E_SP_CASH] Crown Castle 2025 Form 10-K | PDF/印刷p68利息表；p87补充现金流
-https://investor.crowncastle.com/static-files/68fb84e1-1dac-440d-96b4-55b9603e10dd
 [E_SP_LEASE] Crown Castle 2025 Form 10-K | PDF/印刷p58、p64、p75、p85、p87；note14
 https://investor.crowncastle.com/static-files/68fb84e1-1dac-440d-96b4-55b9603e10dd
+[E_SP_Q1CFO] Crown Castle Q1 2026 Form 10-Q | PDF6/印刷p5，2026Q1/2025Q1现金流表；PDF19–20/印刷p18–19，note13重组事项
+https://investor.crowncastle.com/static-files/de60fca2-89d5-499d-899b-8e0a23030617
 [E_SP_RATIOS] S&amp;P Corporate Methodology: Ratios And Adjustments | 原发2019-04-01，2025-12-17重发，PDF7 ¶31–35；17–25 ¶86–137；44–45 ¶223–225
 https://www.maalot.co.il/Publications/MT20251223092257.pdf
-[E_SP_SBC] Crown Castle 2025 Form 10-K | PDF/印刷p59、p65、p83–84
-https://investor.crowncastle.com/static-files/68fb84e1-1dac-440d-96b4-55b9603e10dd
 [E_SP_SCOPE] Crown Castle 2025 Form 10-K | note1/PDF及印刷p62；p60、p87–88
 https://investor.crowncastle.com/static-files/68fb84e1-1dac-440d-96b4-55b9603e10dd
-[E_SP_XBRL] SEC Companyfacts：Crown Castle 2025原申报事实 | facts/us-gaap/InterestPaidNet、InterestCostsCapitalized、AllocatedShareBasedCompensationExpense、ShareBasedCompensation；指定原申报accession
-https://data.sec.gov/api/xbrl/companyfacts/CIK0001051470.json
-[E25CASH] Crown Castle 2025 Form 10-K | note 16，印刷及 PDF p88，cash reconciliation table
+[E_DEV_CP] Crown Castle 2025 Form 10-K | PDF4–8、17–19、36–38；Q1 supplement另见E_DEV_CASH_CONTRACT
 https://investor.crowncastle.com/static-files/68fb84e1-1dac-440d-96b4-55b9603e10dd
-[EPROBASIS] 2026-05-01 出售8-K及Exhibit99.2公开未经审计备考 | Ex99.2 PDF p18编制基础；p21 Note1
-https://investor.crowncastle.com/static-files/f4ff727f-0f13-4f18-affa-1ff461698ccf
-[EPROBS] 2026-05-01 出售8-K及Exhibit99.2公开未经审计备考 | Ex99.2 PDF p19资产负债表；p21 Note2(A)–(D)
-https://investor.crowncastle.com/static-files/f4ff727f-0f13-4f18-affa-1ff461698ccf
-[EPROPL] 2026-05-01 出售8-K及Exhibit99.2公开未经审计备考 | Ex99.2 PDF p20损益；p21 Note2(E)
-https://investor.crowncastle.com/static-files/f4ff727f-0f13-4f18-affa-1ff461698ccf
-[EQ126SALE] Crown Castle Q1 2026 Form 10-Q | note 14 印刷 p19/PDF p20，Completion of Strategic Fiber Transaction
-https://investor.crowncastle.com/static-files/de60fca2-89d5-499d-899b-8e0a23030617</a:t>
+[E_DEV_CORP] Corporate Methodology | PDF4–12、21–22、24–28、30–44、47–50；Tables1/2/3/5/14–19/21–25及¶40–50/91–92/112–125/136–191
+https://www.maalot.co.il/Publications/MT20250709153825.pdf</a:t>
             </a:r>
             <a:endParaRPr lang="en-US" dirty="0"/>
           </a:p>
@@ -1371,22 +2590,74 @@
           <a:p>
             <a:r>
               <a:rPr lang="en-US" dirty="0"/>
-              <a:t>底稿 F11, F16, F17, C_sp_q1_cfo_change, C_sp_renew_share
-[F11] conditional / [F16] supported / [F17] conditional
-底稿 F11 / F16 / F17；来源 SQ126 / S_SP_Q4 / S25 / S_SP_Q1 / S_SP_SECTORS
+              <a:t>底稿 F15, r109_base_FFO_cash_interest_coverage_120, r109_base_FOCF_debt_120, r109_base_DCF_debt_120
+[F15] conditional
+底稿 F15；来源 S25 / SCREDIT / SQ126 / S_SP_Q1 / S_DEV_CORP / S_SP_SECTORS / S_SP_RATIOS / SPROFORMA / S_SP_XBRL / S_DEV_LIQ / S_DEV_REC
 原文定位、URL及完整引用见本页备注；完整方法和明细见同名底稿及 Word/Excel。
+[E25BS] Crown Castle 2025 Form 10-K | 印刷及 PDF p58，Consolidated Balance Sheet，2025/2024 两列
+https://investor.crowncastle.com/static-files/68fb84e1-1dac-440d-96b4-55b9603e10dd
+[ECREDIT] Crown Castle May 1 2026 Form 8-K and Exhibit 10.1 credit agreement | 8-K Item 1.01；协议 §1.01、§1.04/p43、§1.05/p44、§4.02/p93、§6.10/p108；Total Indebtedness印刷39/PDF49，§1.04印刷43/PDF53
+https://investor.crowncastle.com/static-files/dd7712df-51aa-4a29-b6a5-67becf7b2234
+[EQ126CF] Crown Castle Q1 2026 Form 10-Q | 印刷 p18/PDF p19 现金调节；note 5/p12 债务；MD&amp;A/p28 流动性
+https://investor.crowncastle.com/static-files/de60fca2-89d5-499d-899b-8e0a23030617
+[EQ126FAC] Crown Castle Q1 2026 Form 10-Q | note 14 印刷 p20/PDF p21；MD&amp;A/p28 May 5 balances
+https://investor.crowncastle.com/static-files/de60fca2-89d5-499d-899b-8e0a23030617
+[EQ126SALE] Crown Castle Q1 2026 Form 10-Q | note 14 印刷 p19/PDF p20，Completion of Strategic Fiber Transaction
+https://investor.crowncastle.com/static-files/de60fca2-89d5-499d-899b-8e0a23030617
+[E_DEV_CASH_CONTRACT] Crown Castle Q1 2026 Supplemental Information | PDF13–14
+https://investor.crowncastle.com/static-files/38f6a584-60a8-452d-bfd2-a44103aeec82
+[E_DEV_CORP] Corporate Methodology | PDF4–12、21–22、24–28、30–44、47–50；Tables1/2/3/5/14–19/21–25及¶40–50/91–92/112–125/136–191
+https://www.maalot.co.il/Publications/MT20250709153825.pdf
+[E_DEV_CP] Crown Castle 2025 Form 10-K | PDF4–8、17–19、36–38；Q1 supplement另见E_DEV_CASH_CONTRACT
+https://investor.crowncastle.com/static-files/68fb84e1-1dac-440d-96b4-55b9603e10dd
+[E_DEV_CREDIT] Crown Castle May 1 2026 Form 8-K and Exhibit 10.1 credit agreement | PDF11、22–24、40–41、49、51、103、118及公开8K摘要
+https://investor.crowncastle.com/static-files/dd7712df-51aa-4a29-b6a5-67becf7b2234
+[E_DEV_DI] S&amp;P Sector-Specific Corporate Methodology — Digital Infrastructure | PDF61–63、68–71、73、76–77
+https://www.maalot.co.il/Publications/MT20251012123218.pdf
+[E_DEV_FACE] Crown Castle Q1 2026 Supplemental Information | PDF15/印14，Capitalization Overview，Face Value
+https://investor.crowncastle.com/static-files/38f6a584-60a8-452d-bfd2-a44103aeec82
+[E_DEV_NOTE] Crown Castle Q1 2026 Form 10-Q | 2026Q1 10Q PDF13–14，Debt and Other Obligations
+https://investor.crowncastle.com/static-files/de60fca2-89d5-499d-899b-8e0a23030617
+[E_DEV_NOTE_GUAR] Crown Castle 2025 Form 10-K | PDF75、77–79，Senior Notes/Securitized Debt
+https://investor.crowncastle.com/static-files/68fb84e1-1dac-440d-96b4-55b9603e10dd
+[E_DEV_TOWER_RIGHTS] Crown Castle 2025 Form 10-K | PDF4、7、17–18及77–79
+https://investor.crowncastle.com/static-files/68fb84e1-1dac-440d-96b4-55b9603e10dd
+[E_FWD_CASH_TAX] Crown Castle Q1 2026 Supplemental Information | Q1 supplement PDF12/印刷11完整Consolidated ROIC表及(a)–(f)脚注；PDF23/印刷22 Non-GAAP Measures定义
+https://investor.crowncastle.com/static-files/38f6a584-60a8-452d-bfd2-a44103aeec82
+[E_FWD_CONTRACT] Crown Castle Q1 2026 Supplemental Information | PDF9/11/13–16/18/28，印刷8/10/12–15/17/27
+https://investor.crowncastle.com/static-files/38f6a584-60a8-452d-bfd2-a44103aeec82
+[E_FWD_CREDIT_CONDITIONS] Crown Castle May 1 2026 Form 8-K and Exhibit 10.1 credit agreement | 完整协议PDF2、49、51、103、118；协议印刷39、41、93、108；§4.02/§6.10
+https://investor.crowncastle.com/static-files/dd7712df-51aa-4a29-b6a5-67becf7b2234
+[E_FWD_DEBT_MEASURE] S&amp;P Corporate Methodology: Ratios And Adjustments | PDF27/印刷27，Appendix2 Initial measurement / debt at fair value
+https://www.maalot.co.il/Publications/MT20251223092257.pdf
+[E_FWD_GUIDANCE] 2026-05-01 出售8-K及Exhibit99.2公开未经审计备考 | 完整May1 8-K的Ex99.1 PDF6、11、13、15–16（印刷2、7、9、11–12）
+https://investor.crowncastle.com/static-files/f4ff727f-0f13-4f18-affa-1ff461698ccf
+[E_FWD_Q1] Crown Castle Q1 2026 Form 10-Q | PDF4–6/印刷3–5；note5 PDF14/印刷13；note13–14 PDF19–20
+https://investor.crowncastle.com/static-files/de60fca2-89d5-499d-899b-8e0a23030617
+[E_FWD_Q1_XBRL] SEC Companyfacts：Crown Castle 2025年度及2026Q1原申报事实 | InterestPaidNet / InterestCostsCapitalized；accn0001051470-26-000059，2026Q1，filed2026-05-07
+https://data.sec.gov/api/xbrl/companyfacts/CIK0001051470.json
+[E_FWD_RESTRUCT_CLASS] Crown Castle 2025 Form 10-K | 2025 10K PDF89/印刷89；Q1更新已由E_FWD_Q1 note13–14支持
+https://investor.crowncastle.com/static-files/68fb84e1-1dac-440d-96b4-55b9603e10dd
+[E_R109_FRP_TABLE] Corporate Methodology | PDF29–36/¶105、108、110、116–125/Tables17–19
+https://www.maalot.co.il/Publications/MT20250709153825.pdf
+[E_R109_LIQ] Methodology And Assumptions: Liquidity Descriptors For Global Corporate Issuers | PDF4–5/¶22–32；PDF7–14/¶37–50、64、73–90
+urn:sha256:76cf8f47d56b21e8fe60597490f873d1af5dd4ff1326b9a4fa2577c022a534d4
+[E_R109_MODIFIERS] Corporate Methodology | PDF8/Table5脚注4–7；PDF38–43/Tables21–23；PDF49–50/¶186–191
+https://www.maalot.co.il/Publications/MT20250709153825.pdf
+[E_R109_NOTE_ID] Crown Castle Q1 2026 Form 10-Q | PDF13–14；另S25 PDF75/78与S_SP_Q1 PDF15交叉核
+https://investor.crowncastle.com/static-files/de60fca2-89d5-499d-899b-8e0a23030617
+[E_R109_RECOVERY] Recovery Rating Criteria For Corporate Issuers | PDF1、4、10–14、16–17、23、39、44/¶3、21–28、55–83、90–99/Appendix4/G
+https://www.maalot.co.il/Publications/MT20260405084138.pdf
+[E_SP_ARO] Crown Castle 2025 Form 10-K | PDF/印刷p65、p73–74；p80–82税务
+https://investor.crowncastle.com/static-files/68fb84e1-1dac-440d-96b4-55b9603e10dd
+[E_SP_LEASE] Crown Castle 2025 Form 10-K | PDF/印刷p58、p64、p75、p85、p87；note14
+https://investor.crowncastle.com/static-files/68fb84e1-1dac-440d-96b4-55b9603e10dd
 [E_SP_Q1CFO] Crown Castle Q1 2026 Form 10-Q | PDF6/印刷p5，2026Q1/2025Q1现金流表；PDF19–20/印刷p18–19，note13重组事项
 https://investor.crowncastle.com/static-files/de60fca2-89d5-499d-899b-8e0a23030617
-[E_SP_RENEW] Crown Castle Q4 2025 Supplemental Information | PDF13/印刷p12；TENANT OVERVIEW及脚注(a)–(f)
-https://investor.crowncastle.com/static-files/bea23792-6649-4b95-9395-aa837e68396c
-[EDISH] Crown Castle 2025 Form 10-K | note 18/p89，Subsequent Events—DISH Wireless
-https://investor.crowncastle.com/static-files/68fb84e1-1dac-440d-96b4-55b9603e10dd
-[E_SP_Q1BILL] Crown Castle Q1 2026 Supplemental Information | PDF10/印刷p9：2026Q1列，Components of changes in site rental revenues
-https://investor.crowncastle.com/static-files/38f6a584-60a8-452d-bfd2-a44103aeec82
-[E_SP_LAND] Crown Castle Q4 2025 Supplemental Information | PDF14/印刷p13：GROUND INTEREST OVERVIEW及脚注(e)–(i)
-https://investor.crowncastle.com/static-files/bea23792-6649-4b95-9395-aa837e68396c
-[E_SP_SECTORS] S&amp;P Sector-Specific Corporate Methodology — Digital Infrastructure | 2025-07-07原发、2025-09-26重发；PDF61–78数字基础设施章，尤其68–71及77
-https://www.maalot.co.il/Publications/MT20251012123218.pdf</a:t>
+[E_SP_RATIOS] S&amp;P Corporate Methodology: Ratios And Adjustments | 原发2019-04-01，2025-12-17重发，PDF7 ¶31–35；17–25 ¶86–137；44–45 ¶223–225
+https://www.maalot.co.il/Publications/MT20251223092257.pdf
+[E_SP_SCOPE] Crown Castle 2025 Form 10-K | note1/PDF及印刷p62；p60、p87–88
+https://investor.crowncastle.com/static-files/68fb84e1-1dac-440d-96b4-55b9603e10dd</a:t>
             </a:r>
             <a:endParaRPr lang="en-US" dirty="0"/>
           </a:p>
@@ -1474,76 +2745,82 @@
           <a:p>
             <a:r>
               <a:rPr lang="en-US" dirty="0"/>
-              <a:t>底稿 F10, F12, F06, F09, F14, F15, F17
-[F10] unresolved / [F12] supported / [F06] conditional / [F09] conditional / [F14] conditional / [F15] conditional / [F17] conditional
-底稿 F10 / F12 / F06 / F09 / F14 / F15 / F17；来源 S24 / S25 / SQ125 / SSEC / SQ126 / SOLDCREDIT / SCREDIT / SPROFORMA / S_SP_RATIOS / S_SP_XBRL / S_SP_Q4 / S_SP_SECTORS / S_SP_Q1
+              <a:t>底稿 FF_FORWARD_STRESS, FF_FORWARD_FUNDING, F15, fwd_joint_stress_new_draw_2028, fwd_no_new_facility_cash_payment_deficit_2026, fwd_joint_stress_CFO_2028, fwd_joint_stress_debt_EBITDA_2028
+[FF_FORWARD_STRESS] conditional / [FF_FORWARD_FUNDING] conditional / [F15] conditional
+底稿 FF_FORWARD_STRESS / FF_FORWARD_FUNDING / F15；来源 S25 / SCREDIT / SQ126 / S_SP_Q1 / S_SP_RATIOS / SPROFORMA / S_SP_XBRL / S_SP_Q4 / S_DEV_CORP / S_SP_SECTORS / S_DEV_LIQ / S_DEV_REC
 原文定位、URL及完整引用见本页备注；完整方法和明细见同名底稿及 Word/Excel。
-[E24ORIG] Crown Castle 2024 Form 10-K（原报） | 原报 p61 合并损益；note 14/p88–89 segment results，分部表p89
-https://investor.crowncastle.com/static-files/baed4489-6578-4e32-81e6-a084eea66a02
-[E25PL] Crown Castle 2025 Form 10-K | 印刷及 PDF p59，Consolidated Statement of Operations and Comprehensive Income
-https://investor.crowncastle.com/static-files/68fb84e1-1dac-440d-96b4-55b9603e10dd
-[E25HFS] Crown Castle 2025 Form 10-K | note 3，印刷及 PDF p71–72，尤其 p72 资产负债、损益及脚注 (b)(c)
-https://investor.crowncastle.com/static-files/68fb84e1-1dac-440d-96b4-55b9603e10dd
-[EQ125] Crown Castle Q1 2025 Form 10-Q 原报 | note 3，2025-03-31 held-for-sale table
-https://www.sec.gov/Archives/edgar/data/1051470/000105147025000141/cci-20250331.htm
-[ESECSALE] Crown Castle 2025-06-04 SEC comment-response letter | 公司回复 comment 2；ASC205-20-45-3A、税项及830损失/819准备/11售出费用
-https://www.sec.gov/Archives/edgar/data/1051470/000105147025000154/filename1.htm
-[EQ126HFS] Crown Castle Q1 2026 Form 10-Q | note 3 印刷 p9/PDF p10，2026/2025 比较损益、准备表、脚注 (c)
-https://investor.crowncastle.com/static-files/de60fca2-89d5-499d-899b-8e0a23030617
-[E25AUDIT] Crown Castle 2025 Form 10-K | p56–57，PwC auditor report，2026-02-23
-https://investor.crowncastle.com/static-files/68fb84e1-1dac-440d-96b4-55b9603e10dd
 [E25BS] Crown Castle 2025 Form 10-K | 印刷及 PDF p58，Consolidated Balance Sheet，2025/2024 两列
 https://investor.crowncastle.com/static-files/68fb84e1-1dac-440d-96b4-55b9603e10dd
-[E25DEBT] Crown Castle 2025 Form 10-K | note 8，p75–79 债务表、2018 Tower Revenue Notes、CP Program；MD&amp;A p40/p45
-https://investor.crowncastle.com/static-files/68fb84e1-1dac-440d-96b4-55b9603e10dd
-[E25SPE] Crown Castle 2025 Form 10-K | note 8/p77–78，2018 Tower Revenue Notes 及 2009 Securitized Notes
-https://investor.crowncastle.com/static-files/68fb84e1-1dac-440d-96b4-55b9603e10dd
-[EOLDCREDIT] 2022-07-08 Amendment No.7及附后旧信用协议 | §1.01定义：印刷p13–17/27–28/40/44/50–52；§1.04/1.05 p55–56；§6.09/6.10 p129
-https://investor.crowncastle.com/static-files/d735da3e-9136-43ce-ad76-3a96bcb686cf
-[ECREDIT] Crown Castle May 1 2026 Form 8-K and Exhibit 10.1 credit agreement | 8-K Item 1.01；协议 §1.01、§1.04/p43、§1.05/p44、§4.02/p93、§6.10/p108
+[ECREDIT] Crown Castle May 1 2026 Form 8-K and Exhibit 10.1 credit agreement | 8-K Item 1.01；协议 §1.01、§1.04/p43、§1.05/p44、§4.02/p93、§6.10/p108；Total Indebtedness印刷39/PDF49，§1.04印刷43/PDF53
 https://investor.crowncastle.com/static-files/dd7712df-51aa-4a29-b6a5-67becf7b2234
+[EQ126CF] Crown Castle Q1 2026 Form 10-Q | 印刷 p18/PDF p19 现金调节；note 5/p12 债务；MD&amp;A/p28 流动性
+https://investor.crowncastle.com/static-files/de60fca2-89d5-499d-899b-8e0a23030617
 [EQ126FAC] Crown Castle Q1 2026 Form 10-Q | note 14 印刷 p20/PDF p21；MD&amp;A/p28 May 5 balances
 https://investor.crowncastle.com/static-files/de60fca2-89d5-499d-899b-8e0a23030617
-[EOLDVERSION] Crown Castle 2025 Form 10-K | Exhibit Index p101–102，Ex10.49–10.55，尤其2022 Amendment7
-https://investor.crowncastle.com/static-files/68fb84e1-1dac-440d-96b4-55b9603e10dd
-[EQ126INDEX] Crown Castle Q1 2026 Form 10-Q | Item6 Exhibit Index，印刷p38/PDF p39
+[EQ126SALE] Crown Castle Q1 2026 Form 10-Q | note 14 印刷 p19/PDF p20，Completion of Strategic Fiber Transaction
 https://investor.crowncastle.com/static-files/de60fca2-89d5-499d-899b-8e0a23030617
-[EPROPL] 2026-05-01 出售8-K及Exhibit99.2公开未经审计备考 | Ex99.2 PDF p20损益；p21 Note2(E)
+[E_FWD_CASH_TAX] Crown Castle Q1 2026 Supplemental Information | Q1 supplement PDF12/印刷11完整Consolidated ROIC表及(a)–(f)脚注；PDF23/印刷22 Non-GAAP Measures定义
+https://investor.crowncastle.com/static-files/38f6a584-60a8-452d-bfd2-a44103aeec82
+[E_FWD_CONTRACT] Crown Castle Q1 2026 Supplemental Information | PDF9/11/13–16/18/28，印刷8/10/12–15/17/27
+https://investor.crowncastle.com/static-files/38f6a584-60a8-452d-bfd2-a44103aeec82
+[E_FWD_CREDIT_CONDITIONS] Crown Castle May 1 2026 Form 8-K and Exhibit 10.1 credit agreement | 完整协议PDF2、49、51、103、118；协议印刷39、41、93、108；§4.02/§6.10
+https://investor.crowncastle.com/static-files/dd7712df-51aa-4a29-b6a5-67becf7b2234
+[E_FWD_DEBT_MEASURE] S&amp;P Corporate Methodology: Ratios And Adjustments | PDF27/印刷27，Appendix2 Initial measurement / debt at fair value
+https://www.maalot.co.il/Publications/MT20251223092257.pdf
+[E_FWD_GUIDANCE] 2026-05-01 出售8-K及Exhibit99.2公开未经审计备考 | 完整May1 8-K的Ex99.1 PDF6、11、13、15–16（印刷2、7、9、11–12）
 https://investor.crowncastle.com/static-files/f4ff727f-0f13-4f18-affa-1ff461698ccf
-[E_SP_RATIOS] S&amp;P Corporate Methodology: Ratios And Adjustments | 原发2019-04-01，2025-12-17重发，PDF7 ¶31–35；17–25 ¶86–137；44–45 ¶223–225
-https://www.maalot.co.il/Publications/MT20251223092257.pdf
-[E_SP_CASH] Crown Castle 2025 Form 10-K | PDF/印刷p68利息表；p87补充现金流
-https://investor.crowncastle.com/static-files/68fb84e1-1dac-440d-96b4-55b9603e10dd
-[E_SP_SBC] Crown Castle 2025 Form 10-K | PDF/印刷p59、p65、p83–84
+[E_FWD_Q1] Crown Castle Q1 2026 Form 10-Q | PDF4–6/印刷3–5；note5 PDF14/印刷13；note13–14 PDF19–20
+https://investor.crowncastle.com/static-files/de60fca2-89d5-499d-899b-8e0a23030617
+[E_FWD_Q1_XBRL] SEC Companyfacts：Crown Castle 2025年度及2026Q1原申报事实 | InterestPaidNet / InterestCostsCapitalized；accn0001051470-26-000059，2026Q1，filed2026-05-07
+https://data.sec.gov/api/xbrl/companyfacts/CIK0001051470.json
+[E_FWD_RESTRUCT_CLASS] Crown Castle 2025 Form 10-K | 2025 10K PDF89/印刷89；Q1更新已由E_FWD_Q1 note13–14支持
 https://investor.crowncastle.com/static-files/68fb84e1-1dac-440d-96b4-55b9603e10dd
 [E_SP_ARO] Crown Castle 2025 Form 10-K | PDF/印刷p65、p73–74；p80–82税务
 https://investor.crowncastle.com/static-files/68fb84e1-1dac-440d-96b4-55b9603e10dd
-[E_SP_XBRL] SEC Companyfacts：Crown Castle 2025原申报事实 | facts/us-gaap/InterestPaidNet、InterestCostsCapitalized、AllocatedShareBasedCompensationExpense、ShareBasedCompensation；指定原申报accession
-https://data.sec.gov/api/xbrl/companyfacts/CIK0001051470.json
-[E25CF] Crown Castle 2025 Form 10-K | 印刷及 PDF p60，Consolidated Statement of Cash Flows
-https://investor.crowncastle.com/static-files/68fb84e1-1dac-440d-96b4-55b9603e10dd
 [E_SP_LEASE] Crown Castle 2025 Form 10-K | PDF/印刷p58、p64、p75、p85、p87；note14
 https://investor.crowncastle.com/static-files/68fb84e1-1dac-440d-96b4-55b9603e10dd
+[E_SP_Q1CFO] Crown Castle Q1 2026 Form 10-Q | PDF6/印刷p5，2026Q1/2025Q1现金流表；PDF19–20/印刷p18–19，note13重组事项
+https://investor.crowncastle.com/static-files/de60fca2-89d5-499d-899b-8e0a23030617
+[E_SP_RATIOS] S&amp;P Corporate Methodology: Ratios And Adjustments | 原发2019-04-01，2025-12-17重发，PDF7 ¶31–35；17–25 ¶86–137；44–45 ¶223–225
+https://www.maalot.co.il/Publications/MT20251223092257.pdf
 [E_SP_SCOPE] Crown Castle 2025 Form 10-K | note1/PDF及印刷p62；p60、p87–88
 https://investor.crowncastle.com/static-files/68fb84e1-1dac-440d-96b4-55b9603e10dd
-[E25CASH] Crown Castle 2025 Form 10-K | note 16，印刷及 PDF p88，cash reconciliation table
-https://investor.crowncastle.com/static-files/68fb84e1-1dac-440d-96b4-55b9603e10dd
-[EPROBASIS] 2026-05-01 出售8-K及Exhibit99.2公开未经审计备考 | Ex99.2 PDF p18编制基础；p21 Note1
-https://investor.crowncastle.com/static-files/f4ff727f-0f13-4f18-affa-1ff461698ccf
-[EPROBS] 2026-05-01 出售8-K及Exhibit99.2公开未经审计备考 | Ex99.2 PDF p19资产负债表；p21 Note2(A)–(D)
-https://investor.crowncastle.com/static-files/f4ff727f-0f13-4f18-affa-1ff461698ccf
-[EQ126SALE] Crown Castle Q1 2026 Form 10-Q | note 14 印刷 p19/PDF p20，Completion of Strategic Fiber Transaction
-https://investor.crowncastle.com/static-files/de60fca2-89d5-499d-899b-8e0a23030617
 [E_SP_LAND] Crown Castle Q4 2025 Supplemental Information | PDF14/印刷p13：GROUND INTEREST OVERVIEW及脚注(e)–(i)
 https://investor.crowncastle.com/static-files/bea23792-6649-4b95-9395-aa837e68396c
 [E_SP_RENEW] Crown Castle Q4 2025 Supplemental Information | PDF13/印刷p12；TENANT OVERVIEW及脚注(a)–(f)
 https://investor.crowncastle.com/static-files/bea23792-6649-4b95-9395-aa837e68396c
-[E_SP_SECTORS] S&amp;P Sector-Specific Corporate Methodology — Digital Infrastructure | 2025-07-07原发、2025-09-26重发；PDF61–78数字基础设施章，尤其68–71及77
+[E_CG_DRAW] Crown Castle May 1 2026 Form 8-K and Exhibit 10.1 credit agreement | 新8-K PDF2；§1.01 Borrower PDF19、Default PDF24、Unrestricted PDF51；§4.02印刷93/PDF103；§6.10印刷108/PDF118；ArticleVII(d)/(e)印刷109/PDF119；(g)印刷110/PDF120
+https://investor.crowncastle.com/static-files/dd7712df-51aa-4a29-b6a5-67becf7b2234
+[E_CG_RP] Crown Castle May 1 2026 Form 8-K and Exhibit 10.1 credit agreement | 新协议§1.01 Restricted Payment/Restricted Subsidiary PDF45；§6.06印刷105–106/PDF115–116
+https://investor.crowncastle.com/static-files/dd7712df-51aa-4a29-b6a5-67becf7b2234
+[E_R109_FRP_TABLE] Corporate Methodology | PDF29–36/¶105、108、110、116–125/Tables17–19
+https://www.maalot.co.il/Publications/MT20250709153825.pdf
+[E_DEV_DI] S&amp;P Sector-Specific Corporate Methodology — Digital Infrastructure | PDF61–63、68–71、73、76–77
 https://www.maalot.co.il/Publications/MT20251012123218.pdf
-[E_SP_Q1BILL] Crown Castle Q1 2026 Supplemental Information | PDF10/印刷p9：2026Q1列，Components of changes in site rental revenues
+[E_DEV_CASH_CONTRACT] Crown Castle Q1 2026 Supplemental Information | PDF13–14
 https://investor.crowncastle.com/static-files/38f6a584-60a8-452d-bfd2-a44103aeec82
-[EDISH] Crown Castle 2025 Form 10-K | note 18/p89，Subsequent Events—DISH Wireless
-https://investor.crowncastle.com/static-files/68fb84e1-1dac-440d-96b4-55b9603e10dd</a:t>
+[E_DEV_CORP] Corporate Methodology | PDF4–12、21–22、24–28、30–44、47–50；Tables1/2/3/5/14–19/21–25及¶40–50/91–92/112–125/136–191
+https://www.maalot.co.il/Publications/MT20250709153825.pdf
+[E_DEV_CP] Crown Castle 2025 Form 10-K | PDF4–8、17–19、36–38；Q1 supplement另见E_DEV_CASH_CONTRACT
+https://investor.crowncastle.com/static-files/68fb84e1-1dac-440d-96b4-55b9603e10dd
+[E_DEV_CREDIT] Crown Castle May 1 2026 Form 8-K and Exhibit 10.1 credit agreement | PDF11、22–24、40–41、49、51、103、118及公开8K摘要
+https://investor.crowncastle.com/static-files/dd7712df-51aa-4a29-b6a5-67becf7b2234
+[E_DEV_FACE] Crown Castle Q1 2026 Supplemental Information | PDF15/印14，Capitalization Overview，Face Value
+https://investor.crowncastle.com/static-files/38f6a584-60a8-452d-bfd2-a44103aeec82
+[E_DEV_NOTE] Crown Castle Q1 2026 Form 10-Q | 2026Q1 10Q PDF13–14，Debt and Other Obligations
+https://investor.crowncastle.com/static-files/de60fca2-89d5-499d-899b-8e0a23030617
+[E_DEV_NOTE_GUAR] Crown Castle 2025 Form 10-K | PDF75、77–79，Senior Notes/Securitized Debt
+https://investor.crowncastle.com/static-files/68fb84e1-1dac-440d-96b4-55b9603e10dd
+[E_DEV_TOWER_RIGHTS] Crown Castle 2025 Form 10-K | PDF4、7、17–18及77–79
+https://investor.crowncastle.com/static-files/68fb84e1-1dac-440d-96b4-55b9603e10dd
+[E_R109_LIQ] Methodology And Assumptions: Liquidity Descriptors For Global Corporate Issuers | PDF4–5/¶22–32；PDF7–14/¶37–50、64、73–90
+urn:sha256:76cf8f47d56b21e8fe60597490f873d1af5dd4ff1326b9a4fa2577c022a534d4
+[E_R109_MODIFIERS] Corporate Methodology | PDF8/Table5脚注4–7；PDF38–43/Tables21–23；PDF49–50/¶186–191
+https://www.maalot.co.il/Publications/MT20250709153825.pdf
+[E_R109_NOTE_ID] Crown Castle Q1 2026 Form 10-Q | PDF13–14；另S25 PDF75/78与S_SP_Q1 PDF15交叉核
+https://investor.crowncastle.com/static-files/de60fca2-89d5-499d-899b-8e0a23030617
+[E_R109_RECOVERY] Recovery Rating Criteria For Corporate Issuers | PDF1、4、10–14、16–17、23、39、44/¶3、21–28、55–83、90–99/Appendix4/G
+https://www.maalot.co.il/Publications/MT20260405084138.pdf</a:t>
             </a:r>
             <a:endParaRPr lang="en-US" dirty="0"/>
           </a:p>
@@ -2008,7 +3285,7 @@
                   <a:srgbClr val="B9D1CC"/>
                 </a:solidFill>
               </a:rPr>
-              <a:t>Crown Castle Inc. and subsidiaries  |  2025-12-31  |  crown-castle-2025-public-3  |  1</a:t>
+              <a:t>Crown Castle Inc. and subsidiaries  |  2025-12-31  |  crown-castle-2025-public-4  |  1</a:t>
             </a:r>
             <a:endParaRPr lang="en-US" sz="900" dirty="0"/>
           </a:p>
@@ -2047,7 +3324,7 @@
                   <a:srgbClr val="FFFFFF"/>
                 </a:solidFill>
               </a:rPr>
-              <a:t>通过四表、附注、出售协议及信用协议分析交易会计、现金资源和债务约束，</a:t>
+              <a:t>连接实际报告与交易、售后经营现金和债务预测，形成有原文依据、可复算且</a:t>
             </a:r>
             <a:endParaRPr lang="en-US" sz="2400" dirty="0"/>
           </a:p>
@@ -2064,7 +3341,7 @@
                   <a:srgbClr val="FFFFFF"/>
                 </a:solidFill>
               </a:rPr>
-              <a:t>形成可复算的公开资料研究成果。</a:t>
+              <a:t>明确成立条件的主体与指定票据信用研究。</a:t>
             </a:r>
             <a:endParaRPr lang="en-US" sz="2400" dirty="0"/>
           </a:p>
@@ -2166,9 +3443,3609 @@
                   <a:srgbClr val="FFFFFF"/>
                 </a:solidFill>
               </a:rPr>
-              <a:t>来源 SSEC, SFASB 公布日期未核验。不得将当前内容分析称为历史时点可用性验证。</a:t>
+              <a:t>来源 SSEC, SFASB, S_SP_XBRL 未列单一公布日期；各期公开日与可用性说明见来源记录及备注。</a:t>
             </a:r>
             <a:endParaRPr lang="en-US" sz="1600" dirty="0"/>
+          </a:p>
+        </p:txBody>
+      </p:sp>
+    </p:spTree>
+  </p:cSld>
+  <p:clrMapOvr>
+    <a:masterClrMapping/>
+  </p:clrMapOvr>
+</p:sld>
+</file>
+
+<file path=ppt/slides/slide10.xml><?xml version="1.0" encoding="utf-8"?>
+<p:sld xmlns:a="http://schemas.openxmlformats.org/drawingml/2006/main" xmlns:r="http://schemas.openxmlformats.org/officeDocument/2006/relationships" xmlns:p="http://schemas.openxmlformats.org/presentationml/2006/main">
+  <p:cSld name="Slide 10">
+    <p:bg>
+      <p:bgPr>
+        <a:solidFill>
+          <a:srgbClr val="F5F7F6"/>
+        </a:solidFill>
+      </p:bgPr>
+    </p:bg>
+    <p:spTree>
+      <p:nvGrpSpPr>
+        <p:cNvPr id="1" name=""/>
+        <p:cNvGrpSpPr/>
+        <p:nvPr/>
+      </p:nvGrpSpPr>
+      <p:grpSpPr>
+        <a:xfrm>
+          <a:off x="0" y="0"/>
+          <a:ext cx="0" cy="0"/>
+          <a:chOff x="0" y="0"/>
+          <a:chExt cx="0" cy="0"/>
+        </a:xfrm>
+      </p:grpSpPr>
+      <p:sp>
+        <p:nvSpPr>
+          <p:cNvPr id="2" name="Text 0"/>
+          <p:cNvSpPr/>
+          <p:nvPr/>
+        </p:nvSpPr>
+        <p:spPr>
+          <a:xfrm>
+            <a:off x="548640" y="365760"/>
+            <a:ext cx="11064240" cy="731520"/>
+          </a:xfrm>
+          <a:prstGeom prst="rect">
+            <a:avLst/>
+          </a:prstGeom>
+          <a:noFill/>
+          <a:ln/>
+        </p:spPr>
+        <p:txBody>
+          <a:bodyPr wrap="square" lIns="0" tIns="0" rIns="0" bIns="0" rtlCol="0" anchor="t"/>
+          <a:lstStyle/>
+          <a:p>
+            <a:pPr indent="0" marL="0">
+              <a:lnSpc>
+                <a:spcPct val="100000"/>
+              </a:lnSpc>
+              <a:buNone/>
+            </a:pPr>
+            <a:r>
+              <a:rPr lang="en-US" sz="2700" b="1" dirty="0">
+                <a:solidFill>
+                  <a:srgbClr val="213B45"/>
+                </a:solidFill>
+              </a:rPr>
+              <a:t>六月十二个月流动性已经形成可核对的资金条件 1/2</a:t>
+            </a:r>
+            <a:endParaRPr lang="en-US" sz="2700" dirty="0"/>
+          </a:p>
+        </p:txBody>
+      </p:sp>
+      <p:sp>
+        <p:nvSpPr>
+          <p:cNvPr id="3" name="Text 1"/>
+          <p:cNvSpPr/>
+          <p:nvPr/>
+        </p:nvSpPr>
+        <p:spPr>
+          <a:xfrm>
+            <a:off x="548640" y="6473952"/>
+            <a:ext cx="11064240" cy="182880"/>
+          </a:xfrm>
+          <a:prstGeom prst="rect">
+            <a:avLst/>
+          </a:prstGeom>
+          <a:noFill/>
+          <a:ln/>
+        </p:spPr>
+        <p:txBody>
+          <a:bodyPr wrap="square" lIns="0" tIns="0" rIns="0" bIns="0" rtlCol="0" anchor="ctr"/>
+          <a:lstStyle/>
+          <a:p>
+            <a:pPr indent="0" marL="0">
+              <a:buNone/>
+            </a:pPr>
+            <a:r>
+              <a:rPr lang="en-US" sz="900" dirty="0">
+                <a:solidFill>
+                  <a:srgbClr val="586874"/>
+                </a:solidFill>
+              </a:rPr>
+              <a:t>Crown Castle Inc. and subsidiaries  |  2025-12-31  |  crown-castle-2025-public-4  |  10</a:t>
+            </a:r>
+            <a:endParaRPr lang="en-US" sz="900" dirty="0"/>
+          </a:p>
+        </p:txBody>
+      </p:sp>
+      <p:sp>
+        <p:nvSpPr>
+          <p:cNvPr id="4" name="Text 2"/>
+          <p:cNvSpPr/>
+          <p:nvPr/>
+        </p:nvSpPr>
+        <p:spPr>
+          <a:xfrm>
+            <a:off x="594360" y="1417320"/>
+            <a:ext cx="7223760" cy="3794760"/>
+          </a:xfrm>
+          <a:prstGeom prst="rect">
+            <a:avLst/>
+          </a:prstGeom>
+          <a:noFill/>
+          <a:ln/>
+        </p:spPr>
+        <p:txBody>
+          <a:bodyPr wrap="square" lIns="0" tIns="0" rIns="0" bIns="0" rtlCol="0" anchor="t"/>
+          <a:lstStyle/>
+          <a:p>
+            <a:pPr indent="0" marL="0">
+              <a:lnSpc>
+                <a:spcPct val="100000"/>
+              </a:lnSpc>
+              <a:buNone/>
+            </a:pPr>
+            <a:r>
+              <a:rPr lang="en-US" sz="1800" dirty="0">
+                <a:solidFill>
+                  <a:srgbClr val="1F2933"/>
+                </a:solidFill>
+              </a:rPr>
+              <a:t>窗口为July2026至June2027，按相同现金分类连接</a:t>
+            </a:r>
+            <a:endParaRPr lang="en-US" sz="1800" dirty="0"/>
+          </a:p>
+          <a:p>
+            <a:pPr indent="0" marL="0">
+              <a:lnSpc>
+                <a:spcPct val="100000"/>
+              </a:lnSpc>
+              <a:buNone/>
+            </a:pPr>
+            <a:r>
+              <a:rPr lang="en-US" sz="1800" dirty="0">
+                <a:solidFill>
+                  <a:srgbClr val="1F2933"/>
+                </a:solidFill>
+              </a:rPr>
+              <a:t>经营现金、资本支出、分配及未提前偿还的本金。J为六月实际普通</a:t>
+            </a:r>
+            <a:endParaRPr lang="en-US" sz="1800" dirty="0"/>
+          </a:p>
+          <a:p>
+            <a:pPr indent="0" marL="0">
+              <a:lnSpc>
+                <a:spcPct val="100000"/>
+              </a:lnSpc>
+              <a:buNone/>
+            </a:pPr>
+            <a:r>
+              <a:rPr lang="en-US" sz="1800" dirty="0">
+                <a:solidFill>
+                  <a:srgbClr val="1F2933"/>
+                </a:solidFill>
+              </a:rPr>
+              <a:t>现金，V为合格未提资金，U为净额外用途，W为已从CFO扣除的</a:t>
+            </a:r>
+            <a:endParaRPr lang="en-US" sz="1800" dirty="0"/>
+          </a:p>
+          <a:p>
+            <a:pPr indent="0" marL="0">
+              <a:lnSpc>
+                <a:spcPct val="100000"/>
+              </a:lnSpc>
+              <a:buNone/>
+            </a:pPr>
+            <a:r>
+              <a:rPr lang="en-US" sz="1800" dirty="0">
+                <a:solidFill>
+                  <a:srgbClr val="1F2933"/>
+                </a:solidFill>
+              </a:rPr>
+              <a:t>负营运资金。</a:t>
+            </a:r>
+            <a:endParaRPr lang="en-US" sz="1800" dirty="0"/>
+          </a:p>
+          <a:p>
+            <a:pPr indent="0" marL="0">
+              <a:lnSpc>
+                <a:spcPct val="100000"/>
+              </a:lnSpc>
+              <a:buNone/>
+            </a:pPr>
+            <a:endParaRPr lang="en-US" sz="1800" dirty="0"/>
+          </a:p>
+          <a:p>
+            <a:pPr indent="0" marL="0">
+              <a:lnSpc>
+                <a:spcPct val="100000"/>
+              </a:lnSpc>
+              <a:buNone/>
+            </a:pPr>
+            <a:r>
+              <a:rPr lang="en-US" sz="1800" dirty="0">
+                <a:solidFill>
+                  <a:srgbClr val="1F2933"/>
+                </a:solidFill>
+              </a:rPr>
+              <a:t>A=J+CFO+W+V；B=B0+U+W。达到</a:t>
+            </a:r>
+            <a:endParaRPr lang="en-US" sz="1800" dirty="0"/>
+          </a:p>
+          <a:p>
+            <a:pPr indent="0" marL="0">
+              <a:lnSpc>
+                <a:spcPct val="100000"/>
+              </a:lnSpc>
+              <a:buNone/>
+            </a:pPr>
+            <a:r>
+              <a:rPr lang="en-US" sz="1800" dirty="0">
+                <a:solidFill>
+                  <a:srgbClr val="1F2933"/>
+                </a:solidFill>
+              </a:rPr>
+              <a:t>adequate的数量条件仍随U/W和额外付息改变，且另须</a:t>
+            </a:r>
+            <a:endParaRPr lang="en-US" sz="1800" dirty="0"/>
+          </a:p>
+          <a:p>
+            <a:pPr indent="0" marL="0">
+              <a:lnSpc>
+                <a:spcPct val="100000"/>
+              </a:lnSpc>
+              <a:buNone/>
+            </a:pPr>
+            <a:r>
+              <a:rPr lang="en-US" sz="1800" dirty="0">
+                <a:solidFill>
+                  <a:srgbClr val="1F2933"/>
+                </a:solidFill>
+              </a:rPr>
+              <a:t>定性特征、具体付款时点与契约余量。</a:t>
+            </a:r>
+            <a:endParaRPr lang="en-US" sz="1800" dirty="0"/>
+          </a:p>
+          <a:p>
+            <a:pPr indent="0" marL="0">
+              <a:lnSpc>
+                <a:spcPct val="100000"/>
+              </a:lnSpc>
+              <a:buNone/>
+            </a:pPr>
+            <a:endParaRPr lang="en-US" sz="1800" dirty="0"/>
+          </a:p>
+          <a:p>
+            <a:pPr indent="0" marL="0">
+              <a:lnSpc>
+                <a:spcPct val="100000"/>
+              </a:lnSpc>
+              <a:buNone/>
+            </a:pPr>
+            <a:r>
+              <a:rPr lang="en-US" sz="1800" dirty="0">
+                <a:solidFill>
+                  <a:srgbClr val="1F2933"/>
+                </a:solidFill>
+              </a:rPr>
+              <a:t>CP到期与备用额度只计一次，名义授信须扣实际占用并核提款</a:t>
+            </a:r>
+            <a:endParaRPr lang="en-US" sz="1800" dirty="0"/>
+          </a:p>
+          <a:p>
+            <a:pPr indent="0" marL="0">
+              <a:lnSpc>
+                <a:spcPct val="100000"/>
+              </a:lnSpc>
+              <a:buNone/>
+            </a:pPr>
+            <a:r>
+              <a:rPr lang="en-US" sz="1800" dirty="0">
+                <a:solidFill>
+                  <a:srgbClr val="1F2933"/>
+                </a:solidFill>
+              </a:rPr>
+              <a:t>条件；未承销市场融资和年度现金阈值不能补成实际来源。</a:t>
+            </a:r>
+            <a:endParaRPr lang="en-US" sz="1800" dirty="0"/>
+          </a:p>
+        </p:txBody>
+      </p:sp>
+      <p:sp>
+        <p:nvSpPr>
+          <p:cNvPr id="5" name="Shape 3"/>
+          <p:cNvSpPr/>
+          <p:nvPr/>
+        </p:nvSpPr>
+        <p:spPr>
+          <a:xfrm>
+            <a:off x="8046720" y="1325880"/>
+            <a:ext cx="3566160" cy="4069080"/>
+          </a:xfrm>
+          <a:prstGeom prst="rect">
+            <a:avLst/>
+          </a:prstGeom>
+          <a:solidFill>
+            <a:srgbClr val="E6EFEC"/>
+          </a:solidFill>
+          <a:ln w="12700">
+            <a:solidFill>
+              <a:srgbClr val="E6EFEC"/>
+            </a:solidFill>
+            <a:prstDash val="solid"/>
+          </a:ln>
+        </p:spPr>
+      </p:sp>
+      <p:sp>
+        <p:nvSpPr>
+          <p:cNvPr id="6" name="Text 4"/>
+          <p:cNvSpPr/>
+          <p:nvPr/>
+        </p:nvSpPr>
+        <p:spPr>
+          <a:xfrm>
+            <a:off x="8211312" y="1417320"/>
+            <a:ext cx="3246120" cy="3794760"/>
+          </a:xfrm>
+          <a:prstGeom prst="rect">
+            <a:avLst/>
+          </a:prstGeom>
+          <a:noFill/>
+          <a:ln/>
+        </p:spPr>
+        <p:txBody>
+          <a:bodyPr wrap="square" lIns="0" tIns="0" rIns="0" bIns="0" rtlCol="0" anchor="t"/>
+          <a:lstStyle/>
+          <a:p>
+            <a:pPr indent="0" marL="0">
+              <a:lnSpc>
+                <a:spcPct val="100000"/>
+              </a:lnSpc>
+              <a:buNone/>
+            </a:pPr>
+            <a:r>
+              <a:rPr lang="en-US" sz="1600" dirty="0">
+                <a:solidFill>
+                  <a:srgbClr val="237F72"/>
+                </a:solidFill>
+              </a:rPr>
+              <a:t>Jul2026-Jun2027</a:t>
+            </a:r>
+            <a:endParaRPr lang="en-US" sz="1600" dirty="0"/>
+          </a:p>
+          <a:p>
+            <a:pPr indent="0" marL="0">
+              <a:lnSpc>
+                <a:spcPct val="100000"/>
+              </a:lnSpc>
+              <a:buNone/>
+            </a:pPr>
+            <a:r>
+              <a:rPr lang="en-US" sz="1600" dirty="0">
+                <a:solidFill>
+                  <a:srgbClr val="237F72"/>
+                </a:solidFill>
+              </a:rPr>
+              <a:t> displayed uses</a:t>
+            </a:r>
+            <a:endParaRPr lang="en-US" sz="1600" dirty="0"/>
+          </a:p>
+          <a:p>
+            <a:pPr indent="0" marL="0">
+              <a:lnSpc>
+                <a:spcPct val="100000"/>
+              </a:lnSpc>
+              <a:buNone/>
+            </a:pPr>
+            <a:r>
+              <a:rPr lang="en-US" sz="1600" dirty="0">
+                <a:solidFill>
+                  <a:srgbClr val="237F72"/>
+                </a:solidFill>
+              </a:rPr>
+              <a:t> subtotal</a:t>
+            </a:r>
+            <a:endParaRPr lang="en-US" sz="1600" dirty="0"/>
+          </a:p>
+          <a:p>
+            <a:pPr indent="0" marL="0">
+              <a:lnSpc>
+                <a:spcPct val="100000"/>
+              </a:lnSpc>
+              <a:buNone/>
+            </a:pPr>
+            <a:r>
+              <a:rPr lang="en-US" sz="1600" dirty="0">
+                <a:solidFill>
+                  <a:srgbClr val="237F72"/>
+                </a:solidFill>
+              </a:rPr>
+              <a:t>4,437.42 百万USD</a:t>
+            </a:r>
+            <a:endParaRPr lang="en-US" sz="1600" dirty="0"/>
+          </a:p>
+          <a:p>
+            <a:pPr indent="0" marL="0">
+              <a:lnSpc>
+                <a:spcPct val="100000"/>
+              </a:lnSpc>
+              <a:buNone/>
+            </a:pPr>
+            <a:endParaRPr lang="en-US" sz="1600" dirty="0"/>
+          </a:p>
+          <a:p>
+            <a:pPr indent="0" marL="0">
+              <a:lnSpc>
+                <a:spcPct val="100000"/>
+              </a:lnSpc>
+              <a:buNone/>
+            </a:pPr>
+            <a:r>
+              <a:rPr lang="en-US" sz="1600" dirty="0">
+                <a:solidFill>
+                  <a:srgbClr val="237F72"/>
+                </a:solidFill>
+              </a:rPr>
+              <a:t>Necessary June </a:t>
+            </a:r>
+            <a:endParaRPr lang="en-US" sz="1600" dirty="0"/>
+          </a:p>
+          <a:p>
+            <a:pPr indent="0" marL="0">
+              <a:lnSpc>
+                <a:spcPct val="100000"/>
+              </a:lnSpc>
+              <a:buNone/>
+            </a:pPr>
+            <a:r>
+              <a:rPr lang="en-US" sz="1600" dirty="0">
+                <a:solidFill>
+                  <a:srgbClr val="237F72"/>
+                </a:solidFill>
+              </a:rPr>
+              <a:t>cash plus </a:t>
+            </a:r>
+            <a:endParaRPr lang="en-US" sz="1600" dirty="0"/>
+          </a:p>
+          <a:p>
+            <a:pPr indent="0" marL="0">
+              <a:lnSpc>
+                <a:spcPct val="100000"/>
+              </a:lnSpc>
+              <a:buNone/>
+            </a:pPr>
+            <a:r>
+              <a:rPr lang="en-US" sz="1600" dirty="0">
+                <a:solidFill>
+                  <a:srgbClr val="237F72"/>
+                </a:solidFill>
+              </a:rPr>
+              <a:t>qualified </a:t>
+            </a:r>
+            <a:endParaRPr lang="en-US" sz="1600" dirty="0"/>
+          </a:p>
+          <a:p>
+            <a:pPr indent="0" marL="0">
+              <a:lnSpc>
+                <a:spcPct val="100000"/>
+              </a:lnSpc>
+              <a:buNone/>
+            </a:pPr>
+            <a:r>
+              <a:rPr lang="en-US" sz="1600" dirty="0">
+                <a:solidFill>
+                  <a:srgbClr val="237F72"/>
+                </a:solidFill>
+              </a:rPr>
+              <a:t>facilities for </a:t>
+            </a:r>
+            <a:endParaRPr lang="en-US" sz="1600" dirty="0"/>
+          </a:p>
+          <a:p>
+            <a:pPr indent="0" marL="0">
+              <a:lnSpc>
+                <a:spcPct val="100000"/>
+              </a:lnSpc>
+              <a:buNone/>
+            </a:pPr>
+            <a:r>
+              <a:rPr lang="en-US" sz="1600" dirty="0">
+                <a:solidFill>
+                  <a:srgbClr val="237F72"/>
+                </a:solidFill>
+              </a:rPr>
+              <a:t>A/B test</a:t>
+            </a:r>
+            <a:endParaRPr lang="en-US" sz="1600" dirty="0"/>
+          </a:p>
+          <a:p>
+            <a:pPr indent="0" marL="0">
+              <a:lnSpc>
+                <a:spcPct val="100000"/>
+              </a:lnSpc>
+              <a:buNone/>
+            </a:pPr>
+            <a:r>
+              <a:rPr lang="en-US" sz="1600" dirty="0">
+                <a:solidFill>
+                  <a:srgbClr val="237F72"/>
+                </a:solidFill>
+              </a:rPr>
+              <a:t>3,287.19 百万USD</a:t>
+            </a:r>
+            <a:endParaRPr lang="en-US" sz="1600" dirty="0"/>
+          </a:p>
+        </p:txBody>
+      </p:sp>
+      <p:sp>
+        <p:nvSpPr>
+          <p:cNvPr id="7" name="Text 5"/>
+          <p:cNvSpPr/>
+          <p:nvPr/>
+        </p:nvSpPr>
+        <p:spPr>
+          <a:xfrm>
+            <a:off x="594360" y="5321808"/>
+            <a:ext cx="10972800" cy="365760"/>
+          </a:xfrm>
+          <a:prstGeom prst="rect">
+            <a:avLst/>
+          </a:prstGeom>
+          <a:noFill/>
+          <a:ln/>
+        </p:spPr>
+        <p:txBody>
+          <a:bodyPr wrap="square" lIns="0" tIns="0" rIns="0" bIns="0" rtlCol="0" anchor="t"/>
+          <a:lstStyle/>
+          <a:p>
+            <a:pPr indent="0" marL="0">
+              <a:lnSpc>
+                <a:spcPct val="100000"/>
+              </a:lnSpc>
+              <a:buNone/>
+            </a:pPr>
+            <a:r>
+              <a:rPr lang="en-US" sz="1100" dirty="0">
+                <a:solidFill>
+                  <a:srgbClr val="213B45"/>
+                </a:solidFill>
+              </a:rPr>
+              <a:t>[F05] conditional / [cg_cash_spe] conditional / [cg_payment_rights] </a:t>
+            </a:r>
+            <a:endParaRPr lang="en-US" sz="1100" dirty="0"/>
+          </a:p>
+          <a:p>
+            <a:pPr indent="0" marL="0">
+              <a:lnSpc>
+                <a:spcPct val="100000"/>
+              </a:lnSpc>
+              <a:buNone/>
+            </a:pPr>
+            <a:r>
+              <a:rPr lang="en-US" sz="1100" dirty="0">
+                <a:solidFill>
+                  <a:srgbClr val="213B45"/>
+                </a:solidFill>
+              </a:rPr>
+              <a:t>conditional</a:t>
+            </a:r>
+            <a:endParaRPr lang="en-US" sz="1100" dirty="0"/>
+          </a:p>
+        </p:txBody>
+      </p:sp>
+      <p:sp>
+        <p:nvSpPr>
+          <p:cNvPr id="8" name="Text 6"/>
+          <p:cNvSpPr/>
+          <p:nvPr/>
+        </p:nvSpPr>
+        <p:spPr>
+          <a:xfrm>
+            <a:off x="594360" y="5715000"/>
+            <a:ext cx="10972800" cy="731520"/>
+          </a:xfrm>
+          <a:prstGeom prst="rect">
+            <a:avLst/>
+          </a:prstGeom>
+          <a:noFill/>
+          <a:ln/>
+        </p:spPr>
+        <p:txBody>
+          <a:bodyPr wrap="square" lIns="0" tIns="0" rIns="0" bIns="0" rtlCol="0" anchor="t"/>
+          <a:lstStyle/>
+          <a:p>
+            <a:pPr indent="0" marL="0">
+              <a:lnSpc>
+                <a:spcPct val="100000"/>
+              </a:lnSpc>
+              <a:buNone/>
+            </a:pPr>
+            <a:r>
+              <a:rPr lang="en-US" sz="1000" dirty="0">
+                <a:solidFill>
+                  <a:srgbClr val="586874"/>
+                </a:solidFill>
+              </a:rPr>
+              <a:t>底稿 F05 / cg_cash_spe / cg_payment_rights；来源 S25 / SCREDIT / SQ126 / S_SP_Q1 / </a:t>
+            </a:r>
+            <a:endParaRPr lang="en-US" sz="1000" dirty="0"/>
+          </a:p>
+          <a:p>
+            <a:pPr indent="0" marL="0">
+              <a:lnSpc>
+                <a:spcPct val="100000"/>
+              </a:lnSpc>
+              <a:buNone/>
+            </a:pPr>
+            <a:r>
+              <a:rPr lang="en-US" sz="1000" dirty="0">
+                <a:solidFill>
+                  <a:srgbClr val="586874"/>
+                </a:solidFill>
+              </a:rPr>
+              <a:t>S_DEV_CORP / S_SP_SECTORS / S_SP_RATIOS / SPROFORMA / S_SP_XBRL / S_DEV_LIQ / </a:t>
+            </a:r>
+            <a:endParaRPr lang="en-US" sz="1000" dirty="0"/>
+          </a:p>
+          <a:p>
+            <a:pPr indent="0" marL="0">
+              <a:lnSpc>
+                <a:spcPct val="100000"/>
+              </a:lnSpc>
+              <a:buNone/>
+            </a:pPr>
+            <a:r>
+              <a:rPr lang="en-US" sz="1000" dirty="0">
+                <a:solidFill>
+                  <a:srgbClr val="586874"/>
+                </a:solidFill>
+              </a:rPr>
+              <a:t>S_DEV_REC</a:t>
+            </a:r>
+            <a:endParaRPr lang="en-US" sz="1000" dirty="0"/>
+          </a:p>
+          <a:p>
+            <a:pPr indent="0" marL="0">
+              <a:lnSpc>
+                <a:spcPct val="100000"/>
+              </a:lnSpc>
+              <a:buNone/>
+            </a:pPr>
+            <a:r>
+              <a:rPr lang="en-US" sz="1000" dirty="0">
+                <a:solidFill>
+                  <a:srgbClr val="586874"/>
+                </a:solidFill>
+              </a:rPr>
+              <a:t>原文定位、URL及完整引用见本页备注；完整方法和明细见同名底稿及 Word/Excel。</a:t>
+            </a:r>
+            <a:endParaRPr lang="en-US" sz="1000" dirty="0"/>
+          </a:p>
+        </p:txBody>
+      </p:sp>
+    </p:spTree>
+  </p:cSld>
+  <p:clrMapOvr>
+    <a:masterClrMapping/>
+  </p:clrMapOvr>
+</p:sld>
+</file>
+
+<file path=ppt/slides/slide11.xml><?xml version="1.0" encoding="utf-8"?>
+<p:sld xmlns:a="http://schemas.openxmlformats.org/drawingml/2006/main" xmlns:r="http://schemas.openxmlformats.org/officeDocument/2006/relationships" xmlns:p="http://schemas.openxmlformats.org/presentationml/2006/main">
+  <p:cSld name="Slide 11">
+    <p:bg>
+      <p:bgPr>
+        <a:solidFill>
+          <a:srgbClr val="F5F7F6"/>
+        </a:solidFill>
+      </p:bgPr>
+    </p:bg>
+    <p:spTree>
+      <p:nvGrpSpPr>
+        <p:cNvPr id="1" name=""/>
+        <p:cNvGrpSpPr/>
+        <p:nvPr/>
+      </p:nvGrpSpPr>
+      <p:grpSpPr>
+        <a:xfrm>
+          <a:off x="0" y="0"/>
+          <a:ext cx="0" cy="0"/>
+          <a:chOff x="0" y="0"/>
+          <a:chExt cx="0" cy="0"/>
+        </a:xfrm>
+      </p:grpSpPr>
+      <p:sp>
+        <p:nvSpPr>
+          <p:cNvPr id="2" name="Text 0"/>
+          <p:cNvSpPr/>
+          <p:nvPr/>
+        </p:nvSpPr>
+        <p:spPr>
+          <a:xfrm>
+            <a:off x="548640" y="365760"/>
+            <a:ext cx="11064240" cy="731520"/>
+          </a:xfrm>
+          <a:prstGeom prst="rect">
+            <a:avLst/>
+          </a:prstGeom>
+          <a:noFill/>
+          <a:ln/>
+        </p:spPr>
+        <p:txBody>
+          <a:bodyPr wrap="square" lIns="0" tIns="0" rIns="0" bIns="0" rtlCol="0" anchor="t"/>
+          <a:lstStyle/>
+          <a:p>
+            <a:pPr indent="0" marL="0">
+              <a:lnSpc>
+                <a:spcPct val="100000"/>
+              </a:lnSpc>
+              <a:buNone/>
+            </a:pPr>
+            <a:r>
+              <a:rPr lang="en-US" sz="2700" b="1" dirty="0">
+                <a:solidFill>
+                  <a:srgbClr val="213B45"/>
+                </a:solidFill>
+              </a:rPr>
+              <a:t>六月十二个月流动性已经形成可核对的资金条件 2/2</a:t>
+            </a:r>
+            <a:endParaRPr lang="en-US" sz="2700" dirty="0"/>
+          </a:p>
+        </p:txBody>
+      </p:sp>
+      <p:sp>
+        <p:nvSpPr>
+          <p:cNvPr id="3" name="Text 1"/>
+          <p:cNvSpPr/>
+          <p:nvPr/>
+        </p:nvSpPr>
+        <p:spPr>
+          <a:xfrm>
+            <a:off x="548640" y="6473952"/>
+            <a:ext cx="11064240" cy="182880"/>
+          </a:xfrm>
+          <a:prstGeom prst="rect">
+            <a:avLst/>
+          </a:prstGeom>
+          <a:noFill/>
+          <a:ln/>
+        </p:spPr>
+        <p:txBody>
+          <a:bodyPr wrap="square" lIns="0" tIns="0" rIns="0" bIns="0" rtlCol="0" anchor="ctr"/>
+          <a:lstStyle/>
+          <a:p>
+            <a:pPr indent="0" marL="0">
+              <a:buNone/>
+            </a:pPr>
+            <a:r>
+              <a:rPr lang="en-US" sz="900" dirty="0">
+                <a:solidFill>
+                  <a:srgbClr val="586874"/>
+                </a:solidFill>
+              </a:rPr>
+              <a:t>Crown Castle Inc. and subsidiaries  |  2025-12-31  |  crown-castle-2025-public-4  |  11</a:t>
+            </a:r>
+            <a:endParaRPr lang="en-US" sz="900" dirty="0"/>
+          </a:p>
+        </p:txBody>
+      </p:sp>
+      <p:sp>
+        <p:nvSpPr>
+          <p:cNvPr id="4" name="Text 2"/>
+          <p:cNvSpPr/>
+          <p:nvPr/>
+        </p:nvSpPr>
+        <p:spPr>
+          <a:xfrm>
+            <a:off x="594360" y="1417320"/>
+            <a:ext cx="7223760" cy="3794760"/>
+          </a:xfrm>
+          <a:prstGeom prst="rect">
+            <a:avLst/>
+          </a:prstGeom>
+          <a:noFill/>
+          <a:ln/>
+        </p:spPr>
+        <p:txBody>
+          <a:bodyPr wrap="square" lIns="0" tIns="0" rIns="0" bIns="0" rtlCol="0" anchor="t"/>
+          <a:lstStyle/>
+          <a:p>
+            <a:pPr indent="0" marL="0">
+              <a:lnSpc>
+                <a:spcPct val="100000"/>
+              </a:lnSpc>
+              <a:buNone/>
+            </a:pPr>
+            <a:endParaRPr lang="en-US" sz="1800" dirty="0"/>
+          </a:p>
+        </p:txBody>
+      </p:sp>
+      <p:sp>
+        <p:nvSpPr>
+          <p:cNvPr id="5" name="Shape 3"/>
+          <p:cNvSpPr/>
+          <p:nvPr/>
+        </p:nvSpPr>
+        <p:spPr>
+          <a:xfrm>
+            <a:off x="8046720" y="1325880"/>
+            <a:ext cx="3566160" cy="4069080"/>
+          </a:xfrm>
+          <a:prstGeom prst="rect">
+            <a:avLst/>
+          </a:prstGeom>
+          <a:solidFill>
+            <a:srgbClr val="E6EFEC"/>
+          </a:solidFill>
+          <a:ln w="12700">
+            <a:solidFill>
+              <a:srgbClr val="E6EFEC"/>
+            </a:solidFill>
+            <a:prstDash val="solid"/>
+          </a:ln>
+        </p:spPr>
+      </p:sp>
+      <p:sp>
+        <p:nvSpPr>
+          <p:cNvPr id="6" name="Text 4"/>
+          <p:cNvSpPr/>
+          <p:nvPr/>
+        </p:nvSpPr>
+        <p:spPr>
+          <a:xfrm>
+            <a:off x="8211312" y="1417320"/>
+            <a:ext cx="3246120" cy="3794760"/>
+          </a:xfrm>
+          <a:prstGeom prst="rect">
+            <a:avLst/>
+          </a:prstGeom>
+          <a:noFill/>
+          <a:ln/>
+        </p:spPr>
+        <p:txBody>
+          <a:bodyPr wrap="square" lIns="0" tIns="0" rIns="0" bIns="0" rtlCol="0" anchor="t"/>
+          <a:lstStyle/>
+          <a:p>
+            <a:pPr indent="0" marL="0">
+              <a:lnSpc>
+                <a:spcPct val="100000"/>
+              </a:lnSpc>
+              <a:buNone/>
+            </a:pPr>
+            <a:r>
+              <a:rPr lang="en-US" sz="1600" dirty="0">
+                <a:solidFill>
+                  <a:srgbClr val="237F72"/>
+                </a:solidFill>
+              </a:rPr>
+              <a:t>Necessary June </a:t>
+            </a:r>
+            <a:endParaRPr lang="en-US" sz="1600" dirty="0"/>
+          </a:p>
+          <a:p>
+            <a:pPr indent="0" marL="0">
+              <a:lnSpc>
+                <a:spcPct val="100000"/>
+              </a:lnSpc>
+              <a:buNone/>
+            </a:pPr>
+            <a:r>
+              <a:rPr lang="en-US" sz="1600" dirty="0">
+                <a:solidFill>
+                  <a:srgbClr val="237F72"/>
+                </a:solidFill>
+              </a:rPr>
+              <a:t>cash plus </a:t>
+            </a:r>
+            <a:endParaRPr lang="en-US" sz="1600" dirty="0"/>
+          </a:p>
+          <a:p>
+            <a:pPr indent="0" marL="0">
+              <a:lnSpc>
+                <a:spcPct val="100000"/>
+              </a:lnSpc>
+              <a:buNone/>
+            </a:pPr>
+            <a:r>
+              <a:rPr lang="en-US" sz="1600" dirty="0">
+                <a:solidFill>
+                  <a:srgbClr val="237F72"/>
+                </a:solidFill>
+              </a:rPr>
+              <a:t>qualified </a:t>
+            </a:r>
+            <a:endParaRPr lang="en-US" sz="1600" dirty="0"/>
+          </a:p>
+          <a:p>
+            <a:pPr indent="0" marL="0">
+              <a:lnSpc>
+                <a:spcPct val="100000"/>
+              </a:lnSpc>
+              <a:buNone/>
+            </a:pPr>
+            <a:r>
+              <a:rPr lang="en-US" sz="1600" dirty="0">
+                <a:solidFill>
+                  <a:srgbClr val="237F72"/>
+                </a:solidFill>
+              </a:rPr>
+              <a:t>facilities for </a:t>
+            </a:r>
+            <a:endParaRPr lang="en-US" sz="1600" dirty="0"/>
+          </a:p>
+          <a:p>
+            <a:pPr indent="0" marL="0">
+              <a:lnSpc>
+                <a:spcPct val="100000"/>
+              </a:lnSpc>
+              <a:buNone/>
+            </a:pPr>
+            <a:r>
+              <a:rPr lang="en-US" sz="1600" dirty="0">
+                <a:solidFill>
+                  <a:srgbClr val="237F72"/>
+                </a:solidFill>
+              </a:rPr>
+              <a:t>positive </a:t>
+            </a:r>
+            <a:endParaRPr lang="en-US" sz="1600" dirty="0"/>
+          </a:p>
+          <a:p>
+            <a:pPr indent="0" marL="0">
+              <a:lnSpc>
+                <a:spcPct val="100000"/>
+              </a:lnSpc>
+              <a:buNone/>
+            </a:pPr>
+            <a:r>
+              <a:rPr lang="en-US" sz="1600" dirty="0">
+                <a:solidFill>
+                  <a:srgbClr val="237F72"/>
+                </a:solidFill>
+              </a:rPr>
+              <a:t>stressed A-B</a:t>
+            </a:r>
+            <a:endParaRPr lang="en-US" sz="1600" dirty="0"/>
+          </a:p>
+          <a:p>
+            <a:pPr indent="0" marL="0">
+              <a:lnSpc>
+                <a:spcPct val="100000"/>
+              </a:lnSpc>
+              <a:buNone/>
+            </a:pPr>
+            <a:r>
+              <a:rPr lang="en-US" sz="1600" dirty="0">
+                <a:solidFill>
+                  <a:srgbClr val="237F72"/>
+                </a:solidFill>
+              </a:rPr>
+              <a:t>2,887.49 百万USD</a:t>
+            </a:r>
+            <a:endParaRPr lang="en-US" sz="1600" dirty="0"/>
+          </a:p>
+        </p:txBody>
+      </p:sp>
+      <p:sp>
+        <p:nvSpPr>
+          <p:cNvPr id="7" name="Text 5"/>
+          <p:cNvSpPr/>
+          <p:nvPr/>
+        </p:nvSpPr>
+        <p:spPr>
+          <a:xfrm>
+            <a:off x="594360" y="5321808"/>
+            <a:ext cx="10972800" cy="365760"/>
+          </a:xfrm>
+          <a:prstGeom prst="rect">
+            <a:avLst/>
+          </a:prstGeom>
+          <a:noFill/>
+          <a:ln/>
+        </p:spPr>
+        <p:txBody>
+          <a:bodyPr wrap="square" lIns="0" tIns="0" rIns="0" bIns="0" rtlCol="0" anchor="t"/>
+          <a:lstStyle/>
+          <a:p>
+            <a:pPr indent="0" marL="0">
+              <a:lnSpc>
+                <a:spcPct val="100000"/>
+              </a:lnSpc>
+              <a:buNone/>
+            </a:pPr>
+            <a:r>
+              <a:rPr lang="en-US" sz="1100" dirty="0">
+                <a:solidFill>
+                  <a:srgbClr val="213B45"/>
+                </a:solidFill>
+              </a:rPr>
+              <a:t>[F05] conditional / [cg_cash_spe] conditional / [cg_payment_rights] </a:t>
+            </a:r>
+            <a:endParaRPr lang="en-US" sz="1100" dirty="0"/>
+          </a:p>
+          <a:p>
+            <a:pPr indent="0" marL="0">
+              <a:lnSpc>
+                <a:spcPct val="100000"/>
+              </a:lnSpc>
+              <a:buNone/>
+            </a:pPr>
+            <a:r>
+              <a:rPr lang="en-US" sz="1100" dirty="0">
+                <a:solidFill>
+                  <a:srgbClr val="213B45"/>
+                </a:solidFill>
+              </a:rPr>
+              <a:t>conditional</a:t>
+            </a:r>
+            <a:endParaRPr lang="en-US" sz="1100" dirty="0"/>
+          </a:p>
+        </p:txBody>
+      </p:sp>
+      <p:sp>
+        <p:nvSpPr>
+          <p:cNvPr id="8" name="Text 6"/>
+          <p:cNvSpPr/>
+          <p:nvPr/>
+        </p:nvSpPr>
+        <p:spPr>
+          <a:xfrm>
+            <a:off x="594360" y="5715000"/>
+            <a:ext cx="10972800" cy="731520"/>
+          </a:xfrm>
+          <a:prstGeom prst="rect">
+            <a:avLst/>
+          </a:prstGeom>
+          <a:noFill/>
+          <a:ln/>
+        </p:spPr>
+        <p:txBody>
+          <a:bodyPr wrap="square" lIns="0" tIns="0" rIns="0" bIns="0" rtlCol="0" anchor="t"/>
+          <a:lstStyle/>
+          <a:p>
+            <a:pPr indent="0" marL="0">
+              <a:lnSpc>
+                <a:spcPct val="100000"/>
+              </a:lnSpc>
+              <a:buNone/>
+            </a:pPr>
+            <a:r>
+              <a:rPr lang="en-US" sz="1000" dirty="0">
+                <a:solidFill>
+                  <a:srgbClr val="586874"/>
+                </a:solidFill>
+              </a:rPr>
+              <a:t>底稿 F05 / cg_cash_spe / cg_payment_rights；来源 S25 / SCREDIT / SQ126 / S_SP_Q1 / </a:t>
+            </a:r>
+            <a:endParaRPr lang="en-US" sz="1000" dirty="0"/>
+          </a:p>
+          <a:p>
+            <a:pPr indent="0" marL="0">
+              <a:lnSpc>
+                <a:spcPct val="100000"/>
+              </a:lnSpc>
+              <a:buNone/>
+            </a:pPr>
+            <a:r>
+              <a:rPr lang="en-US" sz="1000" dirty="0">
+                <a:solidFill>
+                  <a:srgbClr val="586874"/>
+                </a:solidFill>
+              </a:rPr>
+              <a:t>S_DEV_CORP / S_SP_SECTORS / S_SP_RATIOS / SPROFORMA / S_SP_XBRL / S_DEV_LIQ / </a:t>
+            </a:r>
+            <a:endParaRPr lang="en-US" sz="1000" dirty="0"/>
+          </a:p>
+          <a:p>
+            <a:pPr indent="0" marL="0">
+              <a:lnSpc>
+                <a:spcPct val="100000"/>
+              </a:lnSpc>
+              <a:buNone/>
+            </a:pPr>
+            <a:r>
+              <a:rPr lang="en-US" sz="1000" dirty="0">
+                <a:solidFill>
+                  <a:srgbClr val="586874"/>
+                </a:solidFill>
+              </a:rPr>
+              <a:t>S_DEV_REC</a:t>
+            </a:r>
+            <a:endParaRPr lang="en-US" sz="1000" dirty="0"/>
+          </a:p>
+          <a:p>
+            <a:pPr indent="0" marL="0">
+              <a:lnSpc>
+                <a:spcPct val="100000"/>
+              </a:lnSpc>
+              <a:buNone/>
+            </a:pPr>
+            <a:r>
+              <a:rPr lang="en-US" sz="1000" dirty="0">
+                <a:solidFill>
+                  <a:srgbClr val="586874"/>
+                </a:solidFill>
+              </a:rPr>
+              <a:t>原文定位、URL及完整引用见本页备注；完整方法和明细见同名底稿及 Word/Excel。</a:t>
+            </a:r>
+            <a:endParaRPr lang="en-US" sz="1000" dirty="0"/>
+          </a:p>
+        </p:txBody>
+      </p:sp>
+    </p:spTree>
+  </p:cSld>
+  <p:clrMapOvr>
+    <a:masterClrMapping/>
+  </p:clrMapOvr>
+</p:sld>
+</file>
+
+<file path=ppt/slides/slide12.xml><?xml version="1.0" encoding="utf-8"?>
+<p:sld xmlns:a="http://schemas.openxmlformats.org/drawingml/2006/main" xmlns:r="http://schemas.openxmlformats.org/officeDocument/2006/relationships" xmlns:p="http://schemas.openxmlformats.org/presentationml/2006/main">
+  <p:cSld name="Slide 12">
+    <p:bg>
+      <p:bgPr>
+        <a:solidFill>
+          <a:srgbClr val="F5F7F6"/>
+        </a:solidFill>
+      </p:bgPr>
+    </p:bg>
+    <p:spTree>
+      <p:nvGrpSpPr>
+        <p:cNvPr id="1" name=""/>
+        <p:cNvGrpSpPr/>
+        <p:nvPr/>
+      </p:nvGrpSpPr>
+      <p:grpSpPr>
+        <a:xfrm>
+          <a:off x="0" y="0"/>
+          <a:ext cx="0" cy="0"/>
+          <a:chOff x="0" y="0"/>
+          <a:chExt cx="0" cy="0"/>
+        </a:xfrm>
+      </p:grpSpPr>
+      <p:sp>
+        <p:nvSpPr>
+          <p:cNvPr id="2" name="Text 0"/>
+          <p:cNvSpPr/>
+          <p:nvPr/>
+        </p:nvSpPr>
+        <p:spPr>
+          <a:xfrm>
+            <a:off x="548640" y="365760"/>
+            <a:ext cx="11064240" cy="731520"/>
+          </a:xfrm>
+          <a:prstGeom prst="rect">
+            <a:avLst/>
+          </a:prstGeom>
+          <a:noFill/>
+          <a:ln/>
+        </p:spPr>
+        <p:txBody>
+          <a:bodyPr wrap="square" lIns="0" tIns="0" rIns="0" bIns="0" rtlCol="0" anchor="t"/>
+          <a:lstStyle/>
+          <a:p>
+            <a:pPr indent="0" marL="0">
+              <a:lnSpc>
+                <a:spcPct val="100000"/>
+              </a:lnSpc>
+              <a:buNone/>
+            </a:pPr>
+            <a:r>
+              <a:rPr lang="en-US" sz="2700" b="1" dirty="0">
+                <a:solidFill>
+                  <a:srgbClr val="213B45"/>
+                </a:solidFill>
+              </a:rPr>
+              <a:t>资本结构、治理和CRA在更新后的等级上逐步处理</a:t>
+            </a:r>
+            <a:endParaRPr lang="en-US" sz="2700" dirty="0"/>
+          </a:p>
+        </p:txBody>
+      </p:sp>
+      <p:sp>
+        <p:nvSpPr>
+          <p:cNvPr id="3" name="Text 1"/>
+          <p:cNvSpPr/>
+          <p:nvPr/>
+        </p:nvSpPr>
+        <p:spPr>
+          <a:xfrm>
+            <a:off x="548640" y="6473952"/>
+            <a:ext cx="11064240" cy="182880"/>
+          </a:xfrm>
+          <a:prstGeom prst="rect">
+            <a:avLst/>
+          </a:prstGeom>
+          <a:noFill/>
+          <a:ln/>
+        </p:spPr>
+        <p:txBody>
+          <a:bodyPr wrap="square" lIns="0" tIns="0" rIns="0" bIns="0" rtlCol="0" anchor="ctr"/>
+          <a:lstStyle/>
+          <a:p>
+            <a:pPr indent="0" marL="0">
+              <a:buNone/>
+            </a:pPr>
+            <a:r>
+              <a:rPr lang="en-US" sz="900" dirty="0">
+                <a:solidFill>
+                  <a:srgbClr val="586874"/>
+                </a:solidFill>
+              </a:rPr>
+              <a:t>Crown Castle Inc. and subsidiaries  |  2025-12-31  |  crown-castle-2025-public-4  |  12</a:t>
+            </a:r>
+            <a:endParaRPr lang="en-US" sz="900" dirty="0"/>
+          </a:p>
+        </p:txBody>
+      </p:sp>
+      <p:sp>
+        <p:nvSpPr>
+          <p:cNvPr id="4" name="Text 2"/>
+          <p:cNvSpPr/>
+          <p:nvPr/>
+        </p:nvSpPr>
+        <p:spPr>
+          <a:xfrm>
+            <a:off x="594360" y="1417320"/>
+            <a:ext cx="7223760" cy="3794760"/>
+          </a:xfrm>
+          <a:prstGeom prst="rect">
+            <a:avLst/>
+          </a:prstGeom>
+          <a:noFill/>
+          <a:ln/>
+        </p:spPr>
+        <p:txBody>
+          <a:bodyPr wrap="square" lIns="0" tIns="0" rIns="0" bIns="0" rtlCol="0" anchor="t"/>
+          <a:lstStyle/>
+          <a:p>
+            <a:pPr indent="0" marL="0">
+              <a:lnSpc>
+                <a:spcPct val="100000"/>
+              </a:lnSpc>
+              <a:buNone/>
+            </a:pPr>
+            <a:r>
+              <a:rPr lang="en-US" sz="1800" dirty="0">
+                <a:solidFill>
+                  <a:srgbClr val="1F2933"/>
+                </a:solidFill>
+              </a:rPr>
+              <a:t>主中性资本结构情景仍需实际期限、浮息及对冲证据；同一出售、偿</a:t>
+            </a:r>
+            <a:endParaRPr lang="en-US" sz="1800" dirty="0"/>
+          </a:p>
+          <a:p>
+            <a:pPr indent="0" marL="0">
+              <a:lnSpc>
+                <a:spcPct val="100000"/>
+              </a:lnSpc>
+              <a:buNone/>
+            </a:pPr>
+            <a:r>
+              <a:rPr lang="en-US" sz="1800" dirty="0">
+                <a:solidFill>
+                  <a:srgbClr val="1F2933"/>
+                </a:solidFill>
+              </a:rPr>
+              <a:t>债和分配若已进入预测，不再机械加档或扣档。</a:t>
+            </a:r>
+            <a:endParaRPr lang="en-US" sz="1800" dirty="0"/>
+          </a:p>
+          <a:p>
+            <a:pPr indent="0" marL="0">
+              <a:lnSpc>
+                <a:spcPct val="100000"/>
+              </a:lnSpc>
+              <a:buNone/>
+            </a:pPr>
+            <a:endParaRPr lang="en-US" sz="1800" dirty="0"/>
+          </a:p>
+          <a:p>
+            <a:pPr indent="0" marL="0">
+              <a:lnSpc>
+                <a:spcPct val="100000"/>
+              </a:lnSpc>
+              <a:buNone/>
+            </a:pPr>
+            <a:r>
+              <a:rPr lang="en-US" sz="1800" dirty="0">
+                <a:solidFill>
+                  <a:srgbClr val="1F2933"/>
+                </a:solidFill>
+              </a:rPr>
+              <a:t>流动性后用新的等级范围查治理影响，再评CRA同档位置和未充分</a:t>
+            </a:r>
+            <a:endParaRPr lang="en-US" sz="1800" dirty="0"/>
+          </a:p>
+          <a:p>
+            <a:pPr indent="0" marL="0">
+              <a:lnSpc>
+                <a:spcPct val="100000"/>
+              </a:lnSpc>
+              <a:buNone/>
+            </a:pPr>
+            <a:r>
+              <a:rPr lang="en-US" sz="1800" dirty="0">
+                <a:solidFill>
+                  <a:srgbClr val="1F2933"/>
+                </a:solidFill>
+              </a:rPr>
+              <a:t>捕获因素。较强业务与较弱杠杆的标签本身不足以支持CRA，正向</a:t>
+            </a:r>
+            <a:endParaRPr lang="en-US" sz="1800" dirty="0"/>
+          </a:p>
+          <a:p>
+            <a:pPr indent="0" marL="0">
+              <a:lnSpc>
+                <a:spcPct val="100000"/>
+              </a:lnSpc>
+              <a:buNone/>
+            </a:pPr>
+            <a:r>
+              <a:rPr lang="en-US" sz="1800" dirty="0">
+                <a:solidFill>
+                  <a:srgbClr val="1F2933"/>
+                </a:solidFill>
+              </a:rPr>
+              <a:t>调整也不能越过流动性上限。</a:t>
+            </a:r>
+            <a:endParaRPr lang="en-US" sz="1800" dirty="0"/>
+          </a:p>
+          <a:p>
+            <a:pPr indent="0" marL="0">
+              <a:lnSpc>
+                <a:spcPct val="100000"/>
+              </a:lnSpc>
+              <a:buNone/>
+            </a:pPr>
+            <a:endParaRPr lang="en-US" sz="1800" dirty="0"/>
+          </a:p>
+          <a:p>
+            <a:pPr indent="0" marL="0">
+              <a:lnSpc>
+                <a:spcPct val="100000"/>
+              </a:lnSpc>
+              <a:buNone/>
+            </a:pPr>
+            <a:r>
+              <a:rPr lang="en-US" sz="1800" dirty="0">
+                <a:solidFill>
+                  <a:srgbClr val="1F2933"/>
+                </a:solidFill>
+              </a:rPr>
+              <a:t>委员会、独立性、领导交接和激励差异是实际治理证据，不能直接</a:t>
+            </a:r>
+            <a:endParaRPr lang="en-US" sz="1800" dirty="0"/>
+          </a:p>
+          <a:p>
+            <a:pPr indent="0" marL="0">
+              <a:lnSpc>
+                <a:spcPct val="100000"/>
+              </a:lnSpc>
+              <a:buNone/>
+            </a:pPr>
+            <a:r>
+              <a:rPr lang="en-US" sz="1800" dirty="0">
+                <a:solidFill>
+                  <a:srgbClr val="1F2933"/>
+                </a:solidFill>
+              </a:rPr>
+              <a:t>宣布专门M&amp;G中性已经核准。条件主体建议须保留这一未决节点。</a:t>
+            </a:r>
+            <a:endParaRPr lang="en-US" sz="1800" dirty="0"/>
+          </a:p>
+        </p:txBody>
+      </p:sp>
+      <p:sp>
+        <p:nvSpPr>
+          <p:cNvPr id="5" name="Shape 3"/>
+          <p:cNvSpPr/>
+          <p:nvPr/>
+        </p:nvSpPr>
+        <p:spPr>
+          <a:xfrm>
+            <a:off x="8046720" y="1325880"/>
+            <a:ext cx="3566160" cy="4069080"/>
+          </a:xfrm>
+          <a:prstGeom prst="rect">
+            <a:avLst/>
+          </a:prstGeom>
+          <a:solidFill>
+            <a:srgbClr val="E6EFEC"/>
+          </a:solidFill>
+          <a:ln w="12700">
+            <a:solidFill>
+              <a:srgbClr val="E6EFEC"/>
+            </a:solidFill>
+            <a:prstDash val="solid"/>
+          </a:ln>
+        </p:spPr>
+      </p:sp>
+      <p:sp>
+        <p:nvSpPr>
+          <p:cNvPr id="6" name="Text 4"/>
+          <p:cNvSpPr/>
+          <p:nvPr/>
+        </p:nvSpPr>
+        <p:spPr>
+          <a:xfrm>
+            <a:off x="8211312" y="1417320"/>
+            <a:ext cx="3246120" cy="3794760"/>
+          </a:xfrm>
+          <a:prstGeom prst="rect">
+            <a:avLst/>
+          </a:prstGeom>
+          <a:noFill/>
+          <a:ln/>
+        </p:spPr>
+        <p:txBody>
+          <a:bodyPr wrap="square" lIns="0" tIns="0" rIns="0" bIns="0" rtlCol="0" anchor="t"/>
+          <a:lstStyle/>
+          <a:p>
+            <a:pPr indent="0" marL="0">
+              <a:lnSpc>
+                <a:spcPct val="100000"/>
+              </a:lnSpc>
+              <a:buNone/>
+            </a:pPr>
+            <a:r>
+              <a:rPr lang="en-US" sz="1600" dirty="0">
+                <a:solidFill>
+                  <a:srgbClr val="237F72"/>
+                </a:solidFill>
+              </a:rPr>
+              <a:t>AIP文字与实际表显示差额</a:t>
+            </a:r>
+            <a:endParaRPr lang="en-US" sz="1600" dirty="0"/>
+          </a:p>
+          <a:p>
+            <a:pPr indent="0" marL="0">
+              <a:lnSpc>
+                <a:spcPct val="100000"/>
+              </a:lnSpc>
+              <a:buNone/>
+            </a:pPr>
+            <a:r>
+              <a:rPr lang="en-US" sz="1600" dirty="0">
+                <a:solidFill>
+                  <a:srgbClr val="237F72"/>
+                </a:solidFill>
+              </a:rPr>
+              <a:t>40.00 百万USD</a:t>
+            </a:r>
+            <a:endParaRPr lang="en-US" sz="1600" dirty="0"/>
+          </a:p>
+        </p:txBody>
+      </p:sp>
+      <p:sp>
+        <p:nvSpPr>
+          <p:cNvPr id="7" name="Text 5"/>
+          <p:cNvSpPr/>
+          <p:nvPr/>
+        </p:nvSpPr>
+        <p:spPr>
+          <a:xfrm>
+            <a:off x="594360" y="5321808"/>
+            <a:ext cx="10972800" cy="365760"/>
+          </a:xfrm>
+          <a:prstGeom prst="rect">
+            <a:avLst/>
+          </a:prstGeom>
+          <a:noFill/>
+          <a:ln/>
+        </p:spPr>
+        <p:txBody>
+          <a:bodyPr wrap="square" lIns="0" tIns="0" rIns="0" bIns="0" rtlCol="0" anchor="t"/>
+          <a:lstStyle/>
+          <a:p>
+            <a:pPr indent="0" marL="0">
+              <a:lnSpc>
+                <a:spcPct val="100000"/>
+              </a:lnSpc>
+              <a:buNone/>
+            </a:pPr>
+            <a:r>
+              <a:rPr lang="en-US" sz="1100" dirty="0">
+                <a:solidFill>
+                  <a:srgbClr val="213B45"/>
+                </a:solidFill>
+              </a:rPr>
+              <a:t>[FF_R109_MODIFIERS] conditional / [FF_R109_ISSUER] conditional / [</a:t>
+            </a:r>
+            <a:endParaRPr lang="en-US" sz="1100" dirty="0"/>
+          </a:p>
+          <a:p>
+            <a:pPr indent="0" marL="0">
+              <a:lnSpc>
+                <a:spcPct val="100000"/>
+              </a:lnSpc>
+              <a:buNone/>
+            </a:pPr>
+            <a:r>
+              <a:rPr lang="en-US" sz="1100" dirty="0">
+                <a:solidFill>
+                  <a:srgbClr val="213B45"/>
+                </a:solidFill>
+              </a:rPr>
+              <a:t>cg_governance] conditional / [cg_sti_difference] unresolved</a:t>
+            </a:r>
+            <a:endParaRPr lang="en-US" sz="1100" dirty="0"/>
+          </a:p>
+        </p:txBody>
+      </p:sp>
+      <p:sp>
+        <p:nvSpPr>
+          <p:cNvPr id="8" name="Text 6"/>
+          <p:cNvSpPr/>
+          <p:nvPr/>
+        </p:nvSpPr>
+        <p:spPr>
+          <a:xfrm>
+            <a:off x="594360" y="5715000"/>
+            <a:ext cx="10972800" cy="731520"/>
+          </a:xfrm>
+          <a:prstGeom prst="rect">
+            <a:avLst/>
+          </a:prstGeom>
+          <a:noFill/>
+          <a:ln/>
+        </p:spPr>
+        <p:txBody>
+          <a:bodyPr wrap="square" lIns="0" tIns="0" rIns="0" bIns="0" rtlCol="0" anchor="t"/>
+          <a:lstStyle/>
+          <a:p>
+            <a:pPr indent="0" marL="0">
+              <a:lnSpc>
+                <a:spcPct val="100000"/>
+              </a:lnSpc>
+              <a:buNone/>
+            </a:pPr>
+            <a:r>
+              <a:rPr lang="en-US" sz="1000" dirty="0">
+                <a:solidFill>
+                  <a:srgbClr val="586874"/>
+                </a:solidFill>
+              </a:rPr>
+              <a:t>底稿 FF_R109_MODIFIERS / FF_R109_ISSUER / cg_governance / cg_sti_difference；来源 </a:t>
+            </a:r>
+            <a:endParaRPr lang="en-US" sz="1000" dirty="0"/>
+          </a:p>
+          <a:p>
+            <a:pPr indent="0" marL="0">
+              <a:lnSpc>
+                <a:spcPct val="100000"/>
+              </a:lnSpc>
+              <a:buNone/>
+            </a:pPr>
+            <a:r>
+              <a:rPr lang="en-US" sz="1000" dirty="0">
+                <a:solidFill>
+                  <a:srgbClr val="586874"/>
+                </a:solidFill>
+              </a:rPr>
+              <a:t>S_PROXY26 / S_DEV_CORP / S_SP_Q1 / SCREDIT / SPROFORMA / S25 / SQ126 / S_SP_SECTORS</a:t>
+            </a:r>
+            <a:endParaRPr lang="en-US" sz="1000" dirty="0"/>
+          </a:p>
+          <a:p>
+            <a:pPr indent="0" marL="0">
+              <a:lnSpc>
+                <a:spcPct val="100000"/>
+              </a:lnSpc>
+              <a:buNone/>
+            </a:pPr>
+            <a:r>
+              <a:rPr lang="en-US" sz="1000" dirty="0">
+                <a:solidFill>
+                  <a:srgbClr val="586874"/>
+                </a:solidFill>
+              </a:rPr>
+              <a:t> / S_SP_RATIOS / S_SP_XBRL / S_DEV_LIQ / S_DEV_REC / S_DEV_COUNTRY</a:t>
+            </a:r>
+            <a:endParaRPr lang="en-US" sz="1000" dirty="0"/>
+          </a:p>
+          <a:p>
+            <a:pPr indent="0" marL="0">
+              <a:lnSpc>
+                <a:spcPct val="100000"/>
+              </a:lnSpc>
+              <a:buNone/>
+            </a:pPr>
+            <a:r>
+              <a:rPr lang="en-US" sz="1000" dirty="0">
+                <a:solidFill>
+                  <a:srgbClr val="586874"/>
+                </a:solidFill>
+              </a:rPr>
+              <a:t>原文定位、URL及完整引用见本页备注；完整方法和明细见同名底稿及 Word/Excel。</a:t>
+            </a:r>
+            <a:endParaRPr lang="en-US" sz="1000" dirty="0"/>
+          </a:p>
+        </p:txBody>
+      </p:sp>
+    </p:spTree>
+  </p:cSld>
+  <p:clrMapOvr>
+    <a:masterClrMapping/>
+  </p:clrMapOvr>
+</p:sld>
+</file>
+
+<file path=ppt/slides/slide13.xml><?xml version="1.0" encoding="utf-8"?>
+<p:sld xmlns:a="http://schemas.openxmlformats.org/drawingml/2006/main" xmlns:r="http://schemas.openxmlformats.org/officeDocument/2006/relationships" xmlns:p="http://schemas.openxmlformats.org/presentationml/2006/main">
+  <p:cSld name="Slide 13">
+    <p:bg>
+      <p:bgPr>
+        <a:solidFill>
+          <a:srgbClr val="F5F7F6"/>
+        </a:solidFill>
+      </p:bgPr>
+    </p:bg>
+    <p:spTree>
+      <p:nvGrpSpPr>
+        <p:cNvPr id="1" name=""/>
+        <p:cNvGrpSpPr/>
+        <p:nvPr/>
+      </p:nvGrpSpPr>
+      <p:grpSpPr>
+        <a:xfrm>
+          <a:off x="0" y="0"/>
+          <a:ext cx="0" cy="0"/>
+          <a:chOff x="0" y="0"/>
+          <a:chExt cx="0" cy="0"/>
+        </a:xfrm>
+      </p:grpSpPr>
+      <p:sp>
+        <p:nvSpPr>
+          <p:cNvPr id="2" name="Text 0"/>
+          <p:cNvSpPr/>
+          <p:nvPr/>
+        </p:nvSpPr>
+        <p:spPr>
+          <a:xfrm>
+            <a:off x="548640" y="365760"/>
+            <a:ext cx="11064240" cy="731520"/>
+          </a:xfrm>
+          <a:prstGeom prst="rect">
+            <a:avLst/>
+          </a:prstGeom>
+          <a:noFill/>
+          <a:ln/>
+        </p:spPr>
+        <p:txBody>
+          <a:bodyPr wrap="square" lIns="0" tIns="0" rIns="0" bIns="0" rtlCol="0" anchor="t"/>
+          <a:lstStyle/>
+          <a:p>
+            <a:pPr indent="0" marL="0">
+              <a:lnSpc>
+                <a:spcPct val="100000"/>
+              </a:lnSpc>
+              <a:buNone/>
+            </a:pPr>
+            <a:r>
+              <a:rPr lang="en-US" sz="2700" b="1" dirty="0">
+                <a:solidFill>
+                  <a:srgbClr val="213B45"/>
+                </a:solidFill>
+              </a:rPr>
+              <a:t>指定高级无抵押票据按实际义务人和回收范围判断 1/2</a:t>
+            </a:r>
+            <a:endParaRPr lang="en-US" sz="2700" dirty="0"/>
+          </a:p>
+        </p:txBody>
+      </p:sp>
+      <p:sp>
+        <p:nvSpPr>
+          <p:cNvPr id="3" name="Text 1"/>
+          <p:cNvSpPr/>
+          <p:nvPr/>
+        </p:nvSpPr>
+        <p:spPr>
+          <a:xfrm>
+            <a:off x="548640" y="6473952"/>
+            <a:ext cx="11064240" cy="182880"/>
+          </a:xfrm>
+          <a:prstGeom prst="rect">
+            <a:avLst/>
+          </a:prstGeom>
+          <a:noFill/>
+          <a:ln/>
+        </p:spPr>
+        <p:txBody>
+          <a:bodyPr wrap="square" lIns="0" tIns="0" rIns="0" bIns="0" rtlCol="0" anchor="ctr"/>
+          <a:lstStyle/>
+          <a:p>
+            <a:pPr indent="0" marL="0">
+              <a:buNone/>
+            </a:pPr>
+            <a:r>
+              <a:rPr lang="en-US" sz="900" dirty="0">
+                <a:solidFill>
+                  <a:srgbClr val="586874"/>
+                </a:solidFill>
+              </a:rPr>
+              <a:t>Crown Castle Inc. and subsidiaries  |  2025-12-31  |  crown-castle-2025-public-4  |  13</a:t>
+            </a:r>
+            <a:endParaRPr lang="en-US" sz="900" dirty="0"/>
+          </a:p>
+        </p:txBody>
+      </p:sp>
+      <p:sp>
+        <p:nvSpPr>
+          <p:cNvPr id="4" name="Text 2"/>
+          <p:cNvSpPr/>
+          <p:nvPr/>
+        </p:nvSpPr>
+        <p:spPr>
+          <a:xfrm>
+            <a:off x="594360" y="1417320"/>
+            <a:ext cx="7223760" cy="3794760"/>
+          </a:xfrm>
+          <a:prstGeom prst="rect">
+            <a:avLst/>
+          </a:prstGeom>
+          <a:noFill/>
+          <a:ln/>
+        </p:spPr>
+        <p:txBody>
+          <a:bodyPr wrap="square" lIns="0" tIns="0" rIns="0" bIns="0" rtlCol="0" anchor="t"/>
+          <a:lstStyle/>
+          <a:p>
+            <a:pPr indent="0" marL="0">
+              <a:lnSpc>
+                <a:spcPct val="100000"/>
+              </a:lnSpc>
+              <a:buNone/>
+            </a:pPr>
+            <a:r>
+              <a:rPr lang="en-US" sz="1800" dirty="0">
+                <a:solidFill>
+                  <a:srgbClr val="1F2933"/>
+                </a:solidFill>
+              </a:rPr>
+              <a:t>对象为CCI母公司4.000% March2027 </a:t>
+            </a:r>
+            <a:endParaRPr lang="en-US" sz="1800" dirty="0"/>
+          </a:p>
+          <a:p>
+            <a:pPr indent="0" marL="0">
+              <a:lnSpc>
+                <a:spcPct val="100000"/>
+              </a:lnSpc>
+              <a:buNone/>
+            </a:pPr>
+            <a:r>
+              <a:rPr lang="en-US" sz="1800" dirty="0">
+                <a:solidFill>
+                  <a:srgbClr val="1F2933"/>
+                </a:solidFill>
+              </a:rPr>
+              <a:t>Senior Notes，面值500.00 百万USD、Q1</a:t>
+            </a:r>
+            <a:endParaRPr lang="en-US" sz="1800" dirty="0"/>
+          </a:p>
+          <a:p>
+            <a:pPr indent="0" marL="0">
+              <a:lnSpc>
+                <a:spcPct val="100000"/>
+              </a:lnSpc>
+              <a:buNone/>
+            </a:pPr>
+            <a:r>
+              <a:rPr lang="en-US" sz="1800" dirty="0">
+                <a:solidFill>
+                  <a:srgbClr val="1F2933"/>
+                </a:solidFill>
+              </a:rPr>
+              <a:t>账面499.00 百万USD；无子公司保证，结构从属不自动</a:t>
+            </a:r>
+            <a:endParaRPr lang="en-US" sz="1800" dirty="0"/>
+          </a:p>
+          <a:p>
+            <a:pPr indent="0" marL="0">
+              <a:lnSpc>
+                <a:spcPct val="100000"/>
+              </a:lnSpc>
+              <a:buNone/>
+            </a:pPr>
+            <a:r>
+              <a:rPr lang="en-US" sz="1800" dirty="0">
+                <a:solidFill>
+                  <a:srgbClr val="1F2933"/>
+                </a:solidFill>
+              </a:rPr>
+              <a:t>等于固定降档。</a:t>
+            </a:r>
+            <a:endParaRPr lang="en-US" sz="1800" dirty="0"/>
+          </a:p>
+          <a:p>
+            <a:pPr indent="0" marL="0">
+              <a:lnSpc>
+                <a:spcPct val="100000"/>
+              </a:lnSpc>
+              <a:buNone/>
+            </a:pPr>
+            <a:endParaRPr lang="en-US" sz="1800" dirty="0"/>
+          </a:p>
+          <a:p>
+            <a:pPr indent="0" marL="0">
+              <a:lnSpc>
+                <a:spcPct val="100000"/>
+              </a:lnSpc>
+              <a:buNone/>
+            </a:pPr>
+            <a:r>
+              <a:rPr lang="en-US" sz="1800" dirty="0">
+                <a:solidFill>
+                  <a:srgbClr val="1F2933"/>
+                </a:solidFill>
+              </a:rPr>
+              <a:t>适用回收法域时，合格非SPE塔用DAV，同时排除SPE资产及</a:t>
+            </a:r>
+            <a:endParaRPr lang="en-US" sz="1800" dirty="0"/>
+          </a:p>
+          <a:p>
+            <a:pPr indent="0" marL="0">
+              <a:lnSpc>
+                <a:spcPct val="100000"/>
+              </a:lnSpc>
+              <a:buNone/>
+            </a:pPr>
+            <a:r>
+              <a:rPr lang="en-US" sz="1800" dirty="0">
+                <a:solidFill>
+                  <a:srgbClr val="1F2933"/>
+                </a:solidFill>
+              </a:rPr>
+              <a:t>对应债权；行政成本、优先P和同级U按同范围处理。BB主路径跨</a:t>
+            </a:r>
+            <a:endParaRPr lang="en-US" sz="1800" dirty="0"/>
+          </a:p>
+          <a:p>
+            <a:pPr indent="0" marL="0">
+              <a:lnSpc>
+                <a:spcPct val="100000"/>
+              </a:lnSpc>
+              <a:buNone/>
+            </a:pPr>
+            <a:r>
+              <a:rPr lang="en-US" sz="1800" dirty="0">
+                <a:solidFill>
+                  <a:srgbClr val="1F2933"/>
+                </a:solidFill>
+              </a:rPr>
+              <a:t>30%或10%改变本券级差，上限阻止高回收直接上调；主体降至</a:t>
+            </a:r>
+            <a:endParaRPr lang="en-US" sz="1800" dirty="0"/>
+          </a:p>
+          <a:p>
+            <a:pPr indent="0" marL="0">
+              <a:lnSpc>
+                <a:spcPct val="100000"/>
+              </a:lnSpc>
+              <a:buNone/>
+            </a:pPr>
+            <a:r>
+              <a:rPr lang="en-US" sz="1800" dirty="0">
+                <a:solidFill>
+                  <a:srgbClr val="1F2933"/>
+                </a:solidFill>
+              </a:rPr>
+              <a:t>B+及以下另按Group A/B查回收上限和上调资格。</a:t>
+            </a:r>
+            <a:endParaRPr lang="en-US" sz="1800" dirty="0"/>
+          </a:p>
+          <a:p>
+            <a:pPr indent="0" marL="0">
+              <a:lnSpc>
+                <a:spcPct val="100000"/>
+              </a:lnSpc>
+              <a:buNone/>
+            </a:pPr>
+            <a:endParaRPr lang="en-US" sz="1800" dirty="0"/>
+          </a:p>
+          <a:p>
+            <a:pPr indent="0" marL="0">
+              <a:lnSpc>
+                <a:spcPct val="100000"/>
+              </a:lnSpc>
+              <a:buNone/>
+            </a:pPr>
+            <a:r>
+              <a:rPr lang="en-US" sz="1800" dirty="0">
+                <a:solidFill>
+                  <a:srgbClr val="1F2933"/>
+                </a:solidFill>
+              </a:rPr>
+              <a:t>本券含半年欠息参照及分配边界可复算。设施控制权不等于土地所</a:t>
+            </a:r>
+            <a:endParaRPr lang="en-US" sz="1800" dirty="0"/>
+          </a:p>
+          <a:p>
+            <a:pPr indent="0" marL="0">
+              <a:lnSpc>
+                <a:spcPct val="100000"/>
+              </a:lnSpc>
+              <a:buNone/>
+            </a:pPr>
+            <a:r>
+              <a:rPr lang="en-US" sz="1800" dirty="0">
+                <a:solidFill>
+                  <a:srgbClr val="1F2933"/>
+                </a:solidFill>
+              </a:rPr>
+              <a:t>有权，合格塔、债权及法域未核，实际回收保持未计算。</a:t>
+            </a:r>
+            <a:endParaRPr lang="en-US" sz="1800" dirty="0"/>
+          </a:p>
+        </p:txBody>
+      </p:sp>
+      <p:sp>
+        <p:nvSpPr>
+          <p:cNvPr id="5" name="Shape 3"/>
+          <p:cNvSpPr/>
+          <p:nvPr/>
+        </p:nvSpPr>
+        <p:spPr>
+          <a:xfrm>
+            <a:off x="8046720" y="1325880"/>
+            <a:ext cx="3566160" cy="4069080"/>
+          </a:xfrm>
+          <a:prstGeom prst="rect">
+            <a:avLst/>
+          </a:prstGeom>
+          <a:solidFill>
+            <a:srgbClr val="E6EFEC"/>
+          </a:solidFill>
+          <a:ln w="12700">
+            <a:solidFill>
+              <a:srgbClr val="E6EFEC"/>
+            </a:solidFill>
+            <a:prstDash val="solid"/>
+          </a:ln>
+        </p:spPr>
+      </p:sp>
+      <p:sp>
+        <p:nvSpPr>
+          <p:cNvPr id="6" name="Text 4"/>
+          <p:cNvSpPr/>
+          <p:nvPr/>
+        </p:nvSpPr>
+        <p:spPr>
+          <a:xfrm>
+            <a:off x="8211312" y="1417320"/>
+            <a:ext cx="3246120" cy="3794760"/>
+          </a:xfrm>
+          <a:prstGeom prst="rect">
+            <a:avLst/>
+          </a:prstGeom>
+          <a:noFill/>
+          <a:ln/>
+        </p:spPr>
+        <p:txBody>
+          <a:bodyPr wrap="square" lIns="0" tIns="0" rIns="0" bIns="0" rtlCol="0" anchor="t"/>
+          <a:lstStyle/>
+          <a:p>
+            <a:pPr indent="0" marL="0">
+              <a:lnSpc>
+                <a:spcPct val="100000"/>
+              </a:lnSpc>
+              <a:buNone/>
+            </a:pPr>
+            <a:r>
+              <a:rPr lang="en-US" sz="1600" dirty="0">
+                <a:solidFill>
+                  <a:srgbClr val="237F72"/>
+                </a:solidFill>
+              </a:rPr>
+              <a:t>Specific note </a:t>
+            </a:r>
+            <a:endParaRPr lang="en-US" sz="1600" dirty="0"/>
+          </a:p>
+          <a:p>
+            <a:pPr indent="0" marL="0">
+              <a:lnSpc>
+                <a:spcPct val="100000"/>
+              </a:lnSpc>
+              <a:buNone/>
+            </a:pPr>
+            <a:r>
+              <a:rPr lang="en-US" sz="1600" dirty="0">
+                <a:solidFill>
+                  <a:srgbClr val="237F72"/>
+                </a:solidFill>
+              </a:rPr>
+              <a:t>same-coupon six</a:t>
+            </a:r>
+            <a:endParaRPr lang="en-US" sz="1600" dirty="0"/>
+          </a:p>
+          <a:p>
+            <a:pPr indent="0" marL="0">
+              <a:lnSpc>
+                <a:spcPct val="100000"/>
+              </a:lnSpc>
+              <a:buNone/>
+            </a:pPr>
+            <a:r>
+              <a:rPr lang="en-US" sz="1600" dirty="0">
+                <a:solidFill>
+                  <a:srgbClr val="237F72"/>
+                </a:solidFill>
+              </a:rPr>
+              <a:t>-month claim </a:t>
+            </a:r>
+            <a:endParaRPr lang="en-US" sz="1600" dirty="0"/>
+          </a:p>
+          <a:p>
+            <a:pPr indent="0" marL="0">
+              <a:lnSpc>
+                <a:spcPct val="100000"/>
+              </a:lnSpc>
+              <a:buNone/>
+            </a:pPr>
+            <a:r>
+              <a:rPr lang="en-US" sz="1600" dirty="0">
+                <a:solidFill>
+                  <a:srgbClr val="237F72"/>
+                </a:solidFill>
+              </a:rPr>
+              <a:t>scenario</a:t>
+            </a:r>
+            <a:endParaRPr lang="en-US" sz="1600" dirty="0"/>
+          </a:p>
+          <a:p>
+            <a:pPr indent="0" marL="0">
+              <a:lnSpc>
+                <a:spcPct val="100000"/>
+              </a:lnSpc>
+              <a:buNone/>
+            </a:pPr>
+            <a:r>
+              <a:rPr lang="en-US" sz="1600" dirty="0">
+                <a:solidFill>
+                  <a:srgbClr val="237F72"/>
+                </a:solidFill>
+              </a:rPr>
+              <a:t>510.00 百万USD</a:t>
+            </a:r>
+            <a:endParaRPr lang="en-US" sz="1600" dirty="0"/>
+          </a:p>
+          <a:p>
+            <a:pPr indent="0" marL="0">
+              <a:lnSpc>
+                <a:spcPct val="100000"/>
+              </a:lnSpc>
+              <a:buNone/>
+            </a:pPr>
+            <a:endParaRPr lang="en-US" sz="1600" dirty="0"/>
+          </a:p>
+          <a:p>
+            <a:pPr indent="0" marL="0">
+              <a:lnSpc>
+                <a:spcPct val="100000"/>
+              </a:lnSpc>
+              <a:buNone/>
+            </a:pPr>
+            <a:r>
+              <a:rPr lang="en-US" sz="1600" dirty="0">
+                <a:solidFill>
+                  <a:srgbClr val="237F72"/>
+                </a:solidFill>
+              </a:rPr>
+              <a:t>Specific note </a:t>
+            </a:r>
+            <a:endParaRPr lang="en-US" sz="1600" dirty="0"/>
+          </a:p>
+          <a:p>
+            <a:pPr indent="0" marL="0">
+              <a:lnSpc>
+                <a:spcPct val="100000"/>
+              </a:lnSpc>
+              <a:buNone/>
+            </a:pPr>
+            <a:r>
+              <a:rPr lang="en-US" sz="1600" dirty="0">
+                <a:solidFill>
+                  <a:srgbClr val="237F72"/>
+                </a:solidFill>
+              </a:rPr>
+              <a:t>distribution </a:t>
+            </a:r>
+            <a:endParaRPr lang="en-US" sz="1600" dirty="0"/>
+          </a:p>
+          <a:p>
+            <a:pPr indent="0" marL="0">
+              <a:lnSpc>
+                <a:spcPct val="100000"/>
+              </a:lnSpc>
+              <a:buNone/>
+            </a:pPr>
+            <a:r>
+              <a:rPr lang="en-US" sz="1600" dirty="0">
+                <a:solidFill>
+                  <a:srgbClr val="237F72"/>
+                </a:solidFill>
+              </a:rPr>
+              <a:t>needed for30% </a:t>
+            </a:r>
+            <a:endParaRPr lang="en-US" sz="1600" dirty="0"/>
+          </a:p>
+          <a:p>
+            <a:pPr indent="0" marL="0">
+              <a:lnSpc>
+                <a:spcPct val="100000"/>
+              </a:lnSpc>
+              <a:buNone/>
+            </a:pPr>
+            <a:r>
+              <a:rPr lang="en-US" sz="1600" dirty="0">
+                <a:solidFill>
+                  <a:srgbClr val="237F72"/>
+                </a:solidFill>
+              </a:rPr>
+              <a:t>recovery</a:t>
+            </a:r>
+            <a:endParaRPr lang="en-US" sz="1600" dirty="0"/>
+          </a:p>
+          <a:p>
+            <a:pPr indent="0" marL="0">
+              <a:lnSpc>
+                <a:spcPct val="100000"/>
+              </a:lnSpc>
+              <a:buNone/>
+            </a:pPr>
+            <a:r>
+              <a:rPr lang="en-US" sz="1600" dirty="0">
+                <a:solidFill>
+                  <a:srgbClr val="237F72"/>
+                </a:solidFill>
+              </a:rPr>
+              <a:t>153.00 百万USD</a:t>
+            </a:r>
+            <a:endParaRPr lang="en-US" sz="1600" dirty="0"/>
+          </a:p>
+        </p:txBody>
+      </p:sp>
+      <p:sp>
+        <p:nvSpPr>
+          <p:cNvPr id="7" name="Text 5"/>
+          <p:cNvSpPr/>
+          <p:nvPr/>
+        </p:nvSpPr>
+        <p:spPr>
+          <a:xfrm>
+            <a:off x="594360" y="5321808"/>
+            <a:ext cx="10972800" cy="365760"/>
+          </a:xfrm>
+          <a:prstGeom prst="rect">
+            <a:avLst/>
+          </a:prstGeom>
+          <a:noFill/>
+          <a:ln/>
+        </p:spPr>
+        <p:txBody>
+          <a:bodyPr wrap="square" lIns="0" tIns="0" rIns="0" bIns="0" rtlCol="0" anchor="t"/>
+          <a:lstStyle/>
+          <a:p>
+            <a:pPr indent="0" marL="0">
+              <a:lnSpc>
+                <a:spcPct val="100000"/>
+              </a:lnSpc>
+              <a:buNone/>
+            </a:pPr>
+            <a:r>
+              <a:rPr lang="en-US" sz="1100" dirty="0">
+                <a:solidFill>
+                  <a:srgbClr val="213B45"/>
+                </a:solidFill>
+              </a:rPr>
+              <a:t>[FF_R109_NOTE] conditional / [F06] conditional</a:t>
+            </a:r>
+            <a:endParaRPr lang="en-US" sz="1100" dirty="0"/>
+          </a:p>
+        </p:txBody>
+      </p:sp>
+      <p:sp>
+        <p:nvSpPr>
+          <p:cNvPr id="8" name="Text 6"/>
+          <p:cNvSpPr/>
+          <p:nvPr/>
+        </p:nvSpPr>
+        <p:spPr>
+          <a:xfrm>
+            <a:off x="594360" y="5715000"/>
+            <a:ext cx="10972800" cy="731520"/>
+          </a:xfrm>
+          <a:prstGeom prst="rect">
+            <a:avLst/>
+          </a:prstGeom>
+          <a:noFill/>
+          <a:ln/>
+        </p:spPr>
+        <p:txBody>
+          <a:bodyPr wrap="square" lIns="0" tIns="0" rIns="0" bIns="0" rtlCol="0" anchor="t"/>
+          <a:lstStyle/>
+          <a:p>
+            <a:pPr indent="0" marL="0">
+              <a:lnSpc>
+                <a:spcPct val="100000"/>
+              </a:lnSpc>
+              <a:buNone/>
+            </a:pPr>
+            <a:r>
+              <a:rPr lang="en-US" sz="1000" dirty="0">
+                <a:solidFill>
+                  <a:srgbClr val="586874"/>
+                </a:solidFill>
+              </a:rPr>
+              <a:t>底稿 FF_R109_NOTE / F06；来源 S25 / SCREDIT / SQ126 / S_SP_Q1 / S_DEV_CORP / </a:t>
+            </a:r>
+            <a:endParaRPr lang="en-US" sz="1000" dirty="0"/>
+          </a:p>
+          <a:p>
+            <a:pPr indent="0" marL="0">
+              <a:lnSpc>
+                <a:spcPct val="100000"/>
+              </a:lnSpc>
+              <a:buNone/>
+            </a:pPr>
+            <a:r>
+              <a:rPr lang="en-US" sz="1000" dirty="0">
+                <a:solidFill>
+                  <a:srgbClr val="586874"/>
+                </a:solidFill>
+              </a:rPr>
+              <a:t>S_SP_SECTORS / S_SP_RATIOS / SPROFORMA / S_SP_XBRL / S_DEV_LIQ / S_DEV_REC / </a:t>
+            </a:r>
+            <a:endParaRPr lang="en-US" sz="1000" dirty="0"/>
+          </a:p>
+          <a:p>
+            <a:pPr indent="0" marL="0">
+              <a:lnSpc>
+                <a:spcPct val="100000"/>
+              </a:lnSpc>
+              <a:buNone/>
+            </a:pPr>
+            <a:r>
+              <a:rPr lang="en-US" sz="1000" dirty="0">
+                <a:solidFill>
+                  <a:srgbClr val="586874"/>
+                </a:solidFill>
+              </a:rPr>
+              <a:t>SOLDCREDIT</a:t>
+            </a:r>
+            <a:endParaRPr lang="en-US" sz="1000" dirty="0"/>
+          </a:p>
+          <a:p>
+            <a:pPr indent="0" marL="0">
+              <a:lnSpc>
+                <a:spcPct val="100000"/>
+              </a:lnSpc>
+              <a:buNone/>
+            </a:pPr>
+            <a:r>
+              <a:rPr lang="en-US" sz="1000" dirty="0">
+                <a:solidFill>
+                  <a:srgbClr val="586874"/>
+                </a:solidFill>
+              </a:rPr>
+              <a:t>原文定位、URL及完整引用见本页备注；完整方法和明细见同名底稿及 Word/Excel。</a:t>
+            </a:r>
+            <a:endParaRPr lang="en-US" sz="1000" dirty="0"/>
+          </a:p>
+        </p:txBody>
+      </p:sp>
+    </p:spTree>
+  </p:cSld>
+  <p:clrMapOvr>
+    <a:masterClrMapping/>
+  </p:clrMapOvr>
+</p:sld>
+</file>
+
+<file path=ppt/slides/slide14.xml><?xml version="1.0" encoding="utf-8"?>
+<p:sld xmlns:a="http://schemas.openxmlformats.org/drawingml/2006/main" xmlns:r="http://schemas.openxmlformats.org/officeDocument/2006/relationships" xmlns:p="http://schemas.openxmlformats.org/presentationml/2006/main">
+  <p:cSld name="Slide 14">
+    <p:bg>
+      <p:bgPr>
+        <a:solidFill>
+          <a:srgbClr val="F5F7F6"/>
+        </a:solidFill>
+      </p:bgPr>
+    </p:bg>
+    <p:spTree>
+      <p:nvGrpSpPr>
+        <p:cNvPr id="1" name=""/>
+        <p:cNvGrpSpPr/>
+        <p:nvPr/>
+      </p:nvGrpSpPr>
+      <p:grpSpPr>
+        <a:xfrm>
+          <a:off x="0" y="0"/>
+          <a:ext cx="0" cy="0"/>
+          <a:chOff x="0" y="0"/>
+          <a:chExt cx="0" cy="0"/>
+        </a:xfrm>
+      </p:grpSpPr>
+      <p:sp>
+        <p:nvSpPr>
+          <p:cNvPr id="2" name="Text 0"/>
+          <p:cNvSpPr/>
+          <p:nvPr/>
+        </p:nvSpPr>
+        <p:spPr>
+          <a:xfrm>
+            <a:off x="548640" y="365760"/>
+            <a:ext cx="11064240" cy="731520"/>
+          </a:xfrm>
+          <a:prstGeom prst="rect">
+            <a:avLst/>
+          </a:prstGeom>
+          <a:noFill/>
+          <a:ln/>
+        </p:spPr>
+        <p:txBody>
+          <a:bodyPr wrap="square" lIns="0" tIns="0" rIns="0" bIns="0" rtlCol="0" anchor="t"/>
+          <a:lstStyle/>
+          <a:p>
+            <a:pPr indent="0" marL="0">
+              <a:lnSpc>
+                <a:spcPct val="100000"/>
+              </a:lnSpc>
+              <a:buNone/>
+            </a:pPr>
+            <a:r>
+              <a:rPr lang="en-US" sz="2700" b="1" dirty="0">
+                <a:solidFill>
+                  <a:srgbClr val="213B45"/>
+                </a:solidFill>
+              </a:rPr>
+              <a:t>指定高级无抵押票据按实际义务人和回收范围判断 2/2</a:t>
+            </a:r>
+            <a:endParaRPr lang="en-US" sz="2700" dirty="0"/>
+          </a:p>
+        </p:txBody>
+      </p:sp>
+      <p:sp>
+        <p:nvSpPr>
+          <p:cNvPr id="3" name="Text 1"/>
+          <p:cNvSpPr/>
+          <p:nvPr/>
+        </p:nvSpPr>
+        <p:spPr>
+          <a:xfrm>
+            <a:off x="548640" y="6473952"/>
+            <a:ext cx="11064240" cy="182880"/>
+          </a:xfrm>
+          <a:prstGeom prst="rect">
+            <a:avLst/>
+          </a:prstGeom>
+          <a:noFill/>
+          <a:ln/>
+        </p:spPr>
+        <p:txBody>
+          <a:bodyPr wrap="square" lIns="0" tIns="0" rIns="0" bIns="0" rtlCol="0" anchor="ctr"/>
+          <a:lstStyle/>
+          <a:p>
+            <a:pPr indent="0" marL="0">
+              <a:buNone/>
+            </a:pPr>
+            <a:r>
+              <a:rPr lang="en-US" sz="900" dirty="0">
+                <a:solidFill>
+                  <a:srgbClr val="586874"/>
+                </a:solidFill>
+              </a:rPr>
+              <a:t>Crown Castle Inc. and subsidiaries  |  2025-12-31  |  crown-castle-2025-public-4  |  14</a:t>
+            </a:r>
+            <a:endParaRPr lang="en-US" sz="900" dirty="0"/>
+          </a:p>
+        </p:txBody>
+      </p:sp>
+      <p:sp>
+        <p:nvSpPr>
+          <p:cNvPr id="4" name="Text 2"/>
+          <p:cNvSpPr/>
+          <p:nvPr/>
+        </p:nvSpPr>
+        <p:spPr>
+          <a:xfrm>
+            <a:off x="594360" y="1417320"/>
+            <a:ext cx="7223760" cy="3794760"/>
+          </a:xfrm>
+          <a:prstGeom prst="rect">
+            <a:avLst/>
+          </a:prstGeom>
+          <a:noFill/>
+          <a:ln/>
+        </p:spPr>
+        <p:txBody>
+          <a:bodyPr wrap="square" lIns="0" tIns="0" rIns="0" bIns="0" rtlCol="0" anchor="t"/>
+          <a:lstStyle/>
+          <a:p>
+            <a:pPr indent="0" marL="0">
+              <a:lnSpc>
+                <a:spcPct val="100000"/>
+              </a:lnSpc>
+              <a:buNone/>
+            </a:pPr>
+            <a:endParaRPr lang="en-US" sz="1800" dirty="0"/>
+          </a:p>
+        </p:txBody>
+      </p:sp>
+      <p:sp>
+        <p:nvSpPr>
+          <p:cNvPr id="5" name="Shape 3"/>
+          <p:cNvSpPr/>
+          <p:nvPr/>
+        </p:nvSpPr>
+        <p:spPr>
+          <a:xfrm>
+            <a:off x="8046720" y="1325880"/>
+            <a:ext cx="3566160" cy="4069080"/>
+          </a:xfrm>
+          <a:prstGeom prst="rect">
+            <a:avLst/>
+          </a:prstGeom>
+          <a:solidFill>
+            <a:srgbClr val="E6EFEC"/>
+          </a:solidFill>
+          <a:ln w="12700">
+            <a:solidFill>
+              <a:srgbClr val="E6EFEC"/>
+            </a:solidFill>
+            <a:prstDash val="solid"/>
+          </a:ln>
+        </p:spPr>
+      </p:sp>
+      <p:sp>
+        <p:nvSpPr>
+          <p:cNvPr id="6" name="Text 4"/>
+          <p:cNvSpPr/>
+          <p:nvPr/>
+        </p:nvSpPr>
+        <p:spPr>
+          <a:xfrm>
+            <a:off x="8211312" y="1417320"/>
+            <a:ext cx="3246120" cy="3794760"/>
+          </a:xfrm>
+          <a:prstGeom prst="rect">
+            <a:avLst/>
+          </a:prstGeom>
+          <a:noFill/>
+          <a:ln/>
+        </p:spPr>
+        <p:txBody>
+          <a:bodyPr wrap="square" lIns="0" tIns="0" rIns="0" bIns="0" rtlCol="0" anchor="t"/>
+          <a:lstStyle/>
+          <a:p>
+            <a:pPr indent="0" marL="0">
+              <a:lnSpc>
+                <a:spcPct val="100000"/>
+              </a:lnSpc>
+              <a:buNone/>
+            </a:pPr>
+            <a:r>
+              <a:rPr lang="en-US" sz="1600" dirty="0">
+                <a:solidFill>
+                  <a:srgbClr val="237F72"/>
+                </a:solidFill>
+              </a:rPr>
+              <a:t>Specific note </a:t>
+            </a:r>
+            <a:endParaRPr lang="en-US" sz="1600" dirty="0"/>
+          </a:p>
+          <a:p>
+            <a:pPr indent="0" marL="0">
+              <a:lnSpc>
+                <a:spcPct val="100000"/>
+              </a:lnSpc>
+              <a:buNone/>
+            </a:pPr>
+            <a:r>
+              <a:rPr lang="en-US" sz="1600" dirty="0">
+                <a:solidFill>
+                  <a:srgbClr val="237F72"/>
+                </a:solidFill>
+              </a:rPr>
+              <a:t>distribution </a:t>
+            </a:r>
+            <a:endParaRPr lang="en-US" sz="1600" dirty="0"/>
+          </a:p>
+          <a:p>
+            <a:pPr indent="0" marL="0">
+              <a:lnSpc>
+                <a:spcPct val="100000"/>
+              </a:lnSpc>
+              <a:buNone/>
+            </a:pPr>
+            <a:r>
+              <a:rPr lang="en-US" sz="1600" dirty="0">
+                <a:solidFill>
+                  <a:srgbClr val="237F72"/>
+                </a:solidFill>
+              </a:rPr>
+              <a:t>needed for10% </a:t>
+            </a:r>
+            <a:endParaRPr lang="en-US" sz="1600" dirty="0"/>
+          </a:p>
+          <a:p>
+            <a:pPr indent="0" marL="0">
+              <a:lnSpc>
+                <a:spcPct val="100000"/>
+              </a:lnSpc>
+              <a:buNone/>
+            </a:pPr>
+            <a:r>
+              <a:rPr lang="en-US" sz="1600" dirty="0">
+                <a:solidFill>
+                  <a:srgbClr val="237F72"/>
+                </a:solidFill>
+              </a:rPr>
+              <a:t>recovery</a:t>
+            </a:r>
+            <a:endParaRPr lang="en-US" sz="1600" dirty="0"/>
+          </a:p>
+          <a:p>
+            <a:pPr indent="0" marL="0">
+              <a:lnSpc>
+                <a:spcPct val="100000"/>
+              </a:lnSpc>
+              <a:buNone/>
+            </a:pPr>
+            <a:r>
+              <a:rPr lang="en-US" sz="1600" dirty="0">
+                <a:solidFill>
+                  <a:srgbClr val="237F72"/>
+                </a:solidFill>
+              </a:rPr>
+              <a:t>51.00 百万USD</a:t>
+            </a:r>
+            <a:endParaRPr lang="en-US" sz="1600" dirty="0"/>
+          </a:p>
+        </p:txBody>
+      </p:sp>
+      <p:sp>
+        <p:nvSpPr>
+          <p:cNvPr id="7" name="Text 5"/>
+          <p:cNvSpPr/>
+          <p:nvPr/>
+        </p:nvSpPr>
+        <p:spPr>
+          <a:xfrm>
+            <a:off x="594360" y="5321808"/>
+            <a:ext cx="10972800" cy="365760"/>
+          </a:xfrm>
+          <a:prstGeom prst="rect">
+            <a:avLst/>
+          </a:prstGeom>
+          <a:noFill/>
+          <a:ln/>
+        </p:spPr>
+        <p:txBody>
+          <a:bodyPr wrap="square" lIns="0" tIns="0" rIns="0" bIns="0" rtlCol="0" anchor="t"/>
+          <a:lstStyle/>
+          <a:p>
+            <a:pPr indent="0" marL="0">
+              <a:lnSpc>
+                <a:spcPct val="100000"/>
+              </a:lnSpc>
+              <a:buNone/>
+            </a:pPr>
+            <a:r>
+              <a:rPr lang="en-US" sz="1100" dirty="0">
+                <a:solidFill>
+                  <a:srgbClr val="213B45"/>
+                </a:solidFill>
+              </a:rPr>
+              <a:t>[FF_R109_NOTE] conditional / [F06] conditional</a:t>
+            </a:r>
+            <a:endParaRPr lang="en-US" sz="1100" dirty="0"/>
+          </a:p>
+        </p:txBody>
+      </p:sp>
+      <p:sp>
+        <p:nvSpPr>
+          <p:cNvPr id="8" name="Text 6"/>
+          <p:cNvSpPr/>
+          <p:nvPr/>
+        </p:nvSpPr>
+        <p:spPr>
+          <a:xfrm>
+            <a:off x="594360" y="5715000"/>
+            <a:ext cx="10972800" cy="731520"/>
+          </a:xfrm>
+          <a:prstGeom prst="rect">
+            <a:avLst/>
+          </a:prstGeom>
+          <a:noFill/>
+          <a:ln/>
+        </p:spPr>
+        <p:txBody>
+          <a:bodyPr wrap="square" lIns="0" tIns="0" rIns="0" bIns="0" rtlCol="0" anchor="t"/>
+          <a:lstStyle/>
+          <a:p>
+            <a:pPr indent="0" marL="0">
+              <a:lnSpc>
+                <a:spcPct val="100000"/>
+              </a:lnSpc>
+              <a:buNone/>
+            </a:pPr>
+            <a:r>
+              <a:rPr lang="en-US" sz="1000" dirty="0">
+                <a:solidFill>
+                  <a:srgbClr val="586874"/>
+                </a:solidFill>
+              </a:rPr>
+              <a:t>底稿 FF_R109_NOTE / F06；来源 S25 / SCREDIT / SQ126 / S_SP_Q1 / S_DEV_CORP / </a:t>
+            </a:r>
+            <a:endParaRPr lang="en-US" sz="1000" dirty="0"/>
+          </a:p>
+          <a:p>
+            <a:pPr indent="0" marL="0">
+              <a:lnSpc>
+                <a:spcPct val="100000"/>
+              </a:lnSpc>
+              <a:buNone/>
+            </a:pPr>
+            <a:r>
+              <a:rPr lang="en-US" sz="1000" dirty="0">
+                <a:solidFill>
+                  <a:srgbClr val="586874"/>
+                </a:solidFill>
+              </a:rPr>
+              <a:t>S_SP_SECTORS / S_SP_RATIOS / SPROFORMA / S_SP_XBRL / S_DEV_LIQ / S_DEV_REC / </a:t>
+            </a:r>
+            <a:endParaRPr lang="en-US" sz="1000" dirty="0"/>
+          </a:p>
+          <a:p>
+            <a:pPr indent="0" marL="0">
+              <a:lnSpc>
+                <a:spcPct val="100000"/>
+              </a:lnSpc>
+              <a:buNone/>
+            </a:pPr>
+            <a:r>
+              <a:rPr lang="en-US" sz="1000" dirty="0">
+                <a:solidFill>
+                  <a:srgbClr val="586874"/>
+                </a:solidFill>
+              </a:rPr>
+              <a:t>SOLDCREDIT</a:t>
+            </a:r>
+            <a:endParaRPr lang="en-US" sz="1000" dirty="0"/>
+          </a:p>
+          <a:p>
+            <a:pPr indent="0" marL="0">
+              <a:lnSpc>
+                <a:spcPct val="100000"/>
+              </a:lnSpc>
+              <a:buNone/>
+            </a:pPr>
+            <a:r>
+              <a:rPr lang="en-US" sz="1000" dirty="0">
+                <a:solidFill>
+                  <a:srgbClr val="586874"/>
+                </a:solidFill>
+              </a:rPr>
+              <a:t>原文定位、URL及完整引用见本页备注；完整方法和明细见同名底稿及 Word/Excel。</a:t>
+            </a:r>
+            <a:endParaRPr lang="en-US" sz="1000" dirty="0"/>
+          </a:p>
+        </p:txBody>
+      </p:sp>
+    </p:spTree>
+  </p:cSld>
+  <p:clrMapOvr>
+    <a:masterClrMapping/>
+  </p:clrMapOvr>
+</p:sld>
+</file>
+
+<file path=ppt/slides/slide15.xml><?xml version="1.0" encoding="utf-8"?>
+<p:sld xmlns:a="http://schemas.openxmlformats.org/drawingml/2006/main" xmlns:r="http://schemas.openxmlformats.org/officeDocument/2006/relationships" xmlns:p="http://schemas.openxmlformats.org/presentationml/2006/main">
+  <p:cSld name="Slide 15">
+    <p:bg>
+      <p:bgPr>
+        <a:solidFill>
+          <a:srgbClr val="F5F7F6"/>
+        </a:solidFill>
+      </p:bgPr>
+    </p:bg>
+    <p:spTree>
+      <p:nvGrpSpPr>
+        <p:cNvPr id="1" name=""/>
+        <p:cNvGrpSpPr/>
+        <p:nvPr/>
+      </p:nvGrpSpPr>
+      <p:grpSpPr>
+        <a:xfrm>
+          <a:off x="0" y="0"/>
+          <a:ext cx="0" cy="0"/>
+          <a:chOff x="0" y="0"/>
+          <a:chExt cx="0" cy="0"/>
+        </a:xfrm>
+      </p:grpSpPr>
+      <p:sp>
+        <p:nvSpPr>
+          <p:cNvPr id="2" name="Text 0"/>
+          <p:cNvSpPr/>
+          <p:nvPr/>
+        </p:nvSpPr>
+        <p:spPr>
+          <a:xfrm>
+            <a:off x="548640" y="365760"/>
+            <a:ext cx="11064240" cy="731520"/>
+          </a:xfrm>
+          <a:prstGeom prst="rect">
+            <a:avLst/>
+          </a:prstGeom>
+          <a:noFill/>
+          <a:ln/>
+        </p:spPr>
+        <p:txBody>
+          <a:bodyPr wrap="square" lIns="0" tIns="0" rIns="0" bIns="0" rtlCol="0" anchor="t"/>
+          <a:lstStyle/>
+          <a:p>
+            <a:pPr indent="0" marL="0">
+              <a:lnSpc>
+                <a:spcPct val="100000"/>
+              </a:lnSpc>
+              <a:buNone/>
+            </a:pPr>
+            <a:r>
+              <a:rPr lang="en-US" sz="2700" b="1" dirty="0">
+                <a:solidFill>
+                  <a:srgbClr val="213B45"/>
+                </a:solidFill>
+              </a:rPr>
+              <a:t>公开分析已执行的程序与实际审计证据分别记录</a:t>
+            </a:r>
+            <a:endParaRPr lang="en-US" sz="2700" dirty="0"/>
+          </a:p>
+        </p:txBody>
+      </p:sp>
+      <p:sp>
+        <p:nvSpPr>
+          <p:cNvPr id="3" name="Text 1"/>
+          <p:cNvSpPr/>
+          <p:nvPr/>
+        </p:nvSpPr>
+        <p:spPr>
+          <a:xfrm>
+            <a:off x="548640" y="6473952"/>
+            <a:ext cx="11064240" cy="182880"/>
+          </a:xfrm>
+          <a:prstGeom prst="rect">
+            <a:avLst/>
+          </a:prstGeom>
+          <a:noFill/>
+          <a:ln/>
+        </p:spPr>
+        <p:txBody>
+          <a:bodyPr wrap="square" lIns="0" tIns="0" rIns="0" bIns="0" rtlCol="0" anchor="ctr"/>
+          <a:lstStyle/>
+          <a:p>
+            <a:pPr indent="0" marL="0">
+              <a:buNone/>
+            </a:pPr>
+            <a:r>
+              <a:rPr lang="en-US" sz="900" dirty="0">
+                <a:solidFill>
+                  <a:srgbClr val="586874"/>
+                </a:solidFill>
+              </a:rPr>
+              <a:t>Crown Castle Inc. and subsidiaries  |  2025-12-31  |  crown-castle-2025-public-4  |  15</a:t>
+            </a:r>
+            <a:endParaRPr lang="en-US" sz="900" dirty="0"/>
+          </a:p>
+        </p:txBody>
+      </p:sp>
+      <p:sp>
+        <p:nvSpPr>
+          <p:cNvPr id="4" name="Text 2"/>
+          <p:cNvSpPr/>
+          <p:nvPr/>
+        </p:nvSpPr>
+        <p:spPr>
+          <a:xfrm>
+            <a:off x="594360" y="1417320"/>
+            <a:ext cx="7223760" cy="3794760"/>
+          </a:xfrm>
+          <a:prstGeom prst="rect">
+            <a:avLst/>
+          </a:prstGeom>
+          <a:noFill/>
+          <a:ln/>
+        </p:spPr>
+        <p:txBody>
+          <a:bodyPr wrap="square" lIns="0" tIns="0" rIns="0" bIns="0" rtlCol="0" anchor="t"/>
+          <a:lstStyle/>
+          <a:p>
+            <a:pPr indent="0" marL="0">
+              <a:lnSpc>
+                <a:spcPct val="100000"/>
+              </a:lnSpc>
+              <a:buNone/>
+            </a:pPr>
+            <a:r>
+              <a:rPr lang="en-US" sz="1800" dirty="0">
+                <a:solidFill>
+                  <a:srgbClr val="1F2933"/>
+                </a:solidFill>
+              </a:rPr>
+              <a:t>PwC财报及ICFR意见、收入与出售CAM已有原件。此次分析</a:t>
+            </a:r>
+            <a:endParaRPr lang="en-US" sz="1800" dirty="0"/>
+          </a:p>
+          <a:p>
+            <a:pPr indent="0" marL="0">
+              <a:lnSpc>
+                <a:spcPct val="100000"/>
+              </a:lnSpc>
+              <a:buNone/>
+            </a:pPr>
+            <a:r>
+              <a:rPr lang="en-US" sz="1800" dirty="0">
+                <a:solidFill>
+                  <a:srgbClr val="1F2933"/>
+                </a:solidFill>
+              </a:rPr>
+              <a:t>执行的是公开政策、原文版本和算术核对；银行函证、控制运行与逐</a:t>
+            </a:r>
+            <a:endParaRPr lang="en-US" sz="1800" dirty="0"/>
+          </a:p>
+          <a:p>
+            <a:pPr indent="0" marL="0">
+              <a:lnSpc>
+                <a:spcPct val="100000"/>
+              </a:lnSpc>
+              <a:buNone/>
+            </a:pPr>
+            <a:r>
+              <a:rPr lang="en-US" sz="1800" dirty="0">
+                <a:solidFill>
+                  <a:srgbClr val="1F2933"/>
+                </a:solidFill>
+              </a:rPr>
+              <a:t>项合同检查不能冒记完成。</a:t>
+            </a:r>
+            <a:endParaRPr lang="en-US" sz="1800" dirty="0"/>
+          </a:p>
+          <a:p>
+            <a:pPr indent="0" marL="0">
+              <a:lnSpc>
+                <a:spcPct val="100000"/>
+              </a:lnSpc>
+              <a:buNone/>
+            </a:pPr>
+            <a:endParaRPr lang="en-US" sz="1800" dirty="0"/>
+          </a:p>
+          <a:p>
+            <a:pPr indent="0" marL="0">
+              <a:lnSpc>
+                <a:spcPct val="100000"/>
+              </a:lnSpc>
+              <a:buNone/>
+            </a:pPr>
+            <a:r>
+              <a:rPr lang="en-US" sz="1800" dirty="0">
+                <a:solidFill>
+                  <a:srgbClr val="1F2933"/>
+                </a:solidFill>
+              </a:rPr>
+              <a:t>AIP正文与表中EBITDA差、B3范围、显示加权与完整精度</a:t>
+            </a:r>
+            <a:endParaRPr lang="en-US" sz="1800" dirty="0"/>
+          </a:p>
+          <a:p>
+            <a:pPr indent="0" marL="0">
+              <a:lnSpc>
+                <a:spcPct val="100000"/>
+              </a:lnSpc>
+              <a:buNone/>
+            </a:pPr>
+            <a:r>
+              <a:rPr lang="en-US" sz="1800" dirty="0">
+                <a:solidFill>
+                  <a:srgbClr val="1F2933"/>
+                </a:solidFill>
+              </a:rPr>
+              <a:t>分别保留。小额显示差不自动认定错报；未证完整计算规则也不能</a:t>
+            </a:r>
+            <a:endParaRPr lang="en-US" sz="1800" dirty="0"/>
+          </a:p>
+          <a:p>
+            <a:pPr indent="0" marL="0">
+              <a:lnSpc>
+                <a:spcPct val="100000"/>
+              </a:lnSpc>
+              <a:buNone/>
+            </a:pPr>
+            <a:r>
+              <a:rPr lang="en-US" sz="1800" dirty="0">
+                <a:solidFill>
+                  <a:srgbClr val="1F2933"/>
+                </a:solidFill>
+              </a:rPr>
+              <a:t>自行插值。</a:t>
+            </a:r>
+            <a:endParaRPr lang="en-US" sz="1800" dirty="0"/>
+          </a:p>
+          <a:p>
+            <a:pPr indent="0" marL="0">
+              <a:lnSpc>
+                <a:spcPct val="100000"/>
+              </a:lnSpc>
+              <a:buNone/>
+            </a:pPr>
+            <a:endParaRPr lang="en-US" sz="1800" dirty="0"/>
+          </a:p>
+          <a:p>
+            <a:pPr indent="0" marL="0">
+              <a:lnSpc>
+                <a:spcPct val="100000"/>
+              </a:lnSpc>
+              <a:buNone/>
+            </a:pPr>
+            <a:r>
+              <a:rPr lang="en-US" sz="1800" dirty="0">
+                <a:solidFill>
+                  <a:srgbClr val="1F2933"/>
+                </a:solidFill>
+              </a:rPr>
+              <a:t>后续围绕真实支付、治理执行、收入认定和已识别差异取证；不以</a:t>
+            </a:r>
+            <a:endParaRPr lang="en-US" sz="1800" dirty="0"/>
+          </a:p>
+          <a:p>
+            <a:pPr indent="0" marL="0">
+              <a:lnSpc>
+                <a:spcPct val="100000"/>
+              </a:lnSpc>
+              <a:buNone/>
+            </a:pPr>
+            <a:r>
+              <a:rPr lang="en-US" sz="1800" dirty="0">
+                <a:solidFill>
+                  <a:srgbClr val="1F2933"/>
+                </a:solidFill>
+              </a:rPr>
+              <a:t>制度存在、勾稽通过或审计师程序替代本次实际结果。</a:t>
+            </a:r>
+            <a:endParaRPr lang="en-US" sz="1800" dirty="0"/>
+          </a:p>
+        </p:txBody>
+      </p:sp>
+      <p:sp>
+        <p:nvSpPr>
+          <p:cNvPr id="5" name="Shape 3"/>
+          <p:cNvSpPr/>
+          <p:nvPr/>
+        </p:nvSpPr>
+        <p:spPr>
+          <a:xfrm>
+            <a:off x="8046720" y="1325880"/>
+            <a:ext cx="3566160" cy="4069080"/>
+          </a:xfrm>
+          <a:prstGeom prst="rect">
+            <a:avLst/>
+          </a:prstGeom>
+          <a:solidFill>
+            <a:srgbClr val="E6EFEC"/>
+          </a:solidFill>
+          <a:ln w="12700">
+            <a:solidFill>
+              <a:srgbClr val="E6EFEC"/>
+            </a:solidFill>
+            <a:prstDash val="solid"/>
+          </a:ln>
+        </p:spPr>
+      </p:sp>
+      <p:sp>
+        <p:nvSpPr>
+          <p:cNvPr id="6" name="Text 4"/>
+          <p:cNvSpPr/>
+          <p:nvPr/>
+        </p:nvSpPr>
+        <p:spPr>
+          <a:xfrm>
+            <a:off x="8211312" y="1417320"/>
+            <a:ext cx="3246120" cy="3794760"/>
+          </a:xfrm>
+          <a:prstGeom prst="rect">
+            <a:avLst/>
+          </a:prstGeom>
+          <a:noFill/>
+          <a:ln/>
+        </p:spPr>
+        <p:txBody>
+          <a:bodyPr wrap="square" lIns="0" tIns="0" rIns="0" bIns="0" rtlCol="0" anchor="t"/>
+          <a:lstStyle/>
+          <a:p>
+            <a:pPr indent="0" marL="0">
+              <a:lnSpc>
+                <a:spcPct val="100000"/>
+              </a:lnSpc>
+              <a:buNone/>
+            </a:pPr>
+            <a:r>
+              <a:rPr lang="en-US" sz="1600" dirty="0">
+                <a:solidFill>
+                  <a:srgbClr val="237F72"/>
+                </a:solidFill>
+              </a:rPr>
+              <a:t>AIP组件显示和与披露总的差额</a:t>
+            </a:r>
+            <a:endParaRPr lang="en-US" sz="1600" dirty="0"/>
+          </a:p>
+          <a:p>
+            <a:pPr indent="0" marL="0">
+              <a:lnSpc>
+                <a:spcPct val="100000"/>
+              </a:lnSpc>
+              <a:buNone/>
+            </a:pPr>
+            <a:r>
+              <a:rPr lang="en-US" sz="1600" dirty="0">
+                <a:solidFill>
+                  <a:srgbClr val="237F72"/>
+                </a:solidFill>
+              </a:rPr>
+              <a:t>0.04 个百分点</a:t>
+            </a:r>
+            <a:endParaRPr lang="en-US" sz="1600" dirty="0"/>
+          </a:p>
+          <a:p>
+            <a:pPr indent="0" marL="0">
+              <a:lnSpc>
+                <a:spcPct val="100000"/>
+              </a:lnSpc>
+              <a:buNone/>
+            </a:pPr>
+            <a:endParaRPr lang="en-US" sz="1600" dirty="0"/>
+          </a:p>
+          <a:p>
+            <a:pPr indent="0" marL="0">
+              <a:lnSpc>
+                <a:spcPct val="100000"/>
+              </a:lnSpc>
+              <a:buNone/>
+            </a:pPr>
+            <a:r>
+              <a:rPr lang="en-US" sz="1600" dirty="0">
+                <a:solidFill>
+                  <a:srgbClr val="237F72"/>
+                </a:solidFill>
+              </a:rPr>
+              <a:t>Hillabrant披露奖金减</a:t>
+            </a:r>
+            <a:endParaRPr lang="en-US" sz="1600" dirty="0"/>
+          </a:p>
+          <a:p>
+            <a:pPr indent="0" marL="0">
+              <a:lnSpc>
+                <a:spcPct val="100000"/>
+              </a:lnSpc>
+              <a:buNone/>
+            </a:pPr>
+            <a:r>
+              <a:rPr lang="en-US" sz="1600" dirty="0">
+                <a:solidFill>
+                  <a:srgbClr val="237F72"/>
+                </a:solidFill>
+              </a:rPr>
+              <a:t>显示数乘积</a:t>
+            </a:r>
+            <a:endParaRPr lang="en-US" sz="1600" dirty="0"/>
+          </a:p>
+          <a:p>
+            <a:pPr indent="0" marL="0">
+              <a:lnSpc>
+                <a:spcPct val="100000"/>
+              </a:lnSpc>
+              <a:buNone/>
+            </a:pPr>
+            <a:r>
+              <a:rPr lang="en-US" sz="1600" dirty="0">
+                <a:solidFill>
+                  <a:srgbClr val="237F72"/>
+                </a:solidFill>
+              </a:rPr>
+              <a:t>0.95 USD</a:t>
+            </a:r>
+            <a:endParaRPr lang="en-US" sz="1600" dirty="0"/>
+          </a:p>
+        </p:txBody>
+      </p:sp>
+      <p:sp>
+        <p:nvSpPr>
+          <p:cNvPr id="7" name="Text 5"/>
+          <p:cNvSpPr/>
+          <p:nvPr/>
+        </p:nvSpPr>
+        <p:spPr>
+          <a:xfrm>
+            <a:off x="594360" y="5321808"/>
+            <a:ext cx="10972800" cy="365760"/>
+          </a:xfrm>
+          <a:prstGeom prst="rect">
+            <a:avLst/>
+          </a:prstGeom>
+          <a:noFill/>
+          <a:ln/>
+        </p:spPr>
+        <p:txBody>
+          <a:bodyPr wrap="square" lIns="0" tIns="0" rIns="0" bIns="0" rtlCol="0" anchor="t"/>
+          <a:lstStyle/>
+          <a:p>
+            <a:pPr indent="0" marL="0">
+              <a:lnSpc>
+                <a:spcPct val="100000"/>
+              </a:lnSpc>
+              <a:buNone/>
+            </a:pPr>
+            <a:r>
+              <a:rPr lang="en-US" sz="1100" dirty="0">
+                <a:solidFill>
+                  <a:srgbClr val="213B45"/>
+                </a:solidFill>
+              </a:rPr>
+              <a:t>[F12] supported / [cg_rental_audit] conditional / [cg_sti_difference] </a:t>
+            </a:r>
+            <a:endParaRPr lang="en-US" sz="1100" dirty="0"/>
+          </a:p>
+          <a:p>
+            <a:pPr indent="0" marL="0">
+              <a:lnSpc>
+                <a:spcPct val="100000"/>
+              </a:lnSpc>
+              <a:buNone/>
+            </a:pPr>
+            <a:r>
+              <a:rPr lang="en-US" sz="1100" dirty="0">
+                <a:solidFill>
+                  <a:srgbClr val="213B45"/>
+                </a:solidFill>
+              </a:rPr>
+              <a:t>unresolved / [cg_governance] conditional</a:t>
+            </a:r>
+            <a:endParaRPr lang="en-US" sz="1100" dirty="0"/>
+          </a:p>
+        </p:txBody>
+      </p:sp>
+      <p:sp>
+        <p:nvSpPr>
+          <p:cNvPr id="8" name="Text 6"/>
+          <p:cNvSpPr/>
+          <p:nvPr/>
+        </p:nvSpPr>
+        <p:spPr>
+          <a:xfrm>
+            <a:off x="594360" y="5715000"/>
+            <a:ext cx="10972800" cy="731520"/>
+          </a:xfrm>
+          <a:prstGeom prst="rect">
+            <a:avLst/>
+          </a:prstGeom>
+          <a:noFill/>
+          <a:ln/>
+        </p:spPr>
+        <p:txBody>
+          <a:bodyPr wrap="square" lIns="0" tIns="0" rIns="0" bIns="0" rtlCol="0" anchor="t"/>
+          <a:lstStyle/>
+          <a:p>
+            <a:pPr indent="0" marL="0">
+              <a:lnSpc>
+                <a:spcPct val="100000"/>
+              </a:lnSpc>
+              <a:buNone/>
+            </a:pPr>
+            <a:r>
+              <a:rPr lang="en-US" sz="1000" dirty="0">
+                <a:solidFill>
+                  <a:srgbClr val="586874"/>
+                </a:solidFill>
+              </a:rPr>
+              <a:t>底稿 F12 / cg_rental_audit / cg_sti_difference / cg_governance；来源 S_PROXY26 / S25 / </a:t>
+            </a:r>
+            <a:endParaRPr lang="en-US" sz="1000" dirty="0"/>
+          </a:p>
+          <a:p>
+            <a:pPr indent="0" marL="0">
+              <a:lnSpc>
+                <a:spcPct val="100000"/>
+              </a:lnSpc>
+              <a:buNone/>
+            </a:pPr>
+            <a:r>
+              <a:rPr lang="en-US" sz="1000" dirty="0">
+                <a:solidFill>
+                  <a:srgbClr val="586874"/>
+                </a:solidFill>
+              </a:rPr>
+              <a:t>SQ126 / SCREDIT</a:t>
+            </a:r>
+            <a:endParaRPr lang="en-US" sz="1000" dirty="0"/>
+          </a:p>
+          <a:p>
+            <a:pPr indent="0" marL="0">
+              <a:lnSpc>
+                <a:spcPct val="100000"/>
+              </a:lnSpc>
+              <a:buNone/>
+            </a:pPr>
+            <a:r>
+              <a:rPr lang="en-US" sz="1000" dirty="0">
+                <a:solidFill>
+                  <a:srgbClr val="586874"/>
+                </a:solidFill>
+              </a:rPr>
+              <a:t>原文定位、URL及完整引用见本页备注；完整方法和明细见同名底稿及 Word/Excel。</a:t>
+            </a:r>
+            <a:endParaRPr lang="en-US" sz="1000" dirty="0"/>
+          </a:p>
+        </p:txBody>
+      </p:sp>
+    </p:spTree>
+  </p:cSld>
+  <p:clrMapOvr>
+    <a:masterClrMapping/>
+  </p:clrMapOvr>
+</p:sld>
+</file>
+
+<file path=ppt/slides/slide16.xml><?xml version="1.0" encoding="utf-8"?>
+<p:sld xmlns:a="http://schemas.openxmlformats.org/drawingml/2006/main" xmlns:r="http://schemas.openxmlformats.org/officeDocument/2006/relationships" xmlns:p="http://schemas.openxmlformats.org/presentationml/2006/main">
+  <p:cSld name="Slide 16">
+    <p:bg>
+      <p:bgPr>
+        <a:solidFill>
+          <a:srgbClr val="F5F7F6"/>
+        </a:solidFill>
+      </p:bgPr>
+    </p:bg>
+    <p:spTree>
+      <p:nvGrpSpPr>
+        <p:cNvPr id="1" name=""/>
+        <p:cNvGrpSpPr/>
+        <p:nvPr/>
+      </p:nvGrpSpPr>
+      <p:grpSpPr>
+        <a:xfrm>
+          <a:off x="0" y="0"/>
+          <a:ext cx="0" cy="0"/>
+          <a:chOff x="0" y="0"/>
+          <a:chExt cx="0" cy="0"/>
+        </a:xfrm>
+      </p:grpSpPr>
+      <p:sp>
+        <p:nvSpPr>
+          <p:cNvPr id="2" name="Text 0"/>
+          <p:cNvSpPr/>
+          <p:nvPr/>
+        </p:nvSpPr>
+        <p:spPr>
+          <a:xfrm>
+            <a:off x="548640" y="365760"/>
+            <a:ext cx="11064240" cy="731520"/>
+          </a:xfrm>
+          <a:prstGeom prst="rect">
+            <a:avLst/>
+          </a:prstGeom>
+          <a:noFill/>
+          <a:ln/>
+        </p:spPr>
+        <p:txBody>
+          <a:bodyPr wrap="square" lIns="0" tIns="0" rIns="0" bIns="0" rtlCol="0" anchor="t"/>
+          <a:lstStyle/>
+          <a:p>
+            <a:pPr indent="0" marL="0">
+              <a:lnSpc>
+                <a:spcPct val="100000"/>
+              </a:lnSpc>
+              <a:buNone/>
+            </a:pPr>
+            <a:r>
+              <a:rPr lang="en-US" sz="2700" b="1" dirty="0">
+                <a:solidFill>
+                  <a:srgbClr val="213B45"/>
+                </a:solidFill>
+              </a:rPr>
+              <a:t>新增证据会明确改变哪些判断</a:t>
+            </a:r>
+            <a:endParaRPr lang="en-US" sz="2700" dirty="0"/>
+          </a:p>
+        </p:txBody>
+      </p:sp>
+      <p:sp>
+        <p:nvSpPr>
+          <p:cNvPr id="3" name="Text 1"/>
+          <p:cNvSpPr/>
+          <p:nvPr/>
+        </p:nvSpPr>
+        <p:spPr>
+          <a:xfrm>
+            <a:off x="548640" y="6473952"/>
+            <a:ext cx="11064240" cy="182880"/>
+          </a:xfrm>
+          <a:prstGeom prst="rect">
+            <a:avLst/>
+          </a:prstGeom>
+          <a:noFill/>
+          <a:ln/>
+        </p:spPr>
+        <p:txBody>
+          <a:bodyPr wrap="square" lIns="0" tIns="0" rIns="0" bIns="0" rtlCol="0" anchor="ctr"/>
+          <a:lstStyle/>
+          <a:p>
+            <a:pPr indent="0" marL="0">
+              <a:buNone/>
+            </a:pPr>
+            <a:r>
+              <a:rPr lang="en-US" sz="900" dirty="0">
+                <a:solidFill>
+                  <a:srgbClr val="586874"/>
+                </a:solidFill>
+              </a:rPr>
+              <a:t>Crown Castle Inc. and subsidiaries  |  2025-12-31  |  crown-castle-2025-public-4  |  16</a:t>
+            </a:r>
+            <a:endParaRPr lang="en-US" sz="900" dirty="0"/>
+          </a:p>
+        </p:txBody>
+      </p:sp>
+      <p:sp>
+        <p:nvSpPr>
+          <p:cNvPr id="4" name="Text 2"/>
+          <p:cNvSpPr/>
+          <p:nvPr/>
+        </p:nvSpPr>
+        <p:spPr>
+          <a:xfrm>
+            <a:off x="594360" y="1417320"/>
+            <a:ext cx="10972800" cy="3794760"/>
+          </a:xfrm>
+          <a:prstGeom prst="rect">
+            <a:avLst/>
+          </a:prstGeom>
+          <a:noFill/>
+          <a:ln/>
+        </p:spPr>
+        <p:txBody>
+          <a:bodyPr wrap="square" lIns="0" tIns="0" rIns="0" bIns="0" rtlCol="0" anchor="t"/>
+          <a:lstStyle/>
+          <a:p>
+            <a:pPr indent="0" marL="0">
+              <a:lnSpc>
+                <a:spcPct val="100000"/>
+              </a:lnSpc>
+              <a:buNone/>
+            </a:pPr>
+            <a:r>
+              <a:rPr lang="en-US" sz="1800" dirty="0">
+                <a:solidFill>
+                  <a:srgbClr val="1F2933"/>
+                </a:solidFill>
+              </a:rPr>
+              <a:t>实际六月现金、CP、额度占用及逐券支付将替换J/V/U，决定流动性描述符和主体建议分支；合规</a:t>
+            </a:r>
+            <a:endParaRPr lang="en-US" sz="1800" dirty="0"/>
+          </a:p>
+          <a:p>
+            <a:pPr indent="0" marL="0">
+              <a:lnSpc>
+                <a:spcPct val="100000"/>
+              </a:lnSpc>
+              <a:buNone/>
+            </a:pPr>
+            <a:r>
+              <a:rPr lang="en-US" sz="1800" dirty="0">
+                <a:solidFill>
+                  <a:srgbClr val="1F2933"/>
+                </a:solidFill>
+              </a:rPr>
+              <a:t>证书须按新协议真实分子分母和提款日条件核验。</a:t>
+            </a:r>
+            <a:endParaRPr lang="en-US" sz="1800" dirty="0"/>
+          </a:p>
+          <a:p>
+            <a:pPr indent="0" marL="0">
+              <a:lnSpc>
+                <a:spcPct val="100000"/>
+              </a:lnSpc>
+              <a:buNone/>
+            </a:pPr>
+            <a:endParaRPr lang="en-US" sz="1800" dirty="0"/>
+          </a:p>
+          <a:p>
+            <a:pPr indent="0" marL="0">
+              <a:lnSpc>
+                <a:spcPct val="100000"/>
+              </a:lnSpc>
+              <a:buNone/>
+            </a:pPr>
+            <a:r>
+              <a:rPr lang="en-US" sz="1800" dirty="0">
+                <a:solidFill>
+                  <a:srgbClr val="1F2933"/>
+                </a:solidFill>
+              </a:rPr>
+              <a:t>可执行续约、客户实收和交易最终结算会改变现金转换、可选分配及前瞻杠杆；先更新原输入，再重跑</a:t>
+            </a:r>
+            <a:endParaRPr lang="en-US" sz="1800" dirty="0"/>
+          </a:p>
+          <a:p>
+            <a:pPr indent="0" marL="0">
+              <a:lnSpc>
+                <a:spcPct val="100000"/>
+              </a:lnSpc>
+              <a:buNone/>
+            </a:pPr>
+            <a:r>
+              <a:rPr lang="en-US" sz="1800" dirty="0">
+                <a:solidFill>
+                  <a:srgbClr val="1F2933"/>
+                </a:solidFill>
+              </a:rPr>
+              <a:t>同一预测和形成接口。</a:t>
+            </a:r>
+            <a:endParaRPr lang="en-US" sz="1800" dirty="0"/>
+          </a:p>
+          <a:p>
+            <a:pPr indent="0" marL="0">
+              <a:lnSpc>
+                <a:spcPct val="100000"/>
+              </a:lnSpc>
+              <a:buNone/>
+            </a:pPr>
+            <a:endParaRPr lang="en-US" sz="1800" dirty="0"/>
+          </a:p>
+          <a:p>
+            <a:pPr indent="0" marL="0">
+              <a:lnSpc>
+                <a:spcPct val="100000"/>
+              </a:lnSpc>
+              <a:buNone/>
+            </a:pPr>
+            <a:r>
+              <a:rPr lang="en-US" sz="1800" dirty="0">
+                <a:solidFill>
+                  <a:srgbClr val="1F2933"/>
+                </a:solidFill>
+              </a:rPr>
+              <a:t>专门治理方法与本公司执行证据决定治理修正；合格非SPE设施、同级/优先债权及法域决定本券</a:t>
+            </a:r>
+            <a:endParaRPr lang="en-US" sz="1800" dirty="0"/>
+          </a:p>
+          <a:p>
+            <a:pPr indent="0" marL="0">
+              <a:lnSpc>
+                <a:spcPct val="100000"/>
+              </a:lnSpc>
+              <a:buNone/>
+            </a:pPr>
+            <a:r>
+              <a:rPr lang="en-US" sz="1800" dirty="0">
+                <a:solidFill>
+                  <a:srgbClr val="1F2933"/>
+                </a:solidFill>
+              </a:rPr>
+              <a:t>回收。两处公开版本差异继续保留，正式桥未取得前不强行平账。</a:t>
+            </a:r>
+            <a:endParaRPr lang="en-US" sz="1800" dirty="0"/>
+          </a:p>
+        </p:txBody>
+      </p:sp>
+      <p:sp>
+        <p:nvSpPr>
+          <p:cNvPr id="5" name="Text 3"/>
+          <p:cNvSpPr/>
+          <p:nvPr/>
+        </p:nvSpPr>
+        <p:spPr>
+          <a:xfrm>
+            <a:off x="594360" y="5321808"/>
+            <a:ext cx="10972800" cy="365760"/>
+          </a:xfrm>
+          <a:prstGeom prst="rect">
+            <a:avLst/>
+          </a:prstGeom>
+          <a:noFill/>
+          <a:ln/>
+        </p:spPr>
+        <p:txBody>
+          <a:bodyPr wrap="square" lIns="0" tIns="0" rIns="0" bIns="0" rtlCol="0" anchor="t"/>
+          <a:lstStyle/>
+          <a:p>
+            <a:pPr indent="0" marL="0">
+              <a:lnSpc>
+                <a:spcPct val="100000"/>
+              </a:lnSpc>
+              <a:buNone/>
+            </a:pPr>
+            <a:r>
+              <a:rPr lang="en-US" sz="1100" dirty="0">
+                <a:solidFill>
+                  <a:srgbClr val="213B45"/>
+                </a:solidFill>
+              </a:rPr>
+              <a:t>[F05] conditional / [FF_R109_ISSUER] conditional / [FF_R109_NOTE] </a:t>
+            </a:r>
+            <a:endParaRPr lang="en-US" sz="1100" dirty="0"/>
+          </a:p>
+          <a:p>
+            <a:pPr indent="0" marL="0">
+              <a:lnSpc>
+                <a:spcPct val="100000"/>
+              </a:lnSpc>
+              <a:buNone/>
+            </a:pPr>
+            <a:r>
+              <a:rPr lang="en-US" sz="1100" dirty="0">
+                <a:solidFill>
+                  <a:srgbClr val="213B45"/>
+                </a:solidFill>
+              </a:rPr>
+              <a:t>conditional / [F10] unresolved / [FF_FORWARD_STRESS] conditional</a:t>
+            </a:r>
+            <a:endParaRPr lang="en-US" sz="1100" dirty="0"/>
+          </a:p>
+        </p:txBody>
+      </p:sp>
+      <p:sp>
+        <p:nvSpPr>
+          <p:cNvPr id="6" name="Text 4"/>
+          <p:cNvSpPr/>
+          <p:nvPr/>
+        </p:nvSpPr>
+        <p:spPr>
+          <a:xfrm>
+            <a:off x="594360" y="5715000"/>
+            <a:ext cx="10972800" cy="731520"/>
+          </a:xfrm>
+          <a:prstGeom prst="rect">
+            <a:avLst/>
+          </a:prstGeom>
+          <a:noFill/>
+          <a:ln/>
+        </p:spPr>
+        <p:txBody>
+          <a:bodyPr wrap="square" lIns="0" tIns="0" rIns="0" bIns="0" rtlCol="0" anchor="t"/>
+          <a:lstStyle/>
+          <a:p>
+            <a:pPr indent="0" marL="0">
+              <a:lnSpc>
+                <a:spcPct val="100000"/>
+              </a:lnSpc>
+              <a:buNone/>
+            </a:pPr>
+            <a:r>
+              <a:rPr lang="en-US" sz="1000" dirty="0">
+                <a:solidFill>
+                  <a:srgbClr val="586874"/>
+                </a:solidFill>
+              </a:rPr>
+              <a:t>底稿判断 5 项；来源 17 份。</a:t>
+            </a:r>
+            <a:endParaRPr lang="en-US" sz="1000" dirty="0"/>
+          </a:p>
+          <a:p>
+            <a:pPr indent="0" marL="0">
+              <a:lnSpc>
+                <a:spcPct val="100000"/>
+              </a:lnSpc>
+              <a:buNone/>
+            </a:pPr>
+            <a:r>
+              <a:rPr lang="en-US" sz="1000" dirty="0">
+                <a:solidFill>
+                  <a:srgbClr val="586874"/>
+                </a:solidFill>
+              </a:rPr>
+              <a:t>完整底稿ID、原文定位、URL见本页备注；完整方法和明细见同名 Word/Excel。</a:t>
+            </a:r>
+            <a:endParaRPr lang="en-US" sz="1000" dirty="0"/>
           </a:p>
         </p:txBody>
       </p:sp>
@@ -2237,7 +7114,7 @@
                   <a:srgbClr val="213B45"/>
                 </a:solidFill>
               </a:rPr>
-              <a:t>出售释放资金，售后信用判断仍取决于现金与合同</a:t>
+              <a:t>出售后的信用取决于持续现金和可及时使用的资金</a:t>
             </a:r>
             <a:endParaRPr lang="en-US" sz="2700" dirty="0"/>
           </a:p>
@@ -2273,7 +7150,7 @@
                   <a:srgbClr val="586874"/>
                 </a:solidFill>
               </a:rPr>
-              <a:t>Crown Castle Inc. and subsidiaries  |  2025-12-31  |  crown-castle-2025-public-3  |  2</a:t>
+              <a:t>Crown Castle Inc. and subsidiaries  |  2025-12-31  |  crown-castle-2025-public-4  |  2</a:t>
             </a:r>
             <a:endParaRPr lang="en-US" sz="900" dirty="0"/>
           </a:p>
@@ -2288,7 +7165,7 @@
         <p:spPr>
           <a:xfrm>
             <a:off x="594360" y="1417320"/>
-            <a:ext cx="10972800" cy="3794760"/>
+            <a:ext cx="7223760" cy="3794760"/>
           </a:xfrm>
           <a:prstGeom prst="rect">
             <a:avLst/>
@@ -2312,7 +7189,7 @@
                   <a:srgbClr val="1F2933"/>
                 </a:solidFill>
               </a:rPr>
-              <a:t>截至2026-06-30，已完成出售及部分还债；后续回购、偿债计划仍须与实际支付分开。历史</a:t>
+              <a:t>主研究路径：强业务风险、标准表的高度杠杆财务风险，形成bb锚</a:t>
             </a:r>
             <a:endParaRPr lang="en-US" sz="1800" dirty="0"/>
           </a:p>
@@ -2329,17 +7206,8 @@
                   <a:srgbClr val="1F2933"/>
                 </a:solidFill>
               </a:rPr>
-              <a:t>杠杆不能证明出售后的信用等级。</a:t>
-            </a:r>
-            <a:endParaRPr lang="en-US" sz="1800" dirty="0"/>
-          </a:p>
-          <a:p>
-            <a:pPr indent="0" marL="0">
-              <a:lnSpc>
-                <a:spcPct val="100000"/>
-              </a:lnSpc>
-              <a:buNone/>
-            </a:pPr>
+              <a:t>点。资本结构、财务政策、治理及CRA均按所列中性情景时，流动</a:t>
+            </a:r>
             <a:endParaRPr lang="en-US" sz="1800" dirty="0"/>
           </a:p>
           <a:p>
@@ -2355,7 +7223,7 @@
                   <a:srgbClr val="1F2933"/>
                 </a:solidFill>
               </a:rPr>
-              <a:t>本简报采用US GAAP披露及S&amp;P《Ratios and Adjustments》2025</a:t>
+              <a:t>性adequate对应BB、less than </a:t>
             </a:r>
             <a:endParaRPr lang="en-US" sz="1800" dirty="0"/>
           </a:p>
@@ -2372,8 +7240,17 @@
                   <a:srgbClr val="1F2933"/>
                 </a:solidFill>
               </a:rPr>
-              <a:t>-12-17版、《Sector-Specific Corporate Methodology</a:t>
-            </a:r>
+              <a:t>adequate对应BB−。</a:t>
+            </a:r>
+            <a:endParaRPr lang="en-US" sz="1800" dirty="0"/>
+          </a:p>
+          <a:p>
+            <a:pPr indent="0" marL="0">
+              <a:lnSpc>
+                <a:spcPct val="100000"/>
+              </a:lnSpc>
+              <a:buNone/>
+            </a:pPr>
             <a:endParaRPr lang="en-US" sz="1800" dirty="0"/>
           </a:p>
           <a:p>
@@ -2389,7 +7266,7 @@
                   <a:srgbClr val="1F2933"/>
                 </a:solidFill>
               </a:rPr>
-              <a:t>》2025-09-26版数字基础设施章的调整路径；未完成全套全球尺度评级形成链，不给主体或债</a:t>
+              <a:t>这是一组有条件的研究建议；六月实际资金资格和专门治理分类仍须</a:t>
             </a:r>
             <a:endParaRPr lang="en-US" sz="1800" dirty="0"/>
           </a:p>
@@ -2406,17 +7283,8 @@
                   <a:srgbClr val="1F2933"/>
                 </a:solidFill>
               </a:rPr>
-              <a:t>项字母。</a:t>
-            </a:r>
-            <a:endParaRPr lang="en-US" sz="1800" dirty="0"/>
-          </a:p>
-          <a:p>
-            <a:pPr indent="0" marL="0">
-              <a:lnSpc>
-                <a:spcPct val="100000"/>
-              </a:lnSpc>
-              <a:buNone/>
-            </a:pPr>
+              <a:t>核准。较好的自由经营现金与覆盖指标是相邻改善的反方，不能自动</a:t>
+            </a:r>
             <a:endParaRPr lang="en-US" sz="1800" dirty="0"/>
           </a:p>
           <a:p>
@@ -2432,8 +7300,17 @@
                   <a:srgbClr val="1F2933"/>
                 </a:solidFill>
               </a:rPr>
-              <a:t>关键前提是售后实际债务、可上划现金和保留业务预测。取得这些资料后须连同续约与客户违约压力更新</a:t>
-            </a:r>
+              <a:t>推翻持续分配及融资依赖。</a:t>
+            </a:r>
+            <a:endParaRPr lang="en-US" sz="1800" dirty="0"/>
+          </a:p>
+          <a:p>
+            <a:pPr indent="0" marL="0">
+              <a:lnSpc>
+                <a:spcPct val="100000"/>
+              </a:lnSpc>
+              <a:buNone/>
+            </a:pPr>
             <a:endParaRPr lang="en-US" sz="1800" dirty="0"/>
           </a:p>
           <a:p>
@@ -2449,15 +7326,258 @@
                   <a:srgbClr val="1F2933"/>
                 </a:solidFill>
               </a:rPr>
-              <a:t>判断。完整分析及口径见同一底稿、Word与Excel。</a:t>
-            </a:r>
-            <a:endParaRPr lang="en-US" sz="1800" dirty="0"/>
-          </a:p>
-        </p:txBody>
-      </p:sp>
-      <p:sp>
-        <p:nvSpPr>
-          <p:cNvPr id="5" name="Text 3"/>
+              <a:t>指定无抵押票据另按法律顺位、回收范围与法域分流，不直接继承</a:t>
+            </a:r>
+            <a:endParaRPr lang="en-US" sz="1800" dirty="0"/>
+          </a:p>
+          <a:p>
+            <a:pPr indent="0" marL="0">
+              <a:lnSpc>
+                <a:spcPct val="100000"/>
+              </a:lnSpc>
+              <a:buNone/>
+            </a:pPr>
+            <a:r>
+              <a:rPr lang="en-US" sz="1800" dirty="0">
+                <a:solidFill>
+                  <a:srgbClr val="1F2933"/>
+                </a:solidFill>
+              </a:rPr>
+              <a:t>主体结论。</a:t>
+            </a:r>
+            <a:endParaRPr lang="en-US" sz="1800" dirty="0"/>
+          </a:p>
+        </p:txBody>
+      </p:sp>
+      <p:sp>
+        <p:nvSpPr>
+          <p:cNvPr id="5" name="Shape 3"/>
+          <p:cNvSpPr/>
+          <p:nvPr/>
+        </p:nvSpPr>
+        <p:spPr>
+          <a:xfrm>
+            <a:off x="8046720" y="1325880"/>
+            <a:ext cx="3566160" cy="4069080"/>
+          </a:xfrm>
+          <a:prstGeom prst="rect">
+            <a:avLst/>
+          </a:prstGeom>
+          <a:solidFill>
+            <a:srgbClr val="E6EFEC"/>
+          </a:solidFill>
+          <a:ln w="12700">
+            <a:solidFill>
+              <a:srgbClr val="E6EFEC"/>
+            </a:solidFill>
+            <a:prstDash val="solid"/>
+          </a:ln>
+        </p:spPr>
+      </p:sp>
+      <p:sp>
+        <p:nvSpPr>
+          <p:cNvPr id="6" name="Text 4"/>
+          <p:cNvSpPr/>
+          <p:nvPr/>
+        </p:nvSpPr>
+        <p:spPr>
+          <a:xfrm>
+            <a:off x="8211312" y="1417320"/>
+            <a:ext cx="3246120" cy="3794760"/>
+          </a:xfrm>
+          <a:prstGeom prst="rect">
+            <a:avLst/>
+          </a:prstGeom>
+          <a:noFill/>
+          <a:ln/>
+        </p:spPr>
+        <p:txBody>
+          <a:bodyPr wrap="square" lIns="0" tIns="0" rIns="0" bIns="0" rtlCol="0" anchor="t"/>
+          <a:lstStyle/>
+          <a:p>
+            <a:pPr indent="0" marL="0">
+              <a:lnSpc>
+                <a:spcPct val="100000"/>
+              </a:lnSpc>
+              <a:buNone/>
+            </a:pPr>
+            <a:r>
+              <a:rPr lang="en-US" sz="1600" dirty="0">
+                <a:solidFill>
+                  <a:srgbClr val="237F72"/>
+                </a:solidFill>
+              </a:rPr>
+              <a:t>base </a:t>
+            </a:r>
+            <a:endParaRPr lang="en-US" sz="1600" dirty="0"/>
+          </a:p>
+          <a:p>
+            <a:pPr indent="0" marL="0">
+              <a:lnSpc>
+                <a:spcPct val="100000"/>
+              </a:lnSpc>
+              <a:buNone/>
+            </a:pPr>
+            <a:r>
+              <a:rPr lang="en-US" sz="1600" dirty="0">
+                <a:solidFill>
+                  <a:srgbClr val="237F72"/>
+                </a:solidFill>
+              </a:rPr>
+              <a:t>paragraph120 </a:t>
+            </a:r>
+            <a:endParaRPr lang="en-US" sz="1600" dirty="0"/>
+          </a:p>
+          <a:p>
+            <a:pPr indent="0" marL="0">
+              <a:lnSpc>
+                <a:spcPct val="100000"/>
+              </a:lnSpc>
+              <a:buNone/>
+            </a:pPr>
+            <a:r>
+              <a:rPr lang="en-US" sz="1600" dirty="0">
+                <a:solidFill>
+                  <a:srgbClr val="237F72"/>
+                </a:solidFill>
+              </a:rPr>
+              <a:t>indicative </a:t>
+            </a:r>
+            <a:endParaRPr lang="en-US" sz="1600" dirty="0"/>
+          </a:p>
+          <a:p>
+            <a:pPr indent="0" marL="0">
+              <a:lnSpc>
+                <a:spcPct val="100000"/>
+              </a:lnSpc>
+              <a:buNone/>
+            </a:pPr>
+            <a:r>
+              <a:rPr lang="en-US" sz="1600" dirty="0">
+                <a:solidFill>
+                  <a:srgbClr val="237F72"/>
+                </a:solidFill>
+              </a:rPr>
+              <a:t>FFO_debt</a:t>
+            </a:r>
+            <a:endParaRPr lang="en-US" sz="1600" dirty="0"/>
+          </a:p>
+          <a:p>
+            <a:pPr indent="0" marL="0">
+              <a:lnSpc>
+                <a:spcPct val="100000"/>
+              </a:lnSpc>
+              <a:buNone/>
+            </a:pPr>
+            <a:r>
+              <a:rPr lang="en-US" sz="1600" dirty="0">
+                <a:solidFill>
+                  <a:srgbClr val="237F72"/>
+                </a:solidFill>
+              </a:rPr>
+              <a:t>9.71%</a:t>
+            </a:r>
+            <a:endParaRPr lang="en-US" sz="1600" dirty="0"/>
+          </a:p>
+          <a:p>
+            <a:pPr indent="0" marL="0">
+              <a:lnSpc>
+                <a:spcPct val="100000"/>
+              </a:lnSpc>
+              <a:buNone/>
+            </a:pPr>
+            <a:endParaRPr lang="en-US" sz="1600" dirty="0"/>
+          </a:p>
+          <a:p>
+            <a:pPr indent="0" marL="0">
+              <a:lnSpc>
+                <a:spcPct val="100000"/>
+              </a:lnSpc>
+              <a:buNone/>
+            </a:pPr>
+            <a:r>
+              <a:rPr lang="en-US" sz="1600" dirty="0">
+                <a:solidFill>
+                  <a:srgbClr val="237F72"/>
+                </a:solidFill>
+              </a:rPr>
+              <a:t>base </a:t>
+            </a:r>
+            <a:endParaRPr lang="en-US" sz="1600" dirty="0"/>
+          </a:p>
+          <a:p>
+            <a:pPr indent="0" marL="0">
+              <a:lnSpc>
+                <a:spcPct val="100000"/>
+              </a:lnSpc>
+              <a:buNone/>
+            </a:pPr>
+            <a:r>
+              <a:rPr lang="en-US" sz="1600" dirty="0">
+                <a:solidFill>
+                  <a:srgbClr val="237F72"/>
+                </a:solidFill>
+              </a:rPr>
+              <a:t>paragraph120 </a:t>
+            </a:r>
+            <a:endParaRPr lang="en-US" sz="1600" dirty="0"/>
+          </a:p>
+          <a:p>
+            <a:pPr indent="0" marL="0">
+              <a:lnSpc>
+                <a:spcPct val="100000"/>
+              </a:lnSpc>
+              <a:buNone/>
+            </a:pPr>
+            <a:r>
+              <a:rPr lang="en-US" sz="1600" dirty="0">
+                <a:solidFill>
+                  <a:srgbClr val="237F72"/>
+                </a:solidFill>
+              </a:rPr>
+              <a:t>indicative </a:t>
+            </a:r>
+            <a:endParaRPr lang="en-US" sz="1600" dirty="0"/>
+          </a:p>
+          <a:p>
+            <a:pPr indent="0" marL="0">
+              <a:lnSpc>
+                <a:spcPct val="100000"/>
+              </a:lnSpc>
+              <a:buNone/>
+            </a:pPr>
+            <a:r>
+              <a:rPr lang="en-US" sz="1600" dirty="0">
+                <a:solidFill>
+                  <a:srgbClr val="237F72"/>
+                </a:solidFill>
+              </a:rPr>
+              <a:t>debt_EBITDA</a:t>
+            </a:r>
+            <a:endParaRPr lang="en-US" sz="1600" dirty="0"/>
+          </a:p>
+          <a:p>
+            <a:pPr indent="0" marL="0">
+              <a:lnSpc>
+                <a:spcPct val="100000"/>
+              </a:lnSpc>
+              <a:buNone/>
+            </a:pPr>
+            <a:r>
+              <a:rPr lang="en-US" sz="1600" dirty="0">
+                <a:solidFill>
+                  <a:srgbClr val="237F72"/>
+                </a:solidFill>
+              </a:rPr>
+              <a:t>7.03 倍</a:t>
+            </a:r>
+            <a:endParaRPr lang="en-US" sz="1600" dirty="0"/>
+          </a:p>
+        </p:txBody>
+      </p:sp>
+      <p:sp>
+        <p:nvSpPr>
+          <p:cNvPr id="7" name="Text 5"/>
           <p:cNvSpPr/>
           <p:nvPr/>
         </p:nvSpPr>
@@ -2488,7 +7608,7 @@
                   <a:srgbClr val="213B45"/>
                 </a:solidFill>
               </a:rPr>
-              <a:t>[F05] supported / [F08] supported / [F09] conditional / [F15] conditional /</a:t>
+              <a:t>[FF_R109_ISSUER] conditional / [F15] conditional / [FF_R109_NOTE] </a:t>
             </a:r>
             <a:endParaRPr lang="en-US" sz="1100" dirty="0"/>
           </a:p>
@@ -2505,7 +7625,7 @@
                   <a:srgbClr val="213B45"/>
                 </a:solidFill>
               </a:rPr>
-              <a:t> [F17] conditional</a:t>
+              <a:t>conditional</a:t>
             </a:r>
             <a:endParaRPr lang="en-US" sz="1100" dirty="0"/>
           </a:p>
@@ -2513,7 +7633,7 @@
       </p:sp>
       <p:sp>
         <p:nvSpPr>
-          <p:cNvPr id="6" name="Text 4"/>
+          <p:cNvPr id="8" name="Text 6"/>
           <p:cNvSpPr/>
           <p:nvPr/>
         </p:nvSpPr>
@@ -2544,7 +7664,7 @@
                   <a:srgbClr val="586874"/>
                 </a:solidFill>
               </a:rPr>
-              <a:t>底稿 F05 / F08 / F09 / F15 / F17；来源 S25 / SQ126 / SSALE / SPROFORMA / SSPA / SCREDIT </a:t>
+              <a:t>底稿 FF_R109_ISSUER / F15 / FF_R109_NOTE；来源 S25 / SCREDIT / SQ126 / S_SP_Q1 / </a:t>
             </a:r>
             <a:endParaRPr lang="en-US" sz="1000" dirty="0"/>
           </a:p>
@@ -2561,7 +7681,24 @@
                   <a:srgbClr val="586874"/>
                 </a:solidFill>
               </a:rPr>
-              <a:t>/ SOLDCREDIT / S_SP_RATIOS / S_SP_XBRL / S_SP_Q4 / S_SP_SECTORS / S_SP_Q1</a:t>
+              <a:t>S_DEV_CORP / S_SP_SECTORS / S_SP_RATIOS / SPROFORMA / S_SP_XBRL / S_DEV_LIQ / </a:t>
+            </a:r>
+            <a:endParaRPr lang="en-US" sz="1000" dirty="0"/>
+          </a:p>
+          <a:p>
+            <a:pPr indent="0" marL="0">
+              <a:lnSpc>
+                <a:spcPct val="100000"/>
+              </a:lnSpc>
+              <a:buNone/>
+            </a:pPr>
+            <a:r>
+              <a:rPr lang="en-US" sz="1000" dirty="0">
+                <a:solidFill>
+                  <a:srgbClr val="586874"/>
+                </a:solidFill>
+              </a:rPr>
+              <a:t>S_DEV_REC / S_PROXY26 / S_DEV_COUNTRY</a:t>
             </a:r>
             <a:endParaRPr lang="en-US" sz="1000" dirty="0"/>
           </a:p>
@@ -2649,7 +7786,7 @@
                   <a:srgbClr val="213B45"/>
                 </a:solidFill>
               </a:rPr>
-              <a:t>利润改善须拆开减值、出售计量与持续经营</a:t>
+              <a:t>利润反弹没有等额变成保留业务的盈利改善</a:t>
             </a:r>
             <a:endParaRPr lang="en-US" sz="2700" dirty="0"/>
           </a:p>
@@ -2685,7 +7822,7 @@
                   <a:srgbClr val="586874"/>
                 </a:solidFill>
               </a:rPr>
-              <a:t>Crown Castle Inc. and subsidiaries  |  2025-12-31  |  crown-castle-2025-public-3  |  3</a:t>
+              <a:t>Crown Castle Inc. and subsidiaries  |  2025-12-31  |  crown-castle-2025-public-4  |  3</a:t>
             </a:r>
             <a:endParaRPr lang="en-US" sz="900" dirty="0"/>
           </a:p>
@@ -2724,7 +7861,7 @@
                   <a:srgbClr val="1F2933"/>
                 </a:solidFill>
               </a:rPr>
-              <a:t>Fiber长期资产的未折现测试通过，与商誉全额减值可以同时</a:t>
+              <a:t>合并利润变化须拆成持续和终止经营；持续净利润变化-59.00</a:t>
             </a:r>
             <a:endParaRPr lang="en-US" sz="1800" dirty="0"/>
           </a:p>
@@ -2741,8 +7878,17 @@
                   <a:srgbClr val="1F2933"/>
                 </a:solidFill>
               </a:rPr>
-              <a:t>成立；测试单元、计量基础不同，且另有节点核销。缺管理层预测及</a:t>
-            </a:r>
+              <a:t> 百万USD，终止经营的减值和出售计量主导合并反弹。</a:t>
+            </a:r>
+            <a:endParaRPr lang="en-US" sz="1800" dirty="0"/>
+          </a:p>
+          <a:p>
+            <a:pPr indent="0" marL="0">
+              <a:lnSpc>
+                <a:spcPct val="100000"/>
+              </a:lnSpc>
+              <a:buNone/>
+            </a:pPr>
             <a:endParaRPr lang="en-US" sz="1800" dirty="0"/>
           </a:p>
           <a:p>
@@ -2758,17 +7904,8 @@
                   <a:srgbClr val="1F2933"/>
                 </a:solidFill>
               </a:rPr>
-              <a:t>估值模型，不能据披露顺序认证计量合理。</a:t>
-            </a:r>
-            <a:endParaRPr lang="en-US" sz="1800" dirty="0"/>
-          </a:p>
-          <a:p>
-            <a:pPr indent="0" marL="0">
-              <a:lnSpc>
-                <a:spcPct val="100000"/>
-              </a:lnSpc>
-              <a:buNone/>
-            </a:pPr>
+              <a:t>Fiber长期资产未折现测试通过，与商誉全额减值可以同时</a:t>
+            </a:r>
             <a:endParaRPr lang="en-US" sz="1800" dirty="0"/>
           </a:p>
           <a:p>
@@ -2784,7 +7921,7 @@
                   <a:srgbClr val="1F2933"/>
                 </a:solidFill>
               </a:rPr>
-              <a:t>待售后停止折旧、终止经营重列比较数据；持续净利润变化</a:t>
+              <a:t>成立；计量基础、测试单元和顺序不同。披露顺序不足以认证估值</a:t>
             </a:r>
             <a:endParaRPr lang="en-US" sz="1800" dirty="0"/>
           </a:p>
@@ -2801,7 +7938,7 @@
                   <a:srgbClr val="1F2933"/>
                 </a:solidFill>
               </a:rPr>
-              <a:t>-59.00 百万USD，不宜用合并利润反弹替代经营改善。</a:t>
+              <a:t>输入。</a:t>
             </a:r>
             <a:endParaRPr lang="en-US" sz="1800" dirty="0"/>
           </a:p>
@@ -2827,7 +7964,7 @@
                   <a:srgbClr val="1F2933"/>
                 </a:solidFill>
               </a:rPr>
-              <a:t>处置损失1,575.00 百万USD包含准备及已发生售出</a:t>
+              <a:t>处置损失1,575.00 百万USD含准备及已发生出售费用。</a:t>
             </a:r>
             <a:endParaRPr lang="en-US" sz="1800" dirty="0"/>
           </a:p>
@@ -2844,7 +7981,7 @@
                   <a:srgbClr val="1F2933"/>
                 </a:solidFill>
               </a:rPr>
-              <a:t>成本，费用不等于当期付现。估计净售价差额尚未解释；补分类及估</a:t>
+              <a:t>费用、税影响和实际支付分别进入利润、权益及现金桥，不能把全部</a:t>
             </a:r>
             <a:endParaRPr lang="en-US" sz="1800" dirty="0"/>
           </a:p>
@@ -2861,7 +7998,7 @@
                   <a:srgbClr val="1F2933"/>
                 </a:solidFill>
               </a:rPr>
-              <a:t>值底稿后应同步重算税、权益与现金影响。</a:t>
+              <a:t>损失当当期现金流出。</a:t>
             </a:r>
             <a:endParaRPr lang="en-US" sz="1800" dirty="0"/>
           </a:p>
@@ -3168,7 +8305,7 @@
                   <a:srgbClr val="213B45"/>
                 </a:solidFill>
               </a:rPr>
-              <a:t>现金勾稽通过，可调度资金仍要按法律主体确认</a:t>
+              <a:t>交割实绩、公开备考与后续计划分别计量</a:t>
             </a:r>
             <a:endParaRPr lang="en-US" sz="2700" dirty="0"/>
           </a:p>
@@ -3204,7 +8341,7 @@
                   <a:srgbClr val="586874"/>
                 </a:solidFill>
               </a:rPr>
-              <a:t>Crown Castle Inc. and subsidiaries  |  2025-12-31  |  crown-castle-2025-public-3  |  4</a:t>
+              <a:t>Crown Castle Inc. and subsidiaries  |  2025-12-31  |  crown-castle-2025-public-4  |  4</a:t>
             </a:r>
             <a:endParaRPr lang="en-US" sz="900" dirty="0"/>
           </a:p>
@@ -3243,7 +8380,7 @@
                   <a:srgbClr val="1F2933"/>
                 </a:solidFill>
               </a:rPr>
-              <a:t>合并四表的主要关系已复算，但年末全部现金308.00 百万</a:t>
+              <a:t>五月实际价款复算为8,376.00 百万USD，另付约</a:t>
             </a:r>
             <a:endParaRPr lang="en-US" sz="1800" dirty="0"/>
           </a:p>
@@ -3260,7 +8397,7 @@
                   <a:srgbClr val="1F2933"/>
                 </a:solidFill>
               </a:rPr>
-              <a:t>USD包含受限及终止经营部分；持续非受限现金仅99.00 </a:t>
+              <a:t>74.00 百万USD已计提费用，已还债约3,300.00 </a:t>
             </a:r>
             <a:endParaRPr lang="en-US" sz="1800" dirty="0"/>
           </a:p>
@@ -3277,7 +8414,7 @@
                   <a:srgbClr val="1F2933"/>
                 </a:solidFill>
               </a:rPr>
-              <a:t>百万USD。</a:t>
+              <a:t>百万USD。其后的CP、偿债与回购仍是计划。</a:t>
             </a:r>
             <a:endParaRPr lang="en-US" sz="1800" dirty="0"/>
           </a:p>
@@ -3303,7 +8440,7 @@
                   <a:srgbClr val="1F2933"/>
                 </a:solidFill>
               </a:rPr>
-              <a:t>持续CFO减资本支出、再与集团分配比较为-390.00 百万</a:t>
+              <a:t>公开备考假设2025年末已交割，包含另一组费用及偿债条件；其</a:t>
             </a:r>
             <a:endParaRPr lang="en-US" sz="1800" dirty="0"/>
           </a:p>
@@ -3320,8 +8457,17 @@
                   <a:srgbClr val="1F2933"/>
                 </a:solidFill>
               </a:rPr>
-              <a:t>USD，是一项压力观察，尚非母公司现金缺口。旧授信、CP备用</a:t>
-            </a:r>
+              <a:t>现金结果不能拼成五月真实余额。</a:t>
+            </a:r>
+            <a:endParaRPr lang="en-US" sz="1800" dirty="0"/>
+          </a:p>
+          <a:p>
+            <a:pPr indent="0" marL="0">
+              <a:lnSpc>
+                <a:spcPct val="100000"/>
+              </a:lnSpc>
+              <a:buNone/>
+            </a:pPr>
             <a:endParaRPr lang="en-US" sz="1800" dirty="0"/>
           </a:p>
           <a:p>
@@ -3337,17 +8483,8 @@
                   <a:srgbClr val="1F2933"/>
                 </a:solidFill>
               </a:rPr>
-              <a:t>与现金不能重复相加。</a:t>
-            </a:r>
-            <a:endParaRPr lang="en-US" sz="1800" dirty="0"/>
-          </a:p>
-          <a:p>
-            <a:pPr indent="0" marL="0">
-              <a:lnSpc>
-                <a:spcPct val="100000"/>
-              </a:lnSpc>
-              <a:buNone/>
-            </a:pPr>
+              <a:t>已知动作之外的四月现金归属、最终结算和六月计划执行保持缺失。</a:t>
+            </a:r>
             <a:endParaRPr lang="en-US" sz="1800" dirty="0"/>
           </a:p>
           <a:p>
@@ -3363,41 +8500,7 @@
                   <a:srgbClr val="1F2933"/>
                 </a:solidFill>
               </a:rPr>
-              <a:t>出售形成的期后资金不回写年末。取得法律实体资金、上划限制、</a:t>
-            </a:r>
-            <a:endParaRPr lang="en-US" sz="1800" dirty="0"/>
-          </a:p>
-          <a:p>
-            <a:pPr indent="0" marL="0">
-              <a:lnSpc>
-                <a:spcPct val="100000"/>
-              </a:lnSpc>
-              <a:buNone/>
-            </a:pPr>
-            <a:r>
-              <a:rPr lang="en-US" sz="1800" dirty="0">
-                <a:solidFill>
-                  <a:srgbClr val="1F2933"/>
-                </a:solidFill>
-              </a:rPr>
-              <a:t>到期及资本承诺后，才能建立真正可用的流动性覆盖；算术一致也不</a:t>
-            </a:r>
-            <a:endParaRPr lang="en-US" sz="1800" dirty="0"/>
-          </a:p>
-          <a:p>
-            <a:pPr indent="0" marL="0">
-              <a:lnSpc>
-                <a:spcPct val="100000"/>
-              </a:lnSpc>
-              <a:buNone/>
-            </a:pPr>
-            <a:r>
-              <a:rPr lang="en-US" sz="1800" dirty="0">
-                <a:solidFill>
-                  <a:srgbClr val="1F2933"/>
-                </a:solidFill>
-              </a:rPr>
-              <a:t>替代存在性、计价或完整性审计。</a:t>
+              <a:t>信息截止后披露另作验证，不能倒填截止日可用信息。</a:t>
             </a:r>
             <a:endParaRPr lang="en-US" sz="1800" dirty="0"/>
           </a:p>
@@ -3461,7 +8564,7 @@
                   <a:srgbClr val="237F72"/>
                 </a:solidFill>
               </a:rPr>
-              <a:t>2025 持续经营非受限现金</a:t>
+              <a:t>交割初步实际价款桥</a:t>
             </a:r>
             <a:endParaRPr lang="en-US" sz="1600" dirty="0"/>
           </a:p>
@@ -3478,7 +8581,7 @@
                   <a:srgbClr val="237F72"/>
                 </a:solidFill>
               </a:rPr>
-              <a:t>99.00 百万USD</a:t>
+              <a:t>8,376.00 百万USD</a:t>
             </a:r>
             <a:endParaRPr lang="en-US" sz="1600" dirty="0"/>
           </a:p>
@@ -3504,7 +8607,7 @@
                   <a:srgbClr val="237F72"/>
                 </a:solidFill>
               </a:rPr>
-              <a:t>2025 持续 CFO 减持续</a:t>
+              <a:t>五月一日实际还债（约）</a:t>
             </a:r>
             <a:endParaRPr lang="en-US" sz="1600" dirty="0"/>
           </a:p>
@@ -3521,24 +8624,7 @@
                   <a:srgbClr val="237F72"/>
                 </a:solidFill>
               </a:rPr>
-              <a:t>资本支出及集团已付分配</a:t>
-            </a:r>
-            <a:endParaRPr lang="en-US" sz="1600" dirty="0"/>
-          </a:p>
-          <a:p>
-            <a:pPr indent="0" marL="0">
-              <a:lnSpc>
-                <a:spcPct val="100000"/>
-              </a:lnSpc>
-              <a:buNone/>
-            </a:pPr>
-            <a:r>
-              <a:rPr lang="en-US" sz="1600" dirty="0">
-                <a:solidFill>
-                  <a:srgbClr val="237F72"/>
-                </a:solidFill>
-              </a:rPr>
-              <a:t>-390.00 百万USD</a:t>
+              <a:t>3,300.00 百万USD</a:t>
             </a:r>
             <a:endParaRPr lang="en-US" sz="1600" dirty="0"/>
           </a:p>
@@ -3577,7 +8663,7 @@
                   <a:srgbClr val="213B45"/>
                 </a:solidFill>
               </a:rPr>
-              <a:t>[F04] supported / [F05] supported / [F12] supported</a:t>
+              <a:t>[F08] supported / [F09] conditional / [FF_FORWARD_CASH] conditional</a:t>
             </a:r>
             <a:endParaRPr lang="en-US" sz="1100" dirty="0"/>
           </a:p>
@@ -3616,7 +8702,24 @@
                   <a:srgbClr val="586874"/>
                 </a:solidFill>
               </a:rPr>
-              <a:t>底稿 F04 / F05 / F12；来源 S25</a:t>
+              <a:t>底稿 F08 / F09 / FF_FORWARD_CASH；来源 SQ126 / SSALE / S25 / SPROFORMA / SSPA / SCREDIT </a:t>
+            </a:r>
+            <a:endParaRPr lang="en-US" sz="1000" dirty="0"/>
+          </a:p>
+          <a:p>
+            <a:pPr indent="0" marL="0">
+              <a:lnSpc>
+                <a:spcPct val="100000"/>
+              </a:lnSpc>
+              <a:buNone/>
+            </a:pPr>
+            <a:r>
+              <a:rPr lang="en-US" sz="1000" dirty="0">
+                <a:solidFill>
+                  <a:srgbClr val="586874"/>
+                </a:solidFill>
+              </a:rPr>
+              <a:t>/ SOLDCREDIT / S_SP_XBRL / S_SP_Q1 / S_SP_RATIOS</a:t>
             </a:r>
             <a:endParaRPr lang="en-US" sz="1000" dirty="0"/>
           </a:p>
@@ -3704,7 +8807,7 @@
                   <a:srgbClr val="213B45"/>
                 </a:solidFill>
               </a:rPr>
-              <a:t>交割现金、公开备考与后续计划保留三条时间线</a:t>
+              <a:t>售后现金预算同步反映分配、偿债和融资利息</a:t>
             </a:r>
             <a:endParaRPr lang="en-US" sz="2700" dirty="0"/>
           </a:p>
@@ -3740,7 +8843,7 @@
                   <a:srgbClr val="586874"/>
                 </a:solidFill>
               </a:rPr>
-              <a:t>Crown Castle Inc. and subsidiaries  |  2025-12-31  |  crown-castle-2025-public-3  |  5</a:t>
+              <a:t>Crown Castle Inc. and subsidiaries  |  2025-12-31  |  crown-castle-2025-public-4  |  5</a:t>
             </a:r>
             <a:endParaRPr lang="en-US" sz="900" dirty="0"/>
           </a:p>
@@ -3779,7 +8882,7 @@
                   <a:srgbClr val="1F2933"/>
                 </a:solidFill>
               </a:rPr>
-              <a:t>五月实际价款按合同总价减初步调整复算为8,376.00 百万</a:t>
+              <a:t>实际Q1持续经营CFO296.00 百万USD接入剩余期间</a:t>
             </a:r>
             <a:endParaRPr lang="en-US" sz="1800" dirty="0"/>
           </a:p>
@@ -3796,7 +8899,7 @@
                   <a:srgbClr val="1F2933"/>
                 </a:solidFill>
               </a:rPr>
-              <a:t>USD，另付约74.00 百万USD已计提成本，已还债约</a:t>
+              <a:t>预算。Q1净付退税采用原表披露精度参照，全年现金税仍是独立</a:t>
             </a:r>
             <a:endParaRPr lang="en-US" sz="1800" dirty="0"/>
           </a:p>
@@ -3813,8 +8916,17 @@
                   <a:srgbClr val="1F2933"/>
                 </a:solidFill>
               </a:rPr>
-              <a:t>3,300.00 百万USD。后续CP清偿及回购仍是计划，</a:t>
-            </a:r>
+              <a:t>假设；经营应计利息、实付和资本化现金分别转换。</a:t>
+            </a:r>
+            <a:endParaRPr lang="en-US" sz="1800" dirty="0"/>
+          </a:p>
+          <a:p>
+            <a:pPr indent="0" marL="0">
+              <a:lnSpc>
+                <a:spcPct val="100000"/>
+              </a:lnSpc>
+              <a:buNone/>
+            </a:pPr>
             <a:endParaRPr lang="en-US" sz="1800" dirty="0"/>
           </a:p>
           <a:p>
@@ -3830,17 +8942,8 @@
                   <a:srgbClr val="1F2933"/>
                 </a:solidFill>
               </a:rPr>
-              <a:t>不能全部视为交割日已完成。</a:t>
-            </a:r>
-            <a:endParaRPr lang="en-US" sz="1800" dirty="0"/>
-          </a:p>
-          <a:p>
-            <a:pPr indent="0" marL="0">
-              <a:lnSpc>
-                <a:spcPct val="100000"/>
-              </a:lnSpc>
-              <a:buNone/>
-            </a:pPr>
+              <a:t>基准2026CFO1,799.98 百万USD，仍需新增融资</a:t>
+            </a:r>
             <a:endParaRPr lang="en-US" sz="1800" dirty="0"/>
           </a:p>
           <a:p>
@@ -3856,7 +8959,7 @@
                   <a:srgbClr val="1F2933"/>
                 </a:solidFill>
               </a:rPr>
-              <a:t>公开备考假设在2025年末已出售，其现金结果6,346.00</a:t>
+              <a:t>97.79 百万USD；新提款产生当期及后续利息，债务不能只</a:t>
             </a:r>
             <a:endParaRPr lang="en-US" sz="1800" dirty="0"/>
           </a:p>
@@ -3873,7 +8976,7 @@
                   <a:srgbClr val="1F2933"/>
                 </a:solidFill>
               </a:rPr>
-              <a:t> 百万USD与假设偿债、费用基准均不等于五月实际期末现金。</a:t>
+              <a:t>减已公布偿债计划。</a:t>
             </a:r>
             <a:endParaRPr lang="en-US" sz="1800" dirty="0"/>
           </a:p>
@@ -3899,7 +9002,7 @@
                   <a:srgbClr val="1F2933"/>
                 </a:solidFill>
               </a:rPr>
-              <a:t>最终结算尚缺；取得截止日前公开的确认后再补事实，晚于截止的二</a:t>
+              <a:t>年度期末现金是模型储备条件，方法租赁加回仅改变分析分类，</a:t>
             </a:r>
             <a:endParaRPr lang="en-US" sz="1800" dirty="0"/>
           </a:p>
@@ -3916,7 +9019,7 @@
                   <a:srgbClr val="1F2933"/>
                 </a:solidFill>
               </a:rPr>
-              <a:t>季度披露留作另一期验证。两条现金桥不可拼接来推算售后余额。</a:t>
+              <a:t>都不能当作六月真实可提款来源。</a:t>
             </a:r>
             <a:endParaRPr lang="en-US" sz="1800" dirty="0"/>
           </a:p>
@@ -3980,7 +9083,7 @@
                   <a:srgbClr val="237F72"/>
                 </a:solidFill>
               </a:rPr>
-              <a:t>交割初步实际价款桥</a:t>
+              <a:t>base 2026 CFO</a:t>
             </a:r>
             <a:endParaRPr lang="en-US" sz="1600" dirty="0"/>
           </a:p>
@@ -3997,7 +9100,7 @@
                   <a:srgbClr val="237F72"/>
                 </a:solidFill>
               </a:rPr>
-              <a:t>8,376.00 百万USD</a:t>
+              <a:t>1,799.98 百万USD</a:t>
             </a:r>
             <a:endParaRPr lang="en-US" sz="1600" dirty="0"/>
           </a:p>
@@ -4023,7 +9126,7 @@
                   <a:srgbClr val="237F72"/>
                 </a:solidFill>
               </a:rPr>
-              <a:t>五月一日实际还债（约）</a:t>
+              <a:t>base 2026 </a:t>
             </a:r>
             <a:endParaRPr lang="en-US" sz="1600" dirty="0"/>
           </a:p>
@@ -4040,7 +9143,24 @@
                   <a:srgbClr val="237F72"/>
                 </a:solidFill>
               </a:rPr>
-              <a:t>3,300.00 百万USD</a:t>
+              <a:t>new_draw</a:t>
+            </a:r>
+            <a:endParaRPr lang="en-US" sz="1600" dirty="0"/>
+          </a:p>
+          <a:p>
+            <a:pPr indent="0" marL="0">
+              <a:lnSpc>
+                <a:spcPct val="100000"/>
+              </a:lnSpc>
+              <a:buNone/>
+            </a:pPr>
+            <a:r>
+              <a:rPr lang="en-US" sz="1600" dirty="0">
+                <a:solidFill>
+                  <a:srgbClr val="237F72"/>
+                </a:solidFill>
+              </a:rPr>
+              <a:t>97.79 百万USD</a:t>
             </a:r>
             <a:endParaRPr lang="en-US" sz="1600" dirty="0"/>
           </a:p>
@@ -4079,7 +9199,7 @@
                   <a:srgbClr val="213B45"/>
                 </a:solidFill>
               </a:rPr>
-              <a:t>[F08] supported / [F15] conditional</a:t>
+              <a:t>[FF_FORWARD_CASH] conditional / [F13] conditional / [F14] conditional</a:t>
             </a:r>
             <a:endParaRPr lang="en-US" sz="1100" dirty="0"/>
           </a:p>
@@ -4118,7 +9238,24 @@
                   <a:srgbClr val="586874"/>
                 </a:solidFill>
               </a:rPr>
-              <a:t>底稿 F08 / F15；来源 SQ126 / SPROFORMA / SSALE / S25 / SSPA / S_SP_RATIOS / S_SP_XBRL</a:t>
+              <a:t>底稿 FF_FORWARD_CASH / F13 / F14；来源 S25 / SCREDIT / SQ126 / S_SP_Q1 / S_SP_RATIOS / </a:t>
+            </a:r>
+            <a:endParaRPr lang="en-US" sz="1000" dirty="0"/>
+          </a:p>
+          <a:p>
+            <a:pPr indent="0" marL="0">
+              <a:lnSpc>
+                <a:spcPct val="100000"/>
+              </a:lnSpc>
+              <a:buNone/>
+            </a:pPr>
+            <a:r>
+              <a:rPr lang="en-US" sz="1000" dirty="0">
+                <a:solidFill>
+                  <a:srgbClr val="586874"/>
+                </a:solidFill>
+              </a:rPr>
+              <a:t>SPROFORMA / S_SP_XBRL</a:t>
             </a:r>
             <a:endParaRPr lang="en-US" sz="1000" dirty="0"/>
           </a:p>
@@ -4206,7 +9343,7 @@
                   <a:srgbClr val="213B45"/>
                 </a:solidFill>
               </a:rPr>
-              <a:t>契约余量、提款条件和债项顺位分别判断</a:t>
+              <a:t>经营优势与集中风险共同形成业务风险判断</a:t>
             </a:r>
             <a:endParaRPr lang="en-US" sz="2700" dirty="0"/>
           </a:p>
@@ -4242,7 +9379,7 @@
                   <a:srgbClr val="586874"/>
                 </a:solidFill>
               </a:rPr>
-              <a:t>Crown Castle Inc. and subsidiaries  |  2025-12-31  |  crown-castle-2025-public-3  |  6</a:t>
+              <a:t>Crown Castle Inc. and subsidiaries  |  2025-12-31  |  crown-castle-2025-public-4  |  6</a:t>
             </a:r>
             <a:endParaRPr lang="en-US" sz="900" dirty="0"/>
           </a:p>
@@ -4281,7 +9418,7 @@
                   <a:srgbClr val="1F2933"/>
                 </a:solidFill>
               </a:rPr>
-              <a:t>旧协议净杠杆5.90 倍对限额6.50 倍；该余量不能直接</a:t>
+              <a:t>全美站点覆盖、稀缺性、切换成本、租户利用率和较低维护支出支持</a:t>
             </a:r>
             <a:endParaRPr lang="en-US" sz="1800" dirty="0"/>
           </a:p>
@@ -4298,7 +9435,7 @@
                   <a:srgbClr val="1F2933"/>
                 </a:solidFill>
               </a:rPr>
-              <a:t>换算成可借金额，契约EBITDA与通用EBITDA不同。待售</a:t>
+              <a:t>竞争因素的研究选择；三大运营商集中、DISH/Sprint及</a:t>
             </a:r>
             <a:endParaRPr lang="en-US" sz="1800" dirty="0"/>
           </a:p>
@@ -4315,7 +9452,7 @@
                   <a:srgbClr val="1F2933"/>
                 </a:solidFill>
               </a:rPr>
-              <a:t>但未处置业务亦不能因GAAP终止经营直接剔除。</a:t>
+              <a:t>地权和客户余期构成反证。</a:t>
             </a:r>
             <a:endParaRPr lang="en-US" sz="1800" dirty="0"/>
           </a:p>
@@ -4341,7 +9478,7 @@
                   <a:srgbClr val="1F2933"/>
                 </a:solidFill>
               </a:rPr>
-              <a:t>五月新协议替代旧协议，须按实际出售及偿债重建定义口径；名义额</a:t>
+              <a:t>五档因素按塔行业权重先形成初步竞争地位，再接盈利综合，最后与</a:t>
             </a:r>
             <a:endParaRPr lang="en-US" sz="1800" dirty="0"/>
           </a:p>
@@ -4358,7 +9495,7 @@
                   <a:srgbClr val="1F2933"/>
                 </a:solidFill>
               </a:rPr>
-              <a:t>度扣信用证4,460.60 百万USD不等于可支用现金，提款</a:t>
+              <a:t>行业及国家风险形成BRP；不能将单项strong/</a:t>
             </a:r>
             <a:endParaRPr lang="en-US" sz="1800" dirty="0"/>
           </a:p>
@@ -4375,7 +9512,7 @@
                   <a:srgbClr val="1F2933"/>
                 </a:solidFill>
               </a:rPr>
-              <a:t>还有陈述、无违约等条件。</a:t>
+              <a:t>adequate直接称最终strong。</a:t>
             </a:r>
             <a:endParaRPr lang="en-US" sz="1800" dirty="0"/>
           </a:p>
@@ -4401,7 +9538,7 @@
                   <a:srgbClr val="1F2933"/>
                 </a:solidFill>
               </a:rPr>
-              <a:t>CP短期限、塔票据现金清扫及隔离结构各自影响付款时点和追索。</a:t>
+              <a:t>盈利综合的行业代理仍须保持条件。美国经营国家风险也不能代替</a:t>
             </a:r>
             <a:endParaRPr lang="en-US" sz="1800" dirty="0"/>
           </a:p>
@@ -4418,24 +9555,7 @@
                   <a:srgbClr val="1F2933"/>
                 </a:solidFill>
               </a:rPr>
-              <a:t>补合规证书、具体债券条款及回收估值前，不给债项等级，也不以</a:t>
-            </a:r>
-            <a:endParaRPr lang="en-US" sz="1800" dirty="0"/>
-          </a:p>
-          <a:p>
-            <a:pPr indent="0" marL="0">
-              <a:lnSpc>
-                <a:spcPct val="100000"/>
-              </a:lnSpc>
-              <a:buNone/>
-            </a:pPr>
-            <a:r>
-              <a:rPr lang="en-US" sz="1800" dirty="0">
-                <a:solidFill>
-                  <a:srgbClr val="1F2933"/>
-                </a:solidFill>
-              </a:rPr>
-              <a:t>担保物账面值替代回收。</a:t>
+              <a:t>当前主权、转移可兑换或债项回收法域。</a:t>
             </a:r>
             <a:endParaRPr lang="en-US" sz="1800" dirty="0"/>
           </a:p>
@@ -4499,7 +9619,7 @@
                   <a:srgbClr val="237F72"/>
                 </a:solidFill>
               </a:rPr>
-              <a:t>旧协议净杠杆比率余量</a:t>
+              <a:t>CICRA</a:t>
             </a:r>
             <a:endParaRPr lang="en-US" sz="1600" dirty="0"/>
           </a:p>
@@ -4516,7 +9636,7 @@
                   <a:srgbClr val="237F72"/>
                 </a:solidFill>
               </a:rPr>
-              <a:t>0.60 倍</a:t>
+              <a:t>2.00 CICRA </a:t>
             </a:r>
             <a:endParaRPr lang="en-US" sz="1600" dirty="0"/>
           </a:p>
@@ -4527,6 +9647,14 @@
               </a:lnSpc>
               <a:buNone/>
             </a:pPr>
+            <a:r>
+              <a:rPr lang="en-US" sz="1600" dirty="0">
+                <a:solidFill>
+                  <a:srgbClr val="237F72"/>
+                </a:solidFill>
+              </a:rPr>
+              <a:t>category 1..6</a:t>
+            </a:r>
             <a:endParaRPr lang="en-US" sz="1600" dirty="0"/>
           </a:p>
           <a:p>
@@ -4536,13 +9664,22 @@
               </a:lnSpc>
               <a:buNone/>
             </a:pPr>
+            <a:endParaRPr lang="en-US" sz="1600" dirty="0"/>
+          </a:p>
+          <a:p>
+            <a:pPr indent="0" marL="0">
+              <a:lnSpc>
+                <a:spcPct val="100000"/>
+              </a:lnSpc>
+              <a:buNone/>
+            </a:pPr>
             <a:r>
               <a:rPr lang="en-US" sz="1600" dirty="0">
                 <a:solidFill>
                   <a:srgbClr val="237F72"/>
                 </a:solidFill>
               </a:rPr>
-              <a:t>新承诺扣生效时信用证</a:t>
+              <a:t>Business risk </a:t>
             </a:r>
             <a:endParaRPr lang="en-US" sz="1600" dirty="0"/>
           </a:p>
@@ -4559,7 +9696,58 @@
                   <a:srgbClr val="237F72"/>
                 </a:solidFill>
               </a:rPr>
-              <a:t>4,460.60 百万USD</a:t>
+              <a:t>profile</a:t>
+            </a:r>
+            <a:endParaRPr lang="en-US" sz="1600" dirty="0"/>
+          </a:p>
+          <a:p>
+            <a:pPr indent="0" marL="0">
+              <a:lnSpc>
+                <a:spcPct val="100000"/>
+              </a:lnSpc>
+              <a:buNone/>
+            </a:pPr>
+            <a:r>
+              <a:rPr lang="en-US" sz="1600" dirty="0">
+                <a:solidFill>
+                  <a:srgbClr val="237F72"/>
+                </a:solidFill>
+              </a:rPr>
+              <a:t>2.00 business </a:t>
+            </a:r>
+            <a:endParaRPr lang="en-US" sz="1600" dirty="0"/>
+          </a:p>
+          <a:p>
+            <a:pPr indent="0" marL="0">
+              <a:lnSpc>
+                <a:spcPct val="100000"/>
+              </a:lnSpc>
+              <a:buNone/>
+            </a:pPr>
+            <a:r>
+              <a:rPr lang="en-US" sz="1600" dirty="0">
+                <a:solidFill>
+                  <a:srgbClr val="237F72"/>
+                </a:solidFill>
+              </a:rPr>
+              <a:t>risk category 1</a:t>
+            </a:r>
+            <a:endParaRPr lang="en-US" sz="1600" dirty="0"/>
+          </a:p>
+          <a:p>
+            <a:pPr indent="0" marL="0">
+              <a:lnSpc>
+                <a:spcPct val="100000"/>
+              </a:lnSpc>
+              <a:buNone/>
+            </a:pPr>
+            <a:r>
+              <a:rPr lang="en-US" sz="1600" dirty="0">
+                <a:solidFill>
+                  <a:srgbClr val="237F72"/>
+                </a:solidFill>
+              </a:rPr>
+              <a:t>..6</a:t>
             </a:r>
             <a:endParaRPr lang="en-US" sz="1600" dirty="0"/>
           </a:p>
@@ -4598,7 +9786,7 @@
                   <a:srgbClr val="213B45"/>
                 </a:solidFill>
               </a:rPr>
-              <a:t>[F06] conditional / [F07] supported / [F09] conditional</a:t>
+              <a:t>[FF_R109_BRP] conditional / [F16] supported</a:t>
             </a:r>
             <a:endParaRPr lang="en-US" sz="1100" dirty="0"/>
           </a:p>
@@ -4637,7 +9825,24 @@
                   <a:srgbClr val="586874"/>
                 </a:solidFill>
               </a:rPr>
-              <a:t>底稿 F06 / F07 / F09；来源 S25 / SOLDCREDIT / SCREDIT / SQ126 / SPROFORMA</a:t>
+              <a:t>底稿 FF_R109_BRP / F16；来源 S_DEV_COUNTRY / S_DEV_CORP / S_SP_SECTORS / S25 / S_SP_Q1 /</a:t>
+            </a:r>
+            <a:endParaRPr lang="en-US" sz="1000" dirty="0"/>
+          </a:p>
+          <a:p>
+            <a:pPr indent="0" marL="0">
+              <a:lnSpc>
+                <a:spcPct val="100000"/>
+              </a:lnSpc>
+              <a:buNone/>
+            </a:pPr>
+            <a:r>
+              <a:rPr lang="en-US" sz="1000" dirty="0">
+                <a:solidFill>
+                  <a:srgbClr val="586874"/>
+                </a:solidFill>
+              </a:rPr>
+              <a:t> SQ126</a:t>
             </a:r>
             <a:endParaRPr lang="en-US" sz="1000" dirty="0"/>
           </a:p>
@@ -4725,7 +9930,7 @@
                   <a:srgbClr val="213B45"/>
                 </a:solidFill>
               </a:rPr>
-              <a:t>评级调整改变分类，不会创造可用于还债的现金</a:t>
+              <a:t>保留服务的波动性决定主表选择的理由</a:t>
             </a:r>
             <a:endParaRPr lang="en-US" sz="2700" dirty="0"/>
           </a:p>
@@ -4761,7 +9966,7 @@
                   <a:srgbClr val="586874"/>
                 </a:solidFill>
               </a:rPr>
-              <a:t>Crown Castle Inc. and subsidiaries  |  2025-12-31  |  crown-castle-2025-public-3  |  7</a:t>
+              <a:t>Crown Castle Inc. and subsidiaries  |  2025-12-31  |  crown-castle-2025-public-4  |  7</a:t>
             </a:r>
             <a:endParaRPr lang="en-US" sz="900" dirty="0"/>
           </a:p>
@@ -4800,7 +10005,7 @@
                   <a:srgbClr val="1F2933"/>
                 </a:solidFill>
               </a:rPr>
-              <a:t>租赁债务、盈利及现金分类须同时调整；CFO的租赁加回是方法</a:t>
+              <a:t>售后仍有独立议价、非经常性且历史需求波动显著的服务业务。本</a:t>
             </a:r>
             <a:endParaRPr lang="en-US" sz="1800" dirty="0"/>
           </a:p>
@@ -4817,7 +10022,7 @@
                   <a:srgbClr val="1F2933"/>
                 </a:solidFill>
               </a:rPr>
-              <a:t>代理，实际租赁付现另列。可变费用与已包含的融资租赁不能重复</a:t>
+              <a:t>研究将其视为other activities，主选</a:t>
             </a:r>
             <a:endParaRPr lang="en-US" sz="1800" dirty="0"/>
           </a:p>
@@ -4834,7 +10039,7 @@
                   <a:srgbClr val="1F2933"/>
                 </a:solidFill>
               </a:rPr>
-              <a:t>资本化。</a:t>
+              <a:t>standard；这项业务适用解释本身保留反方。</a:t>
             </a:r>
             <a:endParaRPr lang="en-US" sz="1800" dirty="0"/>
           </a:p>
@@ -4860,7 +10065,7 @@
                   <a:srgbClr val="1F2933"/>
                 </a:solidFill>
               </a:rPr>
-              <a:t>历史调整估计EBITDA3,448.00 百万USD、</a:t>
+              <a:t>先检验low全部资格，未通过才检验medial。可预测经营</a:t>
             </a:r>
             <a:endParaRPr lang="en-US" sz="1800" dirty="0"/>
           </a:p>
@@ -4877,7 +10082,7 @@
                   <a:srgbClr val="1F2933"/>
                 </a:solidFill>
               </a:rPr>
-              <a:t>FFO2,178.57 百万USD、FOCF2,014.57</a:t>
+              <a:t>现金、合同或支持性框架与其他活动条件分别核，不按较有利阈值倒</a:t>
             </a:r>
             <a:endParaRPr lang="en-US" sz="1800" dirty="0"/>
           </a:p>
@@ -4894,8 +10099,17 @@
                   <a:srgbClr val="1F2933"/>
                 </a:solidFill>
               </a:rPr>
-              <a:t> 百万USD；FOCF尚非扣除全部租赁本金后的自由现金，</a:t>
-            </a:r>
+              <a:t>选。</a:t>
+            </a:r>
+            <a:endParaRPr lang="en-US" sz="1800" dirty="0"/>
+          </a:p>
+          <a:p>
+            <a:pPr indent="0" marL="0">
+              <a:lnSpc>
+                <a:spcPct val="100000"/>
+              </a:lnSpc>
+              <a:buNone/>
+            </a:pPr>
             <a:endParaRPr lang="en-US" sz="1800" dirty="0"/>
           </a:p>
           <a:p>
@@ -4911,17 +10125,8 @@
                   <a:srgbClr val="1F2933"/>
                 </a:solidFill>
               </a:rPr>
-              <a:t>也不是机构已发表指标。</a:t>
-            </a:r>
-            <a:endParaRPr lang="en-US" sz="1800" dirty="0"/>
-          </a:p>
-          <a:p>
-            <a:pPr indent="0" marL="0">
-              <a:lnSpc>
-                <a:spcPct val="100000"/>
-              </a:lnSpc>
-              <a:buNone/>
-            </a:pPr>
+              <a:t>租金收入占比、公司租赁现金归属代理和土地控制比例都不等于合格</a:t>
+            </a:r>
             <a:endParaRPr lang="en-US" sz="1800" dirty="0"/>
           </a:p>
           <a:p>
@@ -4937,7 +10142,7 @@
                   <a:srgbClr val="1F2933"/>
                 </a:solidFill>
               </a:rPr>
-              <a:t>资本化现金利息、股份支付及减记差异保留局部敏感性；ARO与</a:t>
+              <a:t>可预测CFO；框架与合同是可替代路径，不由客户余期一项自动</a:t>
             </a:r>
             <a:endParaRPr lang="en-US" sz="1800" dirty="0"/>
           </a:p>
@@ -4954,24 +10159,7 @@
                   <a:srgbClr val="1F2933"/>
                 </a:solidFill>
               </a:rPr>
-              <a:t>现金抵减须核证据。历史杠杆8.64 倍不代表售后评级；更新</a:t>
-            </a:r>
-            <a:endParaRPr lang="en-US" sz="1800" dirty="0"/>
-          </a:p>
-          <a:p>
-            <a:pPr indent="0" marL="0">
-              <a:lnSpc>
-                <a:spcPct val="100000"/>
-              </a:lnSpc>
-              <a:buNone/>
-            </a:pPr>
-            <a:r>
-              <a:rPr lang="en-US" sz="1800" dirty="0">
-                <a:solidFill>
-                  <a:srgbClr val="1F2933"/>
-                </a:solidFill>
-              </a:rPr>
-              <a:t>实际现金、债务和资本分配后再接预测。</a:t>
+              <a:t>否定。</a:t>
             </a:r>
             <a:endParaRPr lang="en-US" sz="1800" dirty="0"/>
           </a:p>
@@ -5035,7 +10223,7 @@
                   <a:srgbClr val="237F72"/>
                 </a:solidFill>
               </a:rPr>
-              <a:t>S&amp;P口径EBITDA分析估计</a:t>
+              <a:t>2026 services </a:t>
             </a:r>
             <a:endParaRPr lang="en-US" sz="1600" dirty="0"/>
           </a:p>
@@ -5052,7 +10240,7 @@
                   <a:srgbClr val="237F72"/>
                 </a:solidFill>
               </a:rPr>
-              <a:t>3,448.00 百万USD</a:t>
+              <a:t>and other gross</a:t>
             </a:r>
             <a:endParaRPr lang="en-US" sz="1600" dirty="0"/>
           </a:p>
@@ -5063,6 +10251,14 @@
               </a:lnSpc>
               <a:buNone/>
             </a:pPr>
+            <a:r>
+              <a:rPr lang="en-US" sz="1600" dirty="0">
+                <a:solidFill>
+                  <a:srgbClr val="237F72"/>
+                </a:solidFill>
+              </a:rPr>
+              <a:t> margin outlook</a:t>
+            </a:r>
             <a:endParaRPr lang="en-US" sz="1600" dirty="0"/>
           </a:p>
           <a:p>
@@ -5078,7 +10274,7 @@
                   <a:srgbClr val="237F72"/>
                 </a:solidFill>
               </a:rPr>
-              <a:t>2025历史条件债务/</a:t>
+              <a:t> low</a:t>
             </a:r>
             <a:endParaRPr lang="en-US" sz="1600" dirty="0"/>
           </a:p>
@@ -5095,7 +10291,7 @@
                   <a:srgbClr val="237F72"/>
                 </a:solidFill>
               </a:rPr>
-              <a:t>EBITDA</a:t>
+              <a:t>90.00 百万USD</a:t>
             </a:r>
             <a:endParaRPr lang="en-US" sz="1600" dirty="0"/>
           </a:p>
@@ -5106,13 +10302,90 @@
               </a:lnSpc>
               <a:buNone/>
             </a:pPr>
+            <a:endParaRPr lang="en-US" sz="1600" dirty="0"/>
+          </a:p>
+          <a:p>
+            <a:pPr indent="0" marL="0">
+              <a:lnSpc>
+                <a:spcPct val="100000"/>
+              </a:lnSpc>
+              <a:buNone/>
+            </a:pPr>
             <a:r>
               <a:rPr lang="en-US" sz="1600" dirty="0">
                 <a:solidFill>
                   <a:srgbClr val="237F72"/>
                 </a:solidFill>
               </a:rPr>
-              <a:t>8.64 倍</a:t>
+              <a:t>2026 services </a:t>
+            </a:r>
+            <a:endParaRPr lang="en-US" sz="1600" dirty="0"/>
+          </a:p>
+          <a:p>
+            <a:pPr indent="0" marL="0">
+              <a:lnSpc>
+                <a:spcPct val="100000"/>
+              </a:lnSpc>
+              <a:buNone/>
+            </a:pPr>
+            <a:r>
+              <a:rPr lang="en-US" sz="1600" dirty="0">
+                <a:solidFill>
+                  <a:srgbClr val="237F72"/>
+                </a:solidFill>
+              </a:rPr>
+              <a:t>and other gross</a:t>
+            </a:r>
+            <a:endParaRPr lang="en-US" sz="1600" dirty="0"/>
+          </a:p>
+          <a:p>
+            <a:pPr indent="0" marL="0">
+              <a:lnSpc>
+                <a:spcPct val="100000"/>
+              </a:lnSpc>
+              <a:buNone/>
+            </a:pPr>
+            <a:r>
+              <a:rPr lang="en-US" sz="1600" dirty="0">
+                <a:solidFill>
+                  <a:srgbClr val="237F72"/>
+                </a:solidFill>
+              </a:rPr>
+              <a:t> margin outlook</a:t>
+            </a:r>
+            <a:endParaRPr lang="en-US" sz="1600" dirty="0"/>
+          </a:p>
+          <a:p>
+            <a:pPr indent="0" marL="0">
+              <a:lnSpc>
+                <a:spcPct val="100000"/>
+              </a:lnSpc>
+              <a:buNone/>
+            </a:pPr>
+            <a:r>
+              <a:rPr lang="en-US" sz="1600" dirty="0">
+                <a:solidFill>
+                  <a:srgbClr val="237F72"/>
+                </a:solidFill>
+              </a:rPr>
+              <a:t> high</a:t>
+            </a:r>
+            <a:endParaRPr lang="en-US" sz="1600" dirty="0"/>
+          </a:p>
+          <a:p>
+            <a:pPr indent="0" marL="0">
+              <a:lnSpc>
+                <a:spcPct val="100000"/>
+              </a:lnSpc>
+              <a:buNone/>
+            </a:pPr>
+            <a:r>
+              <a:rPr lang="en-US" sz="1600" dirty="0">
+                <a:solidFill>
+                  <a:srgbClr val="237F72"/>
+                </a:solidFill>
+              </a:rPr>
+              <a:t>120.00 百万USD</a:t>
             </a:r>
             <a:endParaRPr lang="en-US" sz="1600" dirty="0"/>
           </a:p>
@@ -5151,7 +10424,7 @@
                   <a:srgbClr val="213B45"/>
                 </a:solidFill>
               </a:rPr>
-              <a:t>[F13] conditional / [F14] conditional / [F15] conditional</a:t>
+              <a:t>[F17] conditional</a:t>
             </a:r>
             <a:endParaRPr lang="en-US" sz="1100" dirty="0"/>
           </a:p>
@@ -5190,7 +10463,24 @@
                   <a:srgbClr val="586874"/>
                 </a:solidFill>
               </a:rPr>
-              <a:t>底稿 F13 / F14 / F15；来源 S25 / S_SP_RATIOS / S_SP_XBRL / SPROFORMA / SQ126</a:t>
+              <a:t>底稿 F17；来源 SPROFORMA / S_SP_SECTORS / S25 / S_SP_Q1 / SCREDIT / SQ126 / S_SP_RATIOS </a:t>
+            </a:r>
+            <a:endParaRPr lang="en-US" sz="1000" dirty="0"/>
+          </a:p>
+          <a:p>
+            <a:pPr indent="0" marL="0">
+              <a:lnSpc>
+                <a:spcPct val="100000"/>
+              </a:lnSpc>
+              <a:buNone/>
+            </a:pPr>
+            <a:r>
+              <a:rPr lang="en-US" sz="1000" dirty="0">
+                <a:solidFill>
+                  <a:srgbClr val="586874"/>
+                </a:solidFill>
+              </a:rPr>
+              <a:t>/ S_SP_XBRL / S_DEV_CORP</a:t>
             </a:r>
             <a:endParaRPr lang="en-US" sz="1000" dirty="0"/>
           </a:p>
@@ -5278,7 +10568,7 @@
                   <a:srgbClr val="213B45"/>
                 </a:solidFill>
               </a:rPr>
-              <a:t>客户事件与续约集中检验持续现金，而非单向外推</a:t>
+              <a:t>核心财务风险与有利补充指标保留竞争解释</a:t>
             </a:r>
             <a:endParaRPr lang="en-US" sz="2700" dirty="0"/>
           </a:p>
@@ -5314,7 +10604,7 @@
                   <a:srgbClr val="586874"/>
                 </a:solidFill>
               </a:rPr>
-              <a:t>Crown Castle Inc. and subsidiaries  |  2025-12-31  |  crown-castle-2025-public-3  |  8</a:t>
+              <a:t>Crown Castle Inc. and subsidiaries  |  2025-12-31  |  crown-castle-2025-public-4  |  8</a:t>
             </a:r>
             <a:endParaRPr lang="en-US" sz="900" dirty="0"/>
           </a:p>
@@ -5353,7 +10643,7 @@
                   <a:srgbClr val="1F2933"/>
                 </a:solidFill>
               </a:rPr>
-              <a:t>同口径持续经营Q1 CFO同比-20.22%；剔DISH与</a:t>
+              <a:t>转型主路径按当前及次年逐年比率等权，两个核心均落入高度杠杆</a:t>
             </a:r>
             <a:endParaRPr lang="en-US" sz="1800" dirty="0"/>
           </a:p>
@@ -5370,8 +10660,17 @@
                   <a:srgbClr val="1F2933"/>
                 </a:solidFill>
               </a:rPr>
-              <a:t>Sprint后的billings仍有增长。现金降幅不能全归</a:t>
-            </a:r>
+              <a:t>档。先平均比率，不能先平均分子分母再求比率。</a:t>
+            </a:r>
+            <a:endParaRPr lang="en-US" sz="1800" dirty="0"/>
+          </a:p>
+          <a:p>
+            <a:pPr indent="0" marL="0">
+              <a:lnSpc>
+                <a:spcPct val="100000"/>
+              </a:lnSpc>
+              <a:buNone/>
+            </a:pPr>
             <a:endParaRPr lang="en-US" sz="1800" dirty="0"/>
           </a:p>
           <a:p>
@@ -5387,17 +10686,8 @@
                   <a:srgbClr val="1F2933"/>
                 </a:solidFill>
               </a:rPr>
-              <a:t>DISH，需分解营运资本、利息与重组支付。</a:t>
-            </a:r>
-            <a:endParaRPr lang="en-US" sz="1800" dirty="0"/>
-          </a:p>
-          <a:p>
-            <a:pPr indent="0" marL="0">
-              <a:lnSpc>
-                <a:spcPct val="100000"/>
-              </a:lnSpc>
-              <a:buNone/>
-            </a:pPr>
+              <a:t>现金利息覆盖和FOCF支持改善一类的反方；分配后现金、更慢的</a:t>
+            </a:r>
             <a:endParaRPr lang="en-US" sz="1800" dirty="0"/>
           </a:p>
           <a:p>
@@ -5413,8 +10703,17 @@
                   <a:srgbClr val="1F2933"/>
                 </a:solidFill>
               </a:rPr>
-              <a:t>DISH合同索赔和管理层可收回判断都不是确定回款；法律回收、</a:t>
-            </a:r>
+              <a:t>债务下降和再融资依赖更能解释未来杠杆，主研究保留FRP6。</a:t>
+            </a:r>
+            <a:endParaRPr lang="en-US" sz="1800" dirty="0"/>
+          </a:p>
+          <a:p>
+            <a:pPr indent="0" marL="0">
+              <a:lnSpc>
+                <a:spcPct val="100000"/>
+              </a:lnSpc>
+              <a:buNone/>
+            </a:pPr>
             <a:endParaRPr lang="en-US" sz="1800" dirty="0"/>
           </a:p>
           <a:p>
@@ -5430,17 +10729,8 @@
                   <a:srgbClr val="1F2933"/>
                 </a:solidFill>
               </a:rPr>
-              <a:t>实际收款可能改变应收损失与收入预测。</a:t>
-            </a:r>
-            <a:endParaRPr lang="en-US" sz="1800" dirty="0"/>
-          </a:p>
-          <a:p>
-            <a:pPr indent="0" marL="0">
-              <a:lnSpc>
-                <a:spcPct val="100000"/>
-              </a:lnSpc>
-              <a:buNone/>
-            </a:pPr>
+              <a:t>负分配后现金只有在可能使信用指标恶化时才接前瞻加权例外。服务</a:t>
+            </a:r>
             <a:endParaRPr lang="en-US" sz="1800" dirty="0"/>
           </a:p>
           <a:p>
@@ -5456,58 +10746,7 @@
                   <a:srgbClr val="1F2933"/>
                 </a:solidFill>
               </a:rPr>
-              <a:t>2028续约组年度化租金暴露中AT&amp;T占90.01%，不代表</a:t>
-            </a:r>
-            <a:endParaRPr lang="en-US" sz="1800" dirty="0"/>
-          </a:p>
-          <a:p>
-            <a:pPr indent="0" marL="0">
-              <a:lnSpc>
-                <a:spcPct val="100000"/>
-              </a:lnSpc>
-              <a:buNone/>
-            </a:pPr>
-            <a:r>
-              <a:rPr lang="en-US" sz="1800" dirty="0">
-                <a:solidFill>
-                  <a:srgbClr val="1F2933"/>
-                </a:solidFill>
-              </a:rPr>
-              <a:t>当年必然损失。土地控制与迁移成本可能缓释风险；先核low全部</a:t>
-            </a:r>
-            <a:endParaRPr lang="en-US" sz="1800" dirty="0"/>
-          </a:p>
-          <a:p>
-            <a:pPr indent="0" marL="0">
-              <a:lnSpc>
-                <a:spcPct val="100000"/>
-              </a:lnSpc>
-              <a:buNone/>
-            </a:pPr>
-            <a:r>
-              <a:rPr lang="en-US" sz="1800" dirty="0">
-                <a:solidFill>
-                  <a:srgbClr val="1F2933"/>
-                </a:solidFill>
-              </a:rPr>
-              <a:t>条件，再检验medial或standard。本案CICRA、</a:t>
-            </a:r>
-            <a:endParaRPr lang="en-US" sz="1800" dirty="0"/>
-          </a:p>
-          <a:p>
-            <a:pPr indent="0" marL="0">
-              <a:lnSpc>
-                <a:spcPct val="100000"/>
-              </a:lnSpc>
-              <a:buNone/>
-            </a:pPr>
-            <a:r>
-              <a:rPr lang="en-US" sz="1800" dirty="0">
-                <a:solidFill>
-                  <a:srgbClr val="1F2933"/>
-                </a:solidFill>
-              </a:rPr>
-              <a:t>竞争地位、可预测CFO归属及续约情景尚未完成，不能直接定档。</a:t>
+              <a:t>选表也不自动触发全公司波动扣档；不能跨两类直接形成bbb。</a:t>
             </a:r>
             <a:endParaRPr lang="en-US" sz="1800" dirty="0"/>
           </a:p>
@@ -5571,7 +10810,7 @@
                   <a:srgbClr val="237F72"/>
                 </a:solidFill>
               </a:rPr>
-              <a:t>持续经营Q1 CFO同比</a:t>
+              <a:t>base indicative</a:t>
             </a:r>
             <a:endParaRPr lang="en-US" sz="1600" dirty="0"/>
           </a:p>
@@ -5588,7 +10827,7 @@
                   <a:srgbClr val="237F72"/>
                 </a:solidFill>
               </a:rPr>
-              <a:t>-20.22%</a:t>
+              <a:t> </a:t>
             </a:r>
             <a:endParaRPr lang="en-US" sz="1600" dirty="0"/>
           </a:p>
@@ -5599,6 +10838,14 @@
               </a:lnSpc>
               <a:buNone/>
             </a:pPr>
+            <a:r>
+              <a:rPr lang="en-US" sz="1600" dirty="0">
+                <a:solidFill>
+                  <a:srgbClr val="237F72"/>
+                </a:solidFill>
+              </a:rPr>
+              <a:t>FFO_cash_intere</a:t>
+            </a:r>
             <a:endParaRPr lang="en-US" sz="1600" dirty="0"/>
           </a:p>
           <a:p>
@@ -5614,7 +10861,7 @@
                   <a:srgbClr val="237F72"/>
                 </a:solidFill>
               </a:rPr>
-              <a:t>2028续约组AT&amp;T暴露占比</a:t>
+              <a:t>st_coverage</a:t>
             </a:r>
             <a:endParaRPr lang="en-US" sz="1600" dirty="0"/>
           </a:p>
@@ -5631,7 +10878,127 @@
                   <a:srgbClr val="237F72"/>
                 </a:solidFill>
               </a:rPr>
-              <a:t>90.01%</a:t>
+              <a:t>3.19 倍</a:t>
+            </a:r>
+            <a:endParaRPr lang="en-US" sz="1600" dirty="0"/>
+          </a:p>
+          <a:p>
+            <a:pPr indent="0" marL="0">
+              <a:lnSpc>
+                <a:spcPct val="100000"/>
+              </a:lnSpc>
+              <a:buNone/>
+            </a:pPr>
+            <a:endParaRPr lang="en-US" sz="1600" dirty="0"/>
+          </a:p>
+          <a:p>
+            <a:pPr indent="0" marL="0">
+              <a:lnSpc>
+                <a:spcPct val="100000"/>
+              </a:lnSpc>
+              <a:buNone/>
+            </a:pPr>
+            <a:r>
+              <a:rPr lang="en-US" sz="1600" dirty="0">
+                <a:solidFill>
+                  <a:srgbClr val="237F72"/>
+                </a:solidFill>
+              </a:rPr>
+              <a:t>base indicative</a:t>
+            </a:r>
+            <a:endParaRPr lang="en-US" sz="1600" dirty="0"/>
+          </a:p>
+          <a:p>
+            <a:pPr indent="0" marL="0">
+              <a:lnSpc>
+                <a:spcPct val="100000"/>
+              </a:lnSpc>
+              <a:buNone/>
+            </a:pPr>
+            <a:r>
+              <a:rPr lang="en-US" sz="1600" dirty="0">
+                <a:solidFill>
+                  <a:srgbClr val="237F72"/>
+                </a:solidFill>
+              </a:rPr>
+              <a:t> FOCF_debt</a:t>
+            </a:r>
+            <a:endParaRPr lang="en-US" sz="1600" dirty="0"/>
+          </a:p>
+          <a:p>
+            <a:pPr indent="0" marL="0">
+              <a:lnSpc>
+                <a:spcPct val="100000"/>
+              </a:lnSpc>
+              <a:buNone/>
+            </a:pPr>
+            <a:r>
+              <a:rPr lang="en-US" sz="1600" dirty="0">
+                <a:solidFill>
+                  <a:srgbClr val="237F72"/>
+                </a:solidFill>
+              </a:rPr>
+              <a:t>8.84%</a:t>
+            </a:r>
+            <a:endParaRPr lang="en-US" sz="1600" dirty="0"/>
+          </a:p>
+          <a:p>
+            <a:pPr indent="0" marL="0">
+              <a:lnSpc>
+                <a:spcPct val="100000"/>
+              </a:lnSpc>
+              <a:buNone/>
+            </a:pPr>
+            <a:endParaRPr lang="en-US" sz="1600" dirty="0"/>
+          </a:p>
+          <a:p>
+            <a:pPr indent="0" marL="0">
+              <a:lnSpc>
+                <a:spcPct val="100000"/>
+              </a:lnSpc>
+              <a:buNone/>
+            </a:pPr>
+            <a:r>
+              <a:rPr lang="en-US" sz="1600" dirty="0">
+                <a:solidFill>
+                  <a:srgbClr val="237F72"/>
+                </a:solidFill>
+              </a:rPr>
+              <a:t>base indicative</a:t>
+            </a:r>
+            <a:endParaRPr lang="en-US" sz="1600" dirty="0"/>
+          </a:p>
+          <a:p>
+            <a:pPr indent="0" marL="0">
+              <a:lnSpc>
+                <a:spcPct val="100000"/>
+              </a:lnSpc>
+              <a:buNone/>
+            </a:pPr>
+            <a:r>
+              <a:rPr lang="en-US" sz="1600" dirty="0">
+                <a:solidFill>
+                  <a:srgbClr val="237F72"/>
+                </a:solidFill>
+              </a:rPr>
+              <a:t> DCF_debt</a:t>
+            </a:r>
+            <a:endParaRPr lang="en-US" sz="1600" dirty="0"/>
+          </a:p>
+          <a:p>
+            <a:pPr indent="0" marL="0">
+              <a:lnSpc>
+                <a:spcPct val="100000"/>
+              </a:lnSpc>
+              <a:buNone/>
+            </a:pPr>
+            <a:r>
+              <a:rPr lang="en-US" sz="1600" dirty="0">
+                <a:solidFill>
+                  <a:srgbClr val="237F72"/>
+                </a:solidFill>
+              </a:rPr>
+              <a:t>-1.41%</a:t>
             </a:r>
             <a:endParaRPr lang="en-US" sz="1600" dirty="0"/>
           </a:p>
@@ -5670,7 +11037,7 @@
                   <a:srgbClr val="213B45"/>
                 </a:solidFill>
               </a:rPr>
-              <a:t>[F11] conditional / [F16] supported / [F17] conditional</a:t>
+              <a:t>[F15] conditional</a:t>
             </a:r>
             <a:endParaRPr lang="en-US" sz="1100" dirty="0"/>
           </a:p>
@@ -5709,7 +11076,24 @@
                   <a:srgbClr val="586874"/>
                 </a:solidFill>
               </a:rPr>
-              <a:t>底稿 F11 / F16 / F17；来源 SQ126 / S_SP_Q4 / S25 / S_SP_Q1 / S_SP_SECTORS</a:t>
+              <a:t>底稿 F15；来源 S25 / SCREDIT / SQ126 / S_SP_Q1 / S_DEV_CORP / S_SP_SECTORS / S_SP_RATIOS</a:t>
+            </a:r>
+            <a:endParaRPr lang="en-US" sz="1000" dirty="0"/>
+          </a:p>
+          <a:p>
+            <a:pPr indent="0" marL="0">
+              <a:lnSpc>
+                <a:spcPct val="100000"/>
+              </a:lnSpc>
+              <a:buNone/>
+            </a:pPr>
+            <a:r>
+              <a:rPr lang="en-US" sz="1000" dirty="0">
+                <a:solidFill>
+                  <a:srgbClr val="586874"/>
+                </a:solidFill>
+              </a:rPr>
+              <a:t> / SPROFORMA / S_SP_XBRL / S_DEV_LIQ / S_DEV_REC</a:t>
             </a:r>
             <a:endParaRPr lang="en-US" sz="1000" dirty="0"/>
           </a:p>
@@ -5797,7 +11181,7 @@
                   <a:srgbClr val="213B45"/>
                 </a:solidFill>
               </a:rPr>
-              <a:t>下一步以能改变判断的证据关闭未决事项</a:t>
+              <a:t>客户、再融资和现金执行压力沿同一条债务路径传播</a:t>
             </a:r>
             <a:endParaRPr lang="en-US" sz="2700" dirty="0"/>
           </a:p>
@@ -5833,7 +11217,7 @@
                   <a:srgbClr val="586874"/>
                 </a:solidFill>
               </a:rPr>
-              <a:t>Crown Castle Inc. and subsidiaries  |  2025-12-31  |  crown-castle-2025-public-3  |  9</a:t>
+              <a:t>Crown Castle Inc. and subsidiaries  |  2025-12-31  |  crown-castle-2025-public-4  |  9</a:t>
             </a:r>
             <a:endParaRPr lang="en-US" sz="900" dirty="0"/>
           </a:p>
@@ -5848,7 +11232,7 @@
         <p:spPr>
           <a:xfrm>
             <a:off x="594360" y="1417320"/>
-            <a:ext cx="10972800" cy="3794760"/>
+            <a:ext cx="7223760" cy="3794760"/>
           </a:xfrm>
           <a:prstGeom prst="rect">
             <a:avLst/>
@@ -5872,7 +11256,7 @@
                   <a:srgbClr val="1F2933"/>
                 </a:solidFill>
               </a:rPr>
-              <a:t>原报与重列收入、上年待售准备回述存在未解释差异。取得正式更正或逐项桥前，保留两版，不能自行选</a:t>
+              <a:t>2028客户压力按真实年度化续约暴露、明确损失份额与半年作用</a:t>
             </a:r>
             <a:endParaRPr lang="en-US" sz="1800" dirty="0"/>
           </a:p>
@@ -5889,7 +11273,7 @@
                   <a:srgbClr val="1F2933"/>
                 </a:solidFill>
               </a:rPr>
-              <a:t>一个数强行平账。</a:t>
+              <a:t>期施加；再融资加点按到期后暴露和上年新增借款续息。</a:t>
             </a:r>
             <a:endParaRPr lang="en-US" sz="1800" dirty="0"/>
           </a:p>
@@ -5915,7 +11299,7 @@
                   <a:srgbClr val="1F2933"/>
                 </a:solidFill>
               </a:rPr>
-              <a:t>优先取得截止前售后债务与现金、最终结算、合规证书、客户实收及续约预测；将其接入法律主体资金和</a:t>
+              <a:t>联合压力2028CFO1,801.00 百万USD，债务/</a:t>
             </a:r>
             <a:endParaRPr lang="en-US" sz="1800" dirty="0"/>
           </a:p>
@@ -5932,17 +11316,8 @@
                   <a:srgbClr val="1F2933"/>
                 </a:solidFill>
               </a:rPr>
-              <a:t>契约定义，评估是否改变流动性及财务档。公开可取得协议应先补读，不泛称内部缺口。</a:t>
-            </a:r>
-            <a:endParaRPr lang="en-US" sz="1800" dirty="0"/>
-          </a:p>
-          <a:p>
-            <a:pPr indent="0" marL="0">
-              <a:lnSpc>
-                <a:spcPct val="100000"/>
-              </a:lnSpc>
-              <a:buNone/>
-            </a:pPr>
+              <a:t>EBITDA7.55 倍。新增融资既缓解付款缺口，也增加后续</a:t>
+            </a:r>
             <a:endParaRPr lang="en-US" sz="1800" dirty="0"/>
           </a:p>
           <a:p>
@@ -5958,8 +11333,17 @@
                   <a:srgbClr val="1F2933"/>
                 </a:solidFill>
               </a:rPr>
-              <a:t>减值、税、股份支付等关键差异需相应底稿。这里完成的是公开资料阅读与复算，未执行函证、控制测试</a:t>
-            </a:r>
+              <a:t>利息，不能免费补足现金。</a:t>
+            </a:r>
+            <a:endParaRPr lang="en-US" sz="1800" dirty="0"/>
+          </a:p>
+          <a:p>
+            <a:pPr indent="0" marL="0">
+              <a:lnSpc>
+                <a:spcPct val="100000"/>
+              </a:lnSpc>
+              <a:buNone/>
+            </a:pPr>
             <a:endParaRPr lang="en-US" sz="1800" dirty="0"/>
           </a:p>
           <a:p>
@@ -5975,15 +11359,241 @@
                   <a:srgbClr val="1F2933"/>
                 </a:solidFill>
               </a:rPr>
-              <a:t>或估值重建，不能把审计师的程序记作本次执行。</a:t>
-            </a:r>
-            <a:endParaRPr lang="en-US" sz="1800" dirty="0"/>
-          </a:p>
-        </p:txBody>
-      </p:sp>
-      <p:sp>
-        <p:nvSpPr>
-          <p:cNvPr id="5" name="Text 3"/>
+              <a:t>逆向现金与EBITDA改善分别求单项边界；达到一个FFO/</a:t>
+            </a:r>
+            <a:endParaRPr lang="en-US" sz="1800" dirty="0"/>
+          </a:p>
+          <a:p>
+            <a:pPr indent="0" marL="0">
+              <a:lnSpc>
+                <a:spcPct val="100000"/>
+              </a:lnSpc>
+              <a:buNone/>
+            </a:pPr>
+            <a:r>
+              <a:rPr lang="en-US" sz="1800" dirty="0">
+                <a:solidFill>
+                  <a:srgbClr val="1F2933"/>
+                </a:solidFill>
+              </a:rPr>
+              <a:t>债务边界仍须复查杠杆及其余节点。没有额度的分支出现缺口后</a:t>
+            </a:r>
+            <a:endParaRPr lang="en-US" sz="1800" dirty="0"/>
+          </a:p>
+          <a:p>
+            <a:pPr indent="0" marL="0">
+              <a:lnSpc>
+                <a:spcPct val="100000"/>
+              </a:lnSpc>
+              <a:buNone/>
+            </a:pPr>
+            <a:r>
+              <a:rPr lang="en-US" sz="1800" dirty="0">
+                <a:solidFill>
+                  <a:srgbClr val="1F2933"/>
+                </a:solidFill>
+              </a:rPr>
+              <a:t>停止，不形成负现金资产或后年比率。</a:t>
+            </a:r>
+            <a:endParaRPr lang="en-US" sz="1800" dirty="0"/>
+          </a:p>
+        </p:txBody>
+      </p:sp>
+      <p:sp>
+        <p:nvSpPr>
+          <p:cNvPr id="5" name="Shape 3"/>
+          <p:cNvSpPr/>
+          <p:nvPr/>
+        </p:nvSpPr>
+        <p:spPr>
+          <a:xfrm>
+            <a:off x="8046720" y="1325880"/>
+            <a:ext cx="3566160" cy="4069080"/>
+          </a:xfrm>
+          <a:prstGeom prst="rect">
+            <a:avLst/>
+          </a:prstGeom>
+          <a:solidFill>
+            <a:srgbClr val="E6EFEC"/>
+          </a:solidFill>
+          <a:ln w="12700">
+            <a:solidFill>
+              <a:srgbClr val="E6EFEC"/>
+            </a:solidFill>
+            <a:prstDash val="solid"/>
+          </a:ln>
+        </p:spPr>
+      </p:sp>
+      <p:sp>
+        <p:nvSpPr>
+          <p:cNvPr id="6" name="Text 4"/>
+          <p:cNvSpPr/>
+          <p:nvPr/>
+        </p:nvSpPr>
+        <p:spPr>
+          <a:xfrm>
+            <a:off x="8211312" y="1417320"/>
+            <a:ext cx="3246120" cy="3794760"/>
+          </a:xfrm>
+          <a:prstGeom prst="rect">
+            <a:avLst/>
+          </a:prstGeom>
+          <a:noFill/>
+          <a:ln/>
+        </p:spPr>
+        <p:txBody>
+          <a:bodyPr wrap="square" lIns="0" tIns="0" rIns="0" bIns="0" rtlCol="0" anchor="t"/>
+          <a:lstStyle/>
+          <a:p>
+            <a:pPr indent="0" marL="0">
+              <a:lnSpc>
+                <a:spcPct val="100000"/>
+              </a:lnSpc>
+              <a:buNone/>
+            </a:pPr>
+            <a:r>
+              <a:rPr lang="en-US" sz="1600" dirty="0">
+                <a:solidFill>
+                  <a:srgbClr val="237F72"/>
+                </a:solidFill>
+              </a:rPr>
+              <a:t>joint_stress </a:t>
+            </a:r>
+            <a:endParaRPr lang="en-US" sz="1600" dirty="0"/>
+          </a:p>
+          <a:p>
+            <a:pPr indent="0" marL="0">
+              <a:lnSpc>
+                <a:spcPct val="100000"/>
+              </a:lnSpc>
+              <a:buNone/>
+            </a:pPr>
+            <a:r>
+              <a:rPr lang="en-US" sz="1600" dirty="0">
+                <a:solidFill>
+                  <a:srgbClr val="237F72"/>
+                </a:solidFill>
+              </a:rPr>
+              <a:t>2028 new_draw</a:t>
+            </a:r>
+            <a:endParaRPr lang="en-US" sz="1600" dirty="0"/>
+          </a:p>
+          <a:p>
+            <a:pPr indent="0" marL="0">
+              <a:lnSpc>
+                <a:spcPct val="100000"/>
+              </a:lnSpc>
+              <a:buNone/>
+            </a:pPr>
+            <a:r>
+              <a:rPr lang="en-US" sz="1600" dirty="0">
+                <a:solidFill>
+                  <a:srgbClr val="237F72"/>
+                </a:solidFill>
+              </a:rPr>
+              <a:t>385.25 百万USD</a:t>
+            </a:r>
+            <a:endParaRPr lang="en-US" sz="1600" dirty="0"/>
+          </a:p>
+          <a:p>
+            <a:pPr indent="0" marL="0">
+              <a:lnSpc>
+                <a:spcPct val="100000"/>
+              </a:lnSpc>
+              <a:buNone/>
+            </a:pPr>
+            <a:endParaRPr lang="en-US" sz="1600" dirty="0"/>
+          </a:p>
+          <a:p>
+            <a:pPr indent="0" marL="0">
+              <a:lnSpc>
+                <a:spcPct val="100000"/>
+              </a:lnSpc>
+              <a:buNone/>
+            </a:pPr>
+            <a:r>
+              <a:rPr lang="en-US" sz="1600" dirty="0">
+                <a:solidFill>
+                  <a:srgbClr val="237F72"/>
+                </a:solidFill>
+              </a:rPr>
+              <a:t>no_new_facility</a:t>
+            </a:r>
+            <a:endParaRPr lang="en-US" sz="1600" dirty="0"/>
+          </a:p>
+          <a:p>
+            <a:pPr indent="0" marL="0">
+              <a:lnSpc>
+                <a:spcPct val="100000"/>
+              </a:lnSpc>
+              <a:buNone/>
+            </a:pPr>
+            <a:r>
+              <a:rPr lang="en-US" sz="1600" dirty="0">
+                <a:solidFill>
+                  <a:srgbClr val="237F72"/>
+                </a:solidFill>
+              </a:rPr>
+              <a:t> 2026 </a:t>
+            </a:r>
+            <a:endParaRPr lang="en-US" sz="1600" dirty="0"/>
+          </a:p>
+          <a:p>
+            <a:pPr indent="0" marL="0">
+              <a:lnSpc>
+                <a:spcPct val="100000"/>
+              </a:lnSpc>
+              <a:buNone/>
+            </a:pPr>
+            <a:r>
+              <a:rPr lang="en-US" sz="1600" dirty="0">
+                <a:solidFill>
+                  <a:srgbClr val="237F72"/>
+                </a:solidFill>
+              </a:rPr>
+              <a:t>cash_payment_de</a:t>
+            </a:r>
+            <a:endParaRPr lang="en-US" sz="1600" dirty="0"/>
+          </a:p>
+          <a:p>
+            <a:pPr indent="0" marL="0">
+              <a:lnSpc>
+                <a:spcPct val="100000"/>
+              </a:lnSpc>
+              <a:buNone/>
+            </a:pPr>
+            <a:r>
+              <a:rPr lang="en-US" sz="1600" dirty="0">
+                <a:solidFill>
+                  <a:srgbClr val="237F72"/>
+                </a:solidFill>
+              </a:rPr>
+              <a:t>ficit</a:t>
+            </a:r>
+            <a:endParaRPr lang="en-US" sz="1600" dirty="0"/>
+          </a:p>
+          <a:p>
+            <a:pPr indent="0" marL="0">
+              <a:lnSpc>
+                <a:spcPct val="100000"/>
+              </a:lnSpc>
+              <a:buNone/>
+            </a:pPr>
+            <a:r>
+              <a:rPr lang="en-US" sz="1600" dirty="0">
+                <a:solidFill>
+                  <a:srgbClr val="237F72"/>
+                </a:solidFill>
+              </a:rPr>
+              <a:t>45.77 百万USD</a:t>
+            </a:r>
+            <a:endParaRPr lang="en-US" sz="1600" dirty="0"/>
+          </a:p>
+        </p:txBody>
+      </p:sp>
+      <p:sp>
+        <p:nvSpPr>
+          <p:cNvPr id="7" name="Text 5"/>
           <p:cNvSpPr/>
           <p:nvPr/>
         </p:nvSpPr>
@@ -6014,7 +11624,7 @@
                   <a:srgbClr val="213B45"/>
                 </a:solidFill>
               </a:rPr>
-              <a:t>[F10] unresolved / [F12] supported / [F06] conditional / [F09] conditional </a:t>
+              <a:t>[FF_FORWARD_STRESS] conditional / [FF_FORWARD_FUNDING] conditional / [F15] </a:t>
             </a:r>
             <a:endParaRPr lang="en-US" sz="1100" dirty="0"/>
           </a:p>
@@ -6031,7 +11641,7 @@
                   <a:srgbClr val="213B45"/>
                 </a:solidFill>
               </a:rPr>
-              <a:t>/ [F14] conditional / [F15] conditional / [F17] conditional</a:t>
+              <a:t>conditional</a:t>
             </a:r>
             <a:endParaRPr lang="en-US" sz="1100" dirty="0"/>
           </a:p>
@@ -6039,7 +11649,7 @@
       </p:sp>
       <p:sp>
         <p:nvSpPr>
-          <p:cNvPr id="6" name="Text 4"/>
+          <p:cNvPr id="8" name="Text 6"/>
           <p:cNvSpPr/>
           <p:nvPr/>
         </p:nvSpPr>
@@ -6070,7 +11680,7 @@
                   <a:srgbClr val="586874"/>
                 </a:solidFill>
               </a:rPr>
-              <a:t>底稿 F10 / F12 / F06 / F09 / F14 / F15 / F17；来源 S24 / S25 / SQ125 / SSEC / SQ126 / </a:t>
+              <a:t>底稿 FF_FORWARD_STRESS / FF_FORWARD_FUNDING / F15；来源 S25 / SCREDIT / SQ126 / S_SP_Q1 </a:t>
             </a:r>
             <a:endParaRPr lang="en-US" sz="1000" dirty="0"/>
           </a:p>
@@ -6087,7 +11697,7 @@
                   <a:srgbClr val="586874"/>
                 </a:solidFill>
               </a:rPr>
-              <a:t>SOLDCREDIT / SCREDIT / SPROFORMA / S_SP_RATIOS / S_SP_XBRL / S_SP_Q4 / S_SP_SECTORS</a:t>
+              <a:t>/ S_SP_RATIOS / SPROFORMA / S_SP_XBRL / S_SP_Q4 / S_DEV_CORP / S_SP_SECTORS / </a:t>
             </a:r>
             <a:endParaRPr lang="en-US" sz="1000" dirty="0"/>
           </a:p>
@@ -6104,7 +11714,7 @@
                   <a:srgbClr val="586874"/>
                 </a:solidFill>
               </a:rPr>
-              <a:t> / S_SP_Q1</a:t>
+              <a:t>S_DEV_LIQ / S_DEV_REC</a:t>
             </a:r>
             <a:endParaRPr lang="en-US" sz="1000" dirty="0"/>
           </a:p>

--- a/examples/crown-castle-2025/deliverables/presentation.pptx
+++ b/examples/crown-castle-2025/deliverables/presentation.pptx
@@ -21,9 +21,10 @@
     <p:sldId id="269" r:id="rId15"/>
     <p:sldId id="270" r:id="rId16"/>
     <p:sldId id="271" r:id="rId17"/>
+    <p:sldId id="272" r:id="rId18"/>
   </p:sldIdLst>
   <p:notesMasterIdLst>
-    <p:notesMasterId r:id="rId18"/>
+    <p:notesMasterId r:id="rId19"/>
   </p:notesMasterIdLst>
   <p:sldSz cx="12192000" cy="6858000"/>
   <p:notesSz cx="6858000" cy="12192000"/>
@@ -1690,6 +1691,185 @@
             <a:fld id="{F7021451-1387-4CA6-816F-3879F97B5CBC}" type="slidenum">
               <a:rPr lang="en-US"/>
               <a:t>16</a:t>
+            </a:fld>
+            <a:endParaRPr lang="en-US"/>
+          </a:p>
+        </p:txBody>
+      </p:sp>
+    </p:spTree>
+    <p:extLst>
+      <p:ext uri="{BB962C8B-B14F-4D97-AF65-F5344CB8AC3E}">
+        <p14:creationId xmlns:p14="http://schemas.microsoft.com/office/powerpoint/2010/main" val="1024086991"/>
+      </p:ext>
+    </p:extLst>
+  </p:cSld>
+  <p:clrMapOvr>
+    <a:masterClrMapping/>
+  </p:clrMapOvr>
+</p:notes>
+</file>
+
+<file path=ppt/notesSlides/notesSlide17.xml><?xml version="1.0" encoding="utf-8"?>
+<p:notes xmlns:a="http://schemas.openxmlformats.org/drawingml/2006/main" xmlns:r="http://schemas.openxmlformats.org/officeDocument/2006/relationships" xmlns:p="http://schemas.openxmlformats.org/presentationml/2006/main">
+  <p:cSld>
+    <p:spTree>
+      <p:nvGrpSpPr>
+        <p:cNvPr id="1" name=""/>
+        <p:cNvGrpSpPr/>
+        <p:nvPr/>
+      </p:nvGrpSpPr>
+      <p:grpSpPr>
+        <a:xfrm>
+          <a:off x="0" y="0"/>
+          <a:ext cx="0" cy="0"/>
+          <a:chOff x="0" y="0"/>
+          <a:chExt cx="0" cy="0"/>
+        </a:xfrm>
+      </p:grpSpPr>
+      <p:sp>
+        <p:nvSpPr>
+          <p:cNvPr id="2" name="Slide Image Placeholder 1"/>
+          <p:cNvSpPr>
+            <a:spLocks noGrp="1" noRot="1" noChangeAspect="1"/>
+          </p:cNvSpPr>
+          <p:nvPr>
+            <p:ph type="sldImg"/>
+          </p:nvPr>
+        </p:nvSpPr>
+        <p:spPr/>
+      </p:sp>
+      <p:sp>
+        <p:nvSpPr>
+          <p:cNvPr id="3" name="Notes Placeholder 2"/>
+          <p:cNvSpPr>
+            <a:spLocks noGrp="1"/>
+          </p:cNvSpPr>
+          <p:nvPr>
+            <p:ph type="body" idx="1"/>
+          </p:nvPr>
+        </p:nvSpPr>
+        <p:spPr/>
+        <p:txBody>
+          <a:bodyPr/>
+          <a:lstStyle/>
+          <a:p>
+            <a:r>
+              <a:rPr lang="en-US" dirty="0"/>
+              <a:t>底稿 F05, FF_R109_ISSUER, FF_R109_NOTE, F10, FF_FORWARD_STRESS
+[F05] conditional / [FF_R109_ISSUER] conditional / [FF_R109_NOTE] conditional / [F10] unresolved / [FF_FORWARD_STRESS] conditional
+底稿 F05 / FF_R109_ISSUER / FF_R109_NOTE / F10 / FF_FORWARD_STRESS；来源 S_DEV_LIQ / SCREDIT / SPROFORMA / S25 / SQ126 / S_SP_Q1 / S_SP_RATIOS / S_SP_XBRL / S_DEV_CORP / S_SP_SECTORS / S_DEV_REC / S_PROXY26 / S_DEV_COUNTRY / S24 / SQ125 / SSEC / S_SP_Q4
+原文定位、URL及完整引用见本页备注；完整方法和明细见同名底稿及 Word/Excel。
+[E_R109_LIQ] Methodology And Assumptions: Liquidity Descriptors For Global Corporate Issuers | PDF4–5/¶22–32；PDF7–14/¶37–50、64、73–90
+urn:sha256:76cf8f47d56b21e8fe60597490f873d1af5dd4ff1326b9a4fa2577c022a534d4
+[E_DEV_CREDIT] Crown Castle May 1 2026 Form 8-K and Exhibit 10.1 credit agreement | PDF11、22–24、40–41、49、51、103、118及公开8K摘要
+https://investor.crowncastle.com/static-files/dd7712df-51aa-4a29-b6a5-67becf7b2234
+[E_DEV_SALE] 2026-05-01 出售8-K及Exhibit99.2公开未经审计备考 | PDF2/5–9；已读相关备考章节
+https://investor.crowncastle.com/static-files/f4ff727f-0f13-4f18-affa-1ff461698ccf
+[E25BS] Crown Castle 2025 Form 10-K | 印刷及 PDF p58，Consolidated Balance Sheet，2025/2024 两列
+https://investor.crowncastle.com/static-files/68fb84e1-1dac-440d-96b4-55b9603e10dd
+[ECREDIT] Crown Castle May 1 2026 Form 8-K and Exhibit 10.1 credit agreement | 8-K Item 1.01；协议 §1.01、§1.04/p43、§1.05/p44、§4.02/p93、§6.10/p108；Total Indebtedness印刷39/PDF49，§1.04印刷43/PDF53
+https://investor.crowncastle.com/static-files/dd7712df-51aa-4a29-b6a5-67becf7b2234
+[EQ126CF] Crown Castle Q1 2026 Form 10-Q | 印刷 p18/PDF p19 现金调节；note 5/p12 债务；MD&amp;A/p28 流动性
+https://investor.crowncastle.com/static-files/de60fca2-89d5-499d-899b-8e0a23030617
+[EQ126FAC] Crown Castle Q1 2026 Form 10-Q | note 14 印刷 p20/PDF p21；MD&amp;A/p28 May 5 balances
+https://investor.crowncastle.com/static-files/de60fca2-89d5-499d-899b-8e0a23030617
+[EQ126SALE] Crown Castle Q1 2026 Form 10-Q | note 14 印刷 p19/PDF p20，Completion of Strategic Fiber Transaction
+https://investor.crowncastle.com/static-files/de60fca2-89d5-499d-899b-8e0a23030617
+[E_FWD_CASH_TAX] Crown Castle Q1 2026 Supplemental Information | Q1 supplement PDF12/印刷11完整Consolidated ROIC表及(a)–(f)脚注；PDF23/印刷22 Non-GAAP Measures定义
+https://investor.crowncastle.com/static-files/38f6a584-60a8-452d-bfd2-a44103aeec82
+[E_FWD_CONTRACT] Crown Castle Q1 2026 Supplemental Information | PDF9/11/13–16/18/28，印刷8/10/12–15/17/27
+https://investor.crowncastle.com/static-files/38f6a584-60a8-452d-bfd2-a44103aeec82
+[E_FWD_CREDIT_CONDITIONS] Crown Castle May 1 2026 Form 8-K and Exhibit 10.1 credit agreement | 完整协议PDF2、49、51、103、118；协议印刷39、41、93、108；§4.02/§6.10
+https://investor.crowncastle.com/static-files/dd7712df-51aa-4a29-b6a5-67becf7b2234
+[E_FWD_DEBT_MEASURE] S&amp;P Corporate Methodology: Ratios And Adjustments | PDF27/印刷27，Appendix2 Initial measurement / debt at fair value
+https://www.maalot.co.il/Publications/MT20251223092257.pdf
+[E_FWD_GUIDANCE] 2026-05-01 出售8-K及Exhibit99.2公开未经审计备考 | 完整May1 8-K的Ex99.1 PDF6、11、13、15–16（印刷2、7、9、11–12）
+https://investor.crowncastle.com/static-files/f4ff727f-0f13-4f18-affa-1ff461698ccf
+[E_FWD_Q1] Crown Castle Q1 2026 Form 10-Q | PDF4–6/印刷3–5；note5 PDF14/印刷13；note13–14 PDF19–20
+https://investor.crowncastle.com/static-files/de60fca2-89d5-499d-899b-8e0a23030617
+[E_FWD_Q1_XBRL] SEC Companyfacts：Crown Castle 2025年度及2026Q1原申报事实 | InterestPaidNet / InterestCostsCapitalized；accn0001051470-26-000059，2026Q1，filed2026-05-07
+https://data.sec.gov/api/xbrl/companyfacts/CIK0001051470.json
+[E_FWD_RESTRUCT_CLASS] Crown Castle 2025 Form 10-K | 2025 10K PDF89/印刷89；Q1更新已由E_FWD_Q1 note13–14支持
+https://investor.crowncastle.com/static-files/68fb84e1-1dac-440d-96b4-55b9603e10dd
+[E_SP_ARO] Crown Castle 2025 Form 10-K | PDF/印刷p65、p73–74；p80–82税务
+https://investor.crowncastle.com/static-files/68fb84e1-1dac-440d-96b4-55b9603e10dd
+[E_SP_LEASE] Crown Castle 2025 Form 10-K | PDF/印刷p58、p64、p75、p85、p87；note14
+https://investor.crowncastle.com/static-files/68fb84e1-1dac-440d-96b4-55b9603e10dd
+[E_SP_Q1CFO] Crown Castle Q1 2026 Form 10-Q | PDF6/印刷p5，2026Q1/2025Q1现金流表；PDF19–20/印刷p18–19，note13重组事项
+https://investor.crowncastle.com/static-files/de60fca2-89d5-499d-899b-8e0a23030617
+[E_SP_RATIOS] S&amp;P Corporate Methodology: Ratios And Adjustments | 原发2019-04-01，2025-12-17重发，PDF7 ¶31–35；17–25 ¶86–137；44–45 ¶223–225
+https://www.maalot.co.il/Publications/MT20251223092257.pdf
+[E_SP_SCOPE] Crown Castle 2025 Form 10-K | note1/PDF及印刷p62；p60、p87–88
+https://investor.crowncastle.com/static-files/68fb84e1-1dac-440d-96b4-55b9603e10dd
+[E_DEV_CASH_CONTRACT] Crown Castle Q1 2026 Supplemental Information | PDF13–14
+https://investor.crowncastle.com/static-files/38f6a584-60a8-452d-bfd2-a44103aeec82
+[E_DEV_CORP] Corporate Methodology | PDF4–12、21–22、24–28、30–44、47–50；Tables1/2/3/5/14–19/21–25及¶40–50/91–92/112–125/136–191
+https://www.maalot.co.il/Publications/MT20250709153825.pdf
+[E_DEV_CP] Crown Castle 2025 Form 10-K | PDF4–8、17–19、36–38；Q1 supplement另见E_DEV_CASH_CONTRACT
+https://investor.crowncastle.com/static-files/68fb84e1-1dac-440d-96b4-55b9603e10dd
+[E_DEV_DI] S&amp;P Sector-Specific Corporate Methodology — Digital Infrastructure | PDF61–63、68–71、73、76–77
+https://www.maalot.co.il/Publications/MT20251012123218.pdf
+[E_DEV_FACE] Crown Castle Q1 2026 Supplemental Information | PDF15/印14，Capitalization Overview，Face Value
+https://investor.crowncastle.com/static-files/38f6a584-60a8-452d-bfd2-a44103aeec82
+[E_DEV_NOTE] Crown Castle Q1 2026 Form 10-Q | 2026Q1 10Q PDF13–14，Debt and Other Obligations
+https://investor.crowncastle.com/static-files/de60fca2-89d5-499d-899b-8e0a23030617
+[E_DEV_NOTE_GUAR] Crown Castle 2025 Form 10-K | PDF75、77–79，Senior Notes/Securitized Debt
+https://investor.crowncastle.com/static-files/68fb84e1-1dac-440d-96b4-55b9603e10dd
+[E_DEV_TOWER_RIGHTS] Crown Castle 2025 Form 10-K | PDF4、7、17–18及77–79
+https://investor.crowncastle.com/static-files/68fb84e1-1dac-440d-96b4-55b9603e10dd
+[E_R109_FRP_TABLE] Corporate Methodology | PDF29–36/¶105、108、110、116–125/Tables17–19
+https://www.maalot.co.il/Publications/MT20250709153825.pdf
+[E_R109_MODIFIERS] Corporate Methodology | PDF8/Table5脚注4–7；PDF38–43/Tables21–23；PDF49–50/¶186–191
+https://www.maalot.co.il/Publications/MT20250709153825.pdf
+[E_R109_NOTE_ID] Crown Castle Q1 2026 Form 10-Q | PDF13–14；另S25 PDF75/78与S_SP_Q1 PDF15交叉核
+https://investor.crowncastle.com/static-files/de60fca2-89d5-499d-899b-8e0a23030617
+[E_R109_RECOVERY] Recovery Rating Criteria For Corporate Issuers | PDF1、4、10–14、16–17、23、39、44/¶3、21–28、55–83、90–99/Appendix4/G
+https://www.maalot.co.il/Publications/MT20260405084138.pdf
+[E_DEV_PROXY] Crown Castle 2026 DEF14A（2026年股东会；完整传输HTML） | 完整HTML提取行1706–1732、1882–1907、2091–2112、4909–5008；印18–27/75–76相应部分
+https://investor.crowncastle.com/node/29011/html
+[E_DEV_COUNTRY] Country Risk Assessments Update: June 2026 | 内嵌文章元数据June17及Table1表头/美国行
+https://spratings.spglobal.com/ratings/en/regulatory/article/-/view/type/HTML/id/3582048
+[E_R109_METHOD_LIMIT] Corporate Methodology | PDF49/¶186；未核法域适用性关联另见E_R109_RECOVERY
+https://www.maalot.co.il/Publications/MT20250709153825.pdf
+[E24ORIG] Crown Castle 2024 Form 10-K（原报） | 原报 p61 合并损益；note 14/p88–89 segment results，分部表p89
+https://investor.crowncastle.com/static-files/baed4489-6578-4e32-81e6-a084eea66a02
+[E25PL] Crown Castle 2025 Form 10-K | 印刷及 PDF p59，Consolidated Statement of Operations and Comprehensive Income
+https://investor.crowncastle.com/static-files/68fb84e1-1dac-440d-96b4-55b9603e10dd
+[E25HFS] Crown Castle 2025 Form 10-K | note 3，印刷及 PDF p71–72，尤其 p72 资产负债、损益及脚注 (b)(c)
+https://investor.crowncastle.com/static-files/68fb84e1-1dac-440d-96b4-55b9603e10dd
+[EQ125] Crown Castle Q1 2025 Form 10-Q 原报 | note 3，2025-03-31 held-for-sale table
+https://www.sec.gov/Archives/edgar/data/1051470/000105147025000141/cci-20250331.htm
+[ESECSALE] Crown Castle 2025-06-04 SEC comment-response letter | 公司回复 comment 2；ASC205-20-45-3A、税项及830损失/819准备/11售出费用
+https://www.sec.gov/Archives/edgar/data/1051470/000105147025000154/filename1.htm
+[EQ126HFS] Crown Castle Q1 2026 Form 10-Q | note 3 印刷 p9/PDF p10，2026/2025 比较损益、准备表、脚注 (c)
+https://investor.crowncastle.com/static-files/de60fca2-89d5-499d-899b-8e0a23030617
+[E_SP_LAND] Crown Castle Q4 2025 Supplemental Information | PDF14/印刷p13：GROUND INTEREST OVERVIEW及脚注(e)–(i)
+https://investor.crowncastle.com/static-files/bea23792-6649-4b95-9395-aa837e68396c
+[E_SP_RENEW] Crown Castle Q4 2025 Supplemental Information | PDF13/印刷p12；TENANT OVERVIEW及脚注(a)–(f)
+https://investor.crowncastle.com/static-files/bea23792-6649-4b95-9395-aa837e68396c</a:t>
+            </a:r>
+            <a:endParaRPr lang="en-US" dirty="0"/>
+          </a:p>
+        </p:txBody>
+      </p:sp>
+      <p:sp>
+        <p:nvSpPr>
+          <p:cNvPr id="4" name="Slide Number Placeholder 3"/>
+          <p:cNvSpPr>
+            <a:spLocks noGrp="1"/>
+          </p:cNvSpPr>
+          <p:nvPr>
+            <p:ph type="sldNum" sz="quarter" idx="10"/>
+          </p:nvPr>
+        </p:nvSpPr>
+        <p:spPr/>
+        <p:txBody>
+          <a:bodyPr/>
+          <a:lstStyle/>
+          <a:p>
+            <a:fld id="{F7021451-1387-4CA6-816F-3879F97B5CBC}" type="slidenum">
+              <a:rPr lang="en-US"/>
+              <a:t>17</a:t>
             </a:fld>
             <a:endParaRPr lang="en-US"/>
           </a:p>
@@ -6753,7 +6933,7 @@
                   <a:srgbClr val="213B45"/>
                 </a:solidFill>
               </a:rPr>
-              <a:t>新增证据会明确改变哪些判断</a:t>
+              <a:t>新增证据会明确改变哪些判断 1/2</a:t>
             </a:r>
             <a:endParaRPr lang="en-US" sz="2700" dirty="0"/>
           </a:p>
@@ -6932,6 +7112,451 @@
                 </a:solidFill>
               </a:rPr>
               <a:t>回收。两处公开版本差异继续保留，正式桥未取得前不强行平账。</a:t>
+            </a:r>
+            <a:endParaRPr lang="en-US" sz="1800" dirty="0"/>
+          </a:p>
+        </p:txBody>
+      </p:sp>
+      <p:sp>
+        <p:nvSpPr>
+          <p:cNvPr id="5" name="Text 3"/>
+          <p:cNvSpPr/>
+          <p:nvPr/>
+        </p:nvSpPr>
+        <p:spPr>
+          <a:xfrm>
+            <a:off x="594360" y="5321808"/>
+            <a:ext cx="10972800" cy="365760"/>
+          </a:xfrm>
+          <a:prstGeom prst="rect">
+            <a:avLst/>
+          </a:prstGeom>
+          <a:noFill/>
+          <a:ln/>
+        </p:spPr>
+        <p:txBody>
+          <a:bodyPr wrap="square" lIns="0" tIns="0" rIns="0" bIns="0" rtlCol="0" anchor="t"/>
+          <a:lstStyle/>
+          <a:p>
+            <a:pPr indent="0" marL="0">
+              <a:lnSpc>
+                <a:spcPct val="100000"/>
+              </a:lnSpc>
+              <a:buNone/>
+            </a:pPr>
+            <a:r>
+              <a:rPr lang="en-US" sz="1100" dirty="0">
+                <a:solidFill>
+                  <a:srgbClr val="213B45"/>
+                </a:solidFill>
+              </a:rPr>
+              <a:t>[F05] conditional / [FF_R109_ISSUER] conditional / [FF_R109_NOTE] </a:t>
+            </a:r>
+            <a:endParaRPr lang="en-US" sz="1100" dirty="0"/>
+          </a:p>
+          <a:p>
+            <a:pPr indent="0" marL="0">
+              <a:lnSpc>
+                <a:spcPct val="100000"/>
+              </a:lnSpc>
+              <a:buNone/>
+            </a:pPr>
+            <a:r>
+              <a:rPr lang="en-US" sz="1100" dirty="0">
+                <a:solidFill>
+                  <a:srgbClr val="213B45"/>
+                </a:solidFill>
+              </a:rPr>
+              <a:t>conditional / [F10] unresolved / [FF_FORWARD_STRESS] conditional</a:t>
+            </a:r>
+            <a:endParaRPr lang="en-US" sz="1100" dirty="0"/>
+          </a:p>
+        </p:txBody>
+      </p:sp>
+      <p:sp>
+        <p:nvSpPr>
+          <p:cNvPr id="6" name="Text 4"/>
+          <p:cNvSpPr/>
+          <p:nvPr/>
+        </p:nvSpPr>
+        <p:spPr>
+          <a:xfrm>
+            <a:off x="594360" y="5715000"/>
+            <a:ext cx="10972800" cy="731520"/>
+          </a:xfrm>
+          <a:prstGeom prst="rect">
+            <a:avLst/>
+          </a:prstGeom>
+          <a:noFill/>
+          <a:ln/>
+        </p:spPr>
+        <p:txBody>
+          <a:bodyPr wrap="square" lIns="0" tIns="0" rIns="0" bIns="0" rtlCol="0" anchor="t"/>
+          <a:lstStyle/>
+          <a:p>
+            <a:pPr indent="0" marL="0">
+              <a:lnSpc>
+                <a:spcPct val="100000"/>
+              </a:lnSpc>
+              <a:buNone/>
+            </a:pPr>
+            <a:r>
+              <a:rPr lang="en-US" sz="1000" dirty="0">
+                <a:solidFill>
+                  <a:srgbClr val="586874"/>
+                </a:solidFill>
+              </a:rPr>
+              <a:t>底稿判断 5 项；来源 17 份。</a:t>
+            </a:r>
+            <a:endParaRPr lang="en-US" sz="1000" dirty="0"/>
+          </a:p>
+          <a:p>
+            <a:pPr indent="0" marL="0">
+              <a:lnSpc>
+                <a:spcPct val="100000"/>
+              </a:lnSpc>
+              <a:buNone/>
+            </a:pPr>
+            <a:r>
+              <a:rPr lang="en-US" sz="1000" dirty="0">
+                <a:solidFill>
+                  <a:srgbClr val="586874"/>
+                </a:solidFill>
+              </a:rPr>
+              <a:t>完整底稿ID、原文定位、URL见本页备注；完整方法和明细见同名 Word/Excel。</a:t>
+            </a:r>
+            <a:endParaRPr lang="en-US" sz="1000" dirty="0"/>
+          </a:p>
+        </p:txBody>
+      </p:sp>
+    </p:spTree>
+  </p:cSld>
+  <p:clrMapOvr>
+    <a:masterClrMapping/>
+  </p:clrMapOvr>
+</p:sld>
+</file>
+
+<file path=ppt/slides/slide17.xml><?xml version="1.0" encoding="utf-8"?>
+<p:sld xmlns:a="http://schemas.openxmlformats.org/drawingml/2006/main" xmlns:r="http://schemas.openxmlformats.org/officeDocument/2006/relationships" xmlns:p="http://schemas.openxmlformats.org/presentationml/2006/main">
+  <p:cSld name="Slide 17">
+    <p:bg>
+      <p:bgPr>
+        <a:solidFill>
+          <a:srgbClr val="F5F7F6"/>
+        </a:solidFill>
+      </p:bgPr>
+    </p:bg>
+    <p:spTree>
+      <p:nvGrpSpPr>
+        <p:cNvPr id="1" name=""/>
+        <p:cNvGrpSpPr/>
+        <p:nvPr/>
+      </p:nvGrpSpPr>
+      <p:grpSpPr>
+        <a:xfrm>
+          <a:off x="0" y="0"/>
+          <a:ext cx="0" cy="0"/>
+          <a:chOff x="0" y="0"/>
+          <a:chExt cx="0" cy="0"/>
+        </a:xfrm>
+      </p:grpSpPr>
+      <p:sp>
+        <p:nvSpPr>
+          <p:cNvPr id="2" name="Text 0"/>
+          <p:cNvSpPr/>
+          <p:nvPr/>
+        </p:nvSpPr>
+        <p:spPr>
+          <a:xfrm>
+            <a:off x="548640" y="365760"/>
+            <a:ext cx="11064240" cy="731520"/>
+          </a:xfrm>
+          <a:prstGeom prst="rect">
+            <a:avLst/>
+          </a:prstGeom>
+          <a:noFill/>
+          <a:ln/>
+        </p:spPr>
+        <p:txBody>
+          <a:bodyPr wrap="square" lIns="0" tIns="0" rIns="0" bIns="0" rtlCol="0" anchor="t"/>
+          <a:lstStyle/>
+          <a:p>
+            <a:pPr indent="0" marL="0">
+              <a:lnSpc>
+                <a:spcPct val="100000"/>
+              </a:lnSpc>
+              <a:buNone/>
+            </a:pPr>
+            <a:r>
+              <a:rPr lang="en-US" sz="2700" b="1" dirty="0">
+                <a:solidFill>
+                  <a:srgbClr val="213B45"/>
+                </a:solidFill>
+              </a:rPr>
+              <a:t>新增证据会明确改变哪些判断 2/2</a:t>
+            </a:r>
+            <a:endParaRPr lang="en-US" sz="2700" dirty="0"/>
+          </a:p>
+        </p:txBody>
+      </p:sp>
+      <p:sp>
+        <p:nvSpPr>
+          <p:cNvPr id="3" name="Text 1"/>
+          <p:cNvSpPr/>
+          <p:nvPr/>
+        </p:nvSpPr>
+        <p:spPr>
+          <a:xfrm>
+            <a:off x="548640" y="6473952"/>
+            <a:ext cx="11064240" cy="182880"/>
+          </a:xfrm>
+          <a:prstGeom prst="rect">
+            <a:avLst/>
+          </a:prstGeom>
+          <a:noFill/>
+          <a:ln/>
+        </p:spPr>
+        <p:txBody>
+          <a:bodyPr wrap="square" lIns="0" tIns="0" rIns="0" bIns="0" rtlCol="0" anchor="ctr"/>
+          <a:lstStyle/>
+          <a:p>
+            <a:pPr indent="0" marL="0">
+              <a:buNone/>
+            </a:pPr>
+            <a:r>
+              <a:rPr lang="en-US" sz="900" dirty="0">
+                <a:solidFill>
+                  <a:srgbClr val="586874"/>
+                </a:solidFill>
+              </a:rPr>
+              <a:t>Crown Castle Inc. and subsidiaries  |  2025-12-31  |  crown-castle-2025-public-4  |  17</a:t>
+            </a:r>
+            <a:endParaRPr lang="en-US" sz="900" dirty="0"/>
+          </a:p>
+        </p:txBody>
+      </p:sp>
+      <p:sp>
+        <p:nvSpPr>
+          <p:cNvPr id="4" name="Text 2"/>
+          <p:cNvSpPr/>
+          <p:nvPr/>
+        </p:nvSpPr>
+        <p:spPr>
+          <a:xfrm>
+            <a:off x="594360" y="1417320"/>
+            <a:ext cx="10972800" cy="3794760"/>
+          </a:xfrm>
+          <a:prstGeom prst="rect">
+            <a:avLst/>
+          </a:prstGeom>
+          <a:noFill/>
+          <a:ln/>
+        </p:spPr>
+        <p:txBody>
+          <a:bodyPr wrap="square" lIns="0" tIns="0" rIns="0" bIns="0" rtlCol="0" anchor="t"/>
+          <a:lstStyle/>
+          <a:p>
+            <a:pPr indent="0" marL="0">
+              <a:lnSpc>
+                <a:spcPct val="100000"/>
+              </a:lnSpc>
+              <a:buNone/>
+            </a:pPr>
+            <a:r>
+              <a:rPr lang="en-US" sz="1800" dirty="0">
+                <a:solidFill>
+                  <a:srgbClr val="1F2933"/>
+                </a:solidFill>
+              </a:rPr>
+              <a:t>采用S&amp;P全球尺度作条件性信用研究，信息截止2026-06-30；不是机构已发表评级。本案</a:t>
+            </a:r>
+            <a:endParaRPr lang="en-US" sz="1800" dirty="0"/>
+          </a:p>
+          <a:p>
+            <a:pPr indent="0" marL="0">
+              <a:lnSpc>
+                <a:spcPct val="100000"/>
+              </a:lnSpc>
+              <a:buNone/>
+            </a:pPr>
+            <a:r>
+              <a:rPr lang="en-US" sz="1800" dirty="0">
+                <a:solidFill>
+                  <a:srgbClr val="1F2933"/>
+                </a:solidFill>
+              </a:rPr>
+              <a:t>采用版本：Corporate Methodology（2025-07-07重发）；</a:t>
+            </a:r>
+            <a:endParaRPr lang="en-US" sz="1800" dirty="0"/>
+          </a:p>
+          <a:p>
+            <a:pPr indent="0" marL="0">
+              <a:lnSpc>
+                <a:spcPct val="100000"/>
+              </a:lnSpc>
+              <a:buNone/>
+            </a:pPr>
+            <a:r>
+              <a:rPr lang="en-US" sz="1800" dirty="0">
+                <a:solidFill>
+                  <a:srgbClr val="1F2933"/>
+                </a:solidFill>
+              </a:rPr>
+              <a:t>Corporate Methodology: Ratios And Adjustments（</a:t>
+            </a:r>
+            <a:endParaRPr lang="en-US" sz="1800" dirty="0"/>
+          </a:p>
+          <a:p>
+            <a:pPr indent="0" marL="0">
+              <a:lnSpc>
+                <a:spcPct val="100000"/>
+              </a:lnSpc>
+              <a:buNone/>
+            </a:pPr>
+            <a:r>
+              <a:rPr lang="en-US" sz="1800" dirty="0">
+                <a:solidFill>
+                  <a:srgbClr val="1F2933"/>
+                </a:solidFill>
+              </a:rPr>
+              <a:t>2025-12-17重发）；Sector-Specific Corporate </a:t>
+            </a:r>
+            <a:endParaRPr lang="en-US" sz="1800" dirty="0"/>
+          </a:p>
+          <a:p>
+            <a:pPr indent="0" marL="0">
+              <a:lnSpc>
+                <a:spcPct val="100000"/>
+              </a:lnSpc>
+              <a:buNone/>
+            </a:pPr>
+            <a:r>
+              <a:rPr lang="en-US" sz="1800" dirty="0">
+                <a:solidFill>
+                  <a:srgbClr val="1F2933"/>
+                </a:solidFill>
+              </a:rPr>
+              <a:t>Methodology—Digital Infrastructure（2025-09</a:t>
+            </a:r>
+            <a:endParaRPr lang="en-US" sz="1800" dirty="0"/>
+          </a:p>
+          <a:p>
+            <a:pPr indent="0" marL="0">
+              <a:lnSpc>
+                <a:spcPct val="100000"/>
+              </a:lnSpc>
+              <a:buNone/>
+            </a:pPr>
+            <a:r>
+              <a:rPr lang="en-US" sz="1800" dirty="0">
+                <a:solidFill>
+                  <a:srgbClr val="1F2933"/>
+                </a:solidFill>
+              </a:rPr>
+              <a:t>-26）；Liquidity Descriptors For Global </a:t>
+            </a:r>
+            <a:endParaRPr lang="en-US" sz="1800" dirty="0"/>
+          </a:p>
+          <a:p>
+            <a:pPr indent="0" marL="0">
+              <a:lnSpc>
+                <a:spcPct val="100000"/>
+              </a:lnSpc>
+              <a:buNone/>
+            </a:pPr>
+            <a:r>
+              <a:rPr lang="en-US" sz="1800" dirty="0">
+                <a:solidFill>
+                  <a:srgbClr val="1F2933"/>
+                </a:solidFill>
+              </a:rPr>
+              <a:t>Corporate Issuers（2024-11-19重发）；Recovery </a:t>
+            </a:r>
+            <a:endParaRPr lang="en-US" sz="1800" dirty="0"/>
+          </a:p>
+          <a:p>
+            <a:pPr indent="0" marL="0">
+              <a:lnSpc>
+                <a:spcPct val="100000"/>
+              </a:lnSpc>
+              <a:buNone/>
+            </a:pPr>
+            <a:r>
+              <a:rPr lang="en-US" sz="1800" dirty="0">
+                <a:solidFill>
+                  <a:srgbClr val="1F2933"/>
+                </a:solidFill>
+              </a:rPr>
+              <a:t>Rating Criteria For Corporate Issuers（2026-03</a:t>
+            </a:r>
+            <a:endParaRPr lang="en-US" sz="1800" dirty="0"/>
+          </a:p>
+          <a:p>
+            <a:pPr indent="0" marL="0">
+              <a:lnSpc>
+                <a:spcPct val="100000"/>
+              </a:lnSpc>
+              <a:buNone/>
+            </a:pPr>
+            <a:r>
+              <a:rPr lang="en-US" sz="1800" dirty="0">
+                <a:solidFill>
+                  <a:srgbClr val="1F2933"/>
+                </a:solidFill>
+              </a:rPr>
+              <a:t>-31）；Reflecting Subordination Risk In </a:t>
+            </a:r>
+            <a:endParaRPr lang="en-US" sz="1800" dirty="0"/>
+          </a:p>
+          <a:p>
+            <a:pPr indent="0" marL="0">
+              <a:lnSpc>
+                <a:spcPct val="100000"/>
+              </a:lnSpc>
+              <a:buNone/>
+            </a:pPr>
+            <a:r>
+              <a:rPr lang="en-US" sz="1800" dirty="0">
+                <a:solidFill>
+                  <a:srgbClr val="1F2933"/>
+                </a:solidFill>
+              </a:rPr>
+              <a:t>Corporate Issue Ratings（2026-03-31重发）。2026年10月</a:t>
+            </a:r>
+            <a:endParaRPr lang="en-US" sz="1800" dirty="0"/>
+          </a:p>
+          <a:p>
+            <a:pPr indent="0" marL="0">
+              <a:lnSpc>
+                <a:spcPct val="100000"/>
+              </a:lnSpc>
+              <a:buNone/>
+            </a:pPr>
+            <a:r>
+              <a:rPr lang="en-US" sz="1800" dirty="0">
+                <a:solidFill>
+                  <a:srgbClr val="1F2933"/>
+                </a:solidFill>
+              </a:rPr>
+              <a:t>整理不将截止日后修订倒填历史信息窗；专门治理分类、六月实际资金资格、截止日主权/T&amp;C及回收</a:t>
+            </a:r>
+            <a:endParaRPr lang="en-US" sz="1800" dirty="0"/>
+          </a:p>
+          <a:p>
+            <a:pPr indent="0" marL="0">
+              <a:lnSpc>
+                <a:spcPct val="100000"/>
+              </a:lnSpc>
+              <a:buNone/>
+            </a:pPr>
+            <a:r>
+              <a:rPr lang="en-US" sz="1800" dirty="0">
+                <a:solidFill>
+                  <a:srgbClr val="1F2933"/>
+                </a:solidFill>
+              </a:rPr>
+              <a:t>法域仍分别待核。</a:t>
             </a:r>
             <a:endParaRPr lang="en-US" sz="1800" dirty="0"/>
           </a:p>
